--- a/review/template_ext.pptx
+++ b/review/template_ext.pptx
@@ -13,12 +13,13 @@
     <p:sldId id="258" r:id="rId4"/>
     <p:sldId id="259" r:id="rId5"/>
     <p:sldId id="260" r:id="rId6"/>
+    <p:sldId id="267" r:id="rId18"/>
     <p:sldId id="261" r:id="rId7"/>
     <p:sldId id="262" r:id="rId8"/>
     <p:sldId id="263" r:id="rId9"/>
     <p:sldId id="264" r:id="rId10"/>
+    <p:sldId id="269" r:id="rId20"/>
     <p:sldId id="268" r:id="rId19"/>
-    <p:sldId id="267" r:id="rId18"/>
     <p:sldId id="265" r:id="rId11"/>
     <p:sldId id="266" r:id="rId12"/>
   </p:sldIdLst>
@@ -2128,6 +2129,2318 @@
 
 <file path=ppt/slides/slide12.xml><?xml version="1.0" encoding="utf-8"?>
 <p:sld xmlns:a="http://schemas.openxmlformats.org/drawingml/2006/main" xmlns:r="http://schemas.openxmlformats.org/officeDocument/2006/relationships" xmlns:p="http://schemas.openxmlformats.org/presentationml/2006/main">
+  <p:cSld name="Slide 5">
+    <p:bg>
+      <p:bgPr>
+        <a:solidFill>
+          <a:srgbClr val="FFFFFF"/>
+        </a:solidFill>
+        <a:effectLst/>
+      </p:bgPr>
+    </p:bg>
+    <p:spTree>
+      <p:nvGrpSpPr>
+        <p:cNvPr id="1" name=""/>
+        <p:cNvGrpSpPr/>
+        <p:nvPr/>
+      </p:nvGrpSpPr>
+      <p:grpSpPr>
+        <a:xfrm>
+          <a:off x="0" y="0"/>
+          <a:ext cx="0" cy="0"/>
+          <a:chOff x="0" y="0"/>
+          <a:chExt cx="0" cy="0"/>
+        </a:xfrm>
+      </p:grpSpPr>
+      <p:sp>
+        <p:nvSpPr>
+          <p:cNvPr id="2" name="Text 0"/>
+          <p:cNvSpPr txBox="1"/>
+          <p:nvPr/>
+        </p:nvSpPr>
+        <p:spPr>
+          <a:xfrm>
+            <a:off x="11460175" y="6446520"/>
+            <a:ext cx="457200" cy="274320"/>
+          </a:xfrm>
+          <a:prstGeom prst="rect">
+            <a:avLst/>
+          </a:prstGeom>
+          <a:noFill/>
+          <a:ln/>
+        </p:spPr>
+        <p:txBody>
+          <a:bodyPr wrap="square" lIns="0" tIns="0" rIns="0" bIns="0" rtlCol="0" anchor="ctr"/>
+          <a:lstStyle/>
+          <a:p>
+            <a:pPr marL="0" indent="0" algn="r">
+              <a:buNone/>
+            </a:pPr>
+            <a:r>
+              <a:rPr lang="en-US" sz="1000" dirty="0">
+                <a:solidFill>
+                  <a:srgbClr val="808080"/>
+                </a:solidFill>
+                <a:latin typeface="Calibri" pitchFamily="34" charset="0"/>
+                <a:ea typeface="Calibri" pitchFamily="34" charset="-122"/>
+                <a:cs typeface="Calibri" pitchFamily="34" charset="-120"/>
+              </a:rPr>
+              <a:t>5</a:t>
+            </a:r>
+            <a:endParaRPr lang="en-US" sz="1000" dirty="0"/>
+          </a:p>
+        </p:txBody>
+      </p:sp>
+      <p:sp>
+        <p:nvSpPr>
+          <p:cNvPr id="3" name="Text 1"/>
+          <p:cNvSpPr txBox="1"/>
+          <p:nvPr/>
+        </p:nvSpPr>
+        <p:spPr>
+          <a:xfrm>
+            <a:off x="548640" y="320040"/>
+            <a:ext cx="9601200" cy="685800"/>
+          </a:xfrm>
+          <a:prstGeom prst="rect">
+            <a:avLst/>
+          </a:prstGeom>
+          <a:noFill/>
+          <a:ln/>
+        </p:spPr>
+        <p:txBody>
+          <a:bodyPr wrap="square" lIns="0" tIns="0" rIns="0" bIns="0" rtlCol="0" anchor="ctr"/>
+          <a:lstStyle/>
+          <a:p>
+            <a:pPr marL="0" indent="0">
+              <a:buNone/>
+            </a:pPr>
+            <a:r>
+              <a:rPr lang="en-US" sz="2800" b="1" dirty="0">
+                <a:solidFill>
+                  <a:srgbClr val="1D2F82"/>
+                </a:solidFill>
+                <a:latin typeface="Calibri" pitchFamily="34" charset="0"/>
+                <a:ea typeface="Calibri" pitchFamily="34" charset="-122"/>
+                <a:cs typeface="Calibri" pitchFamily="34" charset="-120"/>
+              </a:rPr>
+              <a:t>Literature Survey</a:t>
+            </a:r>
+            <a:endParaRPr lang="en-US" sz="2800" dirty="0"/>
+          </a:p>
+        </p:txBody>
+      </p:sp>
+      <p:pic>
+        <p:nvPicPr>
+          <p:cNvPr id="4" name="Image 0" descr="logo.png"/>
+          <p:cNvPicPr>
+            <a:picLocks noChangeAspect="1"/>
+          </p:cNvPicPr>
+          <p:nvPr/>
+        </p:nvPicPr>
+        <p:blipFill>
+          <a:blip r:embed="rId3"/>
+          <a:stretch>
+            <a:fillRect/>
+          </a:stretch>
+        </p:blipFill>
+        <p:spPr>
+          <a:xfrm>
+            <a:off x="10362895" y="320040"/>
+            <a:ext cx="1371600" cy="518746"/>
+          </a:xfrm>
+          <a:prstGeom prst="rect">
+            <a:avLst/>
+          </a:prstGeom>
+        </p:spPr>
+      </p:pic>
+      <p:graphicFrame>
+        <p:nvGraphicFramePr>
+          <p:cNvPr id="6" name="Table 0"/>
+          <p:cNvGraphicFramePr>
+            <a:graphicFrameLocks noGrp="1"/>
+          </p:cNvGraphicFramePr>
+          <p:nvPr>
+            <p:extLst>
+              <p:ext uri="{D42A27DB-BD31-4B8C-83A1-F6EECF244321}">
+                <p14:modId xmlns:p14="http://schemas.microsoft.com/office/powerpoint/2010/main" val="1579011935"/>
+              </p:ext>
+            </p:extLst>
+          </p:nvPr>
+        </p:nvGraphicFramePr>
+        <p:xfrm>
+          <a:off x="548640" y="1371600"/>
+          <a:ext cx="11091672" cy="3968496"/>
+        </p:xfrm>
+        <a:graphic>
+          <a:graphicData uri="http://schemas.openxmlformats.org/drawingml/2006/table">
+            <a:tbl>
+              <a:tblPr/>
+              <a:tblGrid>
+                <a:gridCol w="548640">
+                  <a:extLst>
+                    <a:ext uri="{9D8B030D-6E8A-4147-A177-3AD203B41FA5}">
+                      <a16:colId xmlns:a16="http://schemas.microsoft.com/office/drawing/2014/main" val="20000"/>
+                    </a:ext>
+                  </a:extLst>
+                </a:gridCol>
+                <a:gridCol w="1920240">
+                  <a:extLst>
+                    <a:ext uri="{9D8B030D-6E8A-4147-A177-3AD203B41FA5}">
+                      <a16:colId xmlns:a16="http://schemas.microsoft.com/office/drawing/2014/main" val="20001"/>
+                    </a:ext>
+                  </a:extLst>
+                </a:gridCol>
+                <a:gridCol w="3108960">
+                  <a:extLst>
+                    <a:ext uri="{9D8B030D-6E8A-4147-A177-3AD203B41FA5}">
+                      <a16:colId xmlns:a16="http://schemas.microsoft.com/office/drawing/2014/main" val="20002"/>
+                    </a:ext>
+                  </a:extLst>
+                </a:gridCol>
+                <a:gridCol w="2377440">
+                  <a:extLst>
+                    <a:ext uri="{9D8B030D-6E8A-4147-A177-3AD203B41FA5}">
+                      <a16:colId xmlns:a16="http://schemas.microsoft.com/office/drawing/2014/main" val="20003"/>
+                    </a:ext>
+                  </a:extLst>
+                </a:gridCol>
+                <a:gridCol w="3136392">
+                  <a:extLst>
+                    <a:ext uri="{9D8B030D-6E8A-4147-A177-3AD203B41FA5}">
+                      <a16:colId xmlns:a16="http://schemas.microsoft.com/office/drawing/2014/main" val="20004"/>
+                    </a:ext>
+                  </a:extLst>
+                </a:gridCol>
+              </a:tblGrid>
+              <a:tr h="566928">
+                <a:tc>
+                  <a:txBody>
+                    <a:bodyPr/>
+                    <a:lstStyle/>
+                    <a:p>
+                      <a:pPr marL="0" indent="0">
+                        <a:buNone/>
+                      </a:pPr>
+                      <a:r>
+                        <a:rPr lang="en-US" sz="1300" b="1" dirty="0">
+                          <a:solidFill>
+                            <a:srgbClr val="FFFFFF"/>
+                          </a:solidFill>
+                          <a:latin typeface="Calibri" pitchFamily="34" charset="0"/>
+                          <a:ea typeface="Calibri" pitchFamily="34" charset="-122"/>
+                          <a:cs typeface="Calibri" pitchFamily="34" charset="-120"/>
+                        </a:rPr>
+                        <a:t>No.</a:t>
+                      </a:r>
+                      <a:endParaRPr lang="en-US" sz="1300" dirty="0">
+                        <a:latin typeface="Calibri" charset="0"/>
+                        <a:ea typeface="Calibri" charset="0"/>
+                        <a:cs typeface="Calibri" charset="0"/>
+                      </a:endParaRPr>
+                    </a:p>
+                  </a:txBody>
+                  <a:tcPr marL="54864" marR="54864" marT="54864" marB="54864" anchor="ctr">
+                    <a:lnL w="9525" cap="flat" cmpd="sng" algn="ctr">
+                      <a:solidFill>
+                        <a:srgbClr val="BFBFBF"/>
+                      </a:solidFill>
+                      <a:prstDash val="solid"/>
+                      <a:round/>
+                      <a:headEnd type="none" w="med" len="med"/>
+                      <a:tailEnd type="none" w="med" len="med"/>
+                    </a:lnL>
+                    <a:lnR w="9525" cap="flat" cmpd="sng" algn="ctr">
+                      <a:solidFill>
+                        <a:srgbClr val="BFBFBF"/>
+                      </a:solidFill>
+                      <a:prstDash val="solid"/>
+                      <a:round/>
+                      <a:headEnd type="none" w="med" len="med"/>
+                      <a:tailEnd type="none" w="med" len="med"/>
+                    </a:lnR>
+                    <a:lnT w="9525" cap="flat" cmpd="sng" algn="ctr">
+                      <a:solidFill>
+                        <a:srgbClr val="BFBFBF"/>
+                      </a:solidFill>
+                      <a:prstDash val="solid"/>
+                      <a:round/>
+                      <a:headEnd type="none" w="med" len="med"/>
+                      <a:tailEnd type="none" w="med" len="med"/>
+                    </a:lnT>
+                    <a:lnB w="9525" cap="flat" cmpd="sng" algn="ctr">
+                      <a:solidFill>
+                        <a:srgbClr val="BFBFBF"/>
+                      </a:solidFill>
+                      <a:prstDash val="solid"/>
+                      <a:round/>
+                      <a:headEnd type="none" w="med" len="med"/>
+                      <a:tailEnd type="none" w="med" len="med"/>
+                    </a:lnB>
+                    <a:solidFill>
+                      <a:srgbClr val="1D2F82"/>
+                    </a:solidFill>
+                  </a:tcPr>
+                </a:tc>
+                <a:tc>
+                  <a:txBody>
+                    <a:bodyPr/>
+                    <a:lstStyle/>
+                    <a:p>
+                      <a:pPr marL="0" indent="0">
+                        <a:buNone/>
+                      </a:pPr>
+                      <a:r>
+                        <a:rPr lang="en-US" sz="1300" b="1" dirty="0">
+                          <a:solidFill>
+                            <a:srgbClr val="FFFFFF"/>
+                          </a:solidFill>
+                          <a:latin typeface="Calibri" pitchFamily="34" charset="0"/>
+                          <a:ea typeface="Calibri" pitchFamily="34" charset="-122"/>
+                          <a:cs typeface="Calibri" pitchFamily="34" charset="-120"/>
+                        </a:rPr>
+                        <a:t>Author(s) &amp; Year</a:t>
+                      </a:r>
+                      <a:endParaRPr lang="en-US" sz="1300" dirty="0">
+                        <a:latin typeface="Calibri" charset="0"/>
+                        <a:ea typeface="Calibri" charset="0"/>
+                        <a:cs typeface="Calibri" charset="0"/>
+                      </a:endParaRPr>
+                    </a:p>
+                  </a:txBody>
+                  <a:tcPr marL="54864" marR="54864" marT="54864" marB="54864" anchor="ctr">
+                    <a:lnL w="9525" cap="flat" cmpd="sng" algn="ctr">
+                      <a:solidFill>
+                        <a:srgbClr val="BFBFBF"/>
+                      </a:solidFill>
+                      <a:prstDash val="solid"/>
+                      <a:round/>
+                      <a:headEnd type="none" w="med" len="med"/>
+                      <a:tailEnd type="none" w="med" len="med"/>
+                    </a:lnL>
+                    <a:lnR w="9525" cap="flat" cmpd="sng" algn="ctr">
+                      <a:solidFill>
+                        <a:srgbClr val="BFBFBF"/>
+                      </a:solidFill>
+                      <a:prstDash val="solid"/>
+                      <a:round/>
+                      <a:headEnd type="none" w="med" len="med"/>
+                      <a:tailEnd type="none" w="med" len="med"/>
+                    </a:lnR>
+                    <a:lnT w="9525" cap="flat" cmpd="sng" algn="ctr">
+                      <a:solidFill>
+                        <a:srgbClr val="BFBFBF"/>
+                      </a:solidFill>
+                      <a:prstDash val="solid"/>
+                      <a:round/>
+                      <a:headEnd type="none" w="med" len="med"/>
+                      <a:tailEnd type="none" w="med" len="med"/>
+                    </a:lnT>
+                    <a:lnB w="9525" cap="flat" cmpd="sng" algn="ctr">
+                      <a:solidFill>
+                        <a:srgbClr val="BFBFBF"/>
+                      </a:solidFill>
+                      <a:prstDash val="solid"/>
+                      <a:round/>
+                      <a:headEnd type="none" w="med" len="med"/>
+                      <a:tailEnd type="none" w="med" len="med"/>
+                    </a:lnB>
+                    <a:solidFill>
+                      <a:srgbClr val="1D2F82"/>
+                    </a:solidFill>
+                  </a:tcPr>
+                </a:tc>
+                <a:tc>
+                  <a:txBody>
+                    <a:bodyPr/>
+                    <a:lstStyle/>
+                    <a:p>
+                      <a:pPr marL="0" indent="0">
+                        <a:buNone/>
+                      </a:pPr>
+                      <a:r>
+                        <a:rPr lang="en-US" sz="1300" b="1" dirty="0">
+                          <a:solidFill>
+                            <a:srgbClr val="FFFFFF"/>
+                          </a:solidFill>
+                          <a:latin typeface="Calibri" pitchFamily="34" charset="0"/>
+                          <a:ea typeface="Calibri" pitchFamily="34" charset="-122"/>
+                          <a:cs typeface="Calibri" pitchFamily="34" charset="-120"/>
+                        </a:rPr>
+                        <a:t>Title / Source</a:t>
+                      </a:r>
+                      <a:endParaRPr lang="en-US" sz="1300" dirty="0">
+                        <a:latin typeface="Calibri" charset="0"/>
+                        <a:ea typeface="Calibri" charset="0"/>
+                        <a:cs typeface="Calibri" charset="0"/>
+                      </a:endParaRPr>
+                    </a:p>
+                  </a:txBody>
+                  <a:tcPr marL="54864" marR="54864" marT="54864" marB="54864" anchor="ctr">
+                    <a:lnL w="9525" cap="flat" cmpd="sng" algn="ctr">
+                      <a:solidFill>
+                        <a:srgbClr val="BFBFBF"/>
+                      </a:solidFill>
+                      <a:prstDash val="solid"/>
+                      <a:round/>
+                      <a:headEnd type="none" w="med" len="med"/>
+                      <a:tailEnd type="none" w="med" len="med"/>
+                    </a:lnL>
+                    <a:lnR w="9525" cap="flat" cmpd="sng" algn="ctr">
+                      <a:solidFill>
+                        <a:srgbClr val="BFBFBF"/>
+                      </a:solidFill>
+                      <a:prstDash val="solid"/>
+                      <a:round/>
+                      <a:headEnd type="none" w="med" len="med"/>
+                      <a:tailEnd type="none" w="med" len="med"/>
+                    </a:lnR>
+                    <a:lnT w="9525" cap="flat" cmpd="sng" algn="ctr">
+                      <a:solidFill>
+                        <a:srgbClr val="BFBFBF"/>
+                      </a:solidFill>
+                      <a:prstDash val="solid"/>
+                      <a:round/>
+                      <a:headEnd type="none" w="med" len="med"/>
+                      <a:tailEnd type="none" w="med" len="med"/>
+                    </a:lnT>
+                    <a:lnB w="9525" cap="flat" cmpd="sng" algn="ctr">
+                      <a:solidFill>
+                        <a:srgbClr val="BFBFBF"/>
+                      </a:solidFill>
+                      <a:prstDash val="solid"/>
+                      <a:round/>
+                      <a:headEnd type="none" w="med" len="med"/>
+                      <a:tailEnd type="none" w="med" len="med"/>
+                    </a:lnB>
+                    <a:solidFill>
+                      <a:srgbClr val="1D2F82"/>
+                    </a:solidFill>
+                  </a:tcPr>
+                </a:tc>
+                <a:tc>
+                  <a:txBody>
+                    <a:bodyPr/>
+                    <a:lstStyle/>
+                    <a:p>
+                      <a:pPr marL="0" indent="0">
+                        <a:buNone/>
+                      </a:pPr>
+                      <a:r>
+                        <a:rPr lang="en-US" sz="1300" b="1" dirty="0">
+                          <a:solidFill>
+                            <a:srgbClr val="FFFFFF"/>
+                          </a:solidFill>
+                          <a:latin typeface="Calibri" pitchFamily="34" charset="0"/>
+                          <a:ea typeface="Calibri" pitchFamily="34" charset="-122"/>
+                          <a:cs typeface="Calibri" pitchFamily="34" charset="-120"/>
+                        </a:rPr>
+                        <a:t>Method / Approach</a:t>
+                      </a:r>
+                      <a:endParaRPr lang="en-US" sz="1300" dirty="0">
+                        <a:latin typeface="Calibri" charset="0"/>
+                        <a:ea typeface="Calibri" charset="0"/>
+                        <a:cs typeface="Calibri" charset="0"/>
+                      </a:endParaRPr>
+                    </a:p>
+                  </a:txBody>
+                  <a:tcPr marL="54864" marR="54864" marT="54864" marB="54864" anchor="ctr">
+                    <a:lnL w="9525" cap="flat" cmpd="sng" algn="ctr">
+                      <a:solidFill>
+                        <a:srgbClr val="BFBFBF"/>
+                      </a:solidFill>
+                      <a:prstDash val="solid"/>
+                      <a:round/>
+                      <a:headEnd type="none" w="med" len="med"/>
+                      <a:tailEnd type="none" w="med" len="med"/>
+                    </a:lnL>
+                    <a:lnR w="9525" cap="flat" cmpd="sng" algn="ctr">
+                      <a:solidFill>
+                        <a:srgbClr val="BFBFBF"/>
+                      </a:solidFill>
+                      <a:prstDash val="solid"/>
+                      <a:round/>
+                      <a:headEnd type="none" w="med" len="med"/>
+                      <a:tailEnd type="none" w="med" len="med"/>
+                    </a:lnR>
+                    <a:lnT w="9525" cap="flat" cmpd="sng" algn="ctr">
+                      <a:solidFill>
+                        <a:srgbClr val="BFBFBF"/>
+                      </a:solidFill>
+                      <a:prstDash val="solid"/>
+                      <a:round/>
+                      <a:headEnd type="none" w="med" len="med"/>
+                      <a:tailEnd type="none" w="med" len="med"/>
+                    </a:lnT>
+                    <a:lnB w="9525" cap="flat" cmpd="sng" algn="ctr">
+                      <a:solidFill>
+                        <a:srgbClr val="BFBFBF"/>
+                      </a:solidFill>
+                      <a:prstDash val="solid"/>
+                      <a:round/>
+                      <a:headEnd type="none" w="med" len="med"/>
+                      <a:tailEnd type="none" w="med" len="med"/>
+                    </a:lnB>
+                    <a:solidFill>
+                      <a:srgbClr val="1D2F82"/>
+                    </a:solidFill>
+                  </a:tcPr>
+                </a:tc>
+                <a:tc>
+                  <a:txBody>
+                    <a:bodyPr/>
+                    <a:lstStyle/>
+                    <a:p>
+                      <a:pPr marL="0" indent="0">
+                        <a:buNone/>
+                      </a:pPr>
+                      <a:r>
+                        <a:rPr lang="en-US" sz="1300" b="1" dirty="0">
+                          <a:solidFill>
+                            <a:srgbClr val="FFFFFF"/>
+                          </a:solidFill>
+                          <a:latin typeface="Calibri" pitchFamily="34" charset="0"/>
+                          <a:ea typeface="Calibri" pitchFamily="34" charset="-122"/>
+                          <a:cs typeface="Calibri" pitchFamily="34" charset="-120"/>
+                        </a:rPr>
+                        <a:t>Findings &amp; Research Gap</a:t>
+                      </a:r>
+                      <a:endParaRPr lang="en-US" sz="1300" dirty="0">
+                        <a:latin typeface="Calibri" charset="0"/>
+                        <a:ea typeface="Calibri" charset="0"/>
+                        <a:cs typeface="Calibri" charset="0"/>
+                      </a:endParaRPr>
+                    </a:p>
+                  </a:txBody>
+                  <a:tcPr marL="54864" marR="54864" marT="54864" marB="54864" anchor="ctr">
+                    <a:lnL w="9525" cap="flat" cmpd="sng" algn="ctr">
+                      <a:solidFill>
+                        <a:srgbClr val="BFBFBF"/>
+                      </a:solidFill>
+                      <a:prstDash val="solid"/>
+                      <a:round/>
+                      <a:headEnd type="none" w="med" len="med"/>
+                      <a:tailEnd type="none" w="med" len="med"/>
+                    </a:lnL>
+                    <a:lnR w="9525" cap="flat" cmpd="sng" algn="ctr">
+                      <a:solidFill>
+                        <a:srgbClr val="BFBFBF"/>
+                      </a:solidFill>
+                      <a:prstDash val="solid"/>
+                      <a:round/>
+                      <a:headEnd type="none" w="med" len="med"/>
+                      <a:tailEnd type="none" w="med" len="med"/>
+                    </a:lnR>
+                    <a:lnT w="9525" cap="flat" cmpd="sng" algn="ctr">
+                      <a:solidFill>
+                        <a:srgbClr val="BFBFBF"/>
+                      </a:solidFill>
+                      <a:prstDash val="solid"/>
+                      <a:round/>
+                      <a:headEnd type="none" w="med" len="med"/>
+                      <a:tailEnd type="none" w="med" len="med"/>
+                    </a:lnT>
+                    <a:lnB w="9525" cap="flat" cmpd="sng" algn="ctr">
+                      <a:solidFill>
+                        <a:srgbClr val="BFBFBF"/>
+                      </a:solidFill>
+                      <a:prstDash val="solid"/>
+                      <a:round/>
+                      <a:headEnd type="none" w="med" len="med"/>
+                      <a:tailEnd type="none" w="med" len="med"/>
+                    </a:lnB>
+                    <a:solidFill>
+                      <a:srgbClr val="1D2F82"/>
+                    </a:solidFill>
+                  </a:tcPr>
+                </a:tc>
+                <a:extLst>
+                  <a:ext uri="{0D108BD9-81ED-4DB2-BD59-A6C34878D82A}">
+                    <a16:rowId xmlns:a16="http://schemas.microsoft.com/office/drawing/2014/main" val="10000"/>
+                  </a:ext>
+                </a:extLst>
+              </a:tr>
+              <a:tr h="566928">
+                <a:tc>
+                  <a:txBody>
+                    <a:bodyPr/>
+                    <a:lstStyle/>
+                    <a:p>
+                      <a:pPr marL="0" indent="0">
+                        <a:buNone/>
+                      </a:pPr>
+                      <a:r>
+                        <a:rPr lang="en-US" sz="1300" dirty="0">
+                          <a:solidFill>
+                            <a:srgbClr val="000000"/>
+                          </a:solidFill>
+                          <a:latin typeface="Calibri" pitchFamily="34" charset="0"/>
+                          <a:ea typeface="Calibri" pitchFamily="34" charset="-122"/>
+                          <a:cs typeface="Calibri" pitchFamily="34" charset="-120"/>
+                        </a:rPr>
+                        <a:t>1</a:t>
+                      </a:r>
+                      <a:endParaRPr lang="en-US" sz="1300" dirty="0">
+                        <a:latin typeface="Calibri" charset="0"/>
+                        <a:ea typeface="Calibri" charset="0"/>
+                        <a:cs typeface="Calibri" charset="0"/>
+                      </a:endParaRPr>
+                    </a:p>
+                  </a:txBody>
+                  <a:tcPr marL="54864" marR="54864" marT="54864" marB="54864" anchor="ctr">
+                    <a:lnL w="9525" cap="flat" cmpd="sng" algn="ctr">
+                      <a:solidFill>
+                        <a:srgbClr val="BFBFBF"/>
+                      </a:solidFill>
+                      <a:prstDash val="solid"/>
+                      <a:round/>
+                      <a:headEnd type="none" w="med" len="med"/>
+                      <a:tailEnd type="none" w="med" len="med"/>
+                    </a:lnL>
+                    <a:lnR w="9525" cap="flat" cmpd="sng" algn="ctr">
+                      <a:solidFill>
+                        <a:srgbClr val="BFBFBF"/>
+                      </a:solidFill>
+                      <a:prstDash val="solid"/>
+                      <a:round/>
+                      <a:headEnd type="none" w="med" len="med"/>
+                      <a:tailEnd type="none" w="med" len="med"/>
+                    </a:lnR>
+                    <a:lnT w="9525" cap="flat" cmpd="sng" algn="ctr">
+                      <a:solidFill>
+                        <a:srgbClr val="BFBFBF"/>
+                      </a:solidFill>
+                      <a:prstDash val="solid"/>
+                      <a:round/>
+                      <a:headEnd type="none" w="med" len="med"/>
+                      <a:tailEnd type="none" w="med" len="med"/>
+                    </a:lnT>
+                    <a:lnB w="9525" cap="flat" cmpd="sng" algn="ctr">
+                      <a:solidFill>
+                        <a:srgbClr val="BFBFBF"/>
+                      </a:solidFill>
+                      <a:prstDash val="solid"/>
+                      <a:round/>
+                      <a:headEnd type="none" w="med" len="med"/>
+                      <a:tailEnd type="none" w="med" len="med"/>
+                    </a:lnB>
+                  </a:tcPr>
+                </a:tc>
+                <a:tc>
+                  <a:txBody>
+                    <a:bodyPr/>
+                    <a:lstStyle/>
+                    <a:p>
+                      <a:pPr marL="0" indent="0">
+                        <a:buNone/>
+                      </a:pPr>
+                      <a:endParaRPr lang="en-US" sz="1300" dirty="0">
+                        <a:latin typeface="Calibri" charset="0"/>
+                        <a:ea typeface="Calibri" charset="0"/>
+                        <a:cs typeface="Calibri" charset="0"/>
+                      </a:endParaRPr>
+                    </a:p>
+                  </a:txBody>
+                  <a:tcPr marL="54864" marR="54864" marT="54864" marB="54864" anchor="ctr">
+                    <a:lnL w="9525" cap="flat" cmpd="sng" algn="ctr">
+                      <a:solidFill>
+                        <a:srgbClr val="BFBFBF"/>
+                      </a:solidFill>
+                      <a:prstDash val="solid"/>
+                      <a:round/>
+                      <a:headEnd type="none" w="med" len="med"/>
+                      <a:tailEnd type="none" w="med" len="med"/>
+                    </a:lnL>
+                    <a:lnR w="9525" cap="flat" cmpd="sng" algn="ctr">
+                      <a:solidFill>
+                        <a:srgbClr val="BFBFBF"/>
+                      </a:solidFill>
+                      <a:prstDash val="solid"/>
+                      <a:round/>
+                      <a:headEnd type="none" w="med" len="med"/>
+                      <a:tailEnd type="none" w="med" len="med"/>
+                    </a:lnR>
+                    <a:lnT w="9525" cap="flat" cmpd="sng" algn="ctr">
+                      <a:solidFill>
+                        <a:srgbClr val="BFBFBF"/>
+                      </a:solidFill>
+                      <a:prstDash val="solid"/>
+                      <a:round/>
+                      <a:headEnd type="none" w="med" len="med"/>
+                      <a:tailEnd type="none" w="med" len="med"/>
+                    </a:lnT>
+                    <a:lnB w="9525" cap="flat" cmpd="sng" algn="ctr">
+                      <a:solidFill>
+                        <a:srgbClr val="BFBFBF"/>
+                      </a:solidFill>
+                      <a:prstDash val="solid"/>
+                      <a:round/>
+                      <a:headEnd type="none" w="med" len="med"/>
+                      <a:tailEnd type="none" w="med" len="med"/>
+                    </a:lnB>
+                  </a:tcPr>
+                </a:tc>
+                <a:tc>
+                  <a:txBody>
+                    <a:bodyPr/>
+                    <a:lstStyle/>
+                    <a:p>
+                      <a:pPr marL="0" indent="0">
+                        <a:buNone/>
+                      </a:pPr>
+                      <a:endParaRPr lang="en-US" sz="1300" dirty="0">
+                        <a:latin typeface="Calibri" charset="0"/>
+                        <a:ea typeface="Calibri" charset="0"/>
+                        <a:cs typeface="Calibri" charset="0"/>
+                      </a:endParaRPr>
+                    </a:p>
+                  </a:txBody>
+                  <a:tcPr marL="54864" marR="54864" marT="54864" marB="54864" anchor="ctr">
+                    <a:lnL w="9525" cap="flat" cmpd="sng" algn="ctr">
+                      <a:solidFill>
+                        <a:srgbClr val="BFBFBF"/>
+                      </a:solidFill>
+                      <a:prstDash val="solid"/>
+                      <a:round/>
+                      <a:headEnd type="none" w="med" len="med"/>
+                      <a:tailEnd type="none" w="med" len="med"/>
+                    </a:lnL>
+                    <a:lnR w="9525" cap="flat" cmpd="sng" algn="ctr">
+                      <a:solidFill>
+                        <a:srgbClr val="BFBFBF"/>
+                      </a:solidFill>
+                      <a:prstDash val="solid"/>
+                      <a:round/>
+                      <a:headEnd type="none" w="med" len="med"/>
+                      <a:tailEnd type="none" w="med" len="med"/>
+                    </a:lnR>
+                    <a:lnT w="9525" cap="flat" cmpd="sng" algn="ctr">
+                      <a:solidFill>
+                        <a:srgbClr val="BFBFBF"/>
+                      </a:solidFill>
+                      <a:prstDash val="solid"/>
+                      <a:round/>
+                      <a:headEnd type="none" w="med" len="med"/>
+                      <a:tailEnd type="none" w="med" len="med"/>
+                    </a:lnT>
+                    <a:lnB w="9525" cap="flat" cmpd="sng" algn="ctr">
+                      <a:solidFill>
+                        <a:srgbClr val="BFBFBF"/>
+                      </a:solidFill>
+                      <a:prstDash val="solid"/>
+                      <a:round/>
+                      <a:headEnd type="none" w="med" len="med"/>
+                      <a:tailEnd type="none" w="med" len="med"/>
+                    </a:lnB>
+                  </a:tcPr>
+                </a:tc>
+                <a:tc>
+                  <a:txBody>
+                    <a:bodyPr/>
+                    <a:lstStyle/>
+                    <a:p>
+                      <a:pPr marL="0" indent="0">
+                        <a:buNone/>
+                      </a:pPr>
+                      <a:endParaRPr lang="en-US" sz="1300" dirty="0">
+                        <a:latin typeface="Calibri" charset="0"/>
+                        <a:ea typeface="Calibri" charset="0"/>
+                        <a:cs typeface="Calibri" charset="0"/>
+                      </a:endParaRPr>
+                    </a:p>
+                  </a:txBody>
+                  <a:tcPr marL="54864" marR="54864" marT="54864" marB="54864" anchor="ctr">
+                    <a:lnL w="9525" cap="flat" cmpd="sng" algn="ctr">
+                      <a:solidFill>
+                        <a:srgbClr val="BFBFBF"/>
+                      </a:solidFill>
+                      <a:prstDash val="solid"/>
+                      <a:round/>
+                      <a:headEnd type="none" w="med" len="med"/>
+                      <a:tailEnd type="none" w="med" len="med"/>
+                    </a:lnL>
+                    <a:lnR w="9525" cap="flat" cmpd="sng" algn="ctr">
+                      <a:solidFill>
+                        <a:srgbClr val="BFBFBF"/>
+                      </a:solidFill>
+                      <a:prstDash val="solid"/>
+                      <a:round/>
+                      <a:headEnd type="none" w="med" len="med"/>
+                      <a:tailEnd type="none" w="med" len="med"/>
+                    </a:lnR>
+                    <a:lnT w="9525" cap="flat" cmpd="sng" algn="ctr">
+                      <a:solidFill>
+                        <a:srgbClr val="BFBFBF"/>
+                      </a:solidFill>
+                      <a:prstDash val="solid"/>
+                      <a:round/>
+                      <a:headEnd type="none" w="med" len="med"/>
+                      <a:tailEnd type="none" w="med" len="med"/>
+                    </a:lnT>
+                    <a:lnB w="9525" cap="flat" cmpd="sng" algn="ctr">
+                      <a:solidFill>
+                        <a:srgbClr val="BFBFBF"/>
+                      </a:solidFill>
+                      <a:prstDash val="solid"/>
+                      <a:round/>
+                      <a:headEnd type="none" w="med" len="med"/>
+                      <a:tailEnd type="none" w="med" len="med"/>
+                    </a:lnB>
+                  </a:tcPr>
+                </a:tc>
+                <a:tc>
+                  <a:txBody>
+                    <a:bodyPr/>
+                    <a:lstStyle/>
+                    <a:p>
+                      <a:pPr marL="0" indent="0">
+                        <a:buNone/>
+                      </a:pPr>
+                      <a:endParaRPr lang="en-US" sz="1300" dirty="0">
+                        <a:latin typeface="Calibri" charset="0"/>
+                        <a:ea typeface="Calibri" charset="0"/>
+                        <a:cs typeface="Calibri" charset="0"/>
+                      </a:endParaRPr>
+                    </a:p>
+                  </a:txBody>
+                  <a:tcPr marL="54864" marR="54864" marT="54864" marB="54864" anchor="ctr">
+                    <a:lnL w="9525" cap="flat" cmpd="sng" algn="ctr">
+                      <a:solidFill>
+                        <a:srgbClr val="BFBFBF"/>
+                      </a:solidFill>
+                      <a:prstDash val="solid"/>
+                      <a:round/>
+                      <a:headEnd type="none" w="med" len="med"/>
+                      <a:tailEnd type="none" w="med" len="med"/>
+                    </a:lnL>
+                    <a:lnR w="9525" cap="flat" cmpd="sng" algn="ctr">
+                      <a:solidFill>
+                        <a:srgbClr val="BFBFBF"/>
+                      </a:solidFill>
+                      <a:prstDash val="solid"/>
+                      <a:round/>
+                      <a:headEnd type="none" w="med" len="med"/>
+                      <a:tailEnd type="none" w="med" len="med"/>
+                    </a:lnR>
+                    <a:lnT w="9525" cap="flat" cmpd="sng" algn="ctr">
+                      <a:solidFill>
+                        <a:srgbClr val="BFBFBF"/>
+                      </a:solidFill>
+                      <a:prstDash val="solid"/>
+                      <a:round/>
+                      <a:headEnd type="none" w="med" len="med"/>
+                      <a:tailEnd type="none" w="med" len="med"/>
+                    </a:lnT>
+                    <a:lnB w="9525" cap="flat" cmpd="sng" algn="ctr">
+                      <a:solidFill>
+                        <a:srgbClr val="BFBFBF"/>
+                      </a:solidFill>
+                      <a:prstDash val="solid"/>
+                      <a:round/>
+                      <a:headEnd type="none" w="med" len="med"/>
+                      <a:tailEnd type="none" w="med" len="med"/>
+                    </a:lnB>
+                  </a:tcPr>
+                </a:tc>
+                <a:extLst>
+                  <a:ext uri="{0D108BD9-81ED-4DB2-BD59-A6C34878D82A}">
+                    <a16:rowId xmlns:a16="http://schemas.microsoft.com/office/drawing/2014/main" val="10001"/>
+                  </a:ext>
+                </a:extLst>
+              </a:tr>
+              <a:tr h="566928">
+                <a:tc>
+                  <a:txBody>
+                    <a:bodyPr/>
+                    <a:lstStyle/>
+                    <a:p>
+                      <a:pPr marL="0" indent="0">
+                        <a:buNone/>
+                      </a:pPr>
+                      <a:r>
+                        <a:rPr lang="en-US" sz="1300" dirty="0">
+                          <a:solidFill>
+                            <a:srgbClr val="000000"/>
+                          </a:solidFill>
+                          <a:latin typeface="Calibri" pitchFamily="34" charset="0"/>
+                          <a:ea typeface="Calibri" pitchFamily="34" charset="-122"/>
+                          <a:cs typeface="Calibri" pitchFamily="34" charset="-120"/>
+                        </a:rPr>
+                        <a:t>2</a:t>
+                      </a:r>
+                      <a:endParaRPr lang="en-US" sz="1300" dirty="0">
+                        <a:latin typeface="Calibri" charset="0"/>
+                        <a:ea typeface="Calibri" charset="0"/>
+                        <a:cs typeface="Calibri" charset="0"/>
+                      </a:endParaRPr>
+                    </a:p>
+                  </a:txBody>
+                  <a:tcPr marL="54864" marR="54864" marT="54864" marB="54864" anchor="ctr">
+                    <a:lnL w="9525" cap="flat" cmpd="sng" algn="ctr">
+                      <a:solidFill>
+                        <a:srgbClr val="BFBFBF"/>
+                      </a:solidFill>
+                      <a:prstDash val="solid"/>
+                      <a:round/>
+                      <a:headEnd type="none" w="med" len="med"/>
+                      <a:tailEnd type="none" w="med" len="med"/>
+                    </a:lnL>
+                    <a:lnR w="9525" cap="flat" cmpd="sng" algn="ctr">
+                      <a:solidFill>
+                        <a:srgbClr val="BFBFBF"/>
+                      </a:solidFill>
+                      <a:prstDash val="solid"/>
+                      <a:round/>
+                      <a:headEnd type="none" w="med" len="med"/>
+                      <a:tailEnd type="none" w="med" len="med"/>
+                    </a:lnR>
+                    <a:lnT w="9525" cap="flat" cmpd="sng" algn="ctr">
+                      <a:solidFill>
+                        <a:srgbClr val="BFBFBF"/>
+                      </a:solidFill>
+                      <a:prstDash val="solid"/>
+                      <a:round/>
+                      <a:headEnd type="none" w="med" len="med"/>
+                      <a:tailEnd type="none" w="med" len="med"/>
+                    </a:lnT>
+                    <a:lnB w="9525" cap="flat" cmpd="sng" algn="ctr">
+                      <a:solidFill>
+                        <a:srgbClr val="BFBFBF"/>
+                      </a:solidFill>
+                      <a:prstDash val="solid"/>
+                      <a:round/>
+                      <a:headEnd type="none" w="med" len="med"/>
+                      <a:tailEnd type="none" w="med" len="med"/>
+                    </a:lnB>
+                  </a:tcPr>
+                </a:tc>
+                <a:tc>
+                  <a:txBody>
+                    <a:bodyPr/>
+                    <a:lstStyle/>
+                    <a:p>
+                      <a:pPr marL="0" indent="0">
+                        <a:buNone/>
+                      </a:pPr>
+                      <a:endParaRPr lang="en-US" sz="1300" dirty="0">
+                        <a:latin typeface="Calibri" charset="0"/>
+                        <a:ea typeface="Calibri" charset="0"/>
+                        <a:cs typeface="Calibri" charset="0"/>
+                      </a:endParaRPr>
+                    </a:p>
+                  </a:txBody>
+                  <a:tcPr marL="54864" marR="54864" marT="54864" marB="54864" anchor="ctr">
+                    <a:lnL w="9525" cap="flat" cmpd="sng" algn="ctr">
+                      <a:solidFill>
+                        <a:srgbClr val="BFBFBF"/>
+                      </a:solidFill>
+                      <a:prstDash val="solid"/>
+                      <a:round/>
+                      <a:headEnd type="none" w="med" len="med"/>
+                      <a:tailEnd type="none" w="med" len="med"/>
+                    </a:lnL>
+                    <a:lnR w="9525" cap="flat" cmpd="sng" algn="ctr">
+                      <a:solidFill>
+                        <a:srgbClr val="BFBFBF"/>
+                      </a:solidFill>
+                      <a:prstDash val="solid"/>
+                      <a:round/>
+                      <a:headEnd type="none" w="med" len="med"/>
+                      <a:tailEnd type="none" w="med" len="med"/>
+                    </a:lnR>
+                    <a:lnT w="9525" cap="flat" cmpd="sng" algn="ctr">
+                      <a:solidFill>
+                        <a:srgbClr val="BFBFBF"/>
+                      </a:solidFill>
+                      <a:prstDash val="solid"/>
+                      <a:round/>
+                      <a:headEnd type="none" w="med" len="med"/>
+                      <a:tailEnd type="none" w="med" len="med"/>
+                    </a:lnT>
+                    <a:lnB w="9525" cap="flat" cmpd="sng" algn="ctr">
+                      <a:solidFill>
+                        <a:srgbClr val="BFBFBF"/>
+                      </a:solidFill>
+                      <a:prstDash val="solid"/>
+                      <a:round/>
+                      <a:headEnd type="none" w="med" len="med"/>
+                      <a:tailEnd type="none" w="med" len="med"/>
+                    </a:lnB>
+                  </a:tcPr>
+                </a:tc>
+                <a:tc>
+                  <a:txBody>
+                    <a:bodyPr/>
+                    <a:lstStyle/>
+                    <a:p>
+                      <a:pPr marL="0" indent="0">
+                        <a:buNone/>
+                      </a:pPr>
+                      <a:endParaRPr lang="en-US" sz="1300" dirty="0">
+                        <a:latin typeface="Calibri" charset="0"/>
+                        <a:ea typeface="Calibri" charset="0"/>
+                        <a:cs typeface="Calibri" charset="0"/>
+                      </a:endParaRPr>
+                    </a:p>
+                  </a:txBody>
+                  <a:tcPr marL="54864" marR="54864" marT="54864" marB="54864" anchor="ctr">
+                    <a:lnL w="9525" cap="flat" cmpd="sng" algn="ctr">
+                      <a:solidFill>
+                        <a:srgbClr val="BFBFBF"/>
+                      </a:solidFill>
+                      <a:prstDash val="solid"/>
+                      <a:round/>
+                      <a:headEnd type="none" w="med" len="med"/>
+                      <a:tailEnd type="none" w="med" len="med"/>
+                    </a:lnL>
+                    <a:lnR w="9525" cap="flat" cmpd="sng" algn="ctr">
+                      <a:solidFill>
+                        <a:srgbClr val="BFBFBF"/>
+                      </a:solidFill>
+                      <a:prstDash val="solid"/>
+                      <a:round/>
+                      <a:headEnd type="none" w="med" len="med"/>
+                      <a:tailEnd type="none" w="med" len="med"/>
+                    </a:lnR>
+                    <a:lnT w="9525" cap="flat" cmpd="sng" algn="ctr">
+                      <a:solidFill>
+                        <a:srgbClr val="BFBFBF"/>
+                      </a:solidFill>
+                      <a:prstDash val="solid"/>
+                      <a:round/>
+                      <a:headEnd type="none" w="med" len="med"/>
+                      <a:tailEnd type="none" w="med" len="med"/>
+                    </a:lnT>
+                    <a:lnB w="9525" cap="flat" cmpd="sng" algn="ctr">
+                      <a:solidFill>
+                        <a:srgbClr val="BFBFBF"/>
+                      </a:solidFill>
+                      <a:prstDash val="solid"/>
+                      <a:round/>
+                      <a:headEnd type="none" w="med" len="med"/>
+                      <a:tailEnd type="none" w="med" len="med"/>
+                    </a:lnB>
+                  </a:tcPr>
+                </a:tc>
+                <a:tc>
+                  <a:txBody>
+                    <a:bodyPr/>
+                    <a:lstStyle/>
+                    <a:p>
+                      <a:pPr marL="0" indent="0">
+                        <a:buNone/>
+                      </a:pPr>
+                      <a:endParaRPr lang="en-US" sz="1300" dirty="0">
+                        <a:latin typeface="Calibri" charset="0"/>
+                        <a:ea typeface="Calibri" charset="0"/>
+                        <a:cs typeface="Calibri" charset="0"/>
+                      </a:endParaRPr>
+                    </a:p>
+                  </a:txBody>
+                  <a:tcPr marL="54864" marR="54864" marT="54864" marB="54864" anchor="ctr">
+                    <a:lnL w="9525" cap="flat" cmpd="sng" algn="ctr">
+                      <a:solidFill>
+                        <a:srgbClr val="BFBFBF"/>
+                      </a:solidFill>
+                      <a:prstDash val="solid"/>
+                      <a:round/>
+                      <a:headEnd type="none" w="med" len="med"/>
+                      <a:tailEnd type="none" w="med" len="med"/>
+                    </a:lnL>
+                    <a:lnR w="9525" cap="flat" cmpd="sng" algn="ctr">
+                      <a:solidFill>
+                        <a:srgbClr val="BFBFBF"/>
+                      </a:solidFill>
+                      <a:prstDash val="solid"/>
+                      <a:round/>
+                      <a:headEnd type="none" w="med" len="med"/>
+                      <a:tailEnd type="none" w="med" len="med"/>
+                    </a:lnR>
+                    <a:lnT w="9525" cap="flat" cmpd="sng" algn="ctr">
+                      <a:solidFill>
+                        <a:srgbClr val="BFBFBF"/>
+                      </a:solidFill>
+                      <a:prstDash val="solid"/>
+                      <a:round/>
+                      <a:headEnd type="none" w="med" len="med"/>
+                      <a:tailEnd type="none" w="med" len="med"/>
+                    </a:lnT>
+                    <a:lnB w="9525" cap="flat" cmpd="sng" algn="ctr">
+                      <a:solidFill>
+                        <a:srgbClr val="BFBFBF"/>
+                      </a:solidFill>
+                      <a:prstDash val="solid"/>
+                      <a:round/>
+                      <a:headEnd type="none" w="med" len="med"/>
+                      <a:tailEnd type="none" w="med" len="med"/>
+                    </a:lnB>
+                  </a:tcPr>
+                </a:tc>
+                <a:tc>
+                  <a:txBody>
+                    <a:bodyPr/>
+                    <a:lstStyle/>
+                    <a:p>
+                      <a:pPr marL="0" indent="0">
+                        <a:buNone/>
+                      </a:pPr>
+                      <a:endParaRPr lang="en-US" sz="1300" dirty="0">
+                        <a:latin typeface="Calibri" charset="0"/>
+                        <a:ea typeface="Calibri" charset="0"/>
+                        <a:cs typeface="Calibri" charset="0"/>
+                      </a:endParaRPr>
+                    </a:p>
+                  </a:txBody>
+                  <a:tcPr marL="54864" marR="54864" marT="54864" marB="54864" anchor="ctr">
+                    <a:lnL w="9525" cap="flat" cmpd="sng" algn="ctr">
+                      <a:solidFill>
+                        <a:srgbClr val="BFBFBF"/>
+                      </a:solidFill>
+                      <a:prstDash val="solid"/>
+                      <a:round/>
+                      <a:headEnd type="none" w="med" len="med"/>
+                      <a:tailEnd type="none" w="med" len="med"/>
+                    </a:lnL>
+                    <a:lnR w="9525" cap="flat" cmpd="sng" algn="ctr">
+                      <a:solidFill>
+                        <a:srgbClr val="BFBFBF"/>
+                      </a:solidFill>
+                      <a:prstDash val="solid"/>
+                      <a:round/>
+                      <a:headEnd type="none" w="med" len="med"/>
+                      <a:tailEnd type="none" w="med" len="med"/>
+                    </a:lnR>
+                    <a:lnT w="9525" cap="flat" cmpd="sng" algn="ctr">
+                      <a:solidFill>
+                        <a:srgbClr val="BFBFBF"/>
+                      </a:solidFill>
+                      <a:prstDash val="solid"/>
+                      <a:round/>
+                      <a:headEnd type="none" w="med" len="med"/>
+                      <a:tailEnd type="none" w="med" len="med"/>
+                    </a:lnT>
+                    <a:lnB w="9525" cap="flat" cmpd="sng" algn="ctr">
+                      <a:solidFill>
+                        <a:srgbClr val="BFBFBF"/>
+                      </a:solidFill>
+                      <a:prstDash val="solid"/>
+                      <a:round/>
+                      <a:headEnd type="none" w="med" len="med"/>
+                      <a:tailEnd type="none" w="med" len="med"/>
+                    </a:lnB>
+                  </a:tcPr>
+                </a:tc>
+                <a:extLst>
+                  <a:ext uri="{0D108BD9-81ED-4DB2-BD59-A6C34878D82A}">
+                    <a16:rowId xmlns:a16="http://schemas.microsoft.com/office/drawing/2014/main" val="10002"/>
+                  </a:ext>
+                </a:extLst>
+              </a:tr>
+              <a:tr h="566928">
+                <a:tc>
+                  <a:txBody>
+                    <a:bodyPr/>
+                    <a:lstStyle/>
+                    <a:p>
+                      <a:pPr marL="0" indent="0">
+                        <a:buNone/>
+                      </a:pPr>
+                      <a:r>
+                        <a:rPr lang="en-US" sz="1300" dirty="0">
+                          <a:solidFill>
+                            <a:srgbClr val="000000"/>
+                          </a:solidFill>
+                          <a:latin typeface="Calibri" pitchFamily="34" charset="0"/>
+                          <a:ea typeface="Calibri" pitchFamily="34" charset="-122"/>
+                          <a:cs typeface="Calibri" pitchFamily="34" charset="-120"/>
+                        </a:rPr>
+                        <a:t>3</a:t>
+                      </a:r>
+                      <a:endParaRPr lang="en-US" sz="1300" dirty="0">
+                        <a:latin typeface="Calibri" charset="0"/>
+                        <a:ea typeface="Calibri" charset="0"/>
+                        <a:cs typeface="Calibri" charset="0"/>
+                      </a:endParaRPr>
+                    </a:p>
+                  </a:txBody>
+                  <a:tcPr marL="54864" marR="54864" marT="54864" marB="54864" anchor="ctr">
+                    <a:lnL w="9525" cap="flat" cmpd="sng" algn="ctr">
+                      <a:solidFill>
+                        <a:srgbClr val="BFBFBF"/>
+                      </a:solidFill>
+                      <a:prstDash val="solid"/>
+                      <a:round/>
+                      <a:headEnd type="none" w="med" len="med"/>
+                      <a:tailEnd type="none" w="med" len="med"/>
+                    </a:lnL>
+                    <a:lnR w="9525" cap="flat" cmpd="sng" algn="ctr">
+                      <a:solidFill>
+                        <a:srgbClr val="BFBFBF"/>
+                      </a:solidFill>
+                      <a:prstDash val="solid"/>
+                      <a:round/>
+                      <a:headEnd type="none" w="med" len="med"/>
+                      <a:tailEnd type="none" w="med" len="med"/>
+                    </a:lnR>
+                    <a:lnT w="9525" cap="flat" cmpd="sng" algn="ctr">
+                      <a:solidFill>
+                        <a:srgbClr val="BFBFBF"/>
+                      </a:solidFill>
+                      <a:prstDash val="solid"/>
+                      <a:round/>
+                      <a:headEnd type="none" w="med" len="med"/>
+                      <a:tailEnd type="none" w="med" len="med"/>
+                    </a:lnT>
+                    <a:lnB w="9525" cap="flat" cmpd="sng" algn="ctr">
+                      <a:solidFill>
+                        <a:srgbClr val="BFBFBF"/>
+                      </a:solidFill>
+                      <a:prstDash val="solid"/>
+                      <a:round/>
+                      <a:headEnd type="none" w="med" len="med"/>
+                      <a:tailEnd type="none" w="med" len="med"/>
+                    </a:lnB>
+                  </a:tcPr>
+                </a:tc>
+                <a:tc>
+                  <a:txBody>
+                    <a:bodyPr/>
+                    <a:lstStyle/>
+                    <a:p>
+                      <a:pPr marL="0" indent="0">
+                        <a:buNone/>
+                      </a:pPr>
+                      <a:endParaRPr lang="en-US" sz="1300" dirty="0">
+                        <a:latin typeface="Calibri" charset="0"/>
+                        <a:ea typeface="Calibri" charset="0"/>
+                        <a:cs typeface="Calibri" charset="0"/>
+                      </a:endParaRPr>
+                    </a:p>
+                  </a:txBody>
+                  <a:tcPr marL="54864" marR="54864" marT="54864" marB="54864" anchor="ctr">
+                    <a:lnL w="9525" cap="flat" cmpd="sng" algn="ctr">
+                      <a:solidFill>
+                        <a:srgbClr val="BFBFBF"/>
+                      </a:solidFill>
+                      <a:prstDash val="solid"/>
+                      <a:round/>
+                      <a:headEnd type="none" w="med" len="med"/>
+                      <a:tailEnd type="none" w="med" len="med"/>
+                    </a:lnL>
+                    <a:lnR w="9525" cap="flat" cmpd="sng" algn="ctr">
+                      <a:solidFill>
+                        <a:srgbClr val="BFBFBF"/>
+                      </a:solidFill>
+                      <a:prstDash val="solid"/>
+                      <a:round/>
+                      <a:headEnd type="none" w="med" len="med"/>
+                      <a:tailEnd type="none" w="med" len="med"/>
+                    </a:lnR>
+                    <a:lnT w="9525" cap="flat" cmpd="sng" algn="ctr">
+                      <a:solidFill>
+                        <a:srgbClr val="BFBFBF"/>
+                      </a:solidFill>
+                      <a:prstDash val="solid"/>
+                      <a:round/>
+                      <a:headEnd type="none" w="med" len="med"/>
+                      <a:tailEnd type="none" w="med" len="med"/>
+                    </a:lnT>
+                    <a:lnB w="9525" cap="flat" cmpd="sng" algn="ctr">
+                      <a:solidFill>
+                        <a:srgbClr val="BFBFBF"/>
+                      </a:solidFill>
+                      <a:prstDash val="solid"/>
+                      <a:round/>
+                      <a:headEnd type="none" w="med" len="med"/>
+                      <a:tailEnd type="none" w="med" len="med"/>
+                    </a:lnB>
+                  </a:tcPr>
+                </a:tc>
+                <a:tc>
+                  <a:txBody>
+                    <a:bodyPr/>
+                    <a:lstStyle/>
+                    <a:p>
+                      <a:pPr marL="0" indent="0">
+                        <a:buNone/>
+                      </a:pPr>
+                      <a:endParaRPr lang="en-US" sz="1300" dirty="0">
+                        <a:latin typeface="Calibri" charset="0"/>
+                        <a:ea typeface="Calibri" charset="0"/>
+                        <a:cs typeface="Calibri" charset="0"/>
+                      </a:endParaRPr>
+                    </a:p>
+                  </a:txBody>
+                  <a:tcPr marL="54864" marR="54864" marT="54864" marB="54864" anchor="ctr">
+                    <a:lnL w="9525" cap="flat" cmpd="sng" algn="ctr">
+                      <a:solidFill>
+                        <a:srgbClr val="BFBFBF"/>
+                      </a:solidFill>
+                      <a:prstDash val="solid"/>
+                      <a:round/>
+                      <a:headEnd type="none" w="med" len="med"/>
+                      <a:tailEnd type="none" w="med" len="med"/>
+                    </a:lnL>
+                    <a:lnR w="9525" cap="flat" cmpd="sng" algn="ctr">
+                      <a:solidFill>
+                        <a:srgbClr val="BFBFBF"/>
+                      </a:solidFill>
+                      <a:prstDash val="solid"/>
+                      <a:round/>
+                      <a:headEnd type="none" w="med" len="med"/>
+                      <a:tailEnd type="none" w="med" len="med"/>
+                    </a:lnR>
+                    <a:lnT w="9525" cap="flat" cmpd="sng" algn="ctr">
+                      <a:solidFill>
+                        <a:srgbClr val="BFBFBF"/>
+                      </a:solidFill>
+                      <a:prstDash val="solid"/>
+                      <a:round/>
+                      <a:headEnd type="none" w="med" len="med"/>
+                      <a:tailEnd type="none" w="med" len="med"/>
+                    </a:lnT>
+                    <a:lnB w="9525" cap="flat" cmpd="sng" algn="ctr">
+                      <a:solidFill>
+                        <a:srgbClr val="BFBFBF"/>
+                      </a:solidFill>
+                      <a:prstDash val="solid"/>
+                      <a:round/>
+                      <a:headEnd type="none" w="med" len="med"/>
+                      <a:tailEnd type="none" w="med" len="med"/>
+                    </a:lnB>
+                  </a:tcPr>
+                </a:tc>
+                <a:tc>
+                  <a:txBody>
+                    <a:bodyPr/>
+                    <a:lstStyle/>
+                    <a:p>
+                      <a:pPr marL="0" indent="0">
+                        <a:buNone/>
+                      </a:pPr>
+                      <a:endParaRPr lang="en-US" sz="1300" dirty="0">
+                        <a:latin typeface="Calibri" charset="0"/>
+                        <a:ea typeface="Calibri" charset="0"/>
+                        <a:cs typeface="Calibri" charset="0"/>
+                      </a:endParaRPr>
+                    </a:p>
+                  </a:txBody>
+                  <a:tcPr marL="54864" marR="54864" marT="54864" marB="54864" anchor="ctr">
+                    <a:lnL w="9525" cap="flat" cmpd="sng" algn="ctr">
+                      <a:solidFill>
+                        <a:srgbClr val="BFBFBF"/>
+                      </a:solidFill>
+                      <a:prstDash val="solid"/>
+                      <a:round/>
+                      <a:headEnd type="none" w="med" len="med"/>
+                      <a:tailEnd type="none" w="med" len="med"/>
+                    </a:lnL>
+                    <a:lnR w="9525" cap="flat" cmpd="sng" algn="ctr">
+                      <a:solidFill>
+                        <a:srgbClr val="BFBFBF"/>
+                      </a:solidFill>
+                      <a:prstDash val="solid"/>
+                      <a:round/>
+                      <a:headEnd type="none" w="med" len="med"/>
+                      <a:tailEnd type="none" w="med" len="med"/>
+                    </a:lnR>
+                    <a:lnT w="9525" cap="flat" cmpd="sng" algn="ctr">
+                      <a:solidFill>
+                        <a:srgbClr val="BFBFBF"/>
+                      </a:solidFill>
+                      <a:prstDash val="solid"/>
+                      <a:round/>
+                      <a:headEnd type="none" w="med" len="med"/>
+                      <a:tailEnd type="none" w="med" len="med"/>
+                    </a:lnT>
+                    <a:lnB w="9525" cap="flat" cmpd="sng" algn="ctr">
+                      <a:solidFill>
+                        <a:srgbClr val="BFBFBF"/>
+                      </a:solidFill>
+                      <a:prstDash val="solid"/>
+                      <a:round/>
+                      <a:headEnd type="none" w="med" len="med"/>
+                      <a:tailEnd type="none" w="med" len="med"/>
+                    </a:lnB>
+                  </a:tcPr>
+                </a:tc>
+                <a:tc>
+                  <a:txBody>
+                    <a:bodyPr/>
+                    <a:lstStyle/>
+                    <a:p>
+                      <a:pPr marL="0" indent="0">
+                        <a:buNone/>
+                      </a:pPr>
+                      <a:endParaRPr lang="en-US" sz="1300" dirty="0">
+                        <a:latin typeface="Calibri" charset="0"/>
+                        <a:ea typeface="Calibri" charset="0"/>
+                        <a:cs typeface="Calibri" charset="0"/>
+                      </a:endParaRPr>
+                    </a:p>
+                  </a:txBody>
+                  <a:tcPr marL="54864" marR="54864" marT="54864" marB="54864" anchor="ctr">
+                    <a:lnL w="9525" cap="flat" cmpd="sng" algn="ctr">
+                      <a:solidFill>
+                        <a:srgbClr val="BFBFBF"/>
+                      </a:solidFill>
+                      <a:prstDash val="solid"/>
+                      <a:round/>
+                      <a:headEnd type="none" w="med" len="med"/>
+                      <a:tailEnd type="none" w="med" len="med"/>
+                    </a:lnL>
+                    <a:lnR w="9525" cap="flat" cmpd="sng" algn="ctr">
+                      <a:solidFill>
+                        <a:srgbClr val="BFBFBF"/>
+                      </a:solidFill>
+                      <a:prstDash val="solid"/>
+                      <a:round/>
+                      <a:headEnd type="none" w="med" len="med"/>
+                      <a:tailEnd type="none" w="med" len="med"/>
+                    </a:lnR>
+                    <a:lnT w="9525" cap="flat" cmpd="sng" algn="ctr">
+                      <a:solidFill>
+                        <a:srgbClr val="BFBFBF"/>
+                      </a:solidFill>
+                      <a:prstDash val="solid"/>
+                      <a:round/>
+                      <a:headEnd type="none" w="med" len="med"/>
+                      <a:tailEnd type="none" w="med" len="med"/>
+                    </a:lnT>
+                    <a:lnB w="9525" cap="flat" cmpd="sng" algn="ctr">
+                      <a:solidFill>
+                        <a:srgbClr val="BFBFBF"/>
+                      </a:solidFill>
+                      <a:prstDash val="solid"/>
+                      <a:round/>
+                      <a:headEnd type="none" w="med" len="med"/>
+                      <a:tailEnd type="none" w="med" len="med"/>
+                    </a:lnB>
+                  </a:tcPr>
+                </a:tc>
+                <a:extLst>
+                  <a:ext uri="{0D108BD9-81ED-4DB2-BD59-A6C34878D82A}">
+                    <a16:rowId xmlns:a16="http://schemas.microsoft.com/office/drawing/2014/main" val="10003"/>
+                  </a:ext>
+                </a:extLst>
+              </a:tr>
+              <a:tr h="566928">
+                <a:tc>
+                  <a:txBody>
+                    <a:bodyPr/>
+                    <a:lstStyle/>
+                    <a:p>
+                      <a:pPr marL="0" indent="0">
+                        <a:buNone/>
+                      </a:pPr>
+                      <a:r>
+                        <a:rPr lang="en-US" sz="1300" dirty="0">
+                          <a:solidFill>
+                            <a:srgbClr val="000000"/>
+                          </a:solidFill>
+                          <a:latin typeface="Calibri" pitchFamily="34" charset="0"/>
+                          <a:ea typeface="Calibri" pitchFamily="34" charset="-122"/>
+                          <a:cs typeface="Calibri" pitchFamily="34" charset="-120"/>
+                        </a:rPr>
+                        <a:t>4</a:t>
+                      </a:r>
+                      <a:endParaRPr lang="en-US" sz="1300" dirty="0">
+                        <a:latin typeface="Calibri" charset="0"/>
+                        <a:ea typeface="Calibri" charset="0"/>
+                        <a:cs typeface="Calibri" charset="0"/>
+                      </a:endParaRPr>
+                    </a:p>
+                  </a:txBody>
+                  <a:tcPr marL="54864" marR="54864" marT="54864" marB="54864" anchor="ctr">
+                    <a:lnL w="9525" cap="flat" cmpd="sng" algn="ctr">
+                      <a:solidFill>
+                        <a:srgbClr val="BFBFBF"/>
+                      </a:solidFill>
+                      <a:prstDash val="solid"/>
+                      <a:round/>
+                      <a:headEnd type="none" w="med" len="med"/>
+                      <a:tailEnd type="none" w="med" len="med"/>
+                    </a:lnL>
+                    <a:lnR w="9525" cap="flat" cmpd="sng" algn="ctr">
+                      <a:solidFill>
+                        <a:srgbClr val="BFBFBF"/>
+                      </a:solidFill>
+                      <a:prstDash val="solid"/>
+                      <a:round/>
+                      <a:headEnd type="none" w="med" len="med"/>
+                      <a:tailEnd type="none" w="med" len="med"/>
+                    </a:lnR>
+                    <a:lnT w="9525" cap="flat" cmpd="sng" algn="ctr">
+                      <a:solidFill>
+                        <a:srgbClr val="BFBFBF"/>
+                      </a:solidFill>
+                      <a:prstDash val="solid"/>
+                      <a:round/>
+                      <a:headEnd type="none" w="med" len="med"/>
+                      <a:tailEnd type="none" w="med" len="med"/>
+                    </a:lnT>
+                    <a:lnB w="9525" cap="flat" cmpd="sng" algn="ctr">
+                      <a:solidFill>
+                        <a:srgbClr val="BFBFBF"/>
+                      </a:solidFill>
+                      <a:prstDash val="solid"/>
+                      <a:round/>
+                      <a:headEnd type="none" w="med" len="med"/>
+                      <a:tailEnd type="none" w="med" len="med"/>
+                    </a:lnB>
+                  </a:tcPr>
+                </a:tc>
+                <a:tc>
+                  <a:txBody>
+                    <a:bodyPr/>
+                    <a:lstStyle/>
+                    <a:p>
+                      <a:pPr marL="0" indent="0">
+                        <a:buNone/>
+                      </a:pPr>
+                      <a:endParaRPr lang="en-US" sz="1300" dirty="0">
+                        <a:latin typeface="Calibri" charset="0"/>
+                        <a:ea typeface="Calibri" charset="0"/>
+                        <a:cs typeface="Calibri" charset="0"/>
+                      </a:endParaRPr>
+                    </a:p>
+                  </a:txBody>
+                  <a:tcPr marL="54864" marR="54864" marT="54864" marB="54864" anchor="ctr">
+                    <a:lnL w="9525" cap="flat" cmpd="sng" algn="ctr">
+                      <a:solidFill>
+                        <a:srgbClr val="BFBFBF"/>
+                      </a:solidFill>
+                      <a:prstDash val="solid"/>
+                      <a:round/>
+                      <a:headEnd type="none" w="med" len="med"/>
+                      <a:tailEnd type="none" w="med" len="med"/>
+                    </a:lnL>
+                    <a:lnR w="9525" cap="flat" cmpd="sng" algn="ctr">
+                      <a:solidFill>
+                        <a:srgbClr val="BFBFBF"/>
+                      </a:solidFill>
+                      <a:prstDash val="solid"/>
+                      <a:round/>
+                      <a:headEnd type="none" w="med" len="med"/>
+                      <a:tailEnd type="none" w="med" len="med"/>
+                    </a:lnR>
+                    <a:lnT w="9525" cap="flat" cmpd="sng" algn="ctr">
+                      <a:solidFill>
+                        <a:srgbClr val="BFBFBF"/>
+                      </a:solidFill>
+                      <a:prstDash val="solid"/>
+                      <a:round/>
+                      <a:headEnd type="none" w="med" len="med"/>
+                      <a:tailEnd type="none" w="med" len="med"/>
+                    </a:lnT>
+                    <a:lnB w="9525" cap="flat" cmpd="sng" algn="ctr">
+                      <a:solidFill>
+                        <a:srgbClr val="BFBFBF"/>
+                      </a:solidFill>
+                      <a:prstDash val="solid"/>
+                      <a:round/>
+                      <a:headEnd type="none" w="med" len="med"/>
+                      <a:tailEnd type="none" w="med" len="med"/>
+                    </a:lnB>
+                  </a:tcPr>
+                </a:tc>
+                <a:tc>
+                  <a:txBody>
+                    <a:bodyPr/>
+                    <a:lstStyle/>
+                    <a:p>
+                      <a:pPr marL="0" indent="0">
+                        <a:buNone/>
+                      </a:pPr>
+                      <a:endParaRPr lang="en-US" sz="1300" dirty="0">
+                        <a:latin typeface="Calibri" charset="0"/>
+                        <a:ea typeface="Calibri" charset="0"/>
+                        <a:cs typeface="Calibri" charset="0"/>
+                      </a:endParaRPr>
+                    </a:p>
+                  </a:txBody>
+                  <a:tcPr marL="54864" marR="54864" marT="54864" marB="54864" anchor="ctr">
+                    <a:lnL w="9525" cap="flat" cmpd="sng" algn="ctr">
+                      <a:solidFill>
+                        <a:srgbClr val="BFBFBF"/>
+                      </a:solidFill>
+                      <a:prstDash val="solid"/>
+                      <a:round/>
+                      <a:headEnd type="none" w="med" len="med"/>
+                      <a:tailEnd type="none" w="med" len="med"/>
+                    </a:lnL>
+                    <a:lnR w="9525" cap="flat" cmpd="sng" algn="ctr">
+                      <a:solidFill>
+                        <a:srgbClr val="BFBFBF"/>
+                      </a:solidFill>
+                      <a:prstDash val="solid"/>
+                      <a:round/>
+                      <a:headEnd type="none" w="med" len="med"/>
+                      <a:tailEnd type="none" w="med" len="med"/>
+                    </a:lnR>
+                    <a:lnT w="9525" cap="flat" cmpd="sng" algn="ctr">
+                      <a:solidFill>
+                        <a:srgbClr val="BFBFBF"/>
+                      </a:solidFill>
+                      <a:prstDash val="solid"/>
+                      <a:round/>
+                      <a:headEnd type="none" w="med" len="med"/>
+                      <a:tailEnd type="none" w="med" len="med"/>
+                    </a:lnT>
+                    <a:lnB w="9525" cap="flat" cmpd="sng" algn="ctr">
+                      <a:solidFill>
+                        <a:srgbClr val="BFBFBF"/>
+                      </a:solidFill>
+                      <a:prstDash val="solid"/>
+                      <a:round/>
+                      <a:headEnd type="none" w="med" len="med"/>
+                      <a:tailEnd type="none" w="med" len="med"/>
+                    </a:lnB>
+                  </a:tcPr>
+                </a:tc>
+                <a:tc>
+                  <a:txBody>
+                    <a:bodyPr/>
+                    <a:lstStyle/>
+                    <a:p>
+                      <a:pPr marL="0" indent="0">
+                        <a:buNone/>
+                      </a:pPr>
+                      <a:endParaRPr lang="en-US" sz="1300" dirty="0">
+                        <a:latin typeface="Calibri" charset="0"/>
+                        <a:ea typeface="Calibri" charset="0"/>
+                        <a:cs typeface="Calibri" charset="0"/>
+                      </a:endParaRPr>
+                    </a:p>
+                  </a:txBody>
+                  <a:tcPr marL="54864" marR="54864" marT="54864" marB="54864" anchor="ctr">
+                    <a:lnL w="9525" cap="flat" cmpd="sng" algn="ctr">
+                      <a:solidFill>
+                        <a:srgbClr val="BFBFBF"/>
+                      </a:solidFill>
+                      <a:prstDash val="solid"/>
+                      <a:round/>
+                      <a:headEnd type="none" w="med" len="med"/>
+                      <a:tailEnd type="none" w="med" len="med"/>
+                    </a:lnL>
+                    <a:lnR w="9525" cap="flat" cmpd="sng" algn="ctr">
+                      <a:solidFill>
+                        <a:srgbClr val="BFBFBF"/>
+                      </a:solidFill>
+                      <a:prstDash val="solid"/>
+                      <a:round/>
+                      <a:headEnd type="none" w="med" len="med"/>
+                      <a:tailEnd type="none" w="med" len="med"/>
+                    </a:lnR>
+                    <a:lnT w="9525" cap="flat" cmpd="sng" algn="ctr">
+                      <a:solidFill>
+                        <a:srgbClr val="BFBFBF"/>
+                      </a:solidFill>
+                      <a:prstDash val="solid"/>
+                      <a:round/>
+                      <a:headEnd type="none" w="med" len="med"/>
+                      <a:tailEnd type="none" w="med" len="med"/>
+                    </a:lnT>
+                    <a:lnB w="9525" cap="flat" cmpd="sng" algn="ctr">
+                      <a:solidFill>
+                        <a:srgbClr val="BFBFBF"/>
+                      </a:solidFill>
+                      <a:prstDash val="solid"/>
+                      <a:round/>
+                      <a:headEnd type="none" w="med" len="med"/>
+                      <a:tailEnd type="none" w="med" len="med"/>
+                    </a:lnB>
+                  </a:tcPr>
+                </a:tc>
+                <a:tc>
+                  <a:txBody>
+                    <a:bodyPr/>
+                    <a:lstStyle/>
+                    <a:p>
+                      <a:pPr marL="0" indent="0">
+                        <a:buNone/>
+                      </a:pPr>
+                      <a:endParaRPr lang="en-US" sz="1300" dirty="0">
+                        <a:latin typeface="Calibri" charset="0"/>
+                        <a:ea typeface="Calibri" charset="0"/>
+                        <a:cs typeface="Calibri" charset="0"/>
+                      </a:endParaRPr>
+                    </a:p>
+                  </a:txBody>
+                  <a:tcPr marL="54864" marR="54864" marT="54864" marB="54864" anchor="ctr">
+                    <a:lnL w="9525" cap="flat" cmpd="sng" algn="ctr">
+                      <a:solidFill>
+                        <a:srgbClr val="BFBFBF"/>
+                      </a:solidFill>
+                      <a:prstDash val="solid"/>
+                      <a:round/>
+                      <a:headEnd type="none" w="med" len="med"/>
+                      <a:tailEnd type="none" w="med" len="med"/>
+                    </a:lnL>
+                    <a:lnR w="9525" cap="flat" cmpd="sng" algn="ctr">
+                      <a:solidFill>
+                        <a:srgbClr val="BFBFBF"/>
+                      </a:solidFill>
+                      <a:prstDash val="solid"/>
+                      <a:round/>
+                      <a:headEnd type="none" w="med" len="med"/>
+                      <a:tailEnd type="none" w="med" len="med"/>
+                    </a:lnR>
+                    <a:lnT w="9525" cap="flat" cmpd="sng" algn="ctr">
+                      <a:solidFill>
+                        <a:srgbClr val="BFBFBF"/>
+                      </a:solidFill>
+                      <a:prstDash val="solid"/>
+                      <a:round/>
+                      <a:headEnd type="none" w="med" len="med"/>
+                      <a:tailEnd type="none" w="med" len="med"/>
+                    </a:lnT>
+                    <a:lnB w="9525" cap="flat" cmpd="sng" algn="ctr">
+                      <a:solidFill>
+                        <a:srgbClr val="BFBFBF"/>
+                      </a:solidFill>
+                      <a:prstDash val="solid"/>
+                      <a:round/>
+                      <a:headEnd type="none" w="med" len="med"/>
+                      <a:tailEnd type="none" w="med" len="med"/>
+                    </a:lnB>
+                  </a:tcPr>
+                </a:tc>
+                <a:extLst>
+                  <a:ext uri="{0D108BD9-81ED-4DB2-BD59-A6C34878D82A}">
+                    <a16:rowId xmlns:a16="http://schemas.microsoft.com/office/drawing/2014/main" val="10004"/>
+                  </a:ext>
+                </a:extLst>
+              </a:tr>
+              <a:tr h="566928">
+                <a:tc>
+                  <a:txBody>
+                    <a:bodyPr/>
+                    <a:lstStyle/>
+                    <a:p>
+                      <a:pPr marL="0" indent="0">
+                        <a:buNone/>
+                      </a:pPr>
+                      <a:r>
+                        <a:rPr lang="en-US" sz="1300" dirty="0">
+                          <a:solidFill>
+                            <a:srgbClr val="000000"/>
+                          </a:solidFill>
+                          <a:latin typeface="Calibri" pitchFamily="34" charset="0"/>
+                          <a:ea typeface="Calibri" pitchFamily="34" charset="-122"/>
+                          <a:cs typeface="Calibri" pitchFamily="34" charset="-120"/>
+                        </a:rPr>
+                        <a:t>5</a:t>
+                      </a:r>
+                      <a:endParaRPr lang="en-US" sz="1300" dirty="0">
+                        <a:latin typeface="Calibri" charset="0"/>
+                        <a:ea typeface="Calibri" charset="0"/>
+                        <a:cs typeface="Calibri" charset="0"/>
+                      </a:endParaRPr>
+                    </a:p>
+                  </a:txBody>
+                  <a:tcPr marL="54864" marR="54864" marT="54864" marB="54864" anchor="ctr">
+                    <a:lnL w="9525" cap="flat" cmpd="sng" algn="ctr">
+                      <a:solidFill>
+                        <a:srgbClr val="BFBFBF"/>
+                      </a:solidFill>
+                      <a:prstDash val="solid"/>
+                      <a:round/>
+                      <a:headEnd type="none" w="med" len="med"/>
+                      <a:tailEnd type="none" w="med" len="med"/>
+                    </a:lnL>
+                    <a:lnR w="9525" cap="flat" cmpd="sng" algn="ctr">
+                      <a:solidFill>
+                        <a:srgbClr val="BFBFBF"/>
+                      </a:solidFill>
+                      <a:prstDash val="solid"/>
+                      <a:round/>
+                      <a:headEnd type="none" w="med" len="med"/>
+                      <a:tailEnd type="none" w="med" len="med"/>
+                    </a:lnR>
+                    <a:lnT w="9525" cap="flat" cmpd="sng" algn="ctr">
+                      <a:solidFill>
+                        <a:srgbClr val="BFBFBF"/>
+                      </a:solidFill>
+                      <a:prstDash val="solid"/>
+                      <a:round/>
+                      <a:headEnd type="none" w="med" len="med"/>
+                      <a:tailEnd type="none" w="med" len="med"/>
+                    </a:lnT>
+                    <a:lnB w="9525" cap="flat" cmpd="sng" algn="ctr">
+                      <a:solidFill>
+                        <a:srgbClr val="BFBFBF"/>
+                      </a:solidFill>
+                      <a:prstDash val="solid"/>
+                      <a:round/>
+                      <a:headEnd type="none" w="med" len="med"/>
+                      <a:tailEnd type="none" w="med" len="med"/>
+                    </a:lnB>
+                  </a:tcPr>
+                </a:tc>
+                <a:tc>
+                  <a:txBody>
+                    <a:bodyPr/>
+                    <a:lstStyle/>
+                    <a:p>
+                      <a:pPr marL="0" indent="0">
+                        <a:buNone/>
+                      </a:pPr>
+                      <a:endParaRPr lang="en-US" sz="1300" dirty="0">
+                        <a:latin typeface="Calibri" charset="0"/>
+                        <a:ea typeface="Calibri" charset="0"/>
+                        <a:cs typeface="Calibri" charset="0"/>
+                      </a:endParaRPr>
+                    </a:p>
+                  </a:txBody>
+                  <a:tcPr marL="54864" marR="54864" marT="54864" marB="54864" anchor="ctr">
+                    <a:lnL w="9525" cap="flat" cmpd="sng" algn="ctr">
+                      <a:solidFill>
+                        <a:srgbClr val="BFBFBF"/>
+                      </a:solidFill>
+                      <a:prstDash val="solid"/>
+                      <a:round/>
+                      <a:headEnd type="none" w="med" len="med"/>
+                      <a:tailEnd type="none" w="med" len="med"/>
+                    </a:lnL>
+                    <a:lnR w="9525" cap="flat" cmpd="sng" algn="ctr">
+                      <a:solidFill>
+                        <a:srgbClr val="BFBFBF"/>
+                      </a:solidFill>
+                      <a:prstDash val="solid"/>
+                      <a:round/>
+                      <a:headEnd type="none" w="med" len="med"/>
+                      <a:tailEnd type="none" w="med" len="med"/>
+                    </a:lnR>
+                    <a:lnT w="9525" cap="flat" cmpd="sng" algn="ctr">
+                      <a:solidFill>
+                        <a:srgbClr val="BFBFBF"/>
+                      </a:solidFill>
+                      <a:prstDash val="solid"/>
+                      <a:round/>
+                      <a:headEnd type="none" w="med" len="med"/>
+                      <a:tailEnd type="none" w="med" len="med"/>
+                    </a:lnT>
+                    <a:lnB w="9525" cap="flat" cmpd="sng" algn="ctr">
+                      <a:solidFill>
+                        <a:srgbClr val="BFBFBF"/>
+                      </a:solidFill>
+                      <a:prstDash val="solid"/>
+                      <a:round/>
+                      <a:headEnd type="none" w="med" len="med"/>
+                      <a:tailEnd type="none" w="med" len="med"/>
+                    </a:lnB>
+                  </a:tcPr>
+                </a:tc>
+                <a:tc>
+                  <a:txBody>
+                    <a:bodyPr/>
+                    <a:lstStyle/>
+                    <a:p>
+                      <a:pPr marL="0" indent="0">
+                        <a:buNone/>
+                      </a:pPr>
+                      <a:endParaRPr lang="en-US" sz="1300" dirty="0">
+                        <a:latin typeface="Calibri" charset="0"/>
+                        <a:ea typeface="Calibri" charset="0"/>
+                        <a:cs typeface="Calibri" charset="0"/>
+                      </a:endParaRPr>
+                    </a:p>
+                  </a:txBody>
+                  <a:tcPr marL="54864" marR="54864" marT="54864" marB="54864" anchor="ctr">
+                    <a:lnL w="9525" cap="flat" cmpd="sng" algn="ctr">
+                      <a:solidFill>
+                        <a:srgbClr val="BFBFBF"/>
+                      </a:solidFill>
+                      <a:prstDash val="solid"/>
+                      <a:round/>
+                      <a:headEnd type="none" w="med" len="med"/>
+                      <a:tailEnd type="none" w="med" len="med"/>
+                    </a:lnL>
+                    <a:lnR w="9525" cap="flat" cmpd="sng" algn="ctr">
+                      <a:solidFill>
+                        <a:srgbClr val="BFBFBF"/>
+                      </a:solidFill>
+                      <a:prstDash val="solid"/>
+                      <a:round/>
+                      <a:headEnd type="none" w="med" len="med"/>
+                      <a:tailEnd type="none" w="med" len="med"/>
+                    </a:lnR>
+                    <a:lnT w="9525" cap="flat" cmpd="sng" algn="ctr">
+                      <a:solidFill>
+                        <a:srgbClr val="BFBFBF"/>
+                      </a:solidFill>
+                      <a:prstDash val="solid"/>
+                      <a:round/>
+                      <a:headEnd type="none" w="med" len="med"/>
+                      <a:tailEnd type="none" w="med" len="med"/>
+                    </a:lnT>
+                    <a:lnB w="9525" cap="flat" cmpd="sng" algn="ctr">
+                      <a:solidFill>
+                        <a:srgbClr val="BFBFBF"/>
+                      </a:solidFill>
+                      <a:prstDash val="solid"/>
+                      <a:round/>
+                      <a:headEnd type="none" w="med" len="med"/>
+                      <a:tailEnd type="none" w="med" len="med"/>
+                    </a:lnB>
+                  </a:tcPr>
+                </a:tc>
+                <a:tc>
+                  <a:txBody>
+                    <a:bodyPr/>
+                    <a:lstStyle/>
+                    <a:p>
+                      <a:pPr marL="0" indent="0">
+                        <a:buNone/>
+                      </a:pPr>
+                      <a:endParaRPr lang="en-US" sz="1300" dirty="0">
+                        <a:latin typeface="Calibri" charset="0"/>
+                        <a:ea typeface="Calibri" charset="0"/>
+                        <a:cs typeface="Calibri" charset="0"/>
+                      </a:endParaRPr>
+                    </a:p>
+                  </a:txBody>
+                  <a:tcPr marL="54864" marR="54864" marT="54864" marB="54864" anchor="ctr">
+                    <a:lnL w="9525" cap="flat" cmpd="sng" algn="ctr">
+                      <a:solidFill>
+                        <a:srgbClr val="BFBFBF"/>
+                      </a:solidFill>
+                      <a:prstDash val="solid"/>
+                      <a:round/>
+                      <a:headEnd type="none" w="med" len="med"/>
+                      <a:tailEnd type="none" w="med" len="med"/>
+                    </a:lnL>
+                    <a:lnR w="9525" cap="flat" cmpd="sng" algn="ctr">
+                      <a:solidFill>
+                        <a:srgbClr val="BFBFBF"/>
+                      </a:solidFill>
+                      <a:prstDash val="solid"/>
+                      <a:round/>
+                      <a:headEnd type="none" w="med" len="med"/>
+                      <a:tailEnd type="none" w="med" len="med"/>
+                    </a:lnR>
+                    <a:lnT w="9525" cap="flat" cmpd="sng" algn="ctr">
+                      <a:solidFill>
+                        <a:srgbClr val="BFBFBF"/>
+                      </a:solidFill>
+                      <a:prstDash val="solid"/>
+                      <a:round/>
+                      <a:headEnd type="none" w="med" len="med"/>
+                      <a:tailEnd type="none" w="med" len="med"/>
+                    </a:lnT>
+                    <a:lnB w="9525" cap="flat" cmpd="sng" algn="ctr">
+                      <a:solidFill>
+                        <a:srgbClr val="BFBFBF"/>
+                      </a:solidFill>
+                      <a:prstDash val="solid"/>
+                      <a:round/>
+                      <a:headEnd type="none" w="med" len="med"/>
+                      <a:tailEnd type="none" w="med" len="med"/>
+                    </a:lnB>
+                  </a:tcPr>
+                </a:tc>
+                <a:tc>
+                  <a:txBody>
+                    <a:bodyPr/>
+                    <a:lstStyle/>
+                    <a:p>
+                      <a:pPr marL="0" indent="0">
+                        <a:buNone/>
+                      </a:pPr>
+                      <a:endParaRPr lang="en-US" sz="1300" dirty="0">
+                        <a:latin typeface="Calibri" charset="0"/>
+                        <a:ea typeface="Calibri" charset="0"/>
+                        <a:cs typeface="Calibri" charset="0"/>
+                      </a:endParaRPr>
+                    </a:p>
+                  </a:txBody>
+                  <a:tcPr marL="54864" marR="54864" marT="54864" marB="54864" anchor="ctr">
+                    <a:lnL w="9525" cap="flat" cmpd="sng" algn="ctr">
+                      <a:solidFill>
+                        <a:srgbClr val="BFBFBF"/>
+                      </a:solidFill>
+                      <a:prstDash val="solid"/>
+                      <a:round/>
+                      <a:headEnd type="none" w="med" len="med"/>
+                      <a:tailEnd type="none" w="med" len="med"/>
+                    </a:lnL>
+                    <a:lnR w="9525" cap="flat" cmpd="sng" algn="ctr">
+                      <a:solidFill>
+                        <a:srgbClr val="BFBFBF"/>
+                      </a:solidFill>
+                      <a:prstDash val="solid"/>
+                      <a:round/>
+                      <a:headEnd type="none" w="med" len="med"/>
+                      <a:tailEnd type="none" w="med" len="med"/>
+                    </a:lnR>
+                    <a:lnT w="9525" cap="flat" cmpd="sng" algn="ctr">
+                      <a:solidFill>
+                        <a:srgbClr val="BFBFBF"/>
+                      </a:solidFill>
+                      <a:prstDash val="solid"/>
+                      <a:round/>
+                      <a:headEnd type="none" w="med" len="med"/>
+                      <a:tailEnd type="none" w="med" len="med"/>
+                    </a:lnT>
+                    <a:lnB w="9525" cap="flat" cmpd="sng" algn="ctr">
+                      <a:solidFill>
+                        <a:srgbClr val="BFBFBF"/>
+                      </a:solidFill>
+                      <a:prstDash val="solid"/>
+                      <a:round/>
+                      <a:headEnd type="none" w="med" len="med"/>
+                      <a:tailEnd type="none" w="med" len="med"/>
+                    </a:lnB>
+                  </a:tcPr>
+                </a:tc>
+                <a:extLst>
+                  <a:ext uri="{0D108BD9-81ED-4DB2-BD59-A6C34878D82A}">
+                    <a16:rowId xmlns:a16="http://schemas.microsoft.com/office/drawing/2014/main" val="10005"/>
+                  </a:ext>
+                </a:extLst>
+              </a:tr>
+              <a:tr h="566928">
+                <a:tc>
+                  <a:txBody>
+                    <a:bodyPr/>
+                    <a:lstStyle/>
+                    <a:p>
+                      <a:pPr marL="0" indent="0">
+                        <a:buNone/>
+                      </a:pPr>
+                      <a:r>
+                        <a:rPr lang="en-US" sz="1300" dirty="0">
+                          <a:solidFill>
+                            <a:srgbClr val="000000"/>
+                          </a:solidFill>
+                          <a:latin typeface="Calibri" pitchFamily="34" charset="0"/>
+                          <a:ea typeface="Calibri" pitchFamily="34" charset="-122"/>
+                          <a:cs typeface="Calibri" pitchFamily="34" charset="-120"/>
+                        </a:rPr>
+                        <a:t>6</a:t>
+                      </a:r>
+                      <a:endParaRPr lang="en-US" sz="1300" dirty="0">
+                        <a:latin typeface="Calibri" charset="0"/>
+                        <a:ea typeface="Calibri" charset="0"/>
+                        <a:cs typeface="Calibri" charset="0"/>
+                      </a:endParaRPr>
+                    </a:p>
+                  </a:txBody>
+                  <a:tcPr marL="54864" marR="54864" marT="54864" marB="54864" anchor="ctr">
+                    <a:lnL w="9525" cap="flat" cmpd="sng" algn="ctr">
+                      <a:solidFill>
+                        <a:srgbClr val="BFBFBF"/>
+                      </a:solidFill>
+                      <a:prstDash val="solid"/>
+                      <a:round/>
+                      <a:headEnd type="none" w="med" len="med"/>
+                      <a:tailEnd type="none" w="med" len="med"/>
+                    </a:lnL>
+                    <a:lnR w="9525" cap="flat" cmpd="sng" algn="ctr">
+                      <a:solidFill>
+                        <a:srgbClr val="BFBFBF"/>
+                      </a:solidFill>
+                      <a:prstDash val="solid"/>
+                      <a:round/>
+                      <a:headEnd type="none" w="med" len="med"/>
+                      <a:tailEnd type="none" w="med" len="med"/>
+                    </a:lnR>
+                    <a:lnT w="9525" cap="flat" cmpd="sng" algn="ctr">
+                      <a:solidFill>
+                        <a:srgbClr val="BFBFBF"/>
+                      </a:solidFill>
+                      <a:prstDash val="solid"/>
+                      <a:round/>
+                      <a:headEnd type="none" w="med" len="med"/>
+                      <a:tailEnd type="none" w="med" len="med"/>
+                    </a:lnT>
+                    <a:lnB w="9525" cap="flat" cmpd="sng" algn="ctr">
+                      <a:solidFill>
+                        <a:srgbClr val="BFBFBF"/>
+                      </a:solidFill>
+                      <a:prstDash val="solid"/>
+                      <a:round/>
+                      <a:headEnd type="none" w="med" len="med"/>
+                      <a:tailEnd type="none" w="med" len="med"/>
+                    </a:lnB>
+                  </a:tcPr>
+                </a:tc>
+                <a:tc>
+                  <a:txBody>
+                    <a:bodyPr/>
+                    <a:lstStyle/>
+                    <a:p>
+                      <a:pPr marL="0" indent="0">
+                        <a:buNone/>
+                      </a:pPr>
+                      <a:endParaRPr lang="en-US" sz="1300" dirty="0">
+                        <a:latin typeface="Calibri" charset="0"/>
+                        <a:ea typeface="Calibri" charset="0"/>
+                        <a:cs typeface="Calibri" charset="0"/>
+                      </a:endParaRPr>
+                    </a:p>
+                  </a:txBody>
+                  <a:tcPr marL="54864" marR="54864" marT="54864" marB="54864" anchor="ctr">
+                    <a:lnL w="9525" cap="flat" cmpd="sng" algn="ctr">
+                      <a:solidFill>
+                        <a:srgbClr val="BFBFBF"/>
+                      </a:solidFill>
+                      <a:prstDash val="solid"/>
+                      <a:round/>
+                      <a:headEnd type="none" w="med" len="med"/>
+                      <a:tailEnd type="none" w="med" len="med"/>
+                    </a:lnL>
+                    <a:lnR w="9525" cap="flat" cmpd="sng" algn="ctr">
+                      <a:solidFill>
+                        <a:srgbClr val="BFBFBF"/>
+                      </a:solidFill>
+                      <a:prstDash val="solid"/>
+                      <a:round/>
+                      <a:headEnd type="none" w="med" len="med"/>
+                      <a:tailEnd type="none" w="med" len="med"/>
+                    </a:lnR>
+                    <a:lnT w="9525" cap="flat" cmpd="sng" algn="ctr">
+                      <a:solidFill>
+                        <a:srgbClr val="BFBFBF"/>
+                      </a:solidFill>
+                      <a:prstDash val="solid"/>
+                      <a:round/>
+                      <a:headEnd type="none" w="med" len="med"/>
+                      <a:tailEnd type="none" w="med" len="med"/>
+                    </a:lnT>
+                    <a:lnB w="9525" cap="flat" cmpd="sng" algn="ctr">
+                      <a:solidFill>
+                        <a:srgbClr val="BFBFBF"/>
+                      </a:solidFill>
+                      <a:prstDash val="solid"/>
+                      <a:round/>
+                      <a:headEnd type="none" w="med" len="med"/>
+                      <a:tailEnd type="none" w="med" len="med"/>
+                    </a:lnB>
+                  </a:tcPr>
+                </a:tc>
+                <a:tc>
+                  <a:txBody>
+                    <a:bodyPr/>
+                    <a:lstStyle/>
+                    <a:p>
+                      <a:pPr marL="0" indent="0">
+                        <a:buNone/>
+                      </a:pPr>
+                      <a:endParaRPr lang="en-US" sz="1300" dirty="0">
+                        <a:latin typeface="Calibri" charset="0"/>
+                        <a:ea typeface="Calibri" charset="0"/>
+                        <a:cs typeface="Calibri" charset="0"/>
+                      </a:endParaRPr>
+                    </a:p>
+                  </a:txBody>
+                  <a:tcPr marL="54864" marR="54864" marT="54864" marB="54864" anchor="ctr">
+                    <a:lnL w="9525" cap="flat" cmpd="sng" algn="ctr">
+                      <a:solidFill>
+                        <a:srgbClr val="BFBFBF"/>
+                      </a:solidFill>
+                      <a:prstDash val="solid"/>
+                      <a:round/>
+                      <a:headEnd type="none" w="med" len="med"/>
+                      <a:tailEnd type="none" w="med" len="med"/>
+                    </a:lnL>
+                    <a:lnR w="9525" cap="flat" cmpd="sng" algn="ctr">
+                      <a:solidFill>
+                        <a:srgbClr val="BFBFBF"/>
+                      </a:solidFill>
+                      <a:prstDash val="solid"/>
+                      <a:round/>
+                      <a:headEnd type="none" w="med" len="med"/>
+                      <a:tailEnd type="none" w="med" len="med"/>
+                    </a:lnR>
+                    <a:lnT w="9525" cap="flat" cmpd="sng" algn="ctr">
+                      <a:solidFill>
+                        <a:srgbClr val="BFBFBF"/>
+                      </a:solidFill>
+                      <a:prstDash val="solid"/>
+                      <a:round/>
+                      <a:headEnd type="none" w="med" len="med"/>
+                      <a:tailEnd type="none" w="med" len="med"/>
+                    </a:lnT>
+                    <a:lnB w="9525" cap="flat" cmpd="sng" algn="ctr">
+                      <a:solidFill>
+                        <a:srgbClr val="BFBFBF"/>
+                      </a:solidFill>
+                      <a:prstDash val="solid"/>
+                      <a:round/>
+                      <a:headEnd type="none" w="med" len="med"/>
+                      <a:tailEnd type="none" w="med" len="med"/>
+                    </a:lnB>
+                  </a:tcPr>
+                </a:tc>
+                <a:tc>
+                  <a:txBody>
+                    <a:bodyPr/>
+                    <a:lstStyle/>
+                    <a:p>
+                      <a:pPr marL="0" indent="0">
+                        <a:buNone/>
+                      </a:pPr>
+                      <a:endParaRPr lang="en-US" sz="1300" dirty="0">
+                        <a:latin typeface="Calibri" charset="0"/>
+                        <a:ea typeface="Calibri" charset="0"/>
+                        <a:cs typeface="Calibri" charset="0"/>
+                      </a:endParaRPr>
+                    </a:p>
+                  </a:txBody>
+                  <a:tcPr marL="54864" marR="54864" marT="54864" marB="54864" anchor="ctr">
+                    <a:lnL w="9525" cap="flat" cmpd="sng" algn="ctr">
+                      <a:solidFill>
+                        <a:srgbClr val="BFBFBF"/>
+                      </a:solidFill>
+                      <a:prstDash val="solid"/>
+                      <a:round/>
+                      <a:headEnd type="none" w="med" len="med"/>
+                      <a:tailEnd type="none" w="med" len="med"/>
+                    </a:lnL>
+                    <a:lnR w="9525" cap="flat" cmpd="sng" algn="ctr">
+                      <a:solidFill>
+                        <a:srgbClr val="BFBFBF"/>
+                      </a:solidFill>
+                      <a:prstDash val="solid"/>
+                      <a:round/>
+                      <a:headEnd type="none" w="med" len="med"/>
+                      <a:tailEnd type="none" w="med" len="med"/>
+                    </a:lnR>
+                    <a:lnT w="9525" cap="flat" cmpd="sng" algn="ctr">
+                      <a:solidFill>
+                        <a:srgbClr val="BFBFBF"/>
+                      </a:solidFill>
+                      <a:prstDash val="solid"/>
+                      <a:round/>
+                      <a:headEnd type="none" w="med" len="med"/>
+                      <a:tailEnd type="none" w="med" len="med"/>
+                    </a:lnT>
+                    <a:lnB w="9525" cap="flat" cmpd="sng" algn="ctr">
+                      <a:solidFill>
+                        <a:srgbClr val="BFBFBF"/>
+                      </a:solidFill>
+                      <a:prstDash val="solid"/>
+                      <a:round/>
+                      <a:headEnd type="none" w="med" len="med"/>
+                      <a:tailEnd type="none" w="med" len="med"/>
+                    </a:lnB>
+                  </a:tcPr>
+                </a:tc>
+                <a:tc>
+                  <a:txBody>
+                    <a:bodyPr/>
+                    <a:lstStyle/>
+                    <a:p>
+                      <a:pPr marL="0" indent="0">
+                        <a:buNone/>
+                      </a:pPr>
+                      <a:endParaRPr lang="en-US" sz="1300" dirty="0">
+                        <a:latin typeface="Calibri" charset="0"/>
+                        <a:ea typeface="Calibri" charset="0"/>
+                        <a:cs typeface="Calibri" charset="0"/>
+                      </a:endParaRPr>
+                    </a:p>
+                  </a:txBody>
+                  <a:tcPr marL="54864" marR="54864" marT="54864" marB="54864" anchor="ctr">
+                    <a:lnL w="9525" cap="flat" cmpd="sng" algn="ctr">
+                      <a:solidFill>
+                        <a:srgbClr val="BFBFBF"/>
+                      </a:solidFill>
+                      <a:prstDash val="solid"/>
+                      <a:round/>
+                      <a:headEnd type="none" w="med" len="med"/>
+                      <a:tailEnd type="none" w="med" len="med"/>
+                    </a:lnL>
+                    <a:lnR w="9525" cap="flat" cmpd="sng" algn="ctr">
+                      <a:solidFill>
+                        <a:srgbClr val="BFBFBF"/>
+                      </a:solidFill>
+                      <a:prstDash val="solid"/>
+                      <a:round/>
+                      <a:headEnd type="none" w="med" len="med"/>
+                      <a:tailEnd type="none" w="med" len="med"/>
+                    </a:lnR>
+                    <a:lnT w="9525" cap="flat" cmpd="sng" algn="ctr">
+                      <a:solidFill>
+                        <a:srgbClr val="BFBFBF"/>
+                      </a:solidFill>
+                      <a:prstDash val="solid"/>
+                      <a:round/>
+                      <a:headEnd type="none" w="med" len="med"/>
+                      <a:tailEnd type="none" w="med" len="med"/>
+                    </a:lnT>
+                    <a:lnB w="9525" cap="flat" cmpd="sng" algn="ctr">
+                      <a:solidFill>
+                        <a:srgbClr val="BFBFBF"/>
+                      </a:solidFill>
+                      <a:prstDash val="solid"/>
+                      <a:round/>
+                      <a:headEnd type="none" w="med" len="med"/>
+                      <a:tailEnd type="none" w="med" len="med"/>
+                    </a:lnB>
+                  </a:tcPr>
+                </a:tc>
+                <a:extLst>
+                  <a:ext uri="{0D108BD9-81ED-4DB2-BD59-A6C34878D82A}">
+                    <a16:rowId xmlns:a16="http://schemas.microsoft.com/office/drawing/2014/main" val="10006"/>
+                  </a:ext>
+                </a:extLst>
+              </a:tr>
+            </a:tbl>
+          </a:graphicData>
+        </a:graphic>
+      </p:graphicFrame>
+      <p:sp>
+        <p:nvSpPr>
+          <p:cNvPr id="5" name="Text 2"/>
+          <p:cNvSpPr txBox="1"/>
+          <p:nvPr/>
+        </p:nvSpPr>
+        <p:spPr>
+          <a:xfrm>
+            <a:off x="548640" y="5577840"/>
+            <a:ext cx="11064240" cy="365760"/>
+          </a:xfrm>
+          <a:prstGeom prst="rect">
+            <a:avLst/>
+          </a:prstGeom>
+          <a:noFill/>
+          <a:ln/>
+        </p:spPr>
+        <p:txBody>
+          <a:bodyPr wrap="square" lIns="0" tIns="0" rIns="0" bIns="0" rtlCol="0" anchor="ctr"/>
+          <a:lstStyle/>
+          <a:p>
+            <a:pPr marL="0" indent="0">
+              <a:buNone/>
+            </a:pPr>
+            <a:r>
+              <a:rPr lang="en-US" sz="1200" i="1" dirty="0">
+                <a:solidFill>
+                  <a:srgbClr val="000000"/>
+                </a:solidFill>
+                <a:latin typeface="Calibri" pitchFamily="34" charset="0"/>
+                <a:ea typeface="Calibri" pitchFamily="34" charset="-122"/>
+                <a:cs typeface="Calibri" pitchFamily="34" charset="-120"/>
+              </a:rPr>
+              <a:t>Minimum 8–10 recent references. Add rows / duplicate this slide as needed.</a:t>
+            </a:r>
+            <a:endParaRPr lang="en-US" sz="1200" dirty="0"/>
+          </a:p>
+        </p:txBody>
+      </p:sp>
+    </p:spTree>
+  </p:cSld>
+  <p:clrMapOvr>
+    <a:masterClrMapping/>
+  </p:clrMapOvr>
+</p:sld>
+</file>
+
+<file path=ppt/slides/slide13.xml><?xml version="1.0" encoding="utf-8"?>
+<p:sld xmlns:a="http://schemas.openxmlformats.org/drawingml/2006/main" xmlns:r="http://schemas.openxmlformats.org/officeDocument/2006/relationships" xmlns:p="http://schemas.openxmlformats.org/presentationml/2006/main">
   <p:cSld name="Slide 9">
     <p:bg>
       <p:bgPr>
@@ -2261,7 +4574,7 @@
 </p:sld>
 </file>
 
-<file path=ppt/slides/slide13.xml><?xml version="1.0" encoding="utf-8"?>
+<file path=ppt/slides/slide14.xml><?xml version="1.0" encoding="utf-8"?>
 <p:sld xmlns:a="http://schemas.openxmlformats.org/drawingml/2006/main" xmlns:r="http://schemas.openxmlformats.org/officeDocument/2006/relationships" xmlns:p="http://schemas.openxmlformats.org/presentationml/2006/main">
   <p:cSld name="Slide 9">
     <p:bg>

--- a/review/template_ext.pptx
+++ b/review/template_ext.pptx
@@ -18,8 +18,10 @@
     <p:sldId id="262" r:id="rId8"/>
     <p:sldId id="263" r:id="rId9"/>
     <p:sldId id="264" r:id="rId10"/>
+    <p:sldId id="268" r:id="rId19"/>
     <p:sldId id="269" r:id="rId20"/>
-    <p:sldId id="268" r:id="rId19"/>
+    <p:sldId id="270" r:id="rId21"/>
+    <p:sldId id="271" r:id="rId22"/>
     <p:sldId id="265" r:id="rId11"/>
     <p:sldId id="266" r:id="rId12"/>
   </p:sldIdLst>
@@ -4701,6 +4703,382 @@
           </a:prstGeom>
         </p:spPr>
       </p:pic>
+    </p:spTree>
+  </p:cSld>
+  <p:clrMapOvr>
+    <a:masterClrMapping/>
+  </p:clrMapOvr>
+</p:sld>
+</file>
+
+<file path=ppt/slides/slide15.xml><?xml version="1.0" encoding="utf-8"?>
+<p:sld xmlns:a="http://schemas.openxmlformats.org/drawingml/2006/main" xmlns:r="http://schemas.openxmlformats.org/officeDocument/2006/relationships" xmlns:p="http://schemas.openxmlformats.org/presentationml/2006/main">
+  <p:cSld name="Slide 9">
+    <p:bg>
+      <p:bgPr>
+        <a:solidFill>
+          <a:srgbClr val="FFFFFF"/>
+        </a:solidFill>
+        <a:effectLst/>
+      </p:bgPr>
+    </p:bg>
+    <p:spTree>
+      <p:nvGrpSpPr>
+        <p:cNvPr id="1" name=""/>
+        <p:cNvGrpSpPr/>
+        <p:nvPr/>
+      </p:nvGrpSpPr>
+      <p:grpSpPr>
+        <a:xfrm>
+          <a:off x="0" y="0"/>
+          <a:ext cx="0" cy="0"/>
+          <a:chOff x="0" y="0"/>
+          <a:chExt cx="0" cy="0"/>
+        </a:xfrm>
+      </p:grpSpPr>
+      <p:sp>
+        <p:nvSpPr>
+          <p:cNvPr id="2" name="Text 0"/>
+          <p:cNvSpPr txBox="1"/>
+          <p:nvPr/>
+        </p:nvSpPr>
+        <p:spPr>
+          <a:xfrm>
+            <a:off x="11460175" y="6446520"/>
+            <a:ext cx="457200" cy="274320"/>
+          </a:xfrm>
+          <a:prstGeom prst="rect">
+            <a:avLst/>
+          </a:prstGeom>
+          <a:noFill/>
+          <a:ln/>
+        </p:spPr>
+        <p:txBody>
+          <a:bodyPr wrap="square" lIns="0" tIns="0" rIns="0" bIns="0" rtlCol="0" anchor="ctr"/>
+          <a:lstStyle/>
+          <a:p>
+            <a:pPr marL="0" indent="0" algn="r">
+              <a:buNone/>
+            </a:pPr>
+            <a:r>
+              <a:rPr lang="en-US" sz="1000" dirty="0">
+                <a:solidFill>
+                  <a:srgbClr val="808080"/>
+                </a:solidFill>
+                <a:latin typeface="Calibri" pitchFamily="34" charset="0"/>
+                <a:ea typeface="Calibri" pitchFamily="34" charset="-122"/>
+                <a:cs typeface="Calibri" pitchFamily="34" charset="-120"/>
+              </a:rPr>
+              <a:t>9</a:t>
+            </a:r>
+            <a:endParaRPr lang="en-US" sz="1000" dirty="0"/>
+          </a:p>
+        </p:txBody>
+      </p:sp>
+      <p:sp>
+        <p:nvSpPr>
+          <p:cNvPr id="3" name="Text 1"/>
+          <p:cNvSpPr txBox="1"/>
+          <p:nvPr/>
+        </p:nvSpPr>
+        <p:spPr>
+          <a:xfrm>
+            <a:off x="548640" y="320040"/>
+            <a:ext cx="9601200" cy="685800"/>
+          </a:xfrm>
+          <a:prstGeom prst="rect">
+            <a:avLst/>
+          </a:prstGeom>
+          <a:noFill/>
+          <a:ln/>
+        </p:spPr>
+        <p:txBody>
+          <a:bodyPr wrap="square" lIns="0" tIns="0" rIns="0" bIns="0" rtlCol="0" anchor="ctr"/>
+          <a:lstStyle/>
+          <a:p>
+            <a:pPr marL="0" indent="0">
+              <a:buNone/>
+            </a:pPr>
+            <a:r>
+              <a:rPr lang="en-US" sz="2800" b="1" dirty="0">
+                <a:solidFill>
+                  <a:srgbClr val="1D2F82"/>
+                </a:solidFill>
+                <a:latin typeface="Calibri" pitchFamily="34" charset="0"/>
+                <a:ea typeface="Calibri" pitchFamily="34" charset="-122"/>
+                <a:cs typeface="Calibri" pitchFamily="34" charset="-120"/>
+              </a:rPr>
+              <a:t>Results (contd.)</a:t>
+            </a:r>
+            <a:endParaRPr lang="en-US" sz="2800" dirty="0"/>
+          </a:p>
+        </p:txBody>
+      </p:sp>
+      <p:pic>
+        <p:nvPicPr>
+          <p:cNvPr id="4" name="Image 0" descr="logo.png"/>
+          <p:cNvPicPr>
+            <a:picLocks noChangeAspect="1"/>
+          </p:cNvPicPr>
+          <p:nvPr/>
+        </p:nvPicPr>
+        <p:blipFill>
+          <a:blip r:embed="rId3"/>
+          <a:stretch>
+            <a:fillRect/>
+          </a:stretch>
+        </p:blipFill>
+        <p:spPr>
+          <a:xfrm>
+            <a:off x="10362895" y="320040"/>
+            <a:ext cx="1371600" cy="518746"/>
+          </a:xfrm>
+          <a:prstGeom prst="rect">
+            <a:avLst/>
+          </a:prstGeom>
+        </p:spPr>
+      </p:pic>
+    </p:spTree>
+  </p:cSld>
+  <p:clrMapOvr>
+    <a:masterClrMapping/>
+  </p:clrMapOvr>
+</p:sld>
+</file>
+
+<file path=ppt/slides/slide16.xml><?xml version="1.0" encoding="utf-8"?>
+<p:sld xmlns:a="http://schemas.openxmlformats.org/drawingml/2006/main" xmlns:r="http://schemas.openxmlformats.org/officeDocument/2006/relationships" xmlns:p="http://schemas.openxmlformats.org/presentationml/2006/main">
+  <p:cSld name="Slide 4">
+    <p:bg>
+      <p:bgPr>
+        <a:solidFill>
+          <a:srgbClr val="FFFFFF"/>
+        </a:solidFill>
+        <a:effectLst/>
+      </p:bgPr>
+    </p:bg>
+    <p:spTree>
+      <p:nvGrpSpPr>
+        <p:cNvPr id="1" name=""/>
+        <p:cNvGrpSpPr/>
+        <p:nvPr/>
+      </p:nvGrpSpPr>
+      <p:grpSpPr>
+        <a:xfrm>
+          <a:off x="0" y="0"/>
+          <a:ext cx="0" cy="0"/>
+          <a:chOff x="0" y="0"/>
+          <a:chExt cx="0" cy="0"/>
+        </a:xfrm>
+      </p:grpSpPr>
+      <p:sp>
+        <p:nvSpPr>
+          <p:cNvPr id="2" name="Text 0"/>
+          <p:cNvSpPr txBox="1"/>
+          <p:nvPr/>
+        </p:nvSpPr>
+        <p:spPr>
+          <a:xfrm>
+            <a:off x="11460175" y="6446520"/>
+            <a:ext cx="457200" cy="274320"/>
+          </a:xfrm>
+          <a:prstGeom prst="rect">
+            <a:avLst/>
+          </a:prstGeom>
+          <a:noFill/>
+          <a:ln/>
+        </p:spPr>
+        <p:txBody>
+          <a:bodyPr wrap="square" lIns="0" tIns="0" rIns="0" bIns="0" rtlCol="0" anchor="ctr"/>
+          <a:lstStyle/>
+          <a:p>
+            <a:pPr marL="0" indent="0" algn="r">
+              <a:buNone/>
+            </a:pPr>
+            <a:r>
+              <a:rPr lang="en-US" sz="1000" dirty="0">
+                <a:solidFill>
+                  <a:srgbClr val="808080"/>
+                </a:solidFill>
+                <a:latin typeface="Calibri" pitchFamily="34" charset="0"/>
+                <a:ea typeface="Calibri" pitchFamily="34" charset="-122"/>
+                <a:cs typeface="Calibri" pitchFamily="34" charset="-120"/>
+              </a:rPr>
+              <a:t>4</a:t>
+            </a:r>
+            <a:endParaRPr lang="en-US" sz="1000" dirty="0"/>
+          </a:p>
+        </p:txBody>
+      </p:sp>
+      <p:sp>
+        <p:nvSpPr>
+          <p:cNvPr id="3" name="Text 1"/>
+          <p:cNvSpPr txBox="1"/>
+          <p:nvPr/>
+        </p:nvSpPr>
+        <p:spPr>
+          <a:xfrm>
+            <a:off x="548640" y="320040"/>
+            <a:ext cx="9601200" cy="685800"/>
+          </a:xfrm>
+          <a:prstGeom prst="rect">
+            <a:avLst/>
+          </a:prstGeom>
+          <a:noFill/>
+          <a:ln/>
+        </p:spPr>
+        <p:txBody>
+          <a:bodyPr wrap="square" lIns="0" tIns="0" rIns="0" bIns="0" rtlCol="0" anchor="ctr"/>
+          <a:lstStyle/>
+          <a:p>
+            <a:pPr marL="0" indent="0">
+              <a:buNone/>
+            </a:pPr>
+            <a:r>
+              <a:rPr lang="en-US" sz="2800" b="1" dirty="0">
+                <a:solidFill>
+                  <a:srgbClr val="1D2F82"/>
+                </a:solidFill>
+                <a:latin typeface="Calibri" pitchFamily="34" charset="0"/>
+                <a:ea typeface="Calibri" pitchFamily="34" charset="-122"/>
+                <a:cs typeface="Calibri" pitchFamily="34" charset="-120"/>
+              </a:rPr>
+              <a:t>Problem Statement &amp; Background</a:t>
+            </a:r>
+            <a:endParaRPr lang="en-US" sz="2800" dirty="0"/>
+          </a:p>
+        </p:txBody>
+      </p:sp>
+      <p:pic>
+        <p:nvPicPr>
+          <p:cNvPr id="4" name="Image 0" descr="logo.png"/>
+          <p:cNvPicPr>
+            <a:picLocks noChangeAspect="1"/>
+          </p:cNvPicPr>
+          <p:nvPr/>
+        </p:nvPicPr>
+        <p:blipFill>
+          <a:blip r:embed="rId3"/>
+          <a:stretch>
+            <a:fillRect/>
+          </a:stretch>
+        </p:blipFill>
+        <p:spPr>
+          <a:xfrm>
+            <a:off x="10362895" y="320040"/>
+            <a:ext cx="1371600" cy="518746"/>
+          </a:xfrm>
+          <a:prstGeom prst="rect">
+            <a:avLst/>
+          </a:prstGeom>
+        </p:spPr>
+      </p:pic>
+      <p:sp>
+        <p:nvSpPr>
+          <p:cNvPr id="5" name="Text 2"/>
+          <p:cNvSpPr txBox="1"/>
+          <p:nvPr/>
+        </p:nvSpPr>
+        <p:spPr>
+          <a:xfrm>
+            <a:off x="640080" y="1325880"/>
+            <a:ext cx="10881360" cy="4937760"/>
+          </a:xfrm>
+          <a:prstGeom prst="rect">
+            <a:avLst/>
+          </a:prstGeom>
+          <a:noFill/>
+          <a:ln/>
+        </p:spPr>
+        <p:txBody>
+          <a:bodyPr wrap="square" lIns="0" tIns="0" rIns="0" bIns="0" rtlCol="0" anchor="t"/>
+          <a:lstStyle/>
+          <a:p>
+            <a:pPr marL="177800" indent="-177800">
+              <a:spcAft>
+                <a:spcPts val="800"/>
+              </a:spcAft>
+              <a:buSzPct val="100000"/>
+              <a:buChar char="•"/>
+            </a:pPr>
+            <a:r>
+              <a:rPr lang="en-US" sz="1600" dirty="0">
+                <a:solidFill>
+                  <a:srgbClr val="000000"/>
+                </a:solidFill>
+                <a:latin typeface="Calibri" pitchFamily="34" charset="0"/>
+                <a:ea typeface="Calibri" pitchFamily="34" charset="-122"/>
+                <a:cs typeface="Calibri" pitchFamily="34" charset="-120"/>
+              </a:rPr>
+              <a:t>Problem Statement:</a:t>
+            </a:r>
+            <a:endParaRPr lang="en-US" sz="1600" dirty="0"/>
+          </a:p>
+          <a:p>
+            <a:pPr marL="177800" indent="-177800">
+              <a:spcAft>
+                <a:spcPts val="800"/>
+              </a:spcAft>
+              <a:buSzPct val="100000"/>
+              <a:buChar char="•"/>
+            </a:pPr>
+            <a:r>
+              <a:rPr lang="en-US" sz="1600" dirty="0">
+                <a:solidFill>
+                  <a:srgbClr val="000000"/>
+                </a:solidFill>
+                <a:latin typeface="Calibri" pitchFamily="34" charset="0"/>
+                <a:ea typeface="Calibri" pitchFamily="34" charset="-122"/>
+                <a:cs typeface="Calibri" pitchFamily="34" charset="-120"/>
+              </a:rPr>
+              <a:t>Background &amp; Significance:</a:t>
+            </a:r>
+            <a:endParaRPr lang="en-US" sz="1600" dirty="0"/>
+          </a:p>
+          <a:p>
+            <a:pPr marL="177800" indent="-177800">
+              <a:spcAft>
+                <a:spcPts val="800"/>
+              </a:spcAft>
+              <a:buSzPct val="100000"/>
+              <a:buChar char="•"/>
+            </a:pPr>
+            <a:r>
+              <a:rPr lang="en-US" sz="1600" dirty="0">
+                <a:solidFill>
+                  <a:srgbClr val="000000"/>
+                </a:solidFill>
+                <a:latin typeface="Calibri" pitchFamily="34" charset="0"/>
+                <a:ea typeface="Calibri" pitchFamily="34" charset="-122"/>
+                <a:cs typeface="Calibri" pitchFamily="34" charset="-120"/>
+              </a:rPr>
+              <a:t>Existing Solutions:</a:t>
+            </a:r>
+            <a:endParaRPr lang="en-US" sz="1600" dirty="0"/>
+          </a:p>
+          <a:p>
+            <a:pPr marL="177800" indent="-177800">
+              <a:spcAft>
+                <a:spcPts val="800"/>
+              </a:spcAft>
+              <a:buSzPct val="100000"/>
+              <a:buChar char="•"/>
+            </a:pPr>
+            <a:r>
+              <a:rPr lang="en-US" sz="1600" dirty="0">
+                <a:solidFill>
+                  <a:srgbClr val="000000"/>
+                </a:solidFill>
+                <a:latin typeface="Calibri" pitchFamily="34" charset="0"/>
+                <a:ea typeface="Calibri" pitchFamily="34" charset="-122"/>
+                <a:cs typeface="Calibri" pitchFamily="34" charset="-120"/>
+              </a:rPr>
+              <a:t>Limitations / Research Gap:</a:t>
+            </a:r>
+            <a:endParaRPr lang="en-US" sz="1600" dirty="0"/>
+          </a:p>
+        </p:txBody>
+      </p:sp>
     </p:spTree>
   </p:cSld>
   <p:clrMapOvr>

--- a/review/template_ext.pptx
+++ b/review/template_ext.pptx
@@ -15,8 +15,13 @@
     <p:sldId id="260" r:id="rId6"/>
     <p:sldId id="267" r:id="rId18"/>
     <p:sldId id="261" r:id="rId7"/>
+    <p:sldId id="274" r:id="rId25"/>
     <p:sldId id="262" r:id="rId8"/>
+    <p:sldId id="272" r:id="rId23"/>
+    <p:sldId id="273" r:id="rId24"/>
     <p:sldId id="263" r:id="rId9"/>
+    <p:sldId id="275" r:id="rId26"/>
+    <p:sldId id="276" r:id="rId27"/>
     <p:sldId id="264" r:id="rId10"/>
     <p:sldId id="268" r:id="rId19"/>
     <p:sldId id="269" r:id="rId20"/>
@@ -5087,6 +5092,623 @@
 </p:sld>
 </file>
 
+<file path=ppt/slides/slide17.xml><?xml version="1.0" encoding="utf-8"?>
+<p:sld xmlns:a="http://schemas.openxmlformats.org/drawingml/2006/main" xmlns:r="http://schemas.openxmlformats.org/officeDocument/2006/relationships" xmlns:p="http://schemas.openxmlformats.org/presentationml/2006/main">
+  <p:cSld name="Slide 4">
+    <p:bg>
+      <p:bgPr>
+        <a:solidFill>
+          <a:srgbClr val="FFFFFF"/>
+        </a:solidFill>
+        <a:effectLst/>
+      </p:bgPr>
+    </p:bg>
+    <p:spTree>
+      <p:nvGrpSpPr>
+        <p:cNvPr id="1" name=""/>
+        <p:cNvGrpSpPr/>
+        <p:nvPr/>
+      </p:nvGrpSpPr>
+      <p:grpSpPr>
+        <a:xfrm>
+          <a:off x="0" y="0"/>
+          <a:ext cx="0" cy="0"/>
+          <a:chOff x="0" y="0"/>
+          <a:chExt cx="0" cy="0"/>
+        </a:xfrm>
+      </p:grpSpPr>
+      <p:sp>
+        <p:nvSpPr>
+          <p:cNvPr id="2" name="Text 0"/>
+          <p:cNvSpPr txBox="1"/>
+          <p:nvPr/>
+        </p:nvSpPr>
+        <p:spPr>
+          <a:xfrm>
+            <a:off x="11460175" y="6446520"/>
+            <a:ext cx="457200" cy="274320"/>
+          </a:xfrm>
+          <a:prstGeom prst="rect">
+            <a:avLst/>
+          </a:prstGeom>
+          <a:noFill/>
+          <a:ln/>
+        </p:spPr>
+        <p:txBody>
+          <a:bodyPr wrap="square" lIns="0" tIns="0" rIns="0" bIns="0" rtlCol="0" anchor="ctr"/>
+          <a:lstStyle/>
+          <a:p>
+            <a:pPr marL="0" indent="0" algn="r">
+              <a:buNone/>
+            </a:pPr>
+            <a:r>
+              <a:rPr lang="en-US" sz="1000" dirty="0">
+                <a:solidFill>
+                  <a:srgbClr val="808080"/>
+                </a:solidFill>
+                <a:latin typeface="Calibri" pitchFamily="34" charset="0"/>
+                <a:ea typeface="Calibri" pitchFamily="34" charset="-122"/>
+                <a:cs typeface="Calibri" pitchFamily="34" charset="-120"/>
+              </a:rPr>
+              <a:t>4</a:t>
+            </a:r>
+            <a:endParaRPr lang="en-US" sz="1000" dirty="0"/>
+          </a:p>
+        </p:txBody>
+      </p:sp>
+      <p:sp>
+        <p:nvSpPr>
+          <p:cNvPr id="3" name="Text 1"/>
+          <p:cNvSpPr txBox="1"/>
+          <p:nvPr/>
+        </p:nvSpPr>
+        <p:spPr>
+          <a:xfrm>
+            <a:off x="548640" y="320040"/>
+            <a:ext cx="9601200" cy="685800"/>
+          </a:xfrm>
+          <a:prstGeom prst="rect">
+            <a:avLst/>
+          </a:prstGeom>
+          <a:noFill/>
+          <a:ln/>
+        </p:spPr>
+        <p:txBody>
+          <a:bodyPr wrap="square" lIns="0" tIns="0" rIns="0" bIns="0" rtlCol="0" anchor="ctr"/>
+          <a:lstStyle/>
+          <a:p>
+            <a:pPr marL="0" indent="0">
+              <a:buNone/>
+            </a:pPr>
+            <a:r>
+              <a:rPr lang="en-US" sz="2800" b="1" dirty="0">
+                <a:solidFill>
+                  <a:srgbClr val="1D2F82"/>
+                </a:solidFill>
+                <a:latin typeface="Calibri" pitchFamily="34" charset="0"/>
+                <a:ea typeface="Calibri" pitchFamily="34" charset="-122"/>
+                <a:cs typeface="Calibri" pitchFamily="34" charset="-120"/>
+              </a:rPr>
+              <a:t>Problem Statement &amp; Background</a:t>
+            </a:r>
+            <a:endParaRPr lang="en-US" sz="2800" dirty="0"/>
+          </a:p>
+        </p:txBody>
+      </p:sp>
+      <p:pic>
+        <p:nvPicPr>
+          <p:cNvPr id="4" name="Image 0" descr="logo.png"/>
+          <p:cNvPicPr>
+            <a:picLocks noChangeAspect="1"/>
+          </p:cNvPicPr>
+          <p:nvPr/>
+        </p:nvPicPr>
+        <p:blipFill>
+          <a:blip r:embed="rId3"/>
+          <a:stretch>
+            <a:fillRect/>
+          </a:stretch>
+        </p:blipFill>
+        <p:spPr>
+          <a:xfrm>
+            <a:off x="10362895" y="320040"/>
+            <a:ext cx="1371600" cy="518746"/>
+          </a:xfrm>
+          <a:prstGeom prst="rect">
+            <a:avLst/>
+          </a:prstGeom>
+        </p:spPr>
+      </p:pic>
+      <p:sp>
+        <p:nvSpPr>
+          <p:cNvPr id="5" name="Text 2"/>
+          <p:cNvSpPr txBox="1"/>
+          <p:nvPr/>
+        </p:nvSpPr>
+        <p:spPr>
+          <a:xfrm>
+            <a:off x="640080" y="1325880"/>
+            <a:ext cx="10881360" cy="4937760"/>
+          </a:xfrm>
+          <a:prstGeom prst="rect">
+            <a:avLst/>
+          </a:prstGeom>
+          <a:noFill/>
+          <a:ln/>
+        </p:spPr>
+        <p:txBody>
+          <a:bodyPr wrap="square" lIns="0" tIns="0" rIns="0" bIns="0" rtlCol="0" anchor="t"/>
+          <a:lstStyle/>
+          <a:p>
+            <a:pPr marL="177800" indent="-177800">
+              <a:spcAft>
+                <a:spcPts val="800"/>
+              </a:spcAft>
+              <a:buSzPct val="100000"/>
+              <a:buChar char="•"/>
+            </a:pPr>
+            <a:r>
+              <a:rPr lang="en-US" sz="1600" dirty="0">
+                <a:solidFill>
+                  <a:srgbClr val="000000"/>
+                </a:solidFill>
+                <a:latin typeface="Calibri" pitchFamily="34" charset="0"/>
+                <a:ea typeface="Calibri" pitchFamily="34" charset="-122"/>
+                <a:cs typeface="Calibri" pitchFamily="34" charset="-120"/>
+              </a:rPr>
+              <a:t>Problem Statement:</a:t>
+            </a:r>
+            <a:endParaRPr lang="en-US" sz="1600" dirty="0"/>
+          </a:p>
+          <a:p>
+            <a:pPr marL="177800" indent="-177800">
+              <a:spcAft>
+                <a:spcPts val="800"/>
+              </a:spcAft>
+              <a:buSzPct val="100000"/>
+              <a:buChar char="•"/>
+            </a:pPr>
+            <a:r>
+              <a:rPr lang="en-US" sz="1600" dirty="0">
+                <a:solidFill>
+                  <a:srgbClr val="000000"/>
+                </a:solidFill>
+                <a:latin typeface="Calibri" pitchFamily="34" charset="0"/>
+                <a:ea typeface="Calibri" pitchFamily="34" charset="-122"/>
+                <a:cs typeface="Calibri" pitchFamily="34" charset="-120"/>
+              </a:rPr>
+              <a:t>Background &amp; Significance:</a:t>
+            </a:r>
+            <a:endParaRPr lang="en-US" sz="1600" dirty="0"/>
+          </a:p>
+          <a:p>
+            <a:pPr marL="177800" indent="-177800">
+              <a:spcAft>
+                <a:spcPts val="800"/>
+              </a:spcAft>
+              <a:buSzPct val="100000"/>
+              <a:buChar char="•"/>
+            </a:pPr>
+            <a:r>
+              <a:rPr lang="en-US" sz="1600" dirty="0">
+                <a:solidFill>
+                  <a:srgbClr val="000000"/>
+                </a:solidFill>
+                <a:latin typeface="Calibri" pitchFamily="34" charset="0"/>
+                <a:ea typeface="Calibri" pitchFamily="34" charset="-122"/>
+                <a:cs typeface="Calibri" pitchFamily="34" charset="-120"/>
+              </a:rPr>
+              <a:t>Existing Solutions:</a:t>
+            </a:r>
+            <a:endParaRPr lang="en-US" sz="1600" dirty="0"/>
+          </a:p>
+          <a:p>
+            <a:pPr marL="177800" indent="-177800">
+              <a:spcAft>
+                <a:spcPts val="800"/>
+              </a:spcAft>
+              <a:buSzPct val="100000"/>
+              <a:buChar char="•"/>
+            </a:pPr>
+            <a:r>
+              <a:rPr lang="en-US" sz="1600" dirty="0">
+                <a:solidFill>
+                  <a:srgbClr val="000000"/>
+                </a:solidFill>
+                <a:latin typeface="Calibri" pitchFamily="34" charset="0"/>
+                <a:ea typeface="Calibri" pitchFamily="34" charset="-122"/>
+                <a:cs typeface="Calibri" pitchFamily="34" charset="-120"/>
+              </a:rPr>
+              <a:t>Limitations / Research Gap:</a:t>
+            </a:r>
+            <a:endParaRPr lang="en-US" sz="1600" dirty="0"/>
+          </a:p>
+        </p:txBody>
+      </p:sp>
+    </p:spTree>
+  </p:cSld>
+  <p:clrMapOvr>
+    <a:masterClrMapping/>
+  </p:clrMapOvr>
+</p:sld>
+</file>
+
+<file path=ppt/slides/slide18.xml><?xml version="1.0" encoding="utf-8"?>
+<p:sld xmlns:a="http://schemas.openxmlformats.org/drawingml/2006/main" xmlns:r="http://schemas.openxmlformats.org/officeDocument/2006/relationships" xmlns:p="http://schemas.openxmlformats.org/presentationml/2006/main">
+  <p:cSld name="Slide 4">
+    <p:bg>
+      <p:bgPr>
+        <a:solidFill>
+          <a:srgbClr val="FFFFFF"/>
+        </a:solidFill>
+        <a:effectLst/>
+      </p:bgPr>
+    </p:bg>
+    <p:spTree>
+      <p:nvGrpSpPr>
+        <p:cNvPr id="1" name=""/>
+        <p:cNvGrpSpPr/>
+        <p:nvPr/>
+      </p:nvGrpSpPr>
+      <p:grpSpPr>
+        <a:xfrm>
+          <a:off x="0" y="0"/>
+          <a:ext cx="0" cy="0"/>
+          <a:chOff x="0" y="0"/>
+          <a:chExt cx="0" cy="0"/>
+        </a:xfrm>
+      </p:grpSpPr>
+      <p:sp>
+        <p:nvSpPr>
+          <p:cNvPr id="2" name="Text 0"/>
+          <p:cNvSpPr txBox="1"/>
+          <p:nvPr/>
+        </p:nvSpPr>
+        <p:spPr>
+          <a:xfrm>
+            <a:off x="11460175" y="6446520"/>
+            <a:ext cx="457200" cy="274320"/>
+          </a:xfrm>
+          <a:prstGeom prst="rect">
+            <a:avLst/>
+          </a:prstGeom>
+          <a:noFill/>
+          <a:ln/>
+        </p:spPr>
+        <p:txBody>
+          <a:bodyPr wrap="square" lIns="0" tIns="0" rIns="0" bIns="0" rtlCol="0" anchor="ctr"/>
+          <a:lstStyle/>
+          <a:p>
+            <a:pPr marL="0" indent="0" algn="r">
+              <a:buNone/>
+            </a:pPr>
+            <a:r>
+              <a:rPr lang="en-US" sz="1000" dirty="0">
+                <a:solidFill>
+                  <a:srgbClr val="808080"/>
+                </a:solidFill>
+                <a:latin typeface="Calibri" pitchFamily="34" charset="0"/>
+                <a:ea typeface="Calibri" pitchFamily="34" charset="-122"/>
+                <a:cs typeface="Calibri" pitchFamily="34" charset="-120"/>
+              </a:rPr>
+              <a:t>4</a:t>
+            </a:r>
+            <a:endParaRPr lang="en-US" sz="1000" dirty="0"/>
+          </a:p>
+        </p:txBody>
+      </p:sp>
+      <p:sp>
+        <p:nvSpPr>
+          <p:cNvPr id="3" name="Text 1"/>
+          <p:cNvSpPr txBox="1"/>
+          <p:nvPr/>
+        </p:nvSpPr>
+        <p:spPr>
+          <a:xfrm>
+            <a:off x="548640" y="320040"/>
+            <a:ext cx="9601200" cy="685800"/>
+          </a:xfrm>
+          <a:prstGeom prst="rect">
+            <a:avLst/>
+          </a:prstGeom>
+          <a:noFill/>
+          <a:ln/>
+        </p:spPr>
+        <p:txBody>
+          <a:bodyPr wrap="square" lIns="0" tIns="0" rIns="0" bIns="0" rtlCol="0" anchor="ctr"/>
+          <a:lstStyle/>
+          <a:p>
+            <a:pPr marL="0" indent="0">
+              <a:buNone/>
+            </a:pPr>
+            <a:r>
+              <a:rPr lang="en-US" sz="2800" b="1" dirty="0">
+                <a:solidFill>
+                  <a:srgbClr val="1D2F82"/>
+                </a:solidFill>
+                <a:latin typeface="Calibri" pitchFamily="34" charset="0"/>
+                <a:ea typeface="Calibri" pitchFamily="34" charset="-122"/>
+                <a:cs typeface="Calibri" pitchFamily="34" charset="-120"/>
+              </a:rPr>
+              <a:t>Problem Statement &amp; Background</a:t>
+            </a:r>
+            <a:endParaRPr lang="en-US" sz="2800" dirty="0"/>
+          </a:p>
+        </p:txBody>
+      </p:sp>
+      <p:pic>
+        <p:nvPicPr>
+          <p:cNvPr id="4" name="Image 0" descr="logo.png"/>
+          <p:cNvPicPr>
+            <a:picLocks noChangeAspect="1"/>
+          </p:cNvPicPr>
+          <p:nvPr/>
+        </p:nvPicPr>
+        <p:blipFill>
+          <a:blip r:embed="rId3"/>
+          <a:stretch>
+            <a:fillRect/>
+          </a:stretch>
+        </p:blipFill>
+        <p:spPr>
+          <a:xfrm>
+            <a:off x="10362895" y="320040"/>
+            <a:ext cx="1371600" cy="518746"/>
+          </a:xfrm>
+          <a:prstGeom prst="rect">
+            <a:avLst/>
+          </a:prstGeom>
+        </p:spPr>
+      </p:pic>
+      <p:sp>
+        <p:nvSpPr>
+          <p:cNvPr id="5" name="Text 2"/>
+          <p:cNvSpPr txBox="1"/>
+          <p:nvPr/>
+        </p:nvSpPr>
+        <p:spPr>
+          <a:xfrm>
+            <a:off x="640080" y="1325880"/>
+            <a:ext cx="10881360" cy="4937760"/>
+          </a:xfrm>
+          <a:prstGeom prst="rect">
+            <a:avLst/>
+          </a:prstGeom>
+          <a:noFill/>
+          <a:ln/>
+        </p:spPr>
+        <p:txBody>
+          <a:bodyPr wrap="square" lIns="0" tIns="0" rIns="0" bIns="0" rtlCol="0" anchor="t"/>
+          <a:lstStyle/>
+          <a:p>
+            <a:pPr marL="177800" indent="-177800">
+              <a:spcAft>
+                <a:spcPts val="800"/>
+              </a:spcAft>
+              <a:buSzPct val="100000"/>
+              <a:buChar char="•"/>
+            </a:pPr>
+            <a:r>
+              <a:rPr lang="en-US" sz="1600" dirty="0">
+                <a:solidFill>
+                  <a:srgbClr val="000000"/>
+                </a:solidFill>
+                <a:latin typeface="Calibri" pitchFamily="34" charset="0"/>
+                <a:ea typeface="Calibri" pitchFamily="34" charset="-122"/>
+                <a:cs typeface="Calibri" pitchFamily="34" charset="-120"/>
+              </a:rPr>
+              <a:t>Problem Statement:</a:t>
+            </a:r>
+            <a:endParaRPr lang="en-US" sz="1600" dirty="0"/>
+          </a:p>
+          <a:p>
+            <a:pPr marL="177800" indent="-177800">
+              <a:spcAft>
+                <a:spcPts val="800"/>
+              </a:spcAft>
+              <a:buSzPct val="100000"/>
+              <a:buChar char="•"/>
+            </a:pPr>
+            <a:r>
+              <a:rPr lang="en-US" sz="1600" dirty="0">
+                <a:solidFill>
+                  <a:srgbClr val="000000"/>
+                </a:solidFill>
+                <a:latin typeface="Calibri" pitchFamily="34" charset="0"/>
+                <a:ea typeface="Calibri" pitchFamily="34" charset="-122"/>
+                <a:cs typeface="Calibri" pitchFamily="34" charset="-120"/>
+              </a:rPr>
+              <a:t>Background &amp; Significance:</a:t>
+            </a:r>
+            <a:endParaRPr lang="en-US" sz="1600" dirty="0"/>
+          </a:p>
+          <a:p>
+            <a:pPr marL="177800" indent="-177800">
+              <a:spcAft>
+                <a:spcPts val="800"/>
+              </a:spcAft>
+              <a:buSzPct val="100000"/>
+              <a:buChar char="•"/>
+            </a:pPr>
+            <a:r>
+              <a:rPr lang="en-US" sz="1600" dirty="0">
+                <a:solidFill>
+                  <a:srgbClr val="000000"/>
+                </a:solidFill>
+                <a:latin typeface="Calibri" pitchFamily="34" charset="0"/>
+                <a:ea typeface="Calibri" pitchFamily="34" charset="-122"/>
+                <a:cs typeface="Calibri" pitchFamily="34" charset="-120"/>
+              </a:rPr>
+              <a:t>Existing Solutions:</a:t>
+            </a:r>
+            <a:endParaRPr lang="en-US" sz="1600" dirty="0"/>
+          </a:p>
+          <a:p>
+            <a:pPr marL="177800" indent="-177800">
+              <a:spcAft>
+                <a:spcPts val="800"/>
+              </a:spcAft>
+              <a:buSzPct val="100000"/>
+              <a:buChar char="•"/>
+            </a:pPr>
+            <a:r>
+              <a:rPr lang="en-US" sz="1600" dirty="0">
+                <a:solidFill>
+                  <a:srgbClr val="000000"/>
+                </a:solidFill>
+                <a:latin typeface="Calibri" pitchFamily="34" charset="0"/>
+                <a:ea typeface="Calibri" pitchFamily="34" charset="-122"/>
+                <a:cs typeface="Calibri" pitchFamily="34" charset="-120"/>
+              </a:rPr>
+              <a:t>Limitations / Research Gap:</a:t>
+            </a:r>
+            <a:endParaRPr lang="en-US" sz="1600" dirty="0"/>
+          </a:p>
+        </p:txBody>
+      </p:sp>
+    </p:spTree>
+  </p:cSld>
+  <p:clrMapOvr>
+    <a:masterClrMapping/>
+  </p:clrMapOvr>
+</p:sld>
+</file>
+
+<file path=ppt/slides/slide19.xml><?xml version="1.0" encoding="utf-8"?>
+<p:sld xmlns:a="http://schemas.openxmlformats.org/drawingml/2006/main" xmlns:r="http://schemas.openxmlformats.org/officeDocument/2006/relationships" xmlns:p="http://schemas.openxmlformats.org/presentationml/2006/main">
+  <p:cSld name="Slide 9">
+    <p:bg>
+      <p:bgPr>
+        <a:solidFill>
+          <a:srgbClr val="FFFFFF"/>
+        </a:solidFill>
+        <a:effectLst/>
+      </p:bgPr>
+    </p:bg>
+    <p:spTree>
+      <p:nvGrpSpPr>
+        <p:cNvPr id="1" name=""/>
+        <p:cNvGrpSpPr/>
+        <p:nvPr/>
+      </p:nvGrpSpPr>
+      <p:grpSpPr>
+        <a:xfrm>
+          <a:off x="0" y="0"/>
+          <a:ext cx="0" cy="0"/>
+          <a:chOff x="0" y="0"/>
+          <a:chExt cx="0" cy="0"/>
+        </a:xfrm>
+      </p:grpSpPr>
+      <p:sp>
+        <p:nvSpPr>
+          <p:cNvPr id="2" name="Text 0"/>
+          <p:cNvSpPr txBox="1"/>
+          <p:nvPr/>
+        </p:nvSpPr>
+        <p:spPr>
+          <a:xfrm>
+            <a:off x="11460175" y="6446520"/>
+            <a:ext cx="457200" cy="274320"/>
+          </a:xfrm>
+          <a:prstGeom prst="rect">
+            <a:avLst/>
+          </a:prstGeom>
+          <a:noFill/>
+          <a:ln/>
+        </p:spPr>
+        <p:txBody>
+          <a:bodyPr wrap="square" lIns="0" tIns="0" rIns="0" bIns="0" rtlCol="0" anchor="ctr"/>
+          <a:lstStyle/>
+          <a:p>
+            <a:pPr marL="0" indent="0" algn="r">
+              <a:buNone/>
+            </a:pPr>
+            <a:r>
+              <a:rPr lang="en-US" sz="1000" dirty="0">
+                <a:solidFill>
+                  <a:srgbClr val="808080"/>
+                </a:solidFill>
+                <a:latin typeface="Calibri" pitchFamily="34" charset="0"/>
+                <a:ea typeface="Calibri" pitchFamily="34" charset="-122"/>
+                <a:cs typeface="Calibri" pitchFamily="34" charset="-120"/>
+              </a:rPr>
+              <a:t>9</a:t>
+            </a:r>
+            <a:endParaRPr lang="en-US" sz="1000" dirty="0"/>
+          </a:p>
+        </p:txBody>
+      </p:sp>
+      <p:sp>
+        <p:nvSpPr>
+          <p:cNvPr id="3" name="Text 1"/>
+          <p:cNvSpPr txBox="1"/>
+          <p:nvPr/>
+        </p:nvSpPr>
+        <p:spPr>
+          <a:xfrm>
+            <a:off x="548640" y="320040"/>
+            <a:ext cx="9601200" cy="685800"/>
+          </a:xfrm>
+          <a:prstGeom prst="rect">
+            <a:avLst/>
+          </a:prstGeom>
+          <a:noFill/>
+          <a:ln/>
+        </p:spPr>
+        <p:txBody>
+          <a:bodyPr wrap="square" lIns="0" tIns="0" rIns="0" bIns="0" rtlCol="0" anchor="ctr"/>
+          <a:lstStyle/>
+          <a:p>
+            <a:pPr marL="0" indent="0">
+              <a:buNone/>
+            </a:pPr>
+            <a:r>
+              <a:rPr lang="en-US" sz="2800" b="1" dirty="0">
+                <a:solidFill>
+                  <a:srgbClr val="1D2F82"/>
+                </a:solidFill>
+                <a:latin typeface="Calibri" pitchFamily="34" charset="0"/>
+                <a:ea typeface="Calibri" pitchFamily="34" charset="-122"/>
+                <a:cs typeface="Calibri" pitchFamily="34" charset="-120"/>
+              </a:rPr>
+              <a:t>Results (contd.)</a:t>
+            </a:r>
+            <a:endParaRPr lang="en-US" sz="2800" dirty="0"/>
+          </a:p>
+        </p:txBody>
+      </p:sp>
+      <p:pic>
+        <p:nvPicPr>
+          <p:cNvPr id="4" name="Image 0" descr="logo.png"/>
+          <p:cNvPicPr>
+            <a:picLocks noChangeAspect="1"/>
+          </p:cNvPicPr>
+          <p:nvPr/>
+        </p:nvPicPr>
+        <p:blipFill>
+          <a:blip r:embed="rId3"/>
+          <a:stretch>
+            <a:fillRect/>
+          </a:stretch>
+        </p:blipFill>
+        <p:spPr>
+          <a:xfrm>
+            <a:off x="10362895" y="320040"/>
+            <a:ext cx="1371600" cy="518746"/>
+          </a:xfrm>
+          <a:prstGeom prst="rect">
+            <a:avLst/>
+          </a:prstGeom>
+        </p:spPr>
+      </p:pic>
+    </p:spTree>
+  </p:cSld>
+  <p:clrMapOvr>
+    <a:masterClrMapping/>
+  </p:clrMapOvr>
+</p:sld>
+</file>
+
 <file path=ppt/slides/slide2.xml><?xml version="1.0" encoding="utf-8"?>
 <p:sld xmlns:a="http://schemas.openxmlformats.org/drawingml/2006/main" xmlns:r="http://schemas.openxmlformats.org/officeDocument/2006/relationships" xmlns:p="http://schemas.openxmlformats.org/presentationml/2006/main">
   <p:cSld name="Slide 2">
@@ -5912,6 +6534,276 @@
           </a:p>
         </p:txBody>
       </p:sp>
+    </p:spTree>
+  </p:cSld>
+  <p:clrMapOvr>
+    <a:masterClrMapping/>
+  </p:clrMapOvr>
+</p:sld>
+</file>
+
+<file path=ppt/slides/slide20.xml><?xml version="1.0" encoding="utf-8"?>
+<p:sld xmlns:a="http://schemas.openxmlformats.org/drawingml/2006/main" xmlns:r="http://schemas.openxmlformats.org/officeDocument/2006/relationships" xmlns:p="http://schemas.openxmlformats.org/presentationml/2006/main">
+  <p:cSld name="Slide 9">
+    <p:bg>
+      <p:bgPr>
+        <a:solidFill>
+          <a:srgbClr val="FFFFFF"/>
+        </a:solidFill>
+        <a:effectLst/>
+      </p:bgPr>
+    </p:bg>
+    <p:spTree>
+      <p:nvGrpSpPr>
+        <p:cNvPr id="1" name=""/>
+        <p:cNvGrpSpPr/>
+        <p:nvPr/>
+      </p:nvGrpSpPr>
+      <p:grpSpPr>
+        <a:xfrm>
+          <a:off x="0" y="0"/>
+          <a:ext cx="0" cy="0"/>
+          <a:chOff x="0" y="0"/>
+          <a:chExt cx="0" cy="0"/>
+        </a:xfrm>
+      </p:grpSpPr>
+      <p:sp>
+        <p:nvSpPr>
+          <p:cNvPr id="2" name="Text 0"/>
+          <p:cNvSpPr txBox="1"/>
+          <p:nvPr/>
+        </p:nvSpPr>
+        <p:spPr>
+          <a:xfrm>
+            <a:off x="11460175" y="6446520"/>
+            <a:ext cx="457200" cy="274320"/>
+          </a:xfrm>
+          <a:prstGeom prst="rect">
+            <a:avLst/>
+          </a:prstGeom>
+          <a:noFill/>
+          <a:ln/>
+        </p:spPr>
+        <p:txBody>
+          <a:bodyPr wrap="square" lIns="0" tIns="0" rIns="0" bIns="0" rtlCol="0" anchor="ctr"/>
+          <a:lstStyle/>
+          <a:p>
+            <a:pPr marL="0" indent="0" algn="r">
+              <a:buNone/>
+            </a:pPr>
+            <a:r>
+              <a:rPr lang="en-US" sz="1000" dirty="0">
+                <a:solidFill>
+                  <a:srgbClr val="808080"/>
+                </a:solidFill>
+                <a:latin typeface="Calibri" pitchFamily="34" charset="0"/>
+                <a:ea typeface="Calibri" pitchFamily="34" charset="-122"/>
+                <a:cs typeface="Calibri" pitchFamily="34" charset="-120"/>
+              </a:rPr>
+              <a:t>9</a:t>
+            </a:r>
+            <a:endParaRPr lang="en-US" sz="1000" dirty="0"/>
+          </a:p>
+        </p:txBody>
+      </p:sp>
+      <p:sp>
+        <p:nvSpPr>
+          <p:cNvPr id="3" name="Text 1"/>
+          <p:cNvSpPr txBox="1"/>
+          <p:nvPr/>
+        </p:nvSpPr>
+        <p:spPr>
+          <a:xfrm>
+            <a:off x="548640" y="320040"/>
+            <a:ext cx="9601200" cy="685800"/>
+          </a:xfrm>
+          <a:prstGeom prst="rect">
+            <a:avLst/>
+          </a:prstGeom>
+          <a:noFill/>
+          <a:ln/>
+        </p:spPr>
+        <p:txBody>
+          <a:bodyPr wrap="square" lIns="0" tIns="0" rIns="0" bIns="0" rtlCol="0" anchor="ctr"/>
+          <a:lstStyle/>
+          <a:p>
+            <a:pPr marL="0" indent="0">
+              <a:buNone/>
+            </a:pPr>
+            <a:r>
+              <a:rPr lang="en-US" sz="2800" b="1" dirty="0">
+                <a:solidFill>
+                  <a:srgbClr val="1D2F82"/>
+                </a:solidFill>
+                <a:latin typeface="Calibri" pitchFamily="34" charset="0"/>
+                <a:ea typeface="Calibri" pitchFamily="34" charset="-122"/>
+                <a:cs typeface="Calibri" pitchFamily="34" charset="-120"/>
+              </a:rPr>
+              <a:t>Results (contd.)</a:t>
+            </a:r>
+            <a:endParaRPr lang="en-US" sz="2800" dirty="0"/>
+          </a:p>
+        </p:txBody>
+      </p:sp>
+      <p:pic>
+        <p:nvPicPr>
+          <p:cNvPr id="4" name="Image 0" descr="logo.png"/>
+          <p:cNvPicPr>
+            <a:picLocks noChangeAspect="1"/>
+          </p:cNvPicPr>
+          <p:nvPr/>
+        </p:nvPicPr>
+        <p:blipFill>
+          <a:blip r:embed="rId3"/>
+          <a:stretch>
+            <a:fillRect/>
+          </a:stretch>
+        </p:blipFill>
+        <p:spPr>
+          <a:xfrm>
+            <a:off x="10362895" y="320040"/>
+            <a:ext cx="1371600" cy="518746"/>
+          </a:xfrm>
+          <a:prstGeom prst="rect">
+            <a:avLst/>
+          </a:prstGeom>
+        </p:spPr>
+      </p:pic>
+    </p:spTree>
+  </p:cSld>
+  <p:clrMapOvr>
+    <a:masterClrMapping/>
+  </p:clrMapOvr>
+</p:sld>
+</file>
+
+<file path=ppt/slides/slide21.xml><?xml version="1.0" encoding="utf-8"?>
+<p:sld xmlns:a="http://schemas.openxmlformats.org/drawingml/2006/main" xmlns:r="http://schemas.openxmlformats.org/officeDocument/2006/relationships" xmlns:p="http://schemas.openxmlformats.org/presentationml/2006/main">
+  <p:cSld name="Slide 9">
+    <p:bg>
+      <p:bgPr>
+        <a:solidFill>
+          <a:srgbClr val="FFFFFF"/>
+        </a:solidFill>
+        <a:effectLst/>
+      </p:bgPr>
+    </p:bg>
+    <p:spTree>
+      <p:nvGrpSpPr>
+        <p:cNvPr id="1" name=""/>
+        <p:cNvGrpSpPr/>
+        <p:nvPr/>
+      </p:nvGrpSpPr>
+      <p:grpSpPr>
+        <a:xfrm>
+          <a:off x="0" y="0"/>
+          <a:ext cx="0" cy="0"/>
+          <a:chOff x="0" y="0"/>
+          <a:chExt cx="0" cy="0"/>
+        </a:xfrm>
+      </p:grpSpPr>
+      <p:sp>
+        <p:nvSpPr>
+          <p:cNvPr id="2" name="Text 0"/>
+          <p:cNvSpPr txBox="1"/>
+          <p:nvPr/>
+        </p:nvSpPr>
+        <p:spPr>
+          <a:xfrm>
+            <a:off x="11460175" y="6446520"/>
+            <a:ext cx="457200" cy="274320"/>
+          </a:xfrm>
+          <a:prstGeom prst="rect">
+            <a:avLst/>
+          </a:prstGeom>
+          <a:noFill/>
+          <a:ln/>
+        </p:spPr>
+        <p:txBody>
+          <a:bodyPr wrap="square" lIns="0" tIns="0" rIns="0" bIns="0" rtlCol="0" anchor="ctr"/>
+          <a:lstStyle/>
+          <a:p>
+            <a:pPr marL="0" indent="0" algn="r">
+              <a:buNone/>
+            </a:pPr>
+            <a:r>
+              <a:rPr lang="en-US" sz="1000" dirty="0">
+                <a:solidFill>
+                  <a:srgbClr val="808080"/>
+                </a:solidFill>
+                <a:latin typeface="Calibri" pitchFamily="34" charset="0"/>
+                <a:ea typeface="Calibri" pitchFamily="34" charset="-122"/>
+                <a:cs typeface="Calibri" pitchFamily="34" charset="-120"/>
+              </a:rPr>
+              <a:t>9</a:t>
+            </a:r>
+            <a:endParaRPr lang="en-US" sz="1000" dirty="0"/>
+          </a:p>
+        </p:txBody>
+      </p:sp>
+      <p:sp>
+        <p:nvSpPr>
+          <p:cNvPr id="3" name="Text 1"/>
+          <p:cNvSpPr txBox="1"/>
+          <p:nvPr/>
+        </p:nvSpPr>
+        <p:spPr>
+          <a:xfrm>
+            <a:off x="548640" y="320040"/>
+            <a:ext cx="9601200" cy="685800"/>
+          </a:xfrm>
+          <a:prstGeom prst="rect">
+            <a:avLst/>
+          </a:prstGeom>
+          <a:noFill/>
+          <a:ln/>
+        </p:spPr>
+        <p:txBody>
+          <a:bodyPr wrap="square" lIns="0" tIns="0" rIns="0" bIns="0" rtlCol="0" anchor="ctr"/>
+          <a:lstStyle/>
+          <a:p>
+            <a:pPr marL="0" indent="0">
+              <a:buNone/>
+            </a:pPr>
+            <a:r>
+              <a:rPr lang="en-US" sz="2800" b="1" dirty="0">
+                <a:solidFill>
+                  <a:srgbClr val="1D2F82"/>
+                </a:solidFill>
+                <a:latin typeface="Calibri" pitchFamily="34" charset="0"/>
+                <a:ea typeface="Calibri" pitchFamily="34" charset="-122"/>
+                <a:cs typeface="Calibri" pitchFamily="34" charset="-120"/>
+              </a:rPr>
+              <a:t>Results (contd.)</a:t>
+            </a:r>
+            <a:endParaRPr lang="en-US" sz="2800" dirty="0"/>
+          </a:p>
+        </p:txBody>
+      </p:sp>
+      <p:pic>
+        <p:nvPicPr>
+          <p:cNvPr id="4" name="Image 0" descr="logo.png"/>
+          <p:cNvPicPr>
+            <a:picLocks noChangeAspect="1"/>
+          </p:cNvPicPr>
+          <p:nvPr/>
+        </p:nvPicPr>
+        <p:blipFill>
+          <a:blip r:embed="rId3"/>
+          <a:stretch>
+            <a:fillRect/>
+          </a:stretch>
+        </p:blipFill>
+        <p:spPr>
+          <a:xfrm>
+            <a:off x="10362895" y="320040"/>
+            <a:ext cx="1371600" cy="518746"/>
+          </a:xfrm>
+          <a:prstGeom prst="rect">
+            <a:avLst/>
+          </a:prstGeom>
+        </p:spPr>
+      </p:pic>
     </p:spTree>
   </p:cSld>
   <p:clrMapOvr>

--- a/review/template_ext.pptx
+++ b/review/template_ext.pptx
@@ -1572,7 +1572,7 @@
         <p:spPr>
           <a:xfrm>
             <a:off x="548640" y="320040"/>
-            <a:ext cx="9601200" cy="685800"/>
+            <a:ext cx="9601200" cy="914400"/>
           </a:xfrm>
           <a:prstGeom prst="rect">
             <a:avLst/>
@@ -1635,7 +1635,7 @@
         <p:spPr>
           <a:xfrm>
             <a:off x="640080" y="1554480"/>
-            <a:ext cx="10881360" cy="4937760"/>
+            <a:ext cx="10881360" cy="4828032"/>
           </a:xfrm>
           <a:prstGeom prst="rect">
             <a:avLst/>
@@ -1742,7 +1742,7 @@
 
 <file path=ppt/slides/slide10.xml><?xml version="1.0" encoding="utf-8"?>
 <p:sld xmlns:a="http://schemas.openxmlformats.org/drawingml/2006/main" xmlns:r="http://schemas.openxmlformats.org/officeDocument/2006/relationships" xmlns:p="http://schemas.openxmlformats.org/presentationml/2006/main">
-  <p:cSld name="Slide 10">
+  <p:cSld name="Slide 4">
     <p:bg>
       <p:bgPr>
         <a:solidFill>
@@ -1798,7 +1798,7 @@
                 <a:ea typeface="Calibri" pitchFamily="34" charset="-122"/>
                 <a:cs typeface="Calibri" pitchFamily="34" charset="-120"/>
               </a:rPr>
-              <a:t>10</a:t>
+              <a:t>4</a:t>
             </a:r>
             <a:endParaRPr lang="en-US" sz="1000" dirty="0"/>
           </a:p>
@@ -1837,7 +1837,7 @@
                 <a:ea typeface="Calibri" pitchFamily="34" charset="-122"/>
                 <a:cs typeface="Calibri" pitchFamily="34" charset="-120"/>
               </a:rPr>
-              <a:t>References</a:t>
+              <a:t>Problem Statement &amp; Background</a:t>
             </a:r>
             <a:endParaRPr lang="en-US" sz="2800" dirty="0"/>
           </a:p>
@@ -1904,6 +1904,2507 @@
                 <a:ea typeface="Calibri" pitchFamily="34" charset="-122"/>
                 <a:cs typeface="Calibri" pitchFamily="34" charset="-120"/>
               </a:rPr>
+              <a:t>Problem Statement:</a:t>
+            </a:r>
+            <a:endParaRPr lang="en-US" sz="1600" dirty="0"/>
+          </a:p>
+          <a:p>
+            <a:pPr marL="177800" indent="-177800">
+              <a:spcAft>
+                <a:spcPts val="800"/>
+              </a:spcAft>
+              <a:buSzPct val="100000"/>
+              <a:buChar char="•"/>
+            </a:pPr>
+            <a:r>
+              <a:rPr lang="en-US" sz="1600" dirty="0">
+                <a:solidFill>
+                  <a:srgbClr val="000000"/>
+                </a:solidFill>
+                <a:latin typeface="Calibri" pitchFamily="34" charset="0"/>
+                <a:ea typeface="Calibri" pitchFamily="34" charset="-122"/>
+                <a:cs typeface="Calibri" pitchFamily="34" charset="-120"/>
+              </a:rPr>
+              <a:t>Background &amp; Significance:</a:t>
+            </a:r>
+            <a:endParaRPr lang="en-US" sz="1600" dirty="0"/>
+          </a:p>
+          <a:p>
+            <a:pPr marL="177800" indent="-177800">
+              <a:spcAft>
+                <a:spcPts val="800"/>
+              </a:spcAft>
+              <a:buSzPct val="100000"/>
+              <a:buChar char="•"/>
+            </a:pPr>
+            <a:r>
+              <a:rPr lang="en-US" sz="1600" dirty="0">
+                <a:solidFill>
+                  <a:srgbClr val="000000"/>
+                </a:solidFill>
+                <a:latin typeface="Calibri" pitchFamily="34" charset="0"/>
+                <a:ea typeface="Calibri" pitchFamily="34" charset="-122"/>
+                <a:cs typeface="Calibri" pitchFamily="34" charset="-120"/>
+              </a:rPr>
+              <a:t>Existing Solutions:</a:t>
+            </a:r>
+            <a:endParaRPr lang="en-US" sz="1600" dirty="0"/>
+          </a:p>
+          <a:p>
+            <a:pPr marL="177800" indent="-177800">
+              <a:spcAft>
+                <a:spcPts val="800"/>
+              </a:spcAft>
+              <a:buSzPct val="100000"/>
+              <a:buChar char="•"/>
+            </a:pPr>
+            <a:r>
+              <a:rPr lang="en-US" sz="1600" dirty="0">
+                <a:solidFill>
+                  <a:srgbClr val="000000"/>
+                </a:solidFill>
+                <a:latin typeface="Calibri" pitchFamily="34" charset="0"/>
+                <a:ea typeface="Calibri" pitchFamily="34" charset="-122"/>
+                <a:cs typeface="Calibri" pitchFamily="34" charset="-120"/>
+              </a:rPr>
+              <a:t>Limitations / Research Gap:</a:t>
+            </a:r>
+            <a:endParaRPr lang="en-US" sz="1600" dirty="0"/>
+          </a:p>
+        </p:txBody>
+      </p:sp>
+    </p:spTree>
+  </p:cSld>
+  <p:clrMapOvr>
+    <a:masterClrMapping/>
+  </p:clrMapOvr>
+</p:sld>
+</file>
+
+<file path=ppt/slides/slide11.xml><?xml version="1.0" encoding="utf-8"?>
+<p:sld xmlns:a="http://schemas.openxmlformats.org/drawingml/2006/main" xmlns:r="http://schemas.openxmlformats.org/officeDocument/2006/relationships" xmlns:p="http://schemas.openxmlformats.org/presentationml/2006/main">
+  <p:cSld name="Slide 4">
+    <p:bg>
+      <p:bgPr>
+        <a:solidFill>
+          <a:srgbClr val="FFFFFF"/>
+        </a:solidFill>
+        <a:effectLst/>
+      </p:bgPr>
+    </p:bg>
+    <p:spTree>
+      <p:nvGrpSpPr>
+        <p:cNvPr id="1" name=""/>
+        <p:cNvGrpSpPr/>
+        <p:nvPr/>
+      </p:nvGrpSpPr>
+      <p:grpSpPr>
+        <a:xfrm>
+          <a:off x="0" y="0"/>
+          <a:ext cx="0" cy="0"/>
+          <a:chOff x="0" y="0"/>
+          <a:chExt cx="0" cy="0"/>
+        </a:xfrm>
+      </p:grpSpPr>
+      <p:sp>
+        <p:nvSpPr>
+          <p:cNvPr id="2" name="Text 0"/>
+          <p:cNvSpPr txBox="1"/>
+          <p:nvPr/>
+        </p:nvSpPr>
+        <p:spPr>
+          <a:xfrm>
+            <a:off x="11460175" y="6446520"/>
+            <a:ext cx="457200" cy="274320"/>
+          </a:xfrm>
+          <a:prstGeom prst="rect">
+            <a:avLst/>
+          </a:prstGeom>
+          <a:noFill/>
+          <a:ln/>
+        </p:spPr>
+        <p:txBody>
+          <a:bodyPr wrap="square" lIns="0" tIns="0" rIns="0" bIns="0" rtlCol="0" anchor="ctr"/>
+          <a:lstStyle/>
+          <a:p>
+            <a:pPr marL="0" indent="0" algn="r">
+              <a:buNone/>
+            </a:pPr>
+            <a:r>
+              <a:rPr lang="en-US" sz="1000" dirty="0">
+                <a:solidFill>
+                  <a:srgbClr val="808080"/>
+                </a:solidFill>
+                <a:latin typeface="Calibri" pitchFamily="34" charset="0"/>
+                <a:ea typeface="Calibri" pitchFamily="34" charset="-122"/>
+                <a:cs typeface="Calibri" pitchFamily="34" charset="-120"/>
+              </a:rPr>
+              <a:t>4</a:t>
+            </a:r>
+            <a:endParaRPr lang="en-US" sz="1000" dirty="0"/>
+          </a:p>
+        </p:txBody>
+      </p:sp>
+      <p:sp>
+        <p:nvSpPr>
+          <p:cNvPr id="3" name="Text 1"/>
+          <p:cNvSpPr txBox="1"/>
+          <p:nvPr/>
+        </p:nvSpPr>
+        <p:spPr>
+          <a:xfrm>
+            <a:off x="548640" y="320040"/>
+            <a:ext cx="9601200" cy="685800"/>
+          </a:xfrm>
+          <a:prstGeom prst="rect">
+            <a:avLst/>
+          </a:prstGeom>
+          <a:noFill/>
+          <a:ln/>
+        </p:spPr>
+        <p:txBody>
+          <a:bodyPr wrap="square" lIns="0" tIns="0" rIns="0" bIns="0" rtlCol="0" anchor="ctr"/>
+          <a:lstStyle/>
+          <a:p>
+            <a:pPr marL="0" indent="0">
+              <a:buNone/>
+            </a:pPr>
+            <a:r>
+              <a:rPr lang="en-US" sz="2800" b="1" dirty="0">
+                <a:solidFill>
+                  <a:srgbClr val="1D2F82"/>
+                </a:solidFill>
+                <a:latin typeface="Calibri" pitchFamily="34" charset="0"/>
+                <a:ea typeface="Calibri" pitchFamily="34" charset="-122"/>
+                <a:cs typeface="Calibri" pitchFamily="34" charset="-120"/>
+              </a:rPr>
+              <a:t>Problem Statement &amp; Background</a:t>
+            </a:r>
+            <a:endParaRPr lang="en-US" sz="2800" dirty="0"/>
+          </a:p>
+        </p:txBody>
+      </p:sp>
+      <p:pic>
+        <p:nvPicPr>
+          <p:cNvPr id="4" name="Image 0" descr="logo.png"/>
+          <p:cNvPicPr>
+            <a:picLocks noChangeAspect="1"/>
+          </p:cNvPicPr>
+          <p:nvPr/>
+        </p:nvPicPr>
+        <p:blipFill>
+          <a:blip r:embed="rId3"/>
+          <a:stretch>
+            <a:fillRect/>
+          </a:stretch>
+        </p:blipFill>
+        <p:spPr>
+          <a:xfrm>
+            <a:off x="10362895" y="320040"/>
+            <a:ext cx="1371600" cy="518746"/>
+          </a:xfrm>
+          <a:prstGeom prst="rect">
+            <a:avLst/>
+          </a:prstGeom>
+        </p:spPr>
+      </p:pic>
+      <p:sp>
+        <p:nvSpPr>
+          <p:cNvPr id="5" name="Text 2"/>
+          <p:cNvSpPr txBox="1"/>
+          <p:nvPr/>
+        </p:nvSpPr>
+        <p:spPr>
+          <a:xfrm>
+            <a:off x="640080" y="1325880"/>
+            <a:ext cx="10881360" cy="4937760"/>
+          </a:xfrm>
+          <a:prstGeom prst="rect">
+            <a:avLst/>
+          </a:prstGeom>
+          <a:noFill/>
+          <a:ln/>
+        </p:spPr>
+        <p:txBody>
+          <a:bodyPr wrap="square" lIns="0" tIns="0" rIns="0" bIns="0" rtlCol="0" anchor="t"/>
+          <a:lstStyle/>
+          <a:p>
+            <a:pPr marL="177800" indent="-177800">
+              <a:spcAft>
+                <a:spcPts val="800"/>
+              </a:spcAft>
+              <a:buSzPct val="100000"/>
+              <a:buChar char="•"/>
+            </a:pPr>
+            <a:r>
+              <a:rPr lang="en-US" sz="1600" dirty="0">
+                <a:solidFill>
+                  <a:srgbClr val="000000"/>
+                </a:solidFill>
+                <a:latin typeface="Calibri" pitchFamily="34" charset="0"/>
+                <a:ea typeface="Calibri" pitchFamily="34" charset="-122"/>
+                <a:cs typeface="Calibri" pitchFamily="34" charset="-120"/>
+              </a:rPr>
+              <a:t>Problem Statement:</a:t>
+            </a:r>
+            <a:endParaRPr lang="en-US" sz="1600" dirty="0"/>
+          </a:p>
+          <a:p>
+            <a:pPr marL="177800" indent="-177800">
+              <a:spcAft>
+                <a:spcPts val="800"/>
+              </a:spcAft>
+              <a:buSzPct val="100000"/>
+              <a:buChar char="•"/>
+            </a:pPr>
+            <a:r>
+              <a:rPr lang="en-US" sz="1600" dirty="0">
+                <a:solidFill>
+                  <a:srgbClr val="000000"/>
+                </a:solidFill>
+                <a:latin typeface="Calibri" pitchFamily="34" charset="0"/>
+                <a:ea typeface="Calibri" pitchFamily="34" charset="-122"/>
+                <a:cs typeface="Calibri" pitchFamily="34" charset="-120"/>
+              </a:rPr>
+              <a:t>Background &amp; Significance:</a:t>
+            </a:r>
+            <a:endParaRPr lang="en-US" sz="1600" dirty="0"/>
+          </a:p>
+          <a:p>
+            <a:pPr marL="177800" indent="-177800">
+              <a:spcAft>
+                <a:spcPts val="800"/>
+              </a:spcAft>
+              <a:buSzPct val="100000"/>
+              <a:buChar char="•"/>
+            </a:pPr>
+            <a:r>
+              <a:rPr lang="en-US" sz="1600" dirty="0">
+                <a:solidFill>
+                  <a:srgbClr val="000000"/>
+                </a:solidFill>
+                <a:latin typeface="Calibri" pitchFamily="34" charset="0"/>
+                <a:ea typeface="Calibri" pitchFamily="34" charset="-122"/>
+                <a:cs typeface="Calibri" pitchFamily="34" charset="-120"/>
+              </a:rPr>
+              <a:t>Existing Solutions:</a:t>
+            </a:r>
+            <a:endParaRPr lang="en-US" sz="1600" dirty="0"/>
+          </a:p>
+          <a:p>
+            <a:pPr marL="177800" indent="-177800">
+              <a:spcAft>
+                <a:spcPts val="800"/>
+              </a:spcAft>
+              <a:buSzPct val="100000"/>
+              <a:buChar char="•"/>
+            </a:pPr>
+            <a:r>
+              <a:rPr lang="en-US" sz="1600" dirty="0">
+                <a:solidFill>
+                  <a:srgbClr val="000000"/>
+                </a:solidFill>
+                <a:latin typeface="Calibri" pitchFamily="34" charset="0"/>
+                <a:ea typeface="Calibri" pitchFamily="34" charset="-122"/>
+                <a:cs typeface="Calibri" pitchFamily="34" charset="-120"/>
+              </a:rPr>
+              <a:t>Limitations / Research Gap:</a:t>
+            </a:r>
+            <a:endParaRPr lang="en-US" sz="1600" dirty="0"/>
+          </a:p>
+        </p:txBody>
+      </p:sp>
+    </p:spTree>
+  </p:cSld>
+  <p:clrMapOvr>
+    <a:masterClrMapping/>
+  </p:clrMapOvr>
+</p:sld>
+</file>
+
+<file path=ppt/slides/slide12.xml><?xml version="1.0" encoding="utf-8"?>
+<p:sld xmlns:a="http://schemas.openxmlformats.org/drawingml/2006/main" xmlns:r="http://schemas.openxmlformats.org/officeDocument/2006/relationships" xmlns:p="http://schemas.openxmlformats.org/presentationml/2006/main">
+  <p:cSld name="Slide 8">
+    <p:bg>
+      <p:bgPr>
+        <a:solidFill>
+          <a:srgbClr val="FFFFFF"/>
+        </a:solidFill>
+        <a:effectLst/>
+      </p:bgPr>
+    </p:bg>
+    <p:spTree>
+      <p:nvGrpSpPr>
+        <p:cNvPr id="1" name=""/>
+        <p:cNvGrpSpPr/>
+        <p:nvPr/>
+      </p:nvGrpSpPr>
+      <p:grpSpPr>
+        <a:xfrm>
+          <a:off x="0" y="0"/>
+          <a:ext cx="0" cy="0"/>
+          <a:chOff x="0" y="0"/>
+          <a:chExt cx="0" cy="0"/>
+        </a:xfrm>
+      </p:grpSpPr>
+      <p:sp>
+        <p:nvSpPr>
+          <p:cNvPr id="2" name="Text 0"/>
+          <p:cNvSpPr txBox="1"/>
+          <p:nvPr/>
+        </p:nvSpPr>
+        <p:spPr>
+          <a:xfrm>
+            <a:off x="11460175" y="6446520"/>
+            <a:ext cx="457200" cy="274320"/>
+          </a:xfrm>
+          <a:prstGeom prst="rect">
+            <a:avLst/>
+          </a:prstGeom>
+          <a:noFill/>
+          <a:ln/>
+        </p:spPr>
+        <p:txBody>
+          <a:bodyPr wrap="square" lIns="0" tIns="0" rIns="0" bIns="0" rtlCol="0" anchor="ctr"/>
+          <a:lstStyle/>
+          <a:p>
+            <a:pPr marL="0" indent="0" algn="r">
+              <a:buNone/>
+            </a:pPr>
+            <a:r>
+              <a:rPr lang="en-US" sz="1000" dirty="0">
+                <a:solidFill>
+                  <a:srgbClr val="808080"/>
+                </a:solidFill>
+                <a:latin typeface="Calibri" pitchFamily="34" charset="0"/>
+                <a:ea typeface="Calibri" pitchFamily="34" charset="-122"/>
+                <a:cs typeface="Calibri" pitchFamily="34" charset="-120"/>
+              </a:rPr>
+              <a:t>8</a:t>
+            </a:r>
+            <a:endParaRPr lang="en-US" sz="1000" dirty="0"/>
+          </a:p>
+        </p:txBody>
+      </p:sp>
+      <p:sp>
+        <p:nvSpPr>
+          <p:cNvPr id="3" name="Text 1"/>
+          <p:cNvSpPr txBox="1"/>
+          <p:nvPr/>
+        </p:nvSpPr>
+        <p:spPr>
+          <a:xfrm>
+            <a:off x="548640" y="320040"/>
+            <a:ext cx="9601200" cy="685800"/>
+          </a:xfrm>
+          <a:prstGeom prst="rect">
+            <a:avLst/>
+          </a:prstGeom>
+          <a:noFill/>
+          <a:ln/>
+        </p:spPr>
+        <p:txBody>
+          <a:bodyPr wrap="square" lIns="0" tIns="0" rIns="0" bIns="0" rtlCol="0" anchor="ctr"/>
+          <a:lstStyle/>
+          <a:p>
+            <a:pPr marL="0" indent="0">
+              <a:buNone/>
+            </a:pPr>
+            <a:r>
+              <a:rPr lang="en-US" sz="2800" b="1" dirty="0">
+                <a:solidFill>
+                  <a:srgbClr val="1D2F82"/>
+                </a:solidFill>
+                <a:latin typeface="Calibri" pitchFamily="34" charset="0"/>
+                <a:ea typeface="Calibri" pitchFamily="34" charset="-122"/>
+                <a:cs typeface="Calibri" pitchFamily="34" charset="-120"/>
+              </a:rPr>
+              <a:t>Results</a:t>
+            </a:r>
+            <a:endParaRPr lang="en-US" sz="2800" dirty="0"/>
+          </a:p>
+        </p:txBody>
+      </p:sp>
+      <p:pic>
+        <p:nvPicPr>
+          <p:cNvPr id="4" name="Image 0" descr="logo.png"/>
+          <p:cNvPicPr>
+            <a:picLocks noChangeAspect="1"/>
+          </p:cNvPicPr>
+          <p:nvPr/>
+        </p:nvPicPr>
+        <p:blipFill>
+          <a:blip r:embed="rId3"/>
+          <a:stretch>
+            <a:fillRect/>
+          </a:stretch>
+        </p:blipFill>
+        <p:spPr>
+          <a:xfrm>
+            <a:off x="10362895" y="320040"/>
+            <a:ext cx="1371600" cy="518746"/>
+          </a:xfrm>
+          <a:prstGeom prst="rect">
+            <a:avLst/>
+          </a:prstGeom>
+        </p:spPr>
+      </p:pic>
+    </p:spTree>
+  </p:cSld>
+  <p:clrMapOvr>
+    <a:masterClrMapping/>
+  </p:clrMapOvr>
+</p:sld>
+</file>
+
+<file path=ppt/slides/slide13.xml><?xml version="1.0" encoding="utf-8"?>
+<p:sld xmlns:a="http://schemas.openxmlformats.org/drawingml/2006/main" xmlns:r="http://schemas.openxmlformats.org/officeDocument/2006/relationships" xmlns:p="http://schemas.openxmlformats.org/presentationml/2006/main">
+  <p:cSld name="Slide 9">
+    <p:bg>
+      <p:bgPr>
+        <a:solidFill>
+          <a:srgbClr val="FFFFFF"/>
+        </a:solidFill>
+        <a:effectLst/>
+      </p:bgPr>
+    </p:bg>
+    <p:spTree>
+      <p:nvGrpSpPr>
+        <p:cNvPr id="1" name=""/>
+        <p:cNvGrpSpPr/>
+        <p:nvPr/>
+      </p:nvGrpSpPr>
+      <p:grpSpPr>
+        <a:xfrm>
+          <a:off x="0" y="0"/>
+          <a:ext cx="0" cy="0"/>
+          <a:chOff x="0" y="0"/>
+          <a:chExt cx="0" cy="0"/>
+        </a:xfrm>
+      </p:grpSpPr>
+      <p:sp>
+        <p:nvSpPr>
+          <p:cNvPr id="2" name="Text 0"/>
+          <p:cNvSpPr txBox="1"/>
+          <p:nvPr/>
+        </p:nvSpPr>
+        <p:spPr>
+          <a:xfrm>
+            <a:off x="11460175" y="6446520"/>
+            <a:ext cx="457200" cy="274320"/>
+          </a:xfrm>
+          <a:prstGeom prst="rect">
+            <a:avLst/>
+          </a:prstGeom>
+          <a:noFill/>
+          <a:ln/>
+        </p:spPr>
+        <p:txBody>
+          <a:bodyPr wrap="square" lIns="0" tIns="0" rIns="0" bIns="0" rtlCol="0" anchor="ctr"/>
+          <a:lstStyle/>
+          <a:p>
+            <a:pPr marL="0" indent="0" algn="r">
+              <a:buNone/>
+            </a:pPr>
+            <a:r>
+              <a:rPr lang="en-US" sz="1000" dirty="0">
+                <a:solidFill>
+                  <a:srgbClr val="808080"/>
+                </a:solidFill>
+                <a:latin typeface="Calibri" pitchFamily="34" charset="0"/>
+                <a:ea typeface="Calibri" pitchFamily="34" charset="-122"/>
+                <a:cs typeface="Calibri" pitchFamily="34" charset="-120"/>
+              </a:rPr>
+              <a:t>9</a:t>
+            </a:r>
+            <a:endParaRPr lang="en-US" sz="1000" dirty="0"/>
+          </a:p>
+        </p:txBody>
+      </p:sp>
+      <p:sp>
+        <p:nvSpPr>
+          <p:cNvPr id="3" name="Text 1"/>
+          <p:cNvSpPr txBox="1"/>
+          <p:nvPr/>
+        </p:nvSpPr>
+        <p:spPr>
+          <a:xfrm>
+            <a:off x="548640" y="320040"/>
+            <a:ext cx="9601200" cy="685800"/>
+          </a:xfrm>
+          <a:prstGeom prst="rect">
+            <a:avLst/>
+          </a:prstGeom>
+          <a:noFill/>
+          <a:ln/>
+        </p:spPr>
+        <p:txBody>
+          <a:bodyPr wrap="square" lIns="0" tIns="0" rIns="0" bIns="0" rtlCol="0" anchor="ctr"/>
+          <a:lstStyle/>
+          <a:p>
+            <a:pPr marL="0" indent="0">
+              <a:buNone/>
+            </a:pPr>
+            <a:r>
+              <a:rPr lang="en-US" sz="2800" b="1" dirty="0">
+                <a:solidFill>
+                  <a:srgbClr val="1D2F82"/>
+                </a:solidFill>
+                <a:latin typeface="Calibri" pitchFamily="34" charset="0"/>
+                <a:ea typeface="Calibri" pitchFamily="34" charset="-122"/>
+                <a:cs typeface="Calibri" pitchFamily="34" charset="-120"/>
+              </a:rPr>
+              <a:t>Results (contd.)</a:t>
+            </a:r>
+            <a:endParaRPr lang="en-US" sz="2800" dirty="0"/>
+          </a:p>
+        </p:txBody>
+      </p:sp>
+      <p:pic>
+        <p:nvPicPr>
+          <p:cNvPr id="4" name="Image 0" descr="logo.png"/>
+          <p:cNvPicPr>
+            <a:picLocks noChangeAspect="1"/>
+          </p:cNvPicPr>
+          <p:nvPr/>
+        </p:nvPicPr>
+        <p:blipFill>
+          <a:blip r:embed="rId3"/>
+          <a:stretch>
+            <a:fillRect/>
+          </a:stretch>
+        </p:blipFill>
+        <p:spPr>
+          <a:xfrm>
+            <a:off x="10362895" y="320040"/>
+            <a:ext cx="1371600" cy="518746"/>
+          </a:xfrm>
+          <a:prstGeom prst="rect">
+            <a:avLst/>
+          </a:prstGeom>
+        </p:spPr>
+      </p:pic>
+    </p:spTree>
+  </p:cSld>
+  <p:clrMapOvr>
+    <a:masterClrMapping/>
+  </p:clrMapOvr>
+</p:sld>
+</file>
+
+<file path=ppt/slides/slide14.xml><?xml version="1.0" encoding="utf-8"?>
+<p:sld xmlns:a="http://schemas.openxmlformats.org/drawingml/2006/main" xmlns:r="http://schemas.openxmlformats.org/officeDocument/2006/relationships" xmlns:p="http://schemas.openxmlformats.org/presentationml/2006/main">
+  <p:cSld name="Slide 9">
+    <p:bg>
+      <p:bgPr>
+        <a:solidFill>
+          <a:srgbClr val="FFFFFF"/>
+        </a:solidFill>
+        <a:effectLst/>
+      </p:bgPr>
+    </p:bg>
+    <p:spTree>
+      <p:nvGrpSpPr>
+        <p:cNvPr id="1" name=""/>
+        <p:cNvGrpSpPr/>
+        <p:nvPr/>
+      </p:nvGrpSpPr>
+      <p:grpSpPr>
+        <a:xfrm>
+          <a:off x="0" y="0"/>
+          <a:ext cx="0" cy="0"/>
+          <a:chOff x="0" y="0"/>
+          <a:chExt cx="0" cy="0"/>
+        </a:xfrm>
+      </p:grpSpPr>
+      <p:sp>
+        <p:nvSpPr>
+          <p:cNvPr id="2" name="Text 0"/>
+          <p:cNvSpPr txBox="1"/>
+          <p:nvPr/>
+        </p:nvSpPr>
+        <p:spPr>
+          <a:xfrm>
+            <a:off x="11460175" y="6446520"/>
+            <a:ext cx="457200" cy="274320"/>
+          </a:xfrm>
+          <a:prstGeom prst="rect">
+            <a:avLst/>
+          </a:prstGeom>
+          <a:noFill/>
+          <a:ln/>
+        </p:spPr>
+        <p:txBody>
+          <a:bodyPr wrap="square" lIns="0" tIns="0" rIns="0" bIns="0" rtlCol="0" anchor="ctr"/>
+          <a:lstStyle/>
+          <a:p>
+            <a:pPr marL="0" indent="0" algn="r">
+              <a:buNone/>
+            </a:pPr>
+            <a:r>
+              <a:rPr lang="en-US" sz="1000" dirty="0">
+                <a:solidFill>
+                  <a:srgbClr val="808080"/>
+                </a:solidFill>
+                <a:latin typeface="Calibri" pitchFamily="34" charset="0"/>
+                <a:ea typeface="Calibri" pitchFamily="34" charset="-122"/>
+                <a:cs typeface="Calibri" pitchFamily="34" charset="-120"/>
+              </a:rPr>
+              <a:t>9</a:t>
+            </a:r>
+            <a:endParaRPr lang="en-US" sz="1000" dirty="0"/>
+          </a:p>
+        </p:txBody>
+      </p:sp>
+      <p:sp>
+        <p:nvSpPr>
+          <p:cNvPr id="3" name="Text 1"/>
+          <p:cNvSpPr txBox="1"/>
+          <p:nvPr/>
+        </p:nvSpPr>
+        <p:spPr>
+          <a:xfrm>
+            <a:off x="548640" y="320040"/>
+            <a:ext cx="9601200" cy="685800"/>
+          </a:xfrm>
+          <a:prstGeom prst="rect">
+            <a:avLst/>
+          </a:prstGeom>
+          <a:noFill/>
+          <a:ln/>
+        </p:spPr>
+        <p:txBody>
+          <a:bodyPr wrap="square" lIns="0" tIns="0" rIns="0" bIns="0" rtlCol="0" anchor="ctr"/>
+          <a:lstStyle/>
+          <a:p>
+            <a:pPr marL="0" indent="0">
+              <a:buNone/>
+            </a:pPr>
+            <a:r>
+              <a:rPr lang="en-US" sz="2800" b="1" dirty="0">
+                <a:solidFill>
+                  <a:srgbClr val="1D2F82"/>
+                </a:solidFill>
+                <a:latin typeface="Calibri" pitchFamily="34" charset="0"/>
+                <a:ea typeface="Calibri" pitchFamily="34" charset="-122"/>
+                <a:cs typeface="Calibri" pitchFamily="34" charset="-120"/>
+              </a:rPr>
+              <a:t>Results (contd.)</a:t>
+            </a:r>
+            <a:endParaRPr lang="en-US" sz="2800" dirty="0"/>
+          </a:p>
+        </p:txBody>
+      </p:sp>
+      <p:pic>
+        <p:nvPicPr>
+          <p:cNvPr id="4" name="Image 0" descr="logo.png"/>
+          <p:cNvPicPr>
+            <a:picLocks noChangeAspect="1"/>
+          </p:cNvPicPr>
+          <p:nvPr/>
+        </p:nvPicPr>
+        <p:blipFill>
+          <a:blip r:embed="rId3"/>
+          <a:stretch>
+            <a:fillRect/>
+          </a:stretch>
+        </p:blipFill>
+        <p:spPr>
+          <a:xfrm>
+            <a:off x="10362895" y="320040"/>
+            <a:ext cx="1371600" cy="518746"/>
+          </a:xfrm>
+          <a:prstGeom prst="rect">
+            <a:avLst/>
+          </a:prstGeom>
+        </p:spPr>
+      </p:pic>
+    </p:spTree>
+  </p:cSld>
+  <p:clrMapOvr>
+    <a:masterClrMapping/>
+  </p:clrMapOvr>
+</p:sld>
+</file>
+
+<file path=ppt/slides/slide15.xml><?xml version="1.0" encoding="utf-8"?>
+<p:sld xmlns:a="http://schemas.openxmlformats.org/drawingml/2006/main" xmlns:r="http://schemas.openxmlformats.org/officeDocument/2006/relationships" xmlns:p="http://schemas.openxmlformats.org/presentationml/2006/main">
+  <p:cSld name="Slide 9">
+    <p:bg>
+      <p:bgPr>
+        <a:solidFill>
+          <a:srgbClr val="FFFFFF"/>
+        </a:solidFill>
+        <a:effectLst/>
+      </p:bgPr>
+    </p:bg>
+    <p:spTree>
+      <p:nvGrpSpPr>
+        <p:cNvPr id="1" name=""/>
+        <p:cNvGrpSpPr/>
+        <p:nvPr/>
+      </p:nvGrpSpPr>
+      <p:grpSpPr>
+        <a:xfrm>
+          <a:off x="0" y="0"/>
+          <a:ext cx="0" cy="0"/>
+          <a:chOff x="0" y="0"/>
+          <a:chExt cx="0" cy="0"/>
+        </a:xfrm>
+      </p:grpSpPr>
+      <p:sp>
+        <p:nvSpPr>
+          <p:cNvPr id="2" name="Text 0"/>
+          <p:cNvSpPr txBox="1"/>
+          <p:nvPr/>
+        </p:nvSpPr>
+        <p:spPr>
+          <a:xfrm>
+            <a:off x="11460175" y="6446520"/>
+            <a:ext cx="457200" cy="274320"/>
+          </a:xfrm>
+          <a:prstGeom prst="rect">
+            <a:avLst/>
+          </a:prstGeom>
+          <a:noFill/>
+          <a:ln/>
+        </p:spPr>
+        <p:txBody>
+          <a:bodyPr wrap="square" lIns="0" tIns="0" rIns="0" bIns="0" rtlCol="0" anchor="ctr"/>
+          <a:lstStyle/>
+          <a:p>
+            <a:pPr marL="0" indent="0" algn="r">
+              <a:buNone/>
+            </a:pPr>
+            <a:r>
+              <a:rPr lang="en-US" sz="1000" dirty="0">
+                <a:solidFill>
+                  <a:srgbClr val="808080"/>
+                </a:solidFill>
+                <a:latin typeface="Calibri" pitchFamily="34" charset="0"/>
+                <a:ea typeface="Calibri" pitchFamily="34" charset="-122"/>
+                <a:cs typeface="Calibri" pitchFamily="34" charset="-120"/>
+              </a:rPr>
+              <a:t>9</a:t>
+            </a:r>
+            <a:endParaRPr lang="en-US" sz="1000" dirty="0"/>
+          </a:p>
+        </p:txBody>
+      </p:sp>
+      <p:sp>
+        <p:nvSpPr>
+          <p:cNvPr id="3" name="Text 1"/>
+          <p:cNvSpPr txBox="1"/>
+          <p:nvPr/>
+        </p:nvSpPr>
+        <p:spPr>
+          <a:xfrm>
+            <a:off x="548640" y="320040"/>
+            <a:ext cx="9601200" cy="685800"/>
+          </a:xfrm>
+          <a:prstGeom prst="rect">
+            <a:avLst/>
+          </a:prstGeom>
+          <a:noFill/>
+          <a:ln/>
+        </p:spPr>
+        <p:txBody>
+          <a:bodyPr wrap="square" lIns="0" tIns="0" rIns="0" bIns="0" rtlCol="0" anchor="ctr"/>
+          <a:lstStyle/>
+          <a:p>
+            <a:pPr marL="0" indent="0">
+              <a:buNone/>
+            </a:pPr>
+            <a:r>
+              <a:rPr lang="en-US" sz="2800" b="1" dirty="0">
+                <a:solidFill>
+                  <a:srgbClr val="1D2F82"/>
+                </a:solidFill>
+                <a:latin typeface="Calibri" pitchFamily="34" charset="0"/>
+                <a:ea typeface="Calibri" pitchFamily="34" charset="-122"/>
+                <a:cs typeface="Calibri" pitchFamily="34" charset="-120"/>
+              </a:rPr>
+              <a:t>Results (contd.)</a:t>
+            </a:r>
+            <a:endParaRPr lang="en-US" sz="2800" dirty="0"/>
+          </a:p>
+        </p:txBody>
+      </p:sp>
+      <p:pic>
+        <p:nvPicPr>
+          <p:cNvPr id="4" name="Image 0" descr="logo.png"/>
+          <p:cNvPicPr>
+            <a:picLocks noChangeAspect="1"/>
+          </p:cNvPicPr>
+          <p:nvPr/>
+        </p:nvPicPr>
+        <p:blipFill>
+          <a:blip r:embed="rId3"/>
+          <a:stretch>
+            <a:fillRect/>
+          </a:stretch>
+        </p:blipFill>
+        <p:spPr>
+          <a:xfrm>
+            <a:off x="10362895" y="320040"/>
+            <a:ext cx="1371600" cy="518746"/>
+          </a:xfrm>
+          <a:prstGeom prst="rect">
+            <a:avLst/>
+          </a:prstGeom>
+        </p:spPr>
+      </p:pic>
+    </p:spTree>
+  </p:cSld>
+  <p:clrMapOvr>
+    <a:masterClrMapping/>
+  </p:clrMapOvr>
+</p:sld>
+</file>
+
+<file path=ppt/slides/slide16.xml><?xml version="1.0" encoding="utf-8"?>
+<p:sld xmlns:a="http://schemas.openxmlformats.org/drawingml/2006/main" xmlns:r="http://schemas.openxmlformats.org/officeDocument/2006/relationships" xmlns:p="http://schemas.openxmlformats.org/presentationml/2006/main">
+  <p:cSld name="Slide 9">
+    <p:bg>
+      <p:bgPr>
+        <a:solidFill>
+          <a:srgbClr val="FFFFFF"/>
+        </a:solidFill>
+        <a:effectLst/>
+      </p:bgPr>
+    </p:bg>
+    <p:spTree>
+      <p:nvGrpSpPr>
+        <p:cNvPr id="1" name=""/>
+        <p:cNvGrpSpPr/>
+        <p:nvPr/>
+      </p:nvGrpSpPr>
+      <p:grpSpPr>
+        <a:xfrm>
+          <a:off x="0" y="0"/>
+          <a:ext cx="0" cy="0"/>
+          <a:chOff x="0" y="0"/>
+          <a:chExt cx="0" cy="0"/>
+        </a:xfrm>
+      </p:grpSpPr>
+      <p:sp>
+        <p:nvSpPr>
+          <p:cNvPr id="2" name="Text 0"/>
+          <p:cNvSpPr txBox="1"/>
+          <p:nvPr/>
+        </p:nvSpPr>
+        <p:spPr>
+          <a:xfrm>
+            <a:off x="11460175" y="6446520"/>
+            <a:ext cx="457200" cy="274320"/>
+          </a:xfrm>
+          <a:prstGeom prst="rect">
+            <a:avLst/>
+          </a:prstGeom>
+          <a:noFill/>
+          <a:ln/>
+        </p:spPr>
+        <p:txBody>
+          <a:bodyPr wrap="square" lIns="0" tIns="0" rIns="0" bIns="0" rtlCol="0" anchor="ctr"/>
+          <a:lstStyle/>
+          <a:p>
+            <a:pPr marL="0" indent="0" algn="r">
+              <a:buNone/>
+            </a:pPr>
+            <a:r>
+              <a:rPr lang="en-US" sz="1000" dirty="0">
+                <a:solidFill>
+                  <a:srgbClr val="808080"/>
+                </a:solidFill>
+                <a:latin typeface="Calibri" pitchFamily="34" charset="0"/>
+                <a:ea typeface="Calibri" pitchFamily="34" charset="-122"/>
+                <a:cs typeface="Calibri" pitchFamily="34" charset="-120"/>
+              </a:rPr>
+              <a:t>9</a:t>
+            </a:r>
+            <a:endParaRPr lang="en-US" sz="1000" dirty="0"/>
+          </a:p>
+        </p:txBody>
+      </p:sp>
+      <p:sp>
+        <p:nvSpPr>
+          <p:cNvPr id="3" name="Text 1"/>
+          <p:cNvSpPr txBox="1"/>
+          <p:nvPr/>
+        </p:nvSpPr>
+        <p:spPr>
+          <a:xfrm>
+            <a:off x="548640" y="320040"/>
+            <a:ext cx="9601200" cy="685800"/>
+          </a:xfrm>
+          <a:prstGeom prst="rect">
+            <a:avLst/>
+          </a:prstGeom>
+          <a:noFill/>
+          <a:ln/>
+        </p:spPr>
+        <p:txBody>
+          <a:bodyPr wrap="square" lIns="0" tIns="0" rIns="0" bIns="0" rtlCol="0" anchor="ctr"/>
+          <a:lstStyle/>
+          <a:p>
+            <a:pPr marL="0" indent="0">
+              <a:buNone/>
+            </a:pPr>
+            <a:r>
+              <a:rPr lang="en-US" sz="2800" b="1" dirty="0">
+                <a:solidFill>
+                  <a:srgbClr val="1D2F82"/>
+                </a:solidFill>
+                <a:latin typeface="Calibri" pitchFamily="34" charset="0"/>
+                <a:ea typeface="Calibri" pitchFamily="34" charset="-122"/>
+                <a:cs typeface="Calibri" pitchFamily="34" charset="-120"/>
+              </a:rPr>
+              <a:t>Results (contd.)</a:t>
+            </a:r>
+            <a:endParaRPr lang="en-US" sz="2800" dirty="0"/>
+          </a:p>
+        </p:txBody>
+      </p:sp>
+      <p:pic>
+        <p:nvPicPr>
+          <p:cNvPr id="4" name="Image 0" descr="logo.png"/>
+          <p:cNvPicPr>
+            <a:picLocks noChangeAspect="1"/>
+          </p:cNvPicPr>
+          <p:nvPr/>
+        </p:nvPicPr>
+        <p:blipFill>
+          <a:blip r:embed="rId3"/>
+          <a:stretch>
+            <a:fillRect/>
+          </a:stretch>
+        </p:blipFill>
+        <p:spPr>
+          <a:xfrm>
+            <a:off x="10362895" y="320040"/>
+            <a:ext cx="1371600" cy="518746"/>
+          </a:xfrm>
+          <a:prstGeom prst="rect">
+            <a:avLst/>
+          </a:prstGeom>
+        </p:spPr>
+      </p:pic>
+    </p:spTree>
+  </p:cSld>
+  <p:clrMapOvr>
+    <a:masterClrMapping/>
+  </p:clrMapOvr>
+</p:sld>
+</file>
+
+<file path=ppt/slides/slide17.xml><?xml version="1.0" encoding="utf-8"?>
+<p:sld xmlns:a="http://schemas.openxmlformats.org/drawingml/2006/main" xmlns:r="http://schemas.openxmlformats.org/officeDocument/2006/relationships" xmlns:p="http://schemas.openxmlformats.org/presentationml/2006/main">
+  <p:cSld name="Slide 9">
+    <p:bg>
+      <p:bgPr>
+        <a:solidFill>
+          <a:srgbClr val="FFFFFF"/>
+        </a:solidFill>
+        <a:effectLst/>
+      </p:bgPr>
+    </p:bg>
+    <p:spTree>
+      <p:nvGrpSpPr>
+        <p:cNvPr id="1" name=""/>
+        <p:cNvGrpSpPr/>
+        <p:nvPr/>
+      </p:nvGrpSpPr>
+      <p:grpSpPr>
+        <a:xfrm>
+          <a:off x="0" y="0"/>
+          <a:ext cx="0" cy="0"/>
+          <a:chOff x="0" y="0"/>
+          <a:chExt cx="0" cy="0"/>
+        </a:xfrm>
+      </p:grpSpPr>
+      <p:sp>
+        <p:nvSpPr>
+          <p:cNvPr id="2" name="Text 0"/>
+          <p:cNvSpPr txBox="1"/>
+          <p:nvPr/>
+        </p:nvSpPr>
+        <p:spPr>
+          <a:xfrm>
+            <a:off x="11460175" y="6446520"/>
+            <a:ext cx="457200" cy="274320"/>
+          </a:xfrm>
+          <a:prstGeom prst="rect">
+            <a:avLst/>
+          </a:prstGeom>
+          <a:noFill/>
+          <a:ln/>
+        </p:spPr>
+        <p:txBody>
+          <a:bodyPr wrap="square" lIns="0" tIns="0" rIns="0" bIns="0" rtlCol="0" anchor="ctr"/>
+          <a:lstStyle/>
+          <a:p>
+            <a:pPr marL="0" indent="0" algn="r">
+              <a:buNone/>
+            </a:pPr>
+            <a:r>
+              <a:rPr lang="en-US" sz="1000" dirty="0">
+                <a:solidFill>
+                  <a:srgbClr val="808080"/>
+                </a:solidFill>
+                <a:latin typeface="Calibri" pitchFamily="34" charset="0"/>
+                <a:ea typeface="Calibri" pitchFamily="34" charset="-122"/>
+                <a:cs typeface="Calibri" pitchFamily="34" charset="-120"/>
+              </a:rPr>
+              <a:t>9</a:t>
+            </a:r>
+            <a:endParaRPr lang="en-US" sz="1000" dirty="0"/>
+          </a:p>
+        </p:txBody>
+      </p:sp>
+      <p:sp>
+        <p:nvSpPr>
+          <p:cNvPr id="3" name="Text 1"/>
+          <p:cNvSpPr txBox="1"/>
+          <p:nvPr/>
+        </p:nvSpPr>
+        <p:spPr>
+          <a:xfrm>
+            <a:off x="548640" y="320040"/>
+            <a:ext cx="9601200" cy="685800"/>
+          </a:xfrm>
+          <a:prstGeom prst="rect">
+            <a:avLst/>
+          </a:prstGeom>
+          <a:noFill/>
+          <a:ln/>
+        </p:spPr>
+        <p:txBody>
+          <a:bodyPr wrap="square" lIns="0" tIns="0" rIns="0" bIns="0" rtlCol="0" anchor="ctr"/>
+          <a:lstStyle/>
+          <a:p>
+            <a:pPr marL="0" indent="0">
+              <a:buNone/>
+            </a:pPr>
+            <a:r>
+              <a:rPr lang="en-US" sz="2800" b="1" dirty="0">
+                <a:solidFill>
+                  <a:srgbClr val="1D2F82"/>
+                </a:solidFill>
+                <a:latin typeface="Calibri" pitchFamily="34" charset="0"/>
+                <a:ea typeface="Calibri" pitchFamily="34" charset="-122"/>
+                <a:cs typeface="Calibri" pitchFamily="34" charset="-120"/>
+              </a:rPr>
+              <a:t>Results (contd.)</a:t>
+            </a:r>
+            <a:endParaRPr lang="en-US" sz="2800" dirty="0"/>
+          </a:p>
+        </p:txBody>
+      </p:sp>
+      <p:pic>
+        <p:nvPicPr>
+          <p:cNvPr id="4" name="Image 0" descr="logo.png"/>
+          <p:cNvPicPr>
+            <a:picLocks noChangeAspect="1"/>
+          </p:cNvPicPr>
+          <p:nvPr/>
+        </p:nvPicPr>
+        <p:blipFill>
+          <a:blip r:embed="rId3"/>
+          <a:stretch>
+            <a:fillRect/>
+          </a:stretch>
+        </p:blipFill>
+        <p:spPr>
+          <a:xfrm>
+            <a:off x="10362895" y="320040"/>
+            <a:ext cx="1371600" cy="518746"/>
+          </a:xfrm>
+          <a:prstGeom prst="rect">
+            <a:avLst/>
+          </a:prstGeom>
+        </p:spPr>
+      </p:pic>
+    </p:spTree>
+  </p:cSld>
+  <p:clrMapOvr>
+    <a:masterClrMapping/>
+  </p:clrMapOvr>
+</p:sld>
+</file>
+
+<file path=ppt/slides/slide18.xml><?xml version="1.0" encoding="utf-8"?>
+<p:sld xmlns:a="http://schemas.openxmlformats.org/drawingml/2006/main" xmlns:r="http://schemas.openxmlformats.org/officeDocument/2006/relationships" xmlns:p="http://schemas.openxmlformats.org/presentationml/2006/main">
+  <p:cSld name="Slide 9">
+    <p:bg>
+      <p:bgPr>
+        <a:solidFill>
+          <a:srgbClr val="FFFFFF"/>
+        </a:solidFill>
+        <a:effectLst/>
+      </p:bgPr>
+    </p:bg>
+    <p:spTree>
+      <p:nvGrpSpPr>
+        <p:cNvPr id="1" name=""/>
+        <p:cNvGrpSpPr/>
+        <p:nvPr/>
+      </p:nvGrpSpPr>
+      <p:grpSpPr>
+        <a:xfrm>
+          <a:off x="0" y="0"/>
+          <a:ext cx="0" cy="0"/>
+          <a:chOff x="0" y="0"/>
+          <a:chExt cx="0" cy="0"/>
+        </a:xfrm>
+      </p:grpSpPr>
+      <p:sp>
+        <p:nvSpPr>
+          <p:cNvPr id="2" name="Text 0"/>
+          <p:cNvSpPr txBox="1"/>
+          <p:nvPr/>
+        </p:nvSpPr>
+        <p:spPr>
+          <a:xfrm>
+            <a:off x="11460175" y="6446520"/>
+            <a:ext cx="457200" cy="274320"/>
+          </a:xfrm>
+          <a:prstGeom prst="rect">
+            <a:avLst/>
+          </a:prstGeom>
+          <a:noFill/>
+          <a:ln/>
+        </p:spPr>
+        <p:txBody>
+          <a:bodyPr wrap="square" lIns="0" tIns="0" rIns="0" bIns="0" rtlCol="0" anchor="ctr"/>
+          <a:lstStyle/>
+          <a:p>
+            <a:pPr marL="0" indent="0" algn="r">
+              <a:buNone/>
+            </a:pPr>
+            <a:r>
+              <a:rPr lang="en-US" sz="1000" dirty="0">
+                <a:solidFill>
+                  <a:srgbClr val="808080"/>
+                </a:solidFill>
+                <a:latin typeface="Calibri" pitchFamily="34" charset="0"/>
+                <a:ea typeface="Calibri" pitchFamily="34" charset="-122"/>
+                <a:cs typeface="Calibri" pitchFamily="34" charset="-120"/>
+              </a:rPr>
+              <a:t>9</a:t>
+            </a:r>
+            <a:endParaRPr lang="en-US" sz="1000" dirty="0"/>
+          </a:p>
+        </p:txBody>
+      </p:sp>
+      <p:sp>
+        <p:nvSpPr>
+          <p:cNvPr id="3" name="Text 1"/>
+          <p:cNvSpPr txBox="1"/>
+          <p:nvPr/>
+        </p:nvSpPr>
+        <p:spPr>
+          <a:xfrm>
+            <a:off x="548640" y="320040"/>
+            <a:ext cx="9601200" cy="685800"/>
+          </a:xfrm>
+          <a:prstGeom prst="rect">
+            <a:avLst/>
+          </a:prstGeom>
+          <a:noFill/>
+          <a:ln/>
+        </p:spPr>
+        <p:txBody>
+          <a:bodyPr wrap="square" lIns="0" tIns="0" rIns="0" bIns="0" rtlCol="0" anchor="ctr"/>
+          <a:lstStyle/>
+          <a:p>
+            <a:pPr marL="0" indent="0">
+              <a:buNone/>
+            </a:pPr>
+            <a:r>
+              <a:rPr lang="en-US" sz="2800" b="1" dirty="0">
+                <a:solidFill>
+                  <a:srgbClr val="1D2F82"/>
+                </a:solidFill>
+                <a:latin typeface="Calibri" pitchFamily="34" charset="0"/>
+                <a:ea typeface="Calibri" pitchFamily="34" charset="-122"/>
+                <a:cs typeface="Calibri" pitchFamily="34" charset="-120"/>
+              </a:rPr>
+              <a:t>Results (contd.)</a:t>
+            </a:r>
+            <a:endParaRPr lang="en-US" sz="2800" dirty="0"/>
+          </a:p>
+        </p:txBody>
+      </p:sp>
+      <p:pic>
+        <p:nvPicPr>
+          <p:cNvPr id="4" name="Image 0" descr="logo.png"/>
+          <p:cNvPicPr>
+            <a:picLocks noChangeAspect="1"/>
+          </p:cNvPicPr>
+          <p:nvPr/>
+        </p:nvPicPr>
+        <p:blipFill>
+          <a:blip r:embed="rId3"/>
+          <a:stretch>
+            <a:fillRect/>
+          </a:stretch>
+        </p:blipFill>
+        <p:spPr>
+          <a:xfrm>
+            <a:off x="10362895" y="320040"/>
+            <a:ext cx="1371600" cy="518746"/>
+          </a:xfrm>
+          <a:prstGeom prst="rect">
+            <a:avLst/>
+          </a:prstGeom>
+        </p:spPr>
+      </p:pic>
+    </p:spTree>
+  </p:cSld>
+  <p:clrMapOvr>
+    <a:masterClrMapping/>
+  </p:clrMapOvr>
+</p:sld>
+</file>
+
+<file path=ppt/slides/slide19.xml><?xml version="1.0" encoding="utf-8"?>
+<p:sld xmlns:a="http://schemas.openxmlformats.org/drawingml/2006/main" xmlns:r="http://schemas.openxmlformats.org/officeDocument/2006/relationships" xmlns:p="http://schemas.openxmlformats.org/presentationml/2006/main">
+  <p:cSld name="Slide 4">
+    <p:bg>
+      <p:bgPr>
+        <a:solidFill>
+          <a:srgbClr val="FFFFFF"/>
+        </a:solidFill>
+        <a:effectLst/>
+      </p:bgPr>
+    </p:bg>
+    <p:spTree>
+      <p:nvGrpSpPr>
+        <p:cNvPr id="1" name=""/>
+        <p:cNvGrpSpPr/>
+        <p:nvPr/>
+      </p:nvGrpSpPr>
+      <p:grpSpPr>
+        <a:xfrm>
+          <a:off x="0" y="0"/>
+          <a:ext cx="0" cy="0"/>
+          <a:chOff x="0" y="0"/>
+          <a:chExt cx="0" cy="0"/>
+        </a:xfrm>
+      </p:grpSpPr>
+      <p:sp>
+        <p:nvSpPr>
+          <p:cNvPr id="2" name="Text 0"/>
+          <p:cNvSpPr txBox="1"/>
+          <p:nvPr/>
+        </p:nvSpPr>
+        <p:spPr>
+          <a:xfrm>
+            <a:off x="11460175" y="6446520"/>
+            <a:ext cx="457200" cy="274320"/>
+          </a:xfrm>
+          <a:prstGeom prst="rect">
+            <a:avLst/>
+          </a:prstGeom>
+          <a:noFill/>
+          <a:ln/>
+        </p:spPr>
+        <p:txBody>
+          <a:bodyPr wrap="square" lIns="0" tIns="0" rIns="0" bIns="0" rtlCol="0" anchor="ctr"/>
+          <a:lstStyle/>
+          <a:p>
+            <a:pPr marL="0" indent="0" algn="r">
+              <a:buNone/>
+            </a:pPr>
+            <a:r>
+              <a:rPr lang="en-US" sz="1000" dirty="0">
+                <a:solidFill>
+                  <a:srgbClr val="808080"/>
+                </a:solidFill>
+                <a:latin typeface="Calibri" pitchFamily="34" charset="0"/>
+                <a:ea typeface="Calibri" pitchFamily="34" charset="-122"/>
+                <a:cs typeface="Calibri" pitchFamily="34" charset="-120"/>
+              </a:rPr>
+              <a:t>4</a:t>
+            </a:r>
+            <a:endParaRPr lang="en-US" sz="1000" dirty="0"/>
+          </a:p>
+        </p:txBody>
+      </p:sp>
+      <p:sp>
+        <p:nvSpPr>
+          <p:cNvPr id="3" name="Text 1"/>
+          <p:cNvSpPr txBox="1"/>
+          <p:nvPr/>
+        </p:nvSpPr>
+        <p:spPr>
+          <a:xfrm>
+            <a:off x="548640" y="320040"/>
+            <a:ext cx="9601200" cy="685800"/>
+          </a:xfrm>
+          <a:prstGeom prst="rect">
+            <a:avLst/>
+          </a:prstGeom>
+          <a:noFill/>
+          <a:ln/>
+        </p:spPr>
+        <p:txBody>
+          <a:bodyPr wrap="square" lIns="0" tIns="0" rIns="0" bIns="0" rtlCol="0" anchor="ctr"/>
+          <a:lstStyle/>
+          <a:p>
+            <a:pPr marL="0" indent="0">
+              <a:buNone/>
+            </a:pPr>
+            <a:r>
+              <a:rPr lang="en-US" sz="2800" b="1" dirty="0">
+                <a:solidFill>
+                  <a:srgbClr val="1D2F82"/>
+                </a:solidFill>
+                <a:latin typeface="Calibri" pitchFamily="34" charset="0"/>
+                <a:ea typeface="Calibri" pitchFamily="34" charset="-122"/>
+                <a:cs typeface="Calibri" pitchFamily="34" charset="-120"/>
+              </a:rPr>
+              <a:t>Problem Statement &amp; Background</a:t>
+            </a:r>
+            <a:endParaRPr lang="en-US" sz="2800" dirty="0"/>
+          </a:p>
+        </p:txBody>
+      </p:sp>
+      <p:pic>
+        <p:nvPicPr>
+          <p:cNvPr id="4" name="Image 0" descr="logo.png"/>
+          <p:cNvPicPr>
+            <a:picLocks noChangeAspect="1"/>
+          </p:cNvPicPr>
+          <p:nvPr/>
+        </p:nvPicPr>
+        <p:blipFill>
+          <a:blip r:embed="rId3"/>
+          <a:stretch>
+            <a:fillRect/>
+          </a:stretch>
+        </p:blipFill>
+        <p:spPr>
+          <a:xfrm>
+            <a:off x="10362895" y="320040"/>
+            <a:ext cx="1371600" cy="518746"/>
+          </a:xfrm>
+          <a:prstGeom prst="rect">
+            <a:avLst/>
+          </a:prstGeom>
+        </p:spPr>
+      </p:pic>
+      <p:sp>
+        <p:nvSpPr>
+          <p:cNvPr id="5" name="Text 2"/>
+          <p:cNvSpPr txBox="1"/>
+          <p:nvPr/>
+        </p:nvSpPr>
+        <p:spPr>
+          <a:xfrm>
+            <a:off x="640080" y="1325880"/>
+            <a:ext cx="10881360" cy="4937760"/>
+          </a:xfrm>
+          <a:prstGeom prst="rect">
+            <a:avLst/>
+          </a:prstGeom>
+          <a:noFill/>
+          <a:ln/>
+        </p:spPr>
+        <p:txBody>
+          <a:bodyPr wrap="square" lIns="0" tIns="0" rIns="0" bIns="0" rtlCol="0" anchor="t"/>
+          <a:lstStyle/>
+          <a:p>
+            <a:pPr marL="177800" indent="-177800">
+              <a:spcAft>
+                <a:spcPts val="800"/>
+              </a:spcAft>
+              <a:buSzPct val="100000"/>
+              <a:buChar char="•"/>
+            </a:pPr>
+            <a:r>
+              <a:rPr lang="en-US" sz="1600" dirty="0">
+                <a:solidFill>
+                  <a:srgbClr val="000000"/>
+                </a:solidFill>
+                <a:latin typeface="Calibri" pitchFamily="34" charset="0"/>
+                <a:ea typeface="Calibri" pitchFamily="34" charset="-122"/>
+                <a:cs typeface="Calibri" pitchFamily="34" charset="-120"/>
+              </a:rPr>
+              <a:t>Problem Statement:</a:t>
+            </a:r>
+            <a:endParaRPr lang="en-US" sz="1600" dirty="0"/>
+          </a:p>
+          <a:p>
+            <a:pPr marL="177800" indent="-177800">
+              <a:spcAft>
+                <a:spcPts val="800"/>
+              </a:spcAft>
+              <a:buSzPct val="100000"/>
+              <a:buChar char="•"/>
+            </a:pPr>
+            <a:r>
+              <a:rPr lang="en-US" sz="1600" dirty="0">
+                <a:solidFill>
+                  <a:srgbClr val="000000"/>
+                </a:solidFill>
+                <a:latin typeface="Calibri" pitchFamily="34" charset="0"/>
+                <a:ea typeface="Calibri" pitchFamily="34" charset="-122"/>
+                <a:cs typeface="Calibri" pitchFamily="34" charset="-120"/>
+              </a:rPr>
+              <a:t>Background &amp; Significance:</a:t>
+            </a:r>
+            <a:endParaRPr lang="en-US" sz="1600" dirty="0"/>
+          </a:p>
+          <a:p>
+            <a:pPr marL="177800" indent="-177800">
+              <a:spcAft>
+                <a:spcPts val="800"/>
+              </a:spcAft>
+              <a:buSzPct val="100000"/>
+              <a:buChar char="•"/>
+            </a:pPr>
+            <a:r>
+              <a:rPr lang="en-US" sz="1600" dirty="0">
+                <a:solidFill>
+                  <a:srgbClr val="000000"/>
+                </a:solidFill>
+                <a:latin typeface="Calibri" pitchFamily="34" charset="0"/>
+                <a:ea typeface="Calibri" pitchFamily="34" charset="-122"/>
+                <a:cs typeface="Calibri" pitchFamily="34" charset="-120"/>
+              </a:rPr>
+              <a:t>Existing Solutions:</a:t>
+            </a:r>
+            <a:endParaRPr lang="en-US" sz="1600" dirty="0"/>
+          </a:p>
+          <a:p>
+            <a:pPr marL="177800" indent="-177800">
+              <a:spcAft>
+                <a:spcPts val="800"/>
+              </a:spcAft>
+              <a:buSzPct val="100000"/>
+              <a:buChar char="•"/>
+            </a:pPr>
+            <a:r>
+              <a:rPr lang="en-US" sz="1600" dirty="0">
+                <a:solidFill>
+                  <a:srgbClr val="000000"/>
+                </a:solidFill>
+                <a:latin typeface="Calibri" pitchFamily="34" charset="0"/>
+                <a:ea typeface="Calibri" pitchFamily="34" charset="-122"/>
+                <a:cs typeface="Calibri" pitchFamily="34" charset="-120"/>
+              </a:rPr>
+              <a:t>Limitations / Research Gap:</a:t>
+            </a:r>
+            <a:endParaRPr lang="en-US" sz="1600" dirty="0"/>
+          </a:p>
+        </p:txBody>
+      </p:sp>
+    </p:spTree>
+  </p:cSld>
+  <p:clrMapOvr>
+    <a:masterClrMapping/>
+  </p:clrMapOvr>
+</p:sld>
+</file>
+
+<file path=ppt/slides/slide2.xml><?xml version="1.0" encoding="utf-8"?>
+<p:sld xmlns:a="http://schemas.openxmlformats.org/drawingml/2006/main" xmlns:r="http://schemas.openxmlformats.org/officeDocument/2006/relationships" xmlns:p="http://schemas.openxmlformats.org/presentationml/2006/main">
+  <p:cSld name="Slide 2">
+    <p:bg>
+      <p:bgPr>
+        <a:solidFill>
+          <a:srgbClr val="FFFFFF"/>
+        </a:solidFill>
+        <a:effectLst/>
+      </p:bgPr>
+    </p:bg>
+    <p:spTree>
+      <p:nvGrpSpPr>
+        <p:cNvPr id="1" name=""/>
+        <p:cNvGrpSpPr/>
+        <p:nvPr/>
+      </p:nvGrpSpPr>
+      <p:grpSpPr>
+        <a:xfrm>
+          <a:off x="0" y="0"/>
+          <a:ext cx="0" cy="0"/>
+          <a:chOff x="0" y="0"/>
+          <a:chExt cx="0" cy="0"/>
+        </a:xfrm>
+      </p:grpSpPr>
+      <p:sp>
+        <p:nvSpPr>
+          <p:cNvPr id="2" name="Text 0"/>
+          <p:cNvSpPr txBox="1"/>
+          <p:nvPr/>
+        </p:nvSpPr>
+        <p:spPr>
+          <a:xfrm>
+            <a:off x="11460175" y="6446520"/>
+            <a:ext cx="457200" cy="274320"/>
+          </a:xfrm>
+          <a:prstGeom prst="rect">
+            <a:avLst/>
+          </a:prstGeom>
+          <a:noFill/>
+          <a:ln/>
+        </p:spPr>
+        <p:txBody>
+          <a:bodyPr wrap="square" lIns="0" tIns="0" rIns="0" bIns="0" rtlCol="0" anchor="ctr"/>
+          <a:lstStyle/>
+          <a:p>
+            <a:pPr marL="0" indent="0" algn="r">
+              <a:buNone/>
+            </a:pPr>
+            <a:r>
+              <a:rPr lang="en-US" sz="1000" dirty="0">
+                <a:solidFill>
+                  <a:srgbClr val="808080"/>
+                </a:solidFill>
+                <a:latin typeface="Calibri" pitchFamily="34" charset="0"/>
+                <a:ea typeface="Calibri" pitchFamily="34" charset="-122"/>
+                <a:cs typeface="Calibri" pitchFamily="34" charset="-120"/>
+              </a:rPr>
+              <a:t>2</a:t>
+            </a:r>
+            <a:endParaRPr lang="en-US" sz="1000" dirty="0"/>
+          </a:p>
+        </p:txBody>
+      </p:sp>
+      <p:pic>
+        <p:nvPicPr>
+          <p:cNvPr id="3" name="Image 0" descr="logo.png"/>
+          <p:cNvPicPr>
+            <a:picLocks noChangeAspect="1"/>
+          </p:cNvPicPr>
+          <p:nvPr/>
+        </p:nvPicPr>
+        <p:blipFill>
+          <a:blip r:embed="rId3"/>
+          <a:stretch>
+            <a:fillRect/>
+          </a:stretch>
+        </p:blipFill>
+        <p:spPr>
+          <a:xfrm>
+            <a:off x="548640" y="365760"/>
+            <a:ext cx="2011680" cy="760828"/>
+          </a:xfrm>
+          <a:prstGeom prst="rect">
+            <a:avLst/>
+          </a:prstGeom>
+        </p:spPr>
+      </p:pic>
+      <p:sp>
+        <p:nvSpPr>
+          <p:cNvPr id="4" name="Text 1"/>
+          <p:cNvSpPr txBox="1"/>
+          <p:nvPr/>
+        </p:nvSpPr>
+        <p:spPr>
+          <a:xfrm>
+            <a:off x="5486400" y="411480"/>
+            <a:ext cx="6217920" cy="320040"/>
+          </a:xfrm>
+          <a:prstGeom prst="rect">
+            <a:avLst/>
+          </a:prstGeom>
+          <a:noFill/>
+          <a:ln/>
+        </p:spPr>
+        <p:txBody>
+          <a:bodyPr wrap="square" lIns="0" tIns="0" rIns="0" bIns="0" rtlCol="0" anchor="ctr"/>
+          <a:lstStyle/>
+          <a:p>
+            <a:pPr marL="0" indent="0" algn="r">
+              <a:buNone/>
+            </a:pPr>
+            <a:r>
+              <a:rPr lang="en-US" sz="1400" b="1" dirty="0">
+                <a:solidFill>
+                  <a:srgbClr val="1D2F82"/>
+                </a:solidFill>
+                <a:latin typeface="Calibri" pitchFamily="34" charset="0"/>
+                <a:ea typeface="Calibri" pitchFamily="34" charset="-122"/>
+                <a:cs typeface="Calibri" pitchFamily="34" charset="-120"/>
+              </a:rPr>
+              <a:t>School of Electronics Engineering (SENSE)</a:t>
+            </a:r>
+            <a:endParaRPr lang="en-US" sz="1400" dirty="0"/>
+          </a:p>
+        </p:txBody>
+      </p:sp>
+      <p:sp>
+        <p:nvSpPr>
+          <p:cNvPr id="5" name="Text 2"/>
+          <p:cNvSpPr txBox="1"/>
+          <p:nvPr/>
+        </p:nvSpPr>
+        <p:spPr>
+          <a:xfrm>
+            <a:off x="5486400" y="749808"/>
+            <a:ext cx="6217920" cy="274320"/>
+          </a:xfrm>
+          <a:prstGeom prst="rect">
+            <a:avLst/>
+          </a:prstGeom>
+          <a:noFill/>
+          <a:ln/>
+        </p:spPr>
+        <p:txBody>
+          <a:bodyPr wrap="square" lIns="0" tIns="0" rIns="0" bIns="0" rtlCol="0" anchor="ctr"/>
+          <a:lstStyle/>
+          <a:p>
+            <a:pPr marL="0" indent="0" algn="r">
+              <a:buNone/>
+            </a:pPr>
+            <a:r>
+              <a:rPr lang="en-US" sz="1200" dirty="0">
+                <a:solidFill>
+                  <a:srgbClr val="000000"/>
+                </a:solidFill>
+                <a:latin typeface="Calibri" pitchFamily="34" charset="0"/>
+                <a:ea typeface="Calibri" pitchFamily="34" charset="-122"/>
+                <a:cs typeface="Calibri" pitchFamily="34" charset="-120"/>
+              </a:rPr>
+              <a:t>Project-I (2026)</a:t>
+            </a:r>
+            <a:endParaRPr lang="en-US" sz="1200" dirty="0"/>
+          </a:p>
+        </p:txBody>
+      </p:sp>
+      <p:sp>
+        <p:nvSpPr>
+          <p:cNvPr id="6" name="Text 3"/>
+          <p:cNvSpPr txBox="1"/>
+          <p:nvPr/>
+        </p:nvSpPr>
+        <p:spPr>
+          <a:xfrm>
+            <a:off x="548640" y="1737360"/>
+            <a:ext cx="11091672" cy="914400"/>
+          </a:xfrm>
+          <a:prstGeom prst="rect">
+            <a:avLst/>
+          </a:prstGeom>
+          <a:noFill/>
+          <a:ln/>
+        </p:spPr>
+        <p:txBody>
+          <a:bodyPr wrap="square" lIns="0" tIns="0" rIns="0" bIns="0" rtlCol="0" anchor="ctr"/>
+          <a:lstStyle/>
+          <a:p>
+            <a:pPr marL="0" indent="0" algn="ctr">
+              <a:buNone/>
+            </a:pPr>
+            <a:r>
+              <a:rPr lang="en-US" sz="3200" b="1" dirty="0">
+                <a:solidFill>
+                  <a:srgbClr val="1D2F82"/>
+                </a:solidFill>
+                <a:latin typeface="Calibri" pitchFamily="34" charset="0"/>
+                <a:ea typeface="Calibri" pitchFamily="34" charset="-122"/>
+                <a:cs typeface="Calibri" pitchFamily="34" charset="-120"/>
+              </a:rPr>
+              <a:t>Project Title</a:t>
+            </a:r>
+            <a:endParaRPr lang="en-US" sz="3200" dirty="0"/>
+          </a:p>
+        </p:txBody>
+      </p:sp>
+      <p:sp>
+        <p:nvSpPr>
+          <p:cNvPr id="7" name="Text 4"/>
+          <p:cNvSpPr txBox="1"/>
+          <p:nvPr/>
+        </p:nvSpPr>
+        <p:spPr>
+          <a:xfrm>
+            <a:off x="822960" y="3063240"/>
+            <a:ext cx="2560320" cy="384048"/>
+          </a:xfrm>
+          <a:prstGeom prst="rect">
+            <a:avLst/>
+          </a:prstGeom>
+          <a:noFill/>
+          <a:ln/>
+        </p:spPr>
+        <p:txBody>
+          <a:bodyPr wrap="square" lIns="0" tIns="0" rIns="0" bIns="0" rtlCol="0" anchor="ctr"/>
+          <a:lstStyle/>
+          <a:p>
+            <a:pPr marL="0" indent="0">
+              <a:buNone/>
+            </a:pPr>
+            <a:r>
+              <a:rPr lang="en-US" sz="1400" b="1" dirty="0">
+                <a:solidFill>
+                  <a:srgbClr val="000000"/>
+                </a:solidFill>
+                <a:latin typeface="Calibri" pitchFamily="34" charset="0"/>
+                <a:ea typeface="Calibri" pitchFamily="34" charset="-122"/>
+                <a:cs typeface="Calibri" pitchFamily="34" charset="-120"/>
+              </a:rPr>
+              <a:t>Student Name(s):</a:t>
+            </a:r>
+            <a:endParaRPr lang="en-US" sz="1400" dirty="0"/>
+          </a:p>
+        </p:txBody>
+      </p:sp>
+      <p:sp>
+        <p:nvSpPr>
+          <p:cNvPr id="8" name="Text 5"/>
+          <p:cNvSpPr txBox="1"/>
+          <p:nvPr/>
+        </p:nvSpPr>
+        <p:spPr>
+          <a:xfrm>
+            <a:off x="3474720" y="3063240"/>
+            <a:ext cx="4023360" cy="384048"/>
+          </a:xfrm>
+          <a:prstGeom prst="rect">
+            <a:avLst/>
+          </a:prstGeom>
+          <a:noFill/>
+          <a:ln/>
+        </p:spPr>
+        <p:txBody>
+          <a:bodyPr wrap="square" lIns="0" tIns="0" rIns="0" bIns="0" rtlCol="0" anchor="ctr"/>
+          <a:lstStyle/>
+          <a:p>
+            <a:pPr marL="0" indent="0">
+              <a:buNone/>
+            </a:pPr>
+            <a:r>
+              <a:rPr lang="en-US" sz="1400" dirty="0">
+                <a:solidFill>
+                  <a:srgbClr val="000000"/>
+                </a:solidFill>
+                <a:latin typeface="Calibri" pitchFamily="34" charset="0"/>
+                <a:ea typeface="Calibri" pitchFamily="34" charset="-122"/>
+                <a:cs typeface="Calibri" pitchFamily="34" charset="-120"/>
+              </a:rPr>
+              <a:t>Name — Reg. No.</a:t>
+            </a:r>
+            <a:endParaRPr lang="en-US" sz="1400" dirty="0"/>
+          </a:p>
+        </p:txBody>
+      </p:sp>
+      <p:sp>
+        <p:nvSpPr>
+          <p:cNvPr id="9" name="Shape 6"/>
+          <p:cNvSpPr/>
+          <p:nvPr/>
+        </p:nvSpPr>
+        <p:spPr>
+          <a:xfrm>
+            <a:off x="3474720" y="3465576"/>
+            <a:ext cx="4023360" cy="0"/>
+          </a:xfrm>
+          <a:prstGeom prst="line">
+            <a:avLst/>
+          </a:prstGeom>
+          <a:noFill/>
+          <a:ln w="12700">
+            <a:solidFill>
+              <a:srgbClr val="BFBFBF"/>
+            </a:solidFill>
+            <a:prstDash val="solid"/>
+          </a:ln>
+        </p:spPr>
+        <p:txBody>
+          <a:bodyPr/>
+          <a:lstStyle/>
+          <a:p>
+            <a:endParaRPr lang="en-US"/>
+          </a:p>
+        </p:txBody>
+      </p:sp>
+      <p:sp>
+        <p:nvSpPr>
+          <p:cNvPr id="10" name="Text 7"/>
+          <p:cNvSpPr txBox="1"/>
+          <p:nvPr/>
+        </p:nvSpPr>
+        <p:spPr>
+          <a:xfrm>
+            <a:off x="822960" y="3657600"/>
+            <a:ext cx="2560320" cy="384048"/>
+          </a:xfrm>
+          <a:prstGeom prst="rect">
+            <a:avLst/>
+          </a:prstGeom>
+          <a:noFill/>
+          <a:ln/>
+        </p:spPr>
+        <p:txBody>
+          <a:bodyPr wrap="square" lIns="0" tIns="0" rIns="0" bIns="0" rtlCol="0" anchor="ctr"/>
+          <a:lstStyle/>
+          <a:p>
+            <a:pPr marL="0" indent="0">
+              <a:buNone/>
+            </a:pPr>
+            <a:r>
+              <a:rPr lang="en-US" sz="1400" b="1" dirty="0">
+                <a:solidFill>
+                  <a:srgbClr val="000000"/>
+                </a:solidFill>
+                <a:latin typeface="Calibri" pitchFamily="34" charset="0"/>
+                <a:ea typeface="Calibri" pitchFamily="34" charset="-122"/>
+                <a:cs typeface="Calibri" pitchFamily="34" charset="-120"/>
+              </a:rPr>
+              <a:t>Guide:</a:t>
+            </a:r>
+            <a:endParaRPr lang="en-US" sz="1400" dirty="0"/>
+          </a:p>
+        </p:txBody>
+      </p:sp>
+      <p:sp>
+        <p:nvSpPr>
+          <p:cNvPr id="11" name="Text 8"/>
+          <p:cNvSpPr txBox="1"/>
+          <p:nvPr/>
+        </p:nvSpPr>
+        <p:spPr>
+          <a:xfrm>
+            <a:off x="3474720" y="3657600"/>
+            <a:ext cx="4023360" cy="384048"/>
+          </a:xfrm>
+          <a:prstGeom prst="rect">
+            <a:avLst/>
+          </a:prstGeom>
+          <a:noFill/>
+          <a:ln/>
+        </p:spPr>
+        <p:txBody>
+          <a:bodyPr wrap="square" lIns="0" tIns="0" rIns="0" bIns="0" rtlCol="0" anchor="ctr"/>
+          <a:lstStyle/>
+          <a:p>
+            <a:pPr marL="0" indent="0">
+              <a:buNone/>
+            </a:pPr>
+            <a:r>
+              <a:rPr lang="en-US" sz="1400" dirty="0">
+                <a:solidFill>
+                  <a:srgbClr val="000000"/>
+                </a:solidFill>
+                <a:latin typeface="Calibri" pitchFamily="34" charset="0"/>
+                <a:ea typeface="Calibri" pitchFamily="34" charset="-122"/>
+                <a:cs typeface="Calibri" pitchFamily="34" charset="-120"/>
+              </a:rPr>
+              <a:t>Dr. Guide Name, School</a:t>
+            </a:r>
+            <a:endParaRPr lang="en-US" sz="1400" dirty="0"/>
+          </a:p>
+        </p:txBody>
+      </p:sp>
+      <p:sp>
+        <p:nvSpPr>
+          <p:cNvPr id="12" name="Shape 9"/>
+          <p:cNvSpPr/>
+          <p:nvPr/>
+        </p:nvSpPr>
+        <p:spPr>
+          <a:xfrm>
+            <a:off x="3474720" y="4059936"/>
+            <a:ext cx="4023360" cy="0"/>
+          </a:xfrm>
+          <a:prstGeom prst="line">
+            <a:avLst/>
+          </a:prstGeom>
+          <a:noFill/>
+          <a:ln w="12700">
+            <a:solidFill>
+              <a:srgbClr val="BFBFBF"/>
+            </a:solidFill>
+            <a:prstDash val="solid"/>
+          </a:ln>
+        </p:spPr>
+        <p:txBody>
+          <a:bodyPr/>
+          <a:lstStyle/>
+          <a:p>
+            <a:endParaRPr lang="en-US"/>
+          </a:p>
+        </p:txBody>
+      </p:sp>
+      <p:sp>
+        <p:nvSpPr>
+          <p:cNvPr id="13" name="Text 10"/>
+          <p:cNvSpPr txBox="1"/>
+          <p:nvPr/>
+        </p:nvSpPr>
+        <p:spPr>
+          <a:xfrm>
+            <a:off x="822960" y="4251960"/>
+            <a:ext cx="2560320" cy="384048"/>
+          </a:xfrm>
+          <a:prstGeom prst="rect">
+            <a:avLst/>
+          </a:prstGeom>
+          <a:noFill/>
+          <a:ln/>
+        </p:spPr>
+        <p:txBody>
+          <a:bodyPr wrap="square" lIns="0" tIns="0" rIns="0" bIns="0" rtlCol="0" anchor="ctr"/>
+          <a:lstStyle/>
+          <a:p>
+            <a:pPr marL="0" indent="0">
+              <a:buNone/>
+            </a:pPr>
+            <a:r>
+              <a:rPr lang="en-US" sz="1400" b="1" dirty="0">
+                <a:solidFill>
+                  <a:srgbClr val="000000"/>
+                </a:solidFill>
+                <a:latin typeface="Calibri" pitchFamily="34" charset="0"/>
+                <a:ea typeface="Calibri" pitchFamily="34" charset="-122"/>
+                <a:cs typeface="Calibri" pitchFamily="34" charset="-120"/>
+              </a:rPr>
+              <a:t>Programme / School:</a:t>
+            </a:r>
+            <a:endParaRPr lang="en-US" sz="1400" dirty="0"/>
+          </a:p>
+        </p:txBody>
+      </p:sp>
+      <p:sp>
+        <p:nvSpPr>
+          <p:cNvPr id="14" name="Text 11"/>
+          <p:cNvSpPr txBox="1"/>
+          <p:nvPr/>
+        </p:nvSpPr>
+        <p:spPr>
+          <a:xfrm>
+            <a:off x="3474720" y="4251960"/>
+            <a:ext cx="4023360" cy="384048"/>
+          </a:xfrm>
+          <a:prstGeom prst="rect">
+            <a:avLst/>
+          </a:prstGeom>
+          <a:noFill/>
+          <a:ln/>
+        </p:spPr>
+        <p:txBody>
+          <a:bodyPr wrap="square" lIns="0" tIns="0" rIns="0" bIns="0" rtlCol="0" anchor="ctr"/>
+          <a:lstStyle/>
+          <a:p>
+            <a:pPr marL="0" indent="0">
+              <a:buNone/>
+            </a:pPr>
+            <a:r>
+              <a:rPr lang="en-US" sz="1400" dirty="0">
+                <a:solidFill>
+                  <a:srgbClr val="000000"/>
+                </a:solidFill>
+                <a:latin typeface="Calibri" pitchFamily="34" charset="0"/>
+                <a:ea typeface="Calibri" pitchFamily="34" charset="-122"/>
+                <a:cs typeface="Calibri" pitchFamily="34" charset="-120"/>
+              </a:rPr>
+              <a:t>B.Tech — SENSE, VIT Chennai</a:t>
+            </a:r>
+            <a:endParaRPr lang="en-US" sz="1400" dirty="0"/>
+          </a:p>
+        </p:txBody>
+      </p:sp>
+      <p:sp>
+        <p:nvSpPr>
+          <p:cNvPr id="15" name="Shape 12"/>
+          <p:cNvSpPr/>
+          <p:nvPr/>
+        </p:nvSpPr>
+        <p:spPr>
+          <a:xfrm>
+            <a:off x="3474720" y="4654296"/>
+            <a:ext cx="4023360" cy="0"/>
+          </a:xfrm>
+          <a:prstGeom prst="line">
+            <a:avLst/>
+          </a:prstGeom>
+          <a:noFill/>
+          <a:ln w="12700">
+            <a:solidFill>
+              <a:srgbClr val="BFBFBF"/>
+            </a:solidFill>
+            <a:prstDash val="solid"/>
+          </a:ln>
+        </p:spPr>
+        <p:txBody>
+          <a:bodyPr/>
+          <a:lstStyle/>
+          <a:p>
+            <a:endParaRPr lang="en-US"/>
+          </a:p>
+        </p:txBody>
+      </p:sp>
+      <p:sp>
+        <p:nvSpPr>
+          <p:cNvPr id="16" name="Text 13"/>
+          <p:cNvSpPr txBox="1"/>
+          <p:nvPr/>
+        </p:nvSpPr>
+        <p:spPr>
+          <a:xfrm>
+            <a:off x="822960" y="4846320"/>
+            <a:ext cx="2560320" cy="384048"/>
+          </a:xfrm>
+          <a:prstGeom prst="rect">
+            <a:avLst/>
+          </a:prstGeom>
+          <a:noFill/>
+          <a:ln/>
+        </p:spPr>
+        <p:txBody>
+          <a:bodyPr wrap="square" lIns="0" tIns="0" rIns="0" bIns="0" rtlCol="0" anchor="ctr"/>
+          <a:lstStyle/>
+          <a:p>
+            <a:pPr marL="0" indent="0">
+              <a:buNone/>
+            </a:pPr>
+            <a:r>
+              <a:rPr lang="en-US" sz="1400" b="1" dirty="0">
+                <a:solidFill>
+                  <a:srgbClr val="000000"/>
+                </a:solidFill>
+                <a:latin typeface="Calibri" pitchFamily="34" charset="0"/>
+                <a:ea typeface="Calibri" pitchFamily="34" charset="-122"/>
+                <a:cs typeface="Calibri" pitchFamily="34" charset="-120"/>
+              </a:rPr>
+              <a:t>Review &amp; Date:</a:t>
+            </a:r>
+            <a:endParaRPr lang="en-US" sz="1400" dirty="0"/>
+          </a:p>
+        </p:txBody>
+      </p:sp>
+      <p:sp>
+        <p:nvSpPr>
+          <p:cNvPr id="17" name="Text 14"/>
+          <p:cNvSpPr txBox="1"/>
+          <p:nvPr/>
+        </p:nvSpPr>
+        <p:spPr>
+          <a:xfrm>
+            <a:off x="3474720" y="4846320"/>
+            <a:ext cx="4023360" cy="384048"/>
+          </a:xfrm>
+          <a:prstGeom prst="rect">
+            <a:avLst/>
+          </a:prstGeom>
+          <a:noFill/>
+          <a:ln/>
+        </p:spPr>
+        <p:txBody>
+          <a:bodyPr wrap="square" lIns="0" tIns="0" rIns="0" bIns="0" rtlCol="0" anchor="ctr"/>
+          <a:lstStyle/>
+          <a:p>
+            <a:pPr marL="0" indent="0">
+              <a:buNone/>
+            </a:pPr>
+            <a:r>
+              <a:rPr lang="en-US" sz="1400" dirty="0">
+                <a:solidFill>
+                  <a:srgbClr val="000000"/>
+                </a:solidFill>
+                <a:latin typeface="Calibri" pitchFamily="34" charset="0"/>
+                <a:ea typeface="Calibri" pitchFamily="34" charset="-122"/>
+                <a:cs typeface="Calibri" pitchFamily="34" charset="-120"/>
+              </a:rPr>
+              <a:t>Review-I  ·  02.09.2026 (Wednesday)</a:t>
+            </a:r>
+            <a:endParaRPr lang="en-US" sz="1400" dirty="0"/>
+          </a:p>
+        </p:txBody>
+      </p:sp>
+      <p:sp>
+        <p:nvSpPr>
+          <p:cNvPr id="18" name="Shape 15"/>
+          <p:cNvSpPr/>
+          <p:nvPr/>
+        </p:nvSpPr>
+        <p:spPr>
+          <a:xfrm>
+            <a:off x="3474720" y="5248656"/>
+            <a:ext cx="4023360" cy="0"/>
+          </a:xfrm>
+          <a:prstGeom prst="line">
+            <a:avLst/>
+          </a:prstGeom>
+          <a:noFill/>
+          <a:ln w="12700">
+            <a:solidFill>
+              <a:srgbClr val="BFBFBF"/>
+            </a:solidFill>
+            <a:prstDash val="solid"/>
+          </a:ln>
+        </p:spPr>
+        <p:txBody>
+          <a:bodyPr/>
+          <a:lstStyle/>
+          <a:p>
+            <a:endParaRPr lang="en-US"/>
+          </a:p>
+        </p:txBody>
+      </p:sp>
+      <p:sp>
+        <p:nvSpPr>
+          <p:cNvPr id="19" name="Shape 16"/>
+          <p:cNvSpPr/>
+          <p:nvPr/>
+        </p:nvSpPr>
+        <p:spPr>
+          <a:xfrm>
+            <a:off x="8046720" y="3063240"/>
+            <a:ext cx="3657600" cy="2194560"/>
+          </a:xfrm>
+          <a:prstGeom prst="rect">
+            <a:avLst/>
+          </a:prstGeom>
+          <a:solidFill>
+            <a:srgbClr val="FFFFFF"/>
+          </a:solidFill>
+          <a:ln w="15875">
+            <a:solidFill>
+              <a:srgbClr val="1D2F82"/>
+            </a:solidFill>
+            <a:prstDash val="solid"/>
+          </a:ln>
+        </p:spPr>
+        <p:txBody>
+          <a:bodyPr/>
+          <a:lstStyle/>
+          <a:p>
+            <a:endParaRPr lang="en-US"/>
+          </a:p>
+        </p:txBody>
+      </p:sp>
+      <p:sp>
+        <p:nvSpPr>
+          <p:cNvPr id="20" name="Text 17"/>
+          <p:cNvSpPr txBox="1"/>
+          <p:nvPr/>
+        </p:nvSpPr>
+        <p:spPr>
+          <a:xfrm>
+            <a:off x="8229600" y="3246120"/>
+            <a:ext cx="3291840" cy="365760"/>
+          </a:xfrm>
+          <a:prstGeom prst="rect">
+            <a:avLst/>
+          </a:prstGeom>
+          <a:noFill/>
+          <a:ln/>
+        </p:spPr>
+        <p:txBody>
+          <a:bodyPr wrap="square" lIns="0" tIns="0" rIns="0" bIns="0" rtlCol="0" anchor="ctr"/>
+          <a:lstStyle/>
+          <a:p>
+            <a:pPr marL="0" indent="0">
+              <a:buNone/>
+            </a:pPr>
+            <a:r>
+              <a:rPr lang="en-US" sz="1400" b="1" dirty="0">
+                <a:solidFill>
+                  <a:srgbClr val="1D2F82"/>
+                </a:solidFill>
+                <a:latin typeface="Calibri" pitchFamily="34" charset="0"/>
+                <a:ea typeface="Calibri" pitchFamily="34" charset="-122"/>
+                <a:cs typeface="Calibri" pitchFamily="34" charset="-120"/>
+              </a:rPr>
+              <a:t>Guide's Signature with Date</a:t>
+            </a:r>
+            <a:endParaRPr lang="en-US" sz="1400" dirty="0"/>
+          </a:p>
+        </p:txBody>
+      </p:sp>
+      <p:sp>
+        <p:nvSpPr>
+          <p:cNvPr id="21" name="Text 18"/>
+          <p:cNvSpPr txBox="1"/>
+          <p:nvPr/>
+        </p:nvSpPr>
+        <p:spPr>
+          <a:xfrm>
+            <a:off x="8229600" y="3886200"/>
+            <a:ext cx="3291840" cy="320040"/>
+          </a:xfrm>
+          <a:prstGeom prst="rect">
+            <a:avLst/>
+          </a:prstGeom>
+          <a:noFill/>
+          <a:ln/>
+        </p:spPr>
+        <p:txBody>
+          <a:bodyPr wrap="square" lIns="0" tIns="0" rIns="0" bIns="0" rtlCol="0" anchor="ctr"/>
+          <a:lstStyle/>
+          <a:p>
+            <a:pPr marL="0" indent="0">
+              <a:buNone/>
+            </a:pPr>
+            <a:r>
+              <a:rPr lang="en-US" sz="1300" dirty="0">
+                <a:solidFill>
+                  <a:srgbClr val="000000"/>
+                </a:solidFill>
+                <a:latin typeface="Calibri" pitchFamily="34" charset="0"/>
+                <a:ea typeface="Calibri" pitchFamily="34" charset="-122"/>
+                <a:cs typeface="Calibri" pitchFamily="34" charset="-120"/>
+              </a:rPr>
+              <a:t>Signature: _____________________</a:t>
+            </a:r>
+            <a:endParaRPr lang="en-US" sz="1300" dirty="0"/>
+          </a:p>
+        </p:txBody>
+      </p:sp>
+      <p:sp>
+        <p:nvSpPr>
+          <p:cNvPr id="22" name="Text 19"/>
+          <p:cNvSpPr txBox="1"/>
+          <p:nvPr/>
+        </p:nvSpPr>
+        <p:spPr>
+          <a:xfrm>
+            <a:off x="8229600" y="4434840"/>
+            <a:ext cx="3291840" cy="320040"/>
+          </a:xfrm>
+          <a:prstGeom prst="rect">
+            <a:avLst/>
+          </a:prstGeom>
+          <a:noFill/>
+          <a:ln/>
+        </p:spPr>
+        <p:txBody>
+          <a:bodyPr wrap="square" lIns="0" tIns="0" rIns="0" bIns="0" rtlCol="0" anchor="ctr"/>
+          <a:lstStyle/>
+          <a:p>
+            <a:pPr marL="0" indent="0">
+              <a:buNone/>
+            </a:pPr>
+            <a:r>
+              <a:rPr lang="en-US" sz="1300" dirty="0">
+                <a:solidFill>
+                  <a:srgbClr val="000000"/>
+                </a:solidFill>
+                <a:latin typeface="Calibri" pitchFamily="34" charset="0"/>
+                <a:ea typeface="Calibri" pitchFamily="34" charset="-122"/>
+                <a:cs typeface="Calibri" pitchFamily="34" charset="-120"/>
+              </a:rPr>
+              <a:t>Date: _________________________</a:t>
+            </a:r>
+            <a:endParaRPr lang="en-US" sz="1300" dirty="0"/>
+          </a:p>
+        </p:txBody>
+      </p:sp>
+      <p:sp>
+        <p:nvSpPr>
+          <p:cNvPr id="23" name="Text 20"/>
+          <p:cNvSpPr txBox="1"/>
+          <p:nvPr/>
+        </p:nvSpPr>
+        <p:spPr>
+          <a:xfrm>
+            <a:off x="822960" y="5760720"/>
+            <a:ext cx="10607040" cy="548640"/>
+          </a:xfrm>
+          <a:prstGeom prst="rect">
+            <a:avLst/>
+          </a:prstGeom>
+          <a:noFill/>
+          <a:ln/>
+        </p:spPr>
+        <p:txBody>
+          <a:bodyPr wrap="square" lIns="0" tIns="0" rIns="0" bIns="0" rtlCol="0" anchor="ctr"/>
+          <a:lstStyle/>
+          <a:p>
+            <a:pPr marL="0" indent="0">
+              <a:buNone/>
+            </a:pPr>
+            <a:r>
+              <a:rPr lang="en-US" sz="1200" i="1" dirty="0">
+                <a:solidFill>
+                  <a:srgbClr val="000000"/>
+                </a:solidFill>
+                <a:latin typeface="Calibri" pitchFamily="34" charset="0"/>
+                <a:ea typeface="Calibri" pitchFamily="34" charset="-122"/>
+                <a:cs typeface="Calibri" pitchFamily="34" charset="-120"/>
+              </a:rPr>
+              <a:t>Approval is mandatory before every review. After signing, scan this slide and keep the scanned copy as Slide 1 of the presentation.</a:t>
+            </a:r>
+            <a:endParaRPr lang="en-US" sz="1200" dirty="0"/>
+          </a:p>
+        </p:txBody>
+      </p:sp>
+    </p:spTree>
+  </p:cSld>
+  <p:clrMapOvr>
+    <a:masterClrMapping/>
+  </p:clrMapOvr>
+</p:sld>
+</file>
+
+<file path=ppt/slides/slide20.xml><?xml version="1.0" encoding="utf-8"?>
+<p:sld xmlns:a="http://schemas.openxmlformats.org/drawingml/2006/main" xmlns:r="http://schemas.openxmlformats.org/officeDocument/2006/relationships" xmlns:p="http://schemas.openxmlformats.org/presentationml/2006/main">
+  <p:cSld name="Slide 10">
+    <p:bg>
+      <p:bgPr>
+        <a:solidFill>
+          <a:srgbClr val="FFFFFF"/>
+        </a:solidFill>
+        <a:effectLst/>
+      </p:bgPr>
+    </p:bg>
+    <p:spTree>
+      <p:nvGrpSpPr>
+        <p:cNvPr id="1" name=""/>
+        <p:cNvGrpSpPr/>
+        <p:nvPr/>
+      </p:nvGrpSpPr>
+      <p:grpSpPr>
+        <a:xfrm>
+          <a:off x="0" y="0"/>
+          <a:ext cx="0" cy="0"/>
+          <a:chOff x="0" y="0"/>
+          <a:chExt cx="0" cy="0"/>
+        </a:xfrm>
+      </p:grpSpPr>
+      <p:sp>
+        <p:nvSpPr>
+          <p:cNvPr id="2" name="Text 0"/>
+          <p:cNvSpPr txBox="1"/>
+          <p:nvPr/>
+        </p:nvSpPr>
+        <p:spPr>
+          <a:xfrm>
+            <a:off x="11460175" y="6446520"/>
+            <a:ext cx="457200" cy="274320"/>
+          </a:xfrm>
+          <a:prstGeom prst="rect">
+            <a:avLst/>
+          </a:prstGeom>
+          <a:noFill/>
+          <a:ln/>
+        </p:spPr>
+        <p:txBody>
+          <a:bodyPr wrap="square" lIns="0" tIns="0" rIns="0" bIns="0" rtlCol="0" anchor="ctr"/>
+          <a:lstStyle/>
+          <a:p>
+            <a:pPr marL="0" indent="0" algn="r">
+              <a:buNone/>
+            </a:pPr>
+            <a:r>
+              <a:rPr lang="en-US" sz="1000" dirty="0">
+                <a:solidFill>
+                  <a:srgbClr val="808080"/>
+                </a:solidFill>
+                <a:latin typeface="Calibri" pitchFamily="34" charset="0"/>
+                <a:ea typeface="Calibri" pitchFamily="34" charset="-122"/>
+                <a:cs typeface="Calibri" pitchFamily="34" charset="-120"/>
+              </a:rPr>
+              <a:t>10</a:t>
+            </a:r>
+            <a:endParaRPr lang="en-US" sz="1000" dirty="0"/>
+          </a:p>
+        </p:txBody>
+      </p:sp>
+      <p:sp>
+        <p:nvSpPr>
+          <p:cNvPr id="3" name="Text 1"/>
+          <p:cNvSpPr txBox="1"/>
+          <p:nvPr/>
+        </p:nvSpPr>
+        <p:spPr>
+          <a:xfrm>
+            <a:off x="548640" y="320040"/>
+            <a:ext cx="9601200" cy="685800"/>
+          </a:xfrm>
+          <a:prstGeom prst="rect">
+            <a:avLst/>
+          </a:prstGeom>
+          <a:noFill/>
+          <a:ln/>
+        </p:spPr>
+        <p:txBody>
+          <a:bodyPr wrap="square" lIns="0" tIns="0" rIns="0" bIns="0" rtlCol="0" anchor="ctr"/>
+          <a:lstStyle/>
+          <a:p>
+            <a:pPr marL="0" indent="0">
+              <a:buNone/>
+            </a:pPr>
+            <a:r>
+              <a:rPr lang="en-US" sz="2800" b="1" dirty="0">
+                <a:solidFill>
+                  <a:srgbClr val="1D2F82"/>
+                </a:solidFill>
+                <a:latin typeface="Calibri" pitchFamily="34" charset="0"/>
+                <a:ea typeface="Calibri" pitchFamily="34" charset="-122"/>
+                <a:cs typeface="Calibri" pitchFamily="34" charset="-120"/>
+              </a:rPr>
+              <a:t>References</a:t>
+            </a:r>
+            <a:endParaRPr lang="en-US" sz="2800" dirty="0"/>
+          </a:p>
+        </p:txBody>
+      </p:sp>
+      <p:pic>
+        <p:nvPicPr>
+          <p:cNvPr id="4" name="Image 0" descr="logo.png"/>
+          <p:cNvPicPr>
+            <a:picLocks noChangeAspect="1"/>
+          </p:cNvPicPr>
+          <p:nvPr/>
+        </p:nvPicPr>
+        <p:blipFill>
+          <a:blip r:embed="rId3"/>
+          <a:stretch>
+            <a:fillRect/>
+          </a:stretch>
+        </p:blipFill>
+        <p:spPr>
+          <a:xfrm>
+            <a:off x="10362895" y="320040"/>
+            <a:ext cx="1371600" cy="518746"/>
+          </a:xfrm>
+          <a:prstGeom prst="rect">
+            <a:avLst/>
+          </a:prstGeom>
+        </p:spPr>
+      </p:pic>
+      <p:sp>
+        <p:nvSpPr>
+          <p:cNvPr id="5" name="Text 2"/>
+          <p:cNvSpPr txBox="1"/>
+          <p:nvPr/>
+        </p:nvSpPr>
+        <p:spPr>
+          <a:xfrm>
+            <a:off x="640080" y="1325880"/>
+            <a:ext cx="10881360" cy="4937760"/>
+          </a:xfrm>
+          <a:prstGeom prst="rect">
+            <a:avLst/>
+          </a:prstGeom>
+          <a:noFill/>
+          <a:ln/>
+        </p:spPr>
+        <p:txBody>
+          <a:bodyPr wrap="square" lIns="0" tIns="0" rIns="0" bIns="0" rtlCol="0" anchor="t"/>
+          <a:lstStyle/>
+          <a:p>
+            <a:pPr marL="177800" indent="-177800">
+              <a:spcAft>
+                <a:spcPts val="800"/>
+              </a:spcAft>
+              <a:buSzPct val="100000"/>
+              <a:buChar char="•"/>
+            </a:pPr>
+            <a:r>
+              <a:rPr lang="en-US" sz="1600" dirty="0">
+                <a:solidFill>
+                  <a:srgbClr val="000000"/>
+                </a:solidFill>
+                <a:latin typeface="Calibri" pitchFamily="34" charset="0"/>
+                <a:ea typeface="Calibri" pitchFamily="34" charset="-122"/>
+                <a:cs typeface="Calibri" pitchFamily="34" charset="-120"/>
+              </a:rPr>
               <a:t>[1] A. Author, B. Author, “Paper title,” Journal Name, vol. X, no. Y, pp. 1–10, 2025.</a:t>
             </a:r>
             <a:endParaRPr lang="en-US" sz="1600" dirty="0"/>
@@ -1999,7 +4500,7 @@
 </p:sld>
 </file>
 
-<file path=ppt/slides/slide11.xml><?xml version="1.0" encoding="utf-8"?>
+<file path=ppt/slides/slide21.xml><?xml version="1.0" encoding="utf-8"?>
 <p:sld xmlns:a="http://schemas.openxmlformats.org/drawingml/2006/main" xmlns:r="http://schemas.openxmlformats.org/officeDocument/2006/relationships" xmlns:p="http://schemas.openxmlformats.org/presentationml/2006/main">
   <p:cSld name="Slide 11">
     <p:bg>
@@ -2134,7 +4635,615 @@
 </p:sld>
 </file>
 
-<file path=ppt/slides/slide12.xml><?xml version="1.0" encoding="utf-8"?>
+<file path=ppt/slides/slide3.xml><?xml version="1.0" encoding="utf-8"?>
+<p:sld xmlns:a="http://schemas.openxmlformats.org/drawingml/2006/main" xmlns:r="http://schemas.openxmlformats.org/officeDocument/2006/relationships" xmlns:p="http://schemas.openxmlformats.org/presentationml/2006/main">
+  <p:cSld name="Slide 3">
+    <p:bg>
+      <p:bgPr>
+        <a:solidFill>
+          <a:srgbClr val="FFFFFF"/>
+        </a:solidFill>
+        <a:effectLst/>
+      </p:bgPr>
+    </p:bg>
+    <p:spTree>
+      <p:nvGrpSpPr>
+        <p:cNvPr id="1" name=""/>
+        <p:cNvGrpSpPr/>
+        <p:nvPr/>
+      </p:nvGrpSpPr>
+      <p:grpSpPr>
+        <a:xfrm>
+          <a:off x="0" y="0"/>
+          <a:ext cx="0" cy="0"/>
+          <a:chOff x="0" y="0"/>
+          <a:chExt cx="0" cy="0"/>
+        </a:xfrm>
+      </p:grpSpPr>
+      <p:sp>
+        <p:nvSpPr>
+          <p:cNvPr id="2" name="Text 0"/>
+          <p:cNvSpPr txBox="1"/>
+          <p:nvPr/>
+        </p:nvSpPr>
+        <p:spPr>
+          <a:xfrm>
+            <a:off x="11460175" y="6446520"/>
+            <a:ext cx="457200" cy="274320"/>
+          </a:xfrm>
+          <a:prstGeom prst="rect">
+            <a:avLst/>
+          </a:prstGeom>
+          <a:noFill/>
+          <a:ln/>
+        </p:spPr>
+        <p:txBody>
+          <a:bodyPr wrap="square" lIns="0" tIns="0" rIns="0" bIns="0" rtlCol="0" anchor="ctr"/>
+          <a:lstStyle/>
+          <a:p>
+            <a:pPr marL="0" indent="0" algn="r">
+              <a:buNone/>
+            </a:pPr>
+            <a:r>
+              <a:rPr lang="en-US" sz="1000" dirty="0">
+                <a:solidFill>
+                  <a:srgbClr val="808080"/>
+                </a:solidFill>
+                <a:latin typeface="Calibri" pitchFamily="34" charset="0"/>
+                <a:ea typeface="Calibri" pitchFamily="34" charset="-122"/>
+                <a:cs typeface="Calibri" pitchFamily="34" charset="-120"/>
+              </a:rPr>
+              <a:t>3</a:t>
+            </a:r>
+            <a:endParaRPr lang="en-US" sz="1000" dirty="0"/>
+          </a:p>
+        </p:txBody>
+      </p:sp>
+      <p:sp>
+        <p:nvSpPr>
+          <p:cNvPr id="3" name="Text 1"/>
+          <p:cNvSpPr txBox="1"/>
+          <p:nvPr/>
+        </p:nvSpPr>
+        <p:spPr>
+          <a:xfrm>
+            <a:off x="548640" y="320040"/>
+            <a:ext cx="9601200" cy="685800"/>
+          </a:xfrm>
+          <a:prstGeom prst="rect">
+            <a:avLst/>
+          </a:prstGeom>
+          <a:noFill/>
+          <a:ln/>
+        </p:spPr>
+        <p:txBody>
+          <a:bodyPr wrap="square" lIns="0" tIns="0" rIns="0" bIns="0" rtlCol="0" anchor="ctr"/>
+          <a:lstStyle/>
+          <a:p>
+            <a:pPr marL="0" indent="0">
+              <a:buNone/>
+            </a:pPr>
+            <a:r>
+              <a:rPr lang="en-US" sz="2800" b="1" dirty="0">
+                <a:solidFill>
+                  <a:srgbClr val="1D2F82"/>
+                </a:solidFill>
+                <a:latin typeface="Calibri" pitchFamily="34" charset="0"/>
+                <a:ea typeface="Calibri" pitchFamily="34" charset="-122"/>
+                <a:cs typeface="Calibri" pitchFamily="34" charset="-120"/>
+              </a:rPr>
+              <a:t>Review-I — 02.09.2026 (5 Marks, 5%)</a:t>
+            </a:r>
+            <a:endParaRPr lang="en-US" sz="2800" dirty="0"/>
+          </a:p>
+        </p:txBody>
+      </p:sp>
+      <p:pic>
+        <p:nvPicPr>
+          <p:cNvPr id="4" name="Image 0" descr="logo.png"/>
+          <p:cNvPicPr>
+            <a:picLocks noChangeAspect="1"/>
+          </p:cNvPicPr>
+          <p:nvPr/>
+        </p:nvPicPr>
+        <p:blipFill>
+          <a:blip r:embed="rId3"/>
+          <a:stretch>
+            <a:fillRect/>
+          </a:stretch>
+        </p:blipFill>
+        <p:spPr>
+          <a:xfrm>
+            <a:off x="10362895" y="320040"/>
+            <a:ext cx="1371600" cy="518746"/>
+          </a:xfrm>
+          <a:prstGeom prst="rect">
+            <a:avLst/>
+          </a:prstGeom>
+        </p:spPr>
+      </p:pic>
+      <p:sp>
+        <p:nvSpPr>
+          <p:cNvPr id="5" name="Text 2"/>
+          <p:cNvSpPr txBox="1"/>
+          <p:nvPr/>
+        </p:nvSpPr>
+        <p:spPr>
+          <a:xfrm>
+            <a:off x="640080" y="1325880"/>
+            <a:ext cx="10881360" cy="4937760"/>
+          </a:xfrm>
+          <a:prstGeom prst="rect">
+            <a:avLst/>
+          </a:prstGeom>
+          <a:noFill/>
+          <a:ln/>
+        </p:spPr>
+        <p:txBody>
+          <a:bodyPr wrap="square" lIns="0" tIns="0" rIns="0" bIns="0" rtlCol="0" anchor="t"/>
+          <a:lstStyle/>
+          <a:p>
+            <a:pPr marL="177800" indent="-177800">
+              <a:spcAft>
+                <a:spcPts val="800"/>
+              </a:spcAft>
+              <a:buSzPct val="100000"/>
+              <a:buChar char="•"/>
+            </a:pPr>
+            <a:r>
+              <a:rPr lang="en-US" sz="1500" dirty="0">
+                <a:solidFill>
+                  <a:srgbClr val="000000"/>
+                </a:solidFill>
+                <a:latin typeface="Calibri" pitchFamily="34" charset="0"/>
+                <a:ea typeface="Calibri" pitchFamily="34" charset="-122"/>
+                <a:cs typeface="Calibri" pitchFamily="34" charset="-120"/>
+              </a:rPr>
+              <a:t>Focus: Proposed Solution &amp; 50% Work Completion.</a:t>
+            </a:r>
+            <a:endParaRPr lang="en-US" sz="1500" dirty="0"/>
+          </a:p>
+          <a:p>
+            <a:pPr marL="177800" indent="-177800">
+              <a:spcAft>
+                <a:spcPts val="800"/>
+              </a:spcAft>
+              <a:buSzPct val="100000"/>
+              <a:buChar char="•"/>
+            </a:pPr>
+            <a:r>
+              <a:rPr lang="en-US" sz="1500" dirty="0">
+                <a:solidFill>
+                  <a:srgbClr val="000000"/>
+                </a:solidFill>
+                <a:latin typeface="Calibri" pitchFamily="34" charset="0"/>
+                <a:ea typeface="Calibri" pitchFamily="34" charset="-122"/>
+                <a:cs typeface="Calibri" pitchFamily="34" charset="-120"/>
+              </a:rPr>
+              <a:t>Duration: 8–10 minutes.</a:t>
+            </a:r>
+            <a:endParaRPr lang="en-US" sz="1500" dirty="0"/>
+          </a:p>
+          <a:p>
+            <a:pPr marL="177800" indent="-177800">
+              <a:spcAft>
+                <a:spcPts val="800"/>
+              </a:spcAft>
+              <a:buSzPct val="100000"/>
+              <a:buChar char="•"/>
+            </a:pPr>
+            <a:r>
+              <a:rPr lang="en-US" sz="1500" dirty="0">
+                <a:solidFill>
+                  <a:srgbClr val="000000"/>
+                </a:solidFill>
+                <a:latin typeface="Calibri" pitchFamily="34" charset="0"/>
+                <a:ea typeface="Calibri" pitchFamily="34" charset="-122"/>
+                <a:cs typeface="Calibri" pitchFamily="34" charset="-120"/>
+              </a:rPr>
+              <a:t>Presentation contents:</a:t>
+            </a:r>
+            <a:endParaRPr lang="en-US" sz="1500" dirty="0"/>
+          </a:p>
+          <a:p>
+            <a:pPr marL="355600" lvl="1" indent="-177800">
+              <a:spcAft>
+                <a:spcPts val="400"/>
+              </a:spcAft>
+              <a:buSzPct val="100000"/>
+              <a:buChar char="•"/>
+            </a:pPr>
+            <a:r>
+              <a:rPr lang="en-US" sz="1500" dirty="0">
+                <a:solidFill>
+                  <a:srgbClr val="000000"/>
+                </a:solidFill>
+                <a:latin typeface="Calibri" pitchFamily="34" charset="0"/>
+                <a:ea typeface="Calibri" pitchFamily="34" charset="-122"/>
+                <a:cs typeface="Calibri" pitchFamily="34" charset="-120"/>
+              </a:rPr>
+              <a:t>Signed &amp; scanned title slide (Slide 1)</a:t>
+            </a:r>
+            <a:endParaRPr lang="en-US" sz="1500" dirty="0"/>
+          </a:p>
+          <a:p>
+            <a:pPr marL="355600" lvl="1" indent="-177800">
+              <a:spcAft>
+                <a:spcPts val="400"/>
+              </a:spcAft>
+              <a:buSzPct val="100000"/>
+              <a:buChar char="•"/>
+            </a:pPr>
+            <a:r>
+              <a:rPr lang="en-US" sz="1500" dirty="0">
+                <a:solidFill>
+                  <a:srgbClr val="000000"/>
+                </a:solidFill>
+                <a:latin typeface="Calibri" pitchFamily="34" charset="0"/>
+                <a:ea typeface="Calibri" pitchFamily="34" charset="-122"/>
+                <a:cs typeface="Calibri" pitchFamily="34" charset="-120"/>
+              </a:rPr>
+              <a:t>Problem statement and background</a:t>
+            </a:r>
+            <a:endParaRPr lang="en-US" sz="1500" dirty="0"/>
+          </a:p>
+          <a:p>
+            <a:pPr marL="355600" lvl="1" indent="-177800">
+              <a:spcAft>
+                <a:spcPts val="400"/>
+              </a:spcAft>
+              <a:buSzPct val="100000"/>
+              <a:buChar char="•"/>
+            </a:pPr>
+            <a:r>
+              <a:rPr lang="en-US" sz="1500" dirty="0">
+                <a:solidFill>
+                  <a:srgbClr val="000000"/>
+                </a:solidFill>
+                <a:latin typeface="Calibri" pitchFamily="34" charset="0"/>
+                <a:ea typeface="Calibri" pitchFamily="34" charset="-122"/>
+                <a:cs typeface="Calibri" pitchFamily="34" charset="-120"/>
+              </a:rPr>
+              <a:t>Literature survey — minimum 8–10 recent references</a:t>
+            </a:r>
+            <a:endParaRPr lang="en-US" sz="1500" dirty="0"/>
+          </a:p>
+          <a:p>
+            <a:pPr marL="355600" lvl="1" indent="-177800">
+              <a:spcAft>
+                <a:spcPts val="400"/>
+              </a:spcAft>
+              <a:buSzPct val="100000"/>
+              <a:buChar char="•"/>
+            </a:pPr>
+            <a:r>
+              <a:rPr lang="en-US" sz="1500" dirty="0">
+                <a:solidFill>
+                  <a:srgbClr val="000000"/>
+                </a:solidFill>
+                <a:latin typeface="Calibri" pitchFamily="34" charset="0"/>
+                <a:ea typeface="Calibri" pitchFamily="34" charset="-122"/>
+                <a:cs typeface="Calibri" pitchFamily="34" charset="-120"/>
+              </a:rPr>
+              <a:t>Existing solutions and their limitations</a:t>
+            </a:r>
+            <a:endParaRPr lang="en-US" sz="1500" dirty="0"/>
+          </a:p>
+          <a:p>
+            <a:pPr marL="355600" lvl="1" indent="-177800">
+              <a:spcAft>
+                <a:spcPts val="400"/>
+              </a:spcAft>
+              <a:buSzPct val="100000"/>
+              <a:buChar char="•"/>
+            </a:pPr>
+            <a:r>
+              <a:rPr lang="en-US" sz="1500" dirty="0">
+                <a:solidFill>
+                  <a:srgbClr val="000000"/>
+                </a:solidFill>
+                <a:latin typeface="Calibri" pitchFamily="34" charset="0"/>
+                <a:ea typeface="Calibri" pitchFamily="34" charset="-122"/>
+                <a:cs typeface="Calibri" pitchFamily="34" charset="-120"/>
+              </a:rPr>
+              <a:t>Proposed solution, scope and methodology</a:t>
+            </a:r>
+            <a:endParaRPr lang="en-US" sz="1500" dirty="0"/>
+          </a:p>
+          <a:p>
+            <a:pPr marL="355600" lvl="1" indent="-177800">
+              <a:spcAft>
+                <a:spcPts val="400"/>
+              </a:spcAft>
+              <a:buSzPct val="100000"/>
+              <a:buChar char="•"/>
+            </a:pPr>
+            <a:r>
+              <a:rPr lang="en-US" sz="1500" dirty="0">
+                <a:solidFill>
+                  <a:srgbClr val="000000"/>
+                </a:solidFill>
+                <a:latin typeface="Calibri" pitchFamily="34" charset="0"/>
+                <a:ea typeface="Calibri" pitchFamily="34" charset="-122"/>
+                <a:cs typeface="Calibri" pitchFamily="34" charset="-120"/>
+              </a:rPr>
+              <a:t>50% work completed, timeline, tools &amp; technologies</a:t>
+            </a:r>
+            <a:endParaRPr lang="en-US" sz="1500" dirty="0"/>
+          </a:p>
+          <a:p>
+            <a:pPr marL="177800" indent="-177800">
+              <a:spcAft>
+                <a:spcPts val="800"/>
+              </a:spcAft>
+              <a:buSzPct val="100000"/>
+              <a:buChar char="•"/>
+            </a:pPr>
+            <a:r>
+              <a:rPr lang="en-US" sz="1500" dirty="0">
+                <a:solidFill>
+                  <a:srgbClr val="000000"/>
+                </a:solidFill>
+                <a:latin typeface="Calibri" pitchFamily="34" charset="0"/>
+                <a:ea typeface="Calibri" pitchFamily="34" charset="-122"/>
+                <a:cs typeface="Calibri" pitchFamily="34" charset="-120"/>
+              </a:rPr>
+              <a:t>Mark split-up: Problem clarity &amp; relevance (2), Literature survey quality (1), Proposed solution feasibility (1), Presentation quality (1).</a:t>
+            </a:r>
+            <a:endParaRPr lang="en-US" sz="1500" dirty="0"/>
+          </a:p>
+        </p:txBody>
+      </p:sp>
+    </p:spTree>
+  </p:cSld>
+  <p:clrMapOvr>
+    <a:masterClrMapping/>
+  </p:clrMapOvr>
+</p:sld>
+</file>
+
+<file path=ppt/slides/slide4.xml><?xml version="1.0" encoding="utf-8"?>
+<p:sld xmlns:a="http://schemas.openxmlformats.org/drawingml/2006/main" xmlns:r="http://schemas.openxmlformats.org/officeDocument/2006/relationships" xmlns:p="http://schemas.openxmlformats.org/presentationml/2006/main">
+  <p:cSld name="Slide 4">
+    <p:bg>
+      <p:bgPr>
+        <a:solidFill>
+          <a:srgbClr val="FFFFFF"/>
+        </a:solidFill>
+        <a:effectLst/>
+      </p:bgPr>
+    </p:bg>
+    <p:spTree>
+      <p:nvGrpSpPr>
+        <p:cNvPr id="1" name=""/>
+        <p:cNvGrpSpPr/>
+        <p:nvPr/>
+      </p:nvGrpSpPr>
+      <p:grpSpPr>
+        <a:xfrm>
+          <a:off x="0" y="0"/>
+          <a:ext cx="0" cy="0"/>
+          <a:chOff x="0" y="0"/>
+          <a:chExt cx="0" cy="0"/>
+        </a:xfrm>
+      </p:grpSpPr>
+      <p:sp>
+        <p:nvSpPr>
+          <p:cNvPr id="2" name="Text 0"/>
+          <p:cNvSpPr txBox="1"/>
+          <p:nvPr/>
+        </p:nvSpPr>
+        <p:spPr>
+          <a:xfrm>
+            <a:off x="11460175" y="6446520"/>
+            <a:ext cx="457200" cy="274320"/>
+          </a:xfrm>
+          <a:prstGeom prst="rect">
+            <a:avLst/>
+          </a:prstGeom>
+          <a:noFill/>
+          <a:ln/>
+        </p:spPr>
+        <p:txBody>
+          <a:bodyPr wrap="square" lIns="0" tIns="0" rIns="0" bIns="0" rtlCol="0" anchor="ctr"/>
+          <a:lstStyle/>
+          <a:p>
+            <a:pPr marL="0" indent="0" algn="r">
+              <a:buNone/>
+            </a:pPr>
+            <a:r>
+              <a:rPr lang="en-US" sz="1000" dirty="0">
+                <a:solidFill>
+                  <a:srgbClr val="808080"/>
+                </a:solidFill>
+                <a:latin typeface="Calibri" pitchFamily="34" charset="0"/>
+                <a:ea typeface="Calibri" pitchFamily="34" charset="-122"/>
+                <a:cs typeface="Calibri" pitchFamily="34" charset="-120"/>
+              </a:rPr>
+              <a:t>4</a:t>
+            </a:r>
+            <a:endParaRPr lang="en-US" sz="1000" dirty="0"/>
+          </a:p>
+        </p:txBody>
+      </p:sp>
+      <p:sp>
+        <p:nvSpPr>
+          <p:cNvPr id="3" name="Text 1"/>
+          <p:cNvSpPr txBox="1"/>
+          <p:nvPr/>
+        </p:nvSpPr>
+        <p:spPr>
+          <a:xfrm>
+            <a:off x="548640" y="320040"/>
+            <a:ext cx="9601200" cy="685800"/>
+          </a:xfrm>
+          <a:prstGeom prst="rect">
+            <a:avLst/>
+          </a:prstGeom>
+          <a:noFill/>
+          <a:ln/>
+        </p:spPr>
+        <p:txBody>
+          <a:bodyPr wrap="square" lIns="0" tIns="0" rIns="0" bIns="0" rtlCol="0" anchor="ctr"/>
+          <a:lstStyle/>
+          <a:p>
+            <a:pPr marL="0" indent="0">
+              <a:buNone/>
+            </a:pPr>
+            <a:r>
+              <a:rPr lang="en-US" sz="2800" b="1" dirty="0">
+                <a:solidFill>
+                  <a:srgbClr val="1D2F82"/>
+                </a:solidFill>
+                <a:latin typeface="Calibri" pitchFamily="34" charset="0"/>
+                <a:ea typeface="Calibri" pitchFamily="34" charset="-122"/>
+                <a:cs typeface="Calibri" pitchFamily="34" charset="-120"/>
+              </a:rPr>
+              <a:t>Problem Statement &amp; Background</a:t>
+            </a:r>
+            <a:endParaRPr lang="en-US" sz="2800" dirty="0"/>
+          </a:p>
+        </p:txBody>
+      </p:sp>
+      <p:pic>
+        <p:nvPicPr>
+          <p:cNvPr id="4" name="Image 0" descr="logo.png"/>
+          <p:cNvPicPr>
+            <a:picLocks noChangeAspect="1"/>
+          </p:cNvPicPr>
+          <p:nvPr/>
+        </p:nvPicPr>
+        <p:blipFill>
+          <a:blip r:embed="rId3"/>
+          <a:stretch>
+            <a:fillRect/>
+          </a:stretch>
+        </p:blipFill>
+        <p:spPr>
+          <a:xfrm>
+            <a:off x="10362895" y="320040"/>
+            <a:ext cx="1371600" cy="518746"/>
+          </a:xfrm>
+          <a:prstGeom prst="rect">
+            <a:avLst/>
+          </a:prstGeom>
+        </p:spPr>
+      </p:pic>
+      <p:sp>
+        <p:nvSpPr>
+          <p:cNvPr id="5" name="Text 2"/>
+          <p:cNvSpPr txBox="1"/>
+          <p:nvPr/>
+        </p:nvSpPr>
+        <p:spPr>
+          <a:xfrm>
+            <a:off x="640080" y="1325880"/>
+            <a:ext cx="10881360" cy="4937760"/>
+          </a:xfrm>
+          <a:prstGeom prst="rect">
+            <a:avLst/>
+          </a:prstGeom>
+          <a:noFill/>
+          <a:ln/>
+        </p:spPr>
+        <p:txBody>
+          <a:bodyPr wrap="square" lIns="0" tIns="0" rIns="0" bIns="0" rtlCol="0" anchor="t"/>
+          <a:lstStyle/>
+          <a:p>
+            <a:pPr marL="177800" indent="-177800">
+              <a:spcAft>
+                <a:spcPts val="800"/>
+              </a:spcAft>
+              <a:buSzPct val="100000"/>
+              <a:buChar char="•"/>
+            </a:pPr>
+            <a:r>
+              <a:rPr lang="en-US" sz="1600" dirty="0">
+                <a:solidFill>
+                  <a:srgbClr val="000000"/>
+                </a:solidFill>
+                <a:latin typeface="Calibri" pitchFamily="34" charset="0"/>
+                <a:ea typeface="Calibri" pitchFamily="34" charset="-122"/>
+                <a:cs typeface="Calibri" pitchFamily="34" charset="-120"/>
+              </a:rPr>
+              <a:t>Problem Statement:</a:t>
+            </a:r>
+            <a:endParaRPr lang="en-US" sz="1600" dirty="0"/>
+          </a:p>
+          <a:p>
+            <a:pPr marL="177800" indent="-177800">
+              <a:spcAft>
+                <a:spcPts val="800"/>
+              </a:spcAft>
+              <a:buSzPct val="100000"/>
+              <a:buChar char="•"/>
+            </a:pPr>
+            <a:r>
+              <a:rPr lang="en-US" sz="1600" dirty="0">
+                <a:solidFill>
+                  <a:srgbClr val="000000"/>
+                </a:solidFill>
+                <a:latin typeface="Calibri" pitchFamily="34" charset="0"/>
+                <a:ea typeface="Calibri" pitchFamily="34" charset="-122"/>
+                <a:cs typeface="Calibri" pitchFamily="34" charset="-120"/>
+              </a:rPr>
+              <a:t>Background &amp; Significance:</a:t>
+            </a:r>
+            <a:endParaRPr lang="en-US" sz="1600" dirty="0"/>
+          </a:p>
+          <a:p>
+            <a:pPr marL="177800" indent="-177800">
+              <a:spcAft>
+                <a:spcPts val="800"/>
+              </a:spcAft>
+              <a:buSzPct val="100000"/>
+              <a:buChar char="•"/>
+            </a:pPr>
+            <a:r>
+              <a:rPr lang="en-US" sz="1600" dirty="0">
+                <a:solidFill>
+                  <a:srgbClr val="000000"/>
+                </a:solidFill>
+                <a:latin typeface="Calibri" pitchFamily="34" charset="0"/>
+                <a:ea typeface="Calibri" pitchFamily="34" charset="-122"/>
+                <a:cs typeface="Calibri" pitchFamily="34" charset="-120"/>
+              </a:rPr>
+              <a:t>Existing Solutions:</a:t>
+            </a:r>
+            <a:endParaRPr lang="en-US" sz="1600" dirty="0"/>
+          </a:p>
+          <a:p>
+            <a:pPr marL="177800" indent="-177800">
+              <a:spcAft>
+                <a:spcPts val="800"/>
+              </a:spcAft>
+              <a:buSzPct val="100000"/>
+              <a:buChar char="•"/>
+            </a:pPr>
+            <a:r>
+              <a:rPr lang="en-US" sz="1600" dirty="0">
+                <a:solidFill>
+                  <a:srgbClr val="000000"/>
+                </a:solidFill>
+                <a:latin typeface="Calibri" pitchFamily="34" charset="0"/>
+                <a:ea typeface="Calibri" pitchFamily="34" charset="-122"/>
+                <a:cs typeface="Calibri" pitchFamily="34" charset="-120"/>
+              </a:rPr>
+              <a:t>Limitations / Research Gap:</a:t>
+            </a:r>
+            <a:endParaRPr lang="en-US" sz="1600" dirty="0"/>
+          </a:p>
+        </p:txBody>
+      </p:sp>
+    </p:spTree>
+  </p:cSld>
+  <p:clrMapOvr>
+    <a:masterClrMapping/>
+  </p:clrMapOvr>
+</p:sld>
+</file>
+
+<file path=ppt/slides/slide5.xml><?xml version="1.0" encoding="utf-8"?>
 <p:sld xmlns:a="http://schemas.openxmlformats.org/drawingml/2006/main" xmlns:r="http://schemas.openxmlformats.org/officeDocument/2006/relationships" xmlns:p="http://schemas.openxmlformats.org/presentationml/2006/main">
   <p:cSld name="Slide 5">
     <p:bg>
@@ -4446,2981 +7555,7 @@
 </p:sld>
 </file>
 
-<file path=ppt/slides/slide13.xml><?xml version="1.0" encoding="utf-8"?>
-<p:sld xmlns:a="http://schemas.openxmlformats.org/drawingml/2006/main" xmlns:r="http://schemas.openxmlformats.org/officeDocument/2006/relationships" xmlns:p="http://schemas.openxmlformats.org/presentationml/2006/main">
-  <p:cSld name="Slide 9">
-    <p:bg>
-      <p:bgPr>
-        <a:solidFill>
-          <a:srgbClr val="FFFFFF"/>
-        </a:solidFill>
-        <a:effectLst/>
-      </p:bgPr>
-    </p:bg>
-    <p:spTree>
-      <p:nvGrpSpPr>
-        <p:cNvPr id="1" name=""/>
-        <p:cNvGrpSpPr/>
-        <p:nvPr/>
-      </p:nvGrpSpPr>
-      <p:grpSpPr>
-        <a:xfrm>
-          <a:off x="0" y="0"/>
-          <a:ext cx="0" cy="0"/>
-          <a:chOff x="0" y="0"/>
-          <a:chExt cx="0" cy="0"/>
-        </a:xfrm>
-      </p:grpSpPr>
-      <p:sp>
-        <p:nvSpPr>
-          <p:cNvPr id="2" name="Text 0"/>
-          <p:cNvSpPr txBox="1"/>
-          <p:nvPr/>
-        </p:nvSpPr>
-        <p:spPr>
-          <a:xfrm>
-            <a:off x="11460175" y="6446520"/>
-            <a:ext cx="457200" cy="274320"/>
-          </a:xfrm>
-          <a:prstGeom prst="rect">
-            <a:avLst/>
-          </a:prstGeom>
-          <a:noFill/>
-          <a:ln/>
-        </p:spPr>
-        <p:txBody>
-          <a:bodyPr wrap="square" lIns="0" tIns="0" rIns="0" bIns="0" rtlCol="0" anchor="ctr"/>
-          <a:lstStyle/>
-          <a:p>
-            <a:pPr marL="0" indent="0" algn="r">
-              <a:buNone/>
-            </a:pPr>
-            <a:r>
-              <a:rPr lang="en-US" sz="1000" dirty="0">
-                <a:solidFill>
-                  <a:srgbClr val="808080"/>
-                </a:solidFill>
-                <a:latin typeface="Calibri" pitchFamily="34" charset="0"/>
-                <a:ea typeface="Calibri" pitchFamily="34" charset="-122"/>
-                <a:cs typeface="Calibri" pitchFamily="34" charset="-120"/>
-              </a:rPr>
-              <a:t>9</a:t>
-            </a:r>
-            <a:endParaRPr lang="en-US" sz="1000" dirty="0"/>
-          </a:p>
-        </p:txBody>
-      </p:sp>
-      <p:sp>
-        <p:nvSpPr>
-          <p:cNvPr id="3" name="Text 1"/>
-          <p:cNvSpPr txBox="1"/>
-          <p:nvPr/>
-        </p:nvSpPr>
-        <p:spPr>
-          <a:xfrm>
-            <a:off x="548640" y="320040"/>
-            <a:ext cx="9601200" cy="685800"/>
-          </a:xfrm>
-          <a:prstGeom prst="rect">
-            <a:avLst/>
-          </a:prstGeom>
-          <a:noFill/>
-          <a:ln/>
-        </p:spPr>
-        <p:txBody>
-          <a:bodyPr wrap="square" lIns="0" tIns="0" rIns="0" bIns="0" rtlCol="0" anchor="ctr"/>
-          <a:lstStyle/>
-          <a:p>
-            <a:pPr marL="0" indent="0">
-              <a:buNone/>
-            </a:pPr>
-            <a:r>
-              <a:rPr lang="en-US" sz="2800" b="1" dirty="0">
-                <a:solidFill>
-                  <a:srgbClr val="1D2F82"/>
-                </a:solidFill>
-                <a:latin typeface="Calibri" pitchFamily="34" charset="0"/>
-                <a:ea typeface="Calibri" pitchFamily="34" charset="-122"/>
-                <a:cs typeface="Calibri" pitchFamily="34" charset="-120"/>
-              </a:rPr>
-              <a:t>Results (contd.)</a:t>
-            </a:r>
-            <a:endParaRPr lang="en-US" sz="2800" dirty="0"/>
-          </a:p>
-        </p:txBody>
-      </p:sp>
-      <p:pic>
-        <p:nvPicPr>
-          <p:cNvPr id="4" name="Image 0" descr="logo.png"/>
-          <p:cNvPicPr>
-            <a:picLocks noChangeAspect="1"/>
-          </p:cNvPicPr>
-          <p:nvPr/>
-        </p:nvPicPr>
-        <p:blipFill>
-          <a:blip r:embed="rId3"/>
-          <a:stretch>
-            <a:fillRect/>
-          </a:stretch>
-        </p:blipFill>
-        <p:spPr>
-          <a:xfrm>
-            <a:off x="10362895" y="320040"/>
-            <a:ext cx="1371600" cy="518746"/>
-          </a:xfrm>
-          <a:prstGeom prst="rect">
-            <a:avLst/>
-          </a:prstGeom>
-        </p:spPr>
-      </p:pic>
-    </p:spTree>
-  </p:cSld>
-  <p:clrMapOvr>
-    <a:masterClrMapping/>
-  </p:clrMapOvr>
-</p:sld>
-</file>
-
-<file path=ppt/slides/slide14.xml><?xml version="1.0" encoding="utf-8"?>
-<p:sld xmlns:a="http://schemas.openxmlformats.org/drawingml/2006/main" xmlns:r="http://schemas.openxmlformats.org/officeDocument/2006/relationships" xmlns:p="http://schemas.openxmlformats.org/presentationml/2006/main">
-  <p:cSld name="Slide 9">
-    <p:bg>
-      <p:bgPr>
-        <a:solidFill>
-          <a:srgbClr val="FFFFFF"/>
-        </a:solidFill>
-        <a:effectLst/>
-      </p:bgPr>
-    </p:bg>
-    <p:spTree>
-      <p:nvGrpSpPr>
-        <p:cNvPr id="1" name=""/>
-        <p:cNvGrpSpPr/>
-        <p:nvPr/>
-      </p:nvGrpSpPr>
-      <p:grpSpPr>
-        <a:xfrm>
-          <a:off x="0" y="0"/>
-          <a:ext cx="0" cy="0"/>
-          <a:chOff x="0" y="0"/>
-          <a:chExt cx="0" cy="0"/>
-        </a:xfrm>
-      </p:grpSpPr>
-      <p:sp>
-        <p:nvSpPr>
-          <p:cNvPr id="2" name="Text 0"/>
-          <p:cNvSpPr txBox="1"/>
-          <p:nvPr/>
-        </p:nvSpPr>
-        <p:spPr>
-          <a:xfrm>
-            <a:off x="11460175" y="6446520"/>
-            <a:ext cx="457200" cy="274320"/>
-          </a:xfrm>
-          <a:prstGeom prst="rect">
-            <a:avLst/>
-          </a:prstGeom>
-          <a:noFill/>
-          <a:ln/>
-        </p:spPr>
-        <p:txBody>
-          <a:bodyPr wrap="square" lIns="0" tIns="0" rIns="0" bIns="0" rtlCol="0" anchor="ctr"/>
-          <a:lstStyle/>
-          <a:p>
-            <a:pPr marL="0" indent="0" algn="r">
-              <a:buNone/>
-            </a:pPr>
-            <a:r>
-              <a:rPr lang="en-US" sz="1000" dirty="0">
-                <a:solidFill>
-                  <a:srgbClr val="808080"/>
-                </a:solidFill>
-                <a:latin typeface="Calibri" pitchFamily="34" charset="0"/>
-                <a:ea typeface="Calibri" pitchFamily="34" charset="-122"/>
-                <a:cs typeface="Calibri" pitchFamily="34" charset="-120"/>
-              </a:rPr>
-              <a:t>9</a:t>
-            </a:r>
-            <a:endParaRPr lang="en-US" sz="1000" dirty="0"/>
-          </a:p>
-        </p:txBody>
-      </p:sp>
-      <p:sp>
-        <p:nvSpPr>
-          <p:cNvPr id="3" name="Text 1"/>
-          <p:cNvSpPr txBox="1"/>
-          <p:nvPr/>
-        </p:nvSpPr>
-        <p:spPr>
-          <a:xfrm>
-            <a:off x="548640" y="320040"/>
-            <a:ext cx="9601200" cy="685800"/>
-          </a:xfrm>
-          <a:prstGeom prst="rect">
-            <a:avLst/>
-          </a:prstGeom>
-          <a:noFill/>
-          <a:ln/>
-        </p:spPr>
-        <p:txBody>
-          <a:bodyPr wrap="square" lIns="0" tIns="0" rIns="0" bIns="0" rtlCol="0" anchor="ctr"/>
-          <a:lstStyle/>
-          <a:p>
-            <a:pPr marL="0" indent="0">
-              <a:buNone/>
-            </a:pPr>
-            <a:r>
-              <a:rPr lang="en-US" sz="2800" b="1" dirty="0">
-                <a:solidFill>
-                  <a:srgbClr val="1D2F82"/>
-                </a:solidFill>
-                <a:latin typeface="Calibri" pitchFamily="34" charset="0"/>
-                <a:ea typeface="Calibri" pitchFamily="34" charset="-122"/>
-                <a:cs typeface="Calibri" pitchFamily="34" charset="-120"/>
-              </a:rPr>
-              <a:t>Results (contd.)</a:t>
-            </a:r>
-            <a:endParaRPr lang="en-US" sz="2800" dirty="0"/>
-          </a:p>
-        </p:txBody>
-      </p:sp>
-      <p:pic>
-        <p:nvPicPr>
-          <p:cNvPr id="4" name="Image 0" descr="logo.png"/>
-          <p:cNvPicPr>
-            <a:picLocks noChangeAspect="1"/>
-          </p:cNvPicPr>
-          <p:nvPr/>
-        </p:nvPicPr>
-        <p:blipFill>
-          <a:blip r:embed="rId3"/>
-          <a:stretch>
-            <a:fillRect/>
-          </a:stretch>
-        </p:blipFill>
-        <p:spPr>
-          <a:xfrm>
-            <a:off x="10362895" y="320040"/>
-            <a:ext cx="1371600" cy="518746"/>
-          </a:xfrm>
-          <a:prstGeom prst="rect">
-            <a:avLst/>
-          </a:prstGeom>
-        </p:spPr>
-      </p:pic>
-    </p:spTree>
-  </p:cSld>
-  <p:clrMapOvr>
-    <a:masterClrMapping/>
-  </p:clrMapOvr>
-</p:sld>
-</file>
-
-<file path=ppt/slides/slide15.xml><?xml version="1.0" encoding="utf-8"?>
-<p:sld xmlns:a="http://schemas.openxmlformats.org/drawingml/2006/main" xmlns:r="http://schemas.openxmlformats.org/officeDocument/2006/relationships" xmlns:p="http://schemas.openxmlformats.org/presentationml/2006/main">
-  <p:cSld name="Slide 9">
-    <p:bg>
-      <p:bgPr>
-        <a:solidFill>
-          <a:srgbClr val="FFFFFF"/>
-        </a:solidFill>
-        <a:effectLst/>
-      </p:bgPr>
-    </p:bg>
-    <p:spTree>
-      <p:nvGrpSpPr>
-        <p:cNvPr id="1" name=""/>
-        <p:cNvGrpSpPr/>
-        <p:nvPr/>
-      </p:nvGrpSpPr>
-      <p:grpSpPr>
-        <a:xfrm>
-          <a:off x="0" y="0"/>
-          <a:ext cx="0" cy="0"/>
-          <a:chOff x="0" y="0"/>
-          <a:chExt cx="0" cy="0"/>
-        </a:xfrm>
-      </p:grpSpPr>
-      <p:sp>
-        <p:nvSpPr>
-          <p:cNvPr id="2" name="Text 0"/>
-          <p:cNvSpPr txBox="1"/>
-          <p:nvPr/>
-        </p:nvSpPr>
-        <p:spPr>
-          <a:xfrm>
-            <a:off x="11460175" y="6446520"/>
-            <a:ext cx="457200" cy="274320"/>
-          </a:xfrm>
-          <a:prstGeom prst="rect">
-            <a:avLst/>
-          </a:prstGeom>
-          <a:noFill/>
-          <a:ln/>
-        </p:spPr>
-        <p:txBody>
-          <a:bodyPr wrap="square" lIns="0" tIns="0" rIns="0" bIns="0" rtlCol="0" anchor="ctr"/>
-          <a:lstStyle/>
-          <a:p>
-            <a:pPr marL="0" indent="0" algn="r">
-              <a:buNone/>
-            </a:pPr>
-            <a:r>
-              <a:rPr lang="en-US" sz="1000" dirty="0">
-                <a:solidFill>
-                  <a:srgbClr val="808080"/>
-                </a:solidFill>
-                <a:latin typeface="Calibri" pitchFamily="34" charset="0"/>
-                <a:ea typeface="Calibri" pitchFamily="34" charset="-122"/>
-                <a:cs typeface="Calibri" pitchFamily="34" charset="-120"/>
-              </a:rPr>
-              <a:t>9</a:t>
-            </a:r>
-            <a:endParaRPr lang="en-US" sz="1000" dirty="0"/>
-          </a:p>
-        </p:txBody>
-      </p:sp>
-      <p:sp>
-        <p:nvSpPr>
-          <p:cNvPr id="3" name="Text 1"/>
-          <p:cNvSpPr txBox="1"/>
-          <p:nvPr/>
-        </p:nvSpPr>
-        <p:spPr>
-          <a:xfrm>
-            <a:off x="548640" y="320040"/>
-            <a:ext cx="9601200" cy="685800"/>
-          </a:xfrm>
-          <a:prstGeom prst="rect">
-            <a:avLst/>
-          </a:prstGeom>
-          <a:noFill/>
-          <a:ln/>
-        </p:spPr>
-        <p:txBody>
-          <a:bodyPr wrap="square" lIns="0" tIns="0" rIns="0" bIns="0" rtlCol="0" anchor="ctr"/>
-          <a:lstStyle/>
-          <a:p>
-            <a:pPr marL="0" indent="0">
-              <a:buNone/>
-            </a:pPr>
-            <a:r>
-              <a:rPr lang="en-US" sz="2800" b="1" dirty="0">
-                <a:solidFill>
-                  <a:srgbClr val="1D2F82"/>
-                </a:solidFill>
-                <a:latin typeface="Calibri" pitchFamily="34" charset="0"/>
-                <a:ea typeface="Calibri" pitchFamily="34" charset="-122"/>
-                <a:cs typeface="Calibri" pitchFamily="34" charset="-120"/>
-              </a:rPr>
-              <a:t>Results (contd.)</a:t>
-            </a:r>
-            <a:endParaRPr lang="en-US" sz="2800" dirty="0"/>
-          </a:p>
-        </p:txBody>
-      </p:sp>
-      <p:pic>
-        <p:nvPicPr>
-          <p:cNvPr id="4" name="Image 0" descr="logo.png"/>
-          <p:cNvPicPr>
-            <a:picLocks noChangeAspect="1"/>
-          </p:cNvPicPr>
-          <p:nvPr/>
-        </p:nvPicPr>
-        <p:blipFill>
-          <a:blip r:embed="rId3"/>
-          <a:stretch>
-            <a:fillRect/>
-          </a:stretch>
-        </p:blipFill>
-        <p:spPr>
-          <a:xfrm>
-            <a:off x="10362895" y="320040"/>
-            <a:ext cx="1371600" cy="518746"/>
-          </a:xfrm>
-          <a:prstGeom prst="rect">
-            <a:avLst/>
-          </a:prstGeom>
-        </p:spPr>
-      </p:pic>
-    </p:spTree>
-  </p:cSld>
-  <p:clrMapOvr>
-    <a:masterClrMapping/>
-  </p:clrMapOvr>
-</p:sld>
-</file>
-
-<file path=ppt/slides/slide16.xml><?xml version="1.0" encoding="utf-8"?>
-<p:sld xmlns:a="http://schemas.openxmlformats.org/drawingml/2006/main" xmlns:r="http://schemas.openxmlformats.org/officeDocument/2006/relationships" xmlns:p="http://schemas.openxmlformats.org/presentationml/2006/main">
-  <p:cSld name="Slide 4">
-    <p:bg>
-      <p:bgPr>
-        <a:solidFill>
-          <a:srgbClr val="FFFFFF"/>
-        </a:solidFill>
-        <a:effectLst/>
-      </p:bgPr>
-    </p:bg>
-    <p:spTree>
-      <p:nvGrpSpPr>
-        <p:cNvPr id="1" name=""/>
-        <p:cNvGrpSpPr/>
-        <p:nvPr/>
-      </p:nvGrpSpPr>
-      <p:grpSpPr>
-        <a:xfrm>
-          <a:off x="0" y="0"/>
-          <a:ext cx="0" cy="0"/>
-          <a:chOff x="0" y="0"/>
-          <a:chExt cx="0" cy="0"/>
-        </a:xfrm>
-      </p:grpSpPr>
-      <p:sp>
-        <p:nvSpPr>
-          <p:cNvPr id="2" name="Text 0"/>
-          <p:cNvSpPr txBox="1"/>
-          <p:nvPr/>
-        </p:nvSpPr>
-        <p:spPr>
-          <a:xfrm>
-            <a:off x="11460175" y="6446520"/>
-            <a:ext cx="457200" cy="274320"/>
-          </a:xfrm>
-          <a:prstGeom prst="rect">
-            <a:avLst/>
-          </a:prstGeom>
-          <a:noFill/>
-          <a:ln/>
-        </p:spPr>
-        <p:txBody>
-          <a:bodyPr wrap="square" lIns="0" tIns="0" rIns="0" bIns="0" rtlCol="0" anchor="ctr"/>
-          <a:lstStyle/>
-          <a:p>
-            <a:pPr marL="0" indent="0" algn="r">
-              <a:buNone/>
-            </a:pPr>
-            <a:r>
-              <a:rPr lang="en-US" sz="1000" dirty="0">
-                <a:solidFill>
-                  <a:srgbClr val="808080"/>
-                </a:solidFill>
-                <a:latin typeface="Calibri" pitchFamily="34" charset="0"/>
-                <a:ea typeface="Calibri" pitchFamily="34" charset="-122"/>
-                <a:cs typeface="Calibri" pitchFamily="34" charset="-120"/>
-              </a:rPr>
-              <a:t>4</a:t>
-            </a:r>
-            <a:endParaRPr lang="en-US" sz="1000" dirty="0"/>
-          </a:p>
-        </p:txBody>
-      </p:sp>
-      <p:sp>
-        <p:nvSpPr>
-          <p:cNvPr id="3" name="Text 1"/>
-          <p:cNvSpPr txBox="1"/>
-          <p:nvPr/>
-        </p:nvSpPr>
-        <p:spPr>
-          <a:xfrm>
-            <a:off x="548640" y="320040"/>
-            <a:ext cx="9601200" cy="685800"/>
-          </a:xfrm>
-          <a:prstGeom prst="rect">
-            <a:avLst/>
-          </a:prstGeom>
-          <a:noFill/>
-          <a:ln/>
-        </p:spPr>
-        <p:txBody>
-          <a:bodyPr wrap="square" lIns="0" tIns="0" rIns="0" bIns="0" rtlCol="0" anchor="ctr"/>
-          <a:lstStyle/>
-          <a:p>
-            <a:pPr marL="0" indent="0">
-              <a:buNone/>
-            </a:pPr>
-            <a:r>
-              <a:rPr lang="en-US" sz="2800" b="1" dirty="0">
-                <a:solidFill>
-                  <a:srgbClr val="1D2F82"/>
-                </a:solidFill>
-                <a:latin typeface="Calibri" pitchFamily="34" charset="0"/>
-                <a:ea typeface="Calibri" pitchFamily="34" charset="-122"/>
-                <a:cs typeface="Calibri" pitchFamily="34" charset="-120"/>
-              </a:rPr>
-              <a:t>Problem Statement &amp; Background</a:t>
-            </a:r>
-            <a:endParaRPr lang="en-US" sz="2800" dirty="0"/>
-          </a:p>
-        </p:txBody>
-      </p:sp>
-      <p:pic>
-        <p:nvPicPr>
-          <p:cNvPr id="4" name="Image 0" descr="logo.png"/>
-          <p:cNvPicPr>
-            <a:picLocks noChangeAspect="1"/>
-          </p:cNvPicPr>
-          <p:nvPr/>
-        </p:nvPicPr>
-        <p:blipFill>
-          <a:blip r:embed="rId3"/>
-          <a:stretch>
-            <a:fillRect/>
-          </a:stretch>
-        </p:blipFill>
-        <p:spPr>
-          <a:xfrm>
-            <a:off x="10362895" y="320040"/>
-            <a:ext cx="1371600" cy="518746"/>
-          </a:xfrm>
-          <a:prstGeom prst="rect">
-            <a:avLst/>
-          </a:prstGeom>
-        </p:spPr>
-      </p:pic>
-      <p:sp>
-        <p:nvSpPr>
-          <p:cNvPr id="5" name="Text 2"/>
-          <p:cNvSpPr txBox="1"/>
-          <p:nvPr/>
-        </p:nvSpPr>
-        <p:spPr>
-          <a:xfrm>
-            <a:off x="640080" y="1325880"/>
-            <a:ext cx="10881360" cy="4937760"/>
-          </a:xfrm>
-          <a:prstGeom prst="rect">
-            <a:avLst/>
-          </a:prstGeom>
-          <a:noFill/>
-          <a:ln/>
-        </p:spPr>
-        <p:txBody>
-          <a:bodyPr wrap="square" lIns="0" tIns="0" rIns="0" bIns="0" rtlCol="0" anchor="t"/>
-          <a:lstStyle/>
-          <a:p>
-            <a:pPr marL="177800" indent="-177800">
-              <a:spcAft>
-                <a:spcPts val="800"/>
-              </a:spcAft>
-              <a:buSzPct val="100000"/>
-              <a:buChar char="•"/>
-            </a:pPr>
-            <a:r>
-              <a:rPr lang="en-US" sz="1600" dirty="0">
-                <a:solidFill>
-                  <a:srgbClr val="000000"/>
-                </a:solidFill>
-                <a:latin typeface="Calibri" pitchFamily="34" charset="0"/>
-                <a:ea typeface="Calibri" pitchFamily="34" charset="-122"/>
-                <a:cs typeface="Calibri" pitchFamily="34" charset="-120"/>
-              </a:rPr>
-              <a:t>Problem Statement:</a:t>
-            </a:r>
-            <a:endParaRPr lang="en-US" sz="1600" dirty="0"/>
-          </a:p>
-          <a:p>
-            <a:pPr marL="177800" indent="-177800">
-              <a:spcAft>
-                <a:spcPts val="800"/>
-              </a:spcAft>
-              <a:buSzPct val="100000"/>
-              <a:buChar char="•"/>
-            </a:pPr>
-            <a:r>
-              <a:rPr lang="en-US" sz="1600" dirty="0">
-                <a:solidFill>
-                  <a:srgbClr val="000000"/>
-                </a:solidFill>
-                <a:latin typeface="Calibri" pitchFamily="34" charset="0"/>
-                <a:ea typeface="Calibri" pitchFamily="34" charset="-122"/>
-                <a:cs typeface="Calibri" pitchFamily="34" charset="-120"/>
-              </a:rPr>
-              <a:t>Background &amp; Significance:</a:t>
-            </a:r>
-            <a:endParaRPr lang="en-US" sz="1600" dirty="0"/>
-          </a:p>
-          <a:p>
-            <a:pPr marL="177800" indent="-177800">
-              <a:spcAft>
-                <a:spcPts val="800"/>
-              </a:spcAft>
-              <a:buSzPct val="100000"/>
-              <a:buChar char="•"/>
-            </a:pPr>
-            <a:r>
-              <a:rPr lang="en-US" sz="1600" dirty="0">
-                <a:solidFill>
-                  <a:srgbClr val="000000"/>
-                </a:solidFill>
-                <a:latin typeface="Calibri" pitchFamily="34" charset="0"/>
-                <a:ea typeface="Calibri" pitchFamily="34" charset="-122"/>
-                <a:cs typeface="Calibri" pitchFamily="34" charset="-120"/>
-              </a:rPr>
-              <a:t>Existing Solutions:</a:t>
-            </a:r>
-            <a:endParaRPr lang="en-US" sz="1600" dirty="0"/>
-          </a:p>
-          <a:p>
-            <a:pPr marL="177800" indent="-177800">
-              <a:spcAft>
-                <a:spcPts val="800"/>
-              </a:spcAft>
-              <a:buSzPct val="100000"/>
-              <a:buChar char="•"/>
-            </a:pPr>
-            <a:r>
-              <a:rPr lang="en-US" sz="1600" dirty="0">
-                <a:solidFill>
-                  <a:srgbClr val="000000"/>
-                </a:solidFill>
-                <a:latin typeface="Calibri" pitchFamily="34" charset="0"/>
-                <a:ea typeface="Calibri" pitchFamily="34" charset="-122"/>
-                <a:cs typeface="Calibri" pitchFamily="34" charset="-120"/>
-              </a:rPr>
-              <a:t>Limitations / Research Gap:</a:t>
-            </a:r>
-            <a:endParaRPr lang="en-US" sz="1600" dirty="0"/>
-          </a:p>
-        </p:txBody>
-      </p:sp>
-    </p:spTree>
-  </p:cSld>
-  <p:clrMapOvr>
-    <a:masterClrMapping/>
-  </p:clrMapOvr>
-</p:sld>
-</file>
-
-<file path=ppt/slides/slide17.xml><?xml version="1.0" encoding="utf-8"?>
-<p:sld xmlns:a="http://schemas.openxmlformats.org/drawingml/2006/main" xmlns:r="http://schemas.openxmlformats.org/officeDocument/2006/relationships" xmlns:p="http://schemas.openxmlformats.org/presentationml/2006/main">
-  <p:cSld name="Slide 4">
-    <p:bg>
-      <p:bgPr>
-        <a:solidFill>
-          <a:srgbClr val="FFFFFF"/>
-        </a:solidFill>
-        <a:effectLst/>
-      </p:bgPr>
-    </p:bg>
-    <p:spTree>
-      <p:nvGrpSpPr>
-        <p:cNvPr id="1" name=""/>
-        <p:cNvGrpSpPr/>
-        <p:nvPr/>
-      </p:nvGrpSpPr>
-      <p:grpSpPr>
-        <a:xfrm>
-          <a:off x="0" y="0"/>
-          <a:ext cx="0" cy="0"/>
-          <a:chOff x="0" y="0"/>
-          <a:chExt cx="0" cy="0"/>
-        </a:xfrm>
-      </p:grpSpPr>
-      <p:sp>
-        <p:nvSpPr>
-          <p:cNvPr id="2" name="Text 0"/>
-          <p:cNvSpPr txBox="1"/>
-          <p:nvPr/>
-        </p:nvSpPr>
-        <p:spPr>
-          <a:xfrm>
-            <a:off x="11460175" y="6446520"/>
-            <a:ext cx="457200" cy="274320"/>
-          </a:xfrm>
-          <a:prstGeom prst="rect">
-            <a:avLst/>
-          </a:prstGeom>
-          <a:noFill/>
-          <a:ln/>
-        </p:spPr>
-        <p:txBody>
-          <a:bodyPr wrap="square" lIns="0" tIns="0" rIns="0" bIns="0" rtlCol="0" anchor="ctr"/>
-          <a:lstStyle/>
-          <a:p>
-            <a:pPr marL="0" indent="0" algn="r">
-              <a:buNone/>
-            </a:pPr>
-            <a:r>
-              <a:rPr lang="en-US" sz="1000" dirty="0">
-                <a:solidFill>
-                  <a:srgbClr val="808080"/>
-                </a:solidFill>
-                <a:latin typeface="Calibri" pitchFamily="34" charset="0"/>
-                <a:ea typeface="Calibri" pitchFamily="34" charset="-122"/>
-                <a:cs typeface="Calibri" pitchFamily="34" charset="-120"/>
-              </a:rPr>
-              <a:t>4</a:t>
-            </a:r>
-            <a:endParaRPr lang="en-US" sz="1000" dirty="0"/>
-          </a:p>
-        </p:txBody>
-      </p:sp>
-      <p:sp>
-        <p:nvSpPr>
-          <p:cNvPr id="3" name="Text 1"/>
-          <p:cNvSpPr txBox="1"/>
-          <p:nvPr/>
-        </p:nvSpPr>
-        <p:spPr>
-          <a:xfrm>
-            <a:off x="548640" y="320040"/>
-            <a:ext cx="9601200" cy="685800"/>
-          </a:xfrm>
-          <a:prstGeom prst="rect">
-            <a:avLst/>
-          </a:prstGeom>
-          <a:noFill/>
-          <a:ln/>
-        </p:spPr>
-        <p:txBody>
-          <a:bodyPr wrap="square" lIns="0" tIns="0" rIns="0" bIns="0" rtlCol="0" anchor="ctr"/>
-          <a:lstStyle/>
-          <a:p>
-            <a:pPr marL="0" indent="0">
-              <a:buNone/>
-            </a:pPr>
-            <a:r>
-              <a:rPr lang="en-US" sz="2800" b="1" dirty="0">
-                <a:solidFill>
-                  <a:srgbClr val="1D2F82"/>
-                </a:solidFill>
-                <a:latin typeface="Calibri" pitchFamily="34" charset="0"/>
-                <a:ea typeface="Calibri" pitchFamily="34" charset="-122"/>
-                <a:cs typeface="Calibri" pitchFamily="34" charset="-120"/>
-              </a:rPr>
-              <a:t>Problem Statement &amp; Background</a:t>
-            </a:r>
-            <a:endParaRPr lang="en-US" sz="2800" dirty="0"/>
-          </a:p>
-        </p:txBody>
-      </p:sp>
-      <p:pic>
-        <p:nvPicPr>
-          <p:cNvPr id="4" name="Image 0" descr="logo.png"/>
-          <p:cNvPicPr>
-            <a:picLocks noChangeAspect="1"/>
-          </p:cNvPicPr>
-          <p:nvPr/>
-        </p:nvPicPr>
-        <p:blipFill>
-          <a:blip r:embed="rId3"/>
-          <a:stretch>
-            <a:fillRect/>
-          </a:stretch>
-        </p:blipFill>
-        <p:spPr>
-          <a:xfrm>
-            <a:off x="10362895" y="320040"/>
-            <a:ext cx="1371600" cy="518746"/>
-          </a:xfrm>
-          <a:prstGeom prst="rect">
-            <a:avLst/>
-          </a:prstGeom>
-        </p:spPr>
-      </p:pic>
-      <p:sp>
-        <p:nvSpPr>
-          <p:cNvPr id="5" name="Text 2"/>
-          <p:cNvSpPr txBox="1"/>
-          <p:nvPr/>
-        </p:nvSpPr>
-        <p:spPr>
-          <a:xfrm>
-            <a:off x="640080" y="1325880"/>
-            <a:ext cx="10881360" cy="4937760"/>
-          </a:xfrm>
-          <a:prstGeom prst="rect">
-            <a:avLst/>
-          </a:prstGeom>
-          <a:noFill/>
-          <a:ln/>
-        </p:spPr>
-        <p:txBody>
-          <a:bodyPr wrap="square" lIns="0" tIns="0" rIns="0" bIns="0" rtlCol="0" anchor="t"/>
-          <a:lstStyle/>
-          <a:p>
-            <a:pPr marL="177800" indent="-177800">
-              <a:spcAft>
-                <a:spcPts val="800"/>
-              </a:spcAft>
-              <a:buSzPct val="100000"/>
-              <a:buChar char="•"/>
-            </a:pPr>
-            <a:r>
-              <a:rPr lang="en-US" sz="1600" dirty="0">
-                <a:solidFill>
-                  <a:srgbClr val="000000"/>
-                </a:solidFill>
-                <a:latin typeface="Calibri" pitchFamily="34" charset="0"/>
-                <a:ea typeface="Calibri" pitchFamily="34" charset="-122"/>
-                <a:cs typeface="Calibri" pitchFamily="34" charset="-120"/>
-              </a:rPr>
-              <a:t>Problem Statement:</a:t>
-            </a:r>
-            <a:endParaRPr lang="en-US" sz="1600" dirty="0"/>
-          </a:p>
-          <a:p>
-            <a:pPr marL="177800" indent="-177800">
-              <a:spcAft>
-                <a:spcPts val="800"/>
-              </a:spcAft>
-              <a:buSzPct val="100000"/>
-              <a:buChar char="•"/>
-            </a:pPr>
-            <a:r>
-              <a:rPr lang="en-US" sz="1600" dirty="0">
-                <a:solidFill>
-                  <a:srgbClr val="000000"/>
-                </a:solidFill>
-                <a:latin typeface="Calibri" pitchFamily="34" charset="0"/>
-                <a:ea typeface="Calibri" pitchFamily="34" charset="-122"/>
-                <a:cs typeface="Calibri" pitchFamily="34" charset="-120"/>
-              </a:rPr>
-              <a:t>Background &amp; Significance:</a:t>
-            </a:r>
-            <a:endParaRPr lang="en-US" sz="1600" dirty="0"/>
-          </a:p>
-          <a:p>
-            <a:pPr marL="177800" indent="-177800">
-              <a:spcAft>
-                <a:spcPts val="800"/>
-              </a:spcAft>
-              <a:buSzPct val="100000"/>
-              <a:buChar char="•"/>
-            </a:pPr>
-            <a:r>
-              <a:rPr lang="en-US" sz="1600" dirty="0">
-                <a:solidFill>
-                  <a:srgbClr val="000000"/>
-                </a:solidFill>
-                <a:latin typeface="Calibri" pitchFamily="34" charset="0"/>
-                <a:ea typeface="Calibri" pitchFamily="34" charset="-122"/>
-                <a:cs typeface="Calibri" pitchFamily="34" charset="-120"/>
-              </a:rPr>
-              <a:t>Existing Solutions:</a:t>
-            </a:r>
-            <a:endParaRPr lang="en-US" sz="1600" dirty="0"/>
-          </a:p>
-          <a:p>
-            <a:pPr marL="177800" indent="-177800">
-              <a:spcAft>
-                <a:spcPts val="800"/>
-              </a:spcAft>
-              <a:buSzPct val="100000"/>
-              <a:buChar char="•"/>
-            </a:pPr>
-            <a:r>
-              <a:rPr lang="en-US" sz="1600" dirty="0">
-                <a:solidFill>
-                  <a:srgbClr val="000000"/>
-                </a:solidFill>
-                <a:latin typeface="Calibri" pitchFamily="34" charset="0"/>
-                <a:ea typeface="Calibri" pitchFamily="34" charset="-122"/>
-                <a:cs typeface="Calibri" pitchFamily="34" charset="-120"/>
-              </a:rPr>
-              <a:t>Limitations / Research Gap:</a:t>
-            </a:r>
-            <a:endParaRPr lang="en-US" sz="1600" dirty="0"/>
-          </a:p>
-        </p:txBody>
-      </p:sp>
-    </p:spTree>
-  </p:cSld>
-  <p:clrMapOvr>
-    <a:masterClrMapping/>
-  </p:clrMapOvr>
-</p:sld>
-</file>
-
-<file path=ppt/slides/slide18.xml><?xml version="1.0" encoding="utf-8"?>
-<p:sld xmlns:a="http://schemas.openxmlformats.org/drawingml/2006/main" xmlns:r="http://schemas.openxmlformats.org/officeDocument/2006/relationships" xmlns:p="http://schemas.openxmlformats.org/presentationml/2006/main">
-  <p:cSld name="Slide 4">
-    <p:bg>
-      <p:bgPr>
-        <a:solidFill>
-          <a:srgbClr val="FFFFFF"/>
-        </a:solidFill>
-        <a:effectLst/>
-      </p:bgPr>
-    </p:bg>
-    <p:spTree>
-      <p:nvGrpSpPr>
-        <p:cNvPr id="1" name=""/>
-        <p:cNvGrpSpPr/>
-        <p:nvPr/>
-      </p:nvGrpSpPr>
-      <p:grpSpPr>
-        <a:xfrm>
-          <a:off x="0" y="0"/>
-          <a:ext cx="0" cy="0"/>
-          <a:chOff x="0" y="0"/>
-          <a:chExt cx="0" cy="0"/>
-        </a:xfrm>
-      </p:grpSpPr>
-      <p:sp>
-        <p:nvSpPr>
-          <p:cNvPr id="2" name="Text 0"/>
-          <p:cNvSpPr txBox="1"/>
-          <p:nvPr/>
-        </p:nvSpPr>
-        <p:spPr>
-          <a:xfrm>
-            <a:off x="11460175" y="6446520"/>
-            <a:ext cx="457200" cy="274320"/>
-          </a:xfrm>
-          <a:prstGeom prst="rect">
-            <a:avLst/>
-          </a:prstGeom>
-          <a:noFill/>
-          <a:ln/>
-        </p:spPr>
-        <p:txBody>
-          <a:bodyPr wrap="square" lIns="0" tIns="0" rIns="0" bIns="0" rtlCol="0" anchor="ctr"/>
-          <a:lstStyle/>
-          <a:p>
-            <a:pPr marL="0" indent="0" algn="r">
-              <a:buNone/>
-            </a:pPr>
-            <a:r>
-              <a:rPr lang="en-US" sz="1000" dirty="0">
-                <a:solidFill>
-                  <a:srgbClr val="808080"/>
-                </a:solidFill>
-                <a:latin typeface="Calibri" pitchFamily="34" charset="0"/>
-                <a:ea typeface="Calibri" pitchFamily="34" charset="-122"/>
-                <a:cs typeface="Calibri" pitchFamily="34" charset="-120"/>
-              </a:rPr>
-              <a:t>4</a:t>
-            </a:r>
-            <a:endParaRPr lang="en-US" sz="1000" dirty="0"/>
-          </a:p>
-        </p:txBody>
-      </p:sp>
-      <p:sp>
-        <p:nvSpPr>
-          <p:cNvPr id="3" name="Text 1"/>
-          <p:cNvSpPr txBox="1"/>
-          <p:nvPr/>
-        </p:nvSpPr>
-        <p:spPr>
-          <a:xfrm>
-            <a:off x="548640" y="320040"/>
-            <a:ext cx="9601200" cy="685800"/>
-          </a:xfrm>
-          <a:prstGeom prst="rect">
-            <a:avLst/>
-          </a:prstGeom>
-          <a:noFill/>
-          <a:ln/>
-        </p:spPr>
-        <p:txBody>
-          <a:bodyPr wrap="square" lIns="0" tIns="0" rIns="0" bIns="0" rtlCol="0" anchor="ctr"/>
-          <a:lstStyle/>
-          <a:p>
-            <a:pPr marL="0" indent="0">
-              <a:buNone/>
-            </a:pPr>
-            <a:r>
-              <a:rPr lang="en-US" sz="2800" b="1" dirty="0">
-                <a:solidFill>
-                  <a:srgbClr val="1D2F82"/>
-                </a:solidFill>
-                <a:latin typeface="Calibri" pitchFamily="34" charset="0"/>
-                <a:ea typeface="Calibri" pitchFamily="34" charset="-122"/>
-                <a:cs typeface="Calibri" pitchFamily="34" charset="-120"/>
-              </a:rPr>
-              <a:t>Problem Statement &amp; Background</a:t>
-            </a:r>
-            <a:endParaRPr lang="en-US" sz="2800" dirty="0"/>
-          </a:p>
-        </p:txBody>
-      </p:sp>
-      <p:pic>
-        <p:nvPicPr>
-          <p:cNvPr id="4" name="Image 0" descr="logo.png"/>
-          <p:cNvPicPr>
-            <a:picLocks noChangeAspect="1"/>
-          </p:cNvPicPr>
-          <p:nvPr/>
-        </p:nvPicPr>
-        <p:blipFill>
-          <a:blip r:embed="rId3"/>
-          <a:stretch>
-            <a:fillRect/>
-          </a:stretch>
-        </p:blipFill>
-        <p:spPr>
-          <a:xfrm>
-            <a:off x="10362895" y="320040"/>
-            <a:ext cx="1371600" cy="518746"/>
-          </a:xfrm>
-          <a:prstGeom prst="rect">
-            <a:avLst/>
-          </a:prstGeom>
-        </p:spPr>
-      </p:pic>
-      <p:sp>
-        <p:nvSpPr>
-          <p:cNvPr id="5" name="Text 2"/>
-          <p:cNvSpPr txBox="1"/>
-          <p:nvPr/>
-        </p:nvSpPr>
-        <p:spPr>
-          <a:xfrm>
-            <a:off x="640080" y="1325880"/>
-            <a:ext cx="10881360" cy="4937760"/>
-          </a:xfrm>
-          <a:prstGeom prst="rect">
-            <a:avLst/>
-          </a:prstGeom>
-          <a:noFill/>
-          <a:ln/>
-        </p:spPr>
-        <p:txBody>
-          <a:bodyPr wrap="square" lIns="0" tIns="0" rIns="0" bIns="0" rtlCol="0" anchor="t"/>
-          <a:lstStyle/>
-          <a:p>
-            <a:pPr marL="177800" indent="-177800">
-              <a:spcAft>
-                <a:spcPts val="800"/>
-              </a:spcAft>
-              <a:buSzPct val="100000"/>
-              <a:buChar char="•"/>
-            </a:pPr>
-            <a:r>
-              <a:rPr lang="en-US" sz="1600" dirty="0">
-                <a:solidFill>
-                  <a:srgbClr val="000000"/>
-                </a:solidFill>
-                <a:latin typeface="Calibri" pitchFamily="34" charset="0"/>
-                <a:ea typeface="Calibri" pitchFamily="34" charset="-122"/>
-                <a:cs typeface="Calibri" pitchFamily="34" charset="-120"/>
-              </a:rPr>
-              <a:t>Problem Statement:</a:t>
-            </a:r>
-            <a:endParaRPr lang="en-US" sz="1600" dirty="0"/>
-          </a:p>
-          <a:p>
-            <a:pPr marL="177800" indent="-177800">
-              <a:spcAft>
-                <a:spcPts val="800"/>
-              </a:spcAft>
-              <a:buSzPct val="100000"/>
-              <a:buChar char="•"/>
-            </a:pPr>
-            <a:r>
-              <a:rPr lang="en-US" sz="1600" dirty="0">
-                <a:solidFill>
-                  <a:srgbClr val="000000"/>
-                </a:solidFill>
-                <a:latin typeface="Calibri" pitchFamily="34" charset="0"/>
-                <a:ea typeface="Calibri" pitchFamily="34" charset="-122"/>
-                <a:cs typeface="Calibri" pitchFamily="34" charset="-120"/>
-              </a:rPr>
-              <a:t>Background &amp; Significance:</a:t>
-            </a:r>
-            <a:endParaRPr lang="en-US" sz="1600" dirty="0"/>
-          </a:p>
-          <a:p>
-            <a:pPr marL="177800" indent="-177800">
-              <a:spcAft>
-                <a:spcPts val="800"/>
-              </a:spcAft>
-              <a:buSzPct val="100000"/>
-              <a:buChar char="•"/>
-            </a:pPr>
-            <a:r>
-              <a:rPr lang="en-US" sz="1600" dirty="0">
-                <a:solidFill>
-                  <a:srgbClr val="000000"/>
-                </a:solidFill>
-                <a:latin typeface="Calibri" pitchFamily="34" charset="0"/>
-                <a:ea typeface="Calibri" pitchFamily="34" charset="-122"/>
-                <a:cs typeface="Calibri" pitchFamily="34" charset="-120"/>
-              </a:rPr>
-              <a:t>Existing Solutions:</a:t>
-            </a:r>
-            <a:endParaRPr lang="en-US" sz="1600" dirty="0"/>
-          </a:p>
-          <a:p>
-            <a:pPr marL="177800" indent="-177800">
-              <a:spcAft>
-                <a:spcPts val="800"/>
-              </a:spcAft>
-              <a:buSzPct val="100000"/>
-              <a:buChar char="•"/>
-            </a:pPr>
-            <a:r>
-              <a:rPr lang="en-US" sz="1600" dirty="0">
-                <a:solidFill>
-                  <a:srgbClr val="000000"/>
-                </a:solidFill>
-                <a:latin typeface="Calibri" pitchFamily="34" charset="0"/>
-                <a:ea typeface="Calibri" pitchFamily="34" charset="-122"/>
-                <a:cs typeface="Calibri" pitchFamily="34" charset="-120"/>
-              </a:rPr>
-              <a:t>Limitations / Research Gap:</a:t>
-            </a:r>
-            <a:endParaRPr lang="en-US" sz="1600" dirty="0"/>
-          </a:p>
-        </p:txBody>
-      </p:sp>
-    </p:spTree>
-  </p:cSld>
-  <p:clrMapOvr>
-    <a:masterClrMapping/>
-  </p:clrMapOvr>
-</p:sld>
-</file>
-
-<file path=ppt/slides/slide19.xml><?xml version="1.0" encoding="utf-8"?>
-<p:sld xmlns:a="http://schemas.openxmlformats.org/drawingml/2006/main" xmlns:r="http://schemas.openxmlformats.org/officeDocument/2006/relationships" xmlns:p="http://schemas.openxmlformats.org/presentationml/2006/main">
-  <p:cSld name="Slide 9">
-    <p:bg>
-      <p:bgPr>
-        <a:solidFill>
-          <a:srgbClr val="FFFFFF"/>
-        </a:solidFill>
-        <a:effectLst/>
-      </p:bgPr>
-    </p:bg>
-    <p:spTree>
-      <p:nvGrpSpPr>
-        <p:cNvPr id="1" name=""/>
-        <p:cNvGrpSpPr/>
-        <p:nvPr/>
-      </p:nvGrpSpPr>
-      <p:grpSpPr>
-        <a:xfrm>
-          <a:off x="0" y="0"/>
-          <a:ext cx="0" cy="0"/>
-          <a:chOff x="0" y="0"/>
-          <a:chExt cx="0" cy="0"/>
-        </a:xfrm>
-      </p:grpSpPr>
-      <p:sp>
-        <p:nvSpPr>
-          <p:cNvPr id="2" name="Text 0"/>
-          <p:cNvSpPr txBox="1"/>
-          <p:nvPr/>
-        </p:nvSpPr>
-        <p:spPr>
-          <a:xfrm>
-            <a:off x="11460175" y="6446520"/>
-            <a:ext cx="457200" cy="274320"/>
-          </a:xfrm>
-          <a:prstGeom prst="rect">
-            <a:avLst/>
-          </a:prstGeom>
-          <a:noFill/>
-          <a:ln/>
-        </p:spPr>
-        <p:txBody>
-          <a:bodyPr wrap="square" lIns="0" tIns="0" rIns="0" bIns="0" rtlCol="0" anchor="ctr"/>
-          <a:lstStyle/>
-          <a:p>
-            <a:pPr marL="0" indent="0" algn="r">
-              <a:buNone/>
-            </a:pPr>
-            <a:r>
-              <a:rPr lang="en-US" sz="1000" dirty="0">
-                <a:solidFill>
-                  <a:srgbClr val="808080"/>
-                </a:solidFill>
-                <a:latin typeface="Calibri" pitchFamily="34" charset="0"/>
-                <a:ea typeface="Calibri" pitchFamily="34" charset="-122"/>
-                <a:cs typeface="Calibri" pitchFamily="34" charset="-120"/>
-              </a:rPr>
-              <a:t>9</a:t>
-            </a:r>
-            <a:endParaRPr lang="en-US" sz="1000" dirty="0"/>
-          </a:p>
-        </p:txBody>
-      </p:sp>
-      <p:sp>
-        <p:nvSpPr>
-          <p:cNvPr id="3" name="Text 1"/>
-          <p:cNvSpPr txBox="1"/>
-          <p:nvPr/>
-        </p:nvSpPr>
-        <p:spPr>
-          <a:xfrm>
-            <a:off x="548640" y="320040"/>
-            <a:ext cx="9601200" cy="685800"/>
-          </a:xfrm>
-          <a:prstGeom prst="rect">
-            <a:avLst/>
-          </a:prstGeom>
-          <a:noFill/>
-          <a:ln/>
-        </p:spPr>
-        <p:txBody>
-          <a:bodyPr wrap="square" lIns="0" tIns="0" rIns="0" bIns="0" rtlCol="0" anchor="ctr"/>
-          <a:lstStyle/>
-          <a:p>
-            <a:pPr marL="0" indent="0">
-              <a:buNone/>
-            </a:pPr>
-            <a:r>
-              <a:rPr lang="en-US" sz="2800" b="1" dirty="0">
-                <a:solidFill>
-                  <a:srgbClr val="1D2F82"/>
-                </a:solidFill>
-                <a:latin typeface="Calibri" pitchFamily="34" charset="0"/>
-                <a:ea typeface="Calibri" pitchFamily="34" charset="-122"/>
-                <a:cs typeface="Calibri" pitchFamily="34" charset="-120"/>
-              </a:rPr>
-              <a:t>Results (contd.)</a:t>
-            </a:r>
-            <a:endParaRPr lang="en-US" sz="2800" dirty="0"/>
-          </a:p>
-        </p:txBody>
-      </p:sp>
-      <p:pic>
-        <p:nvPicPr>
-          <p:cNvPr id="4" name="Image 0" descr="logo.png"/>
-          <p:cNvPicPr>
-            <a:picLocks noChangeAspect="1"/>
-          </p:cNvPicPr>
-          <p:nvPr/>
-        </p:nvPicPr>
-        <p:blipFill>
-          <a:blip r:embed="rId3"/>
-          <a:stretch>
-            <a:fillRect/>
-          </a:stretch>
-        </p:blipFill>
-        <p:spPr>
-          <a:xfrm>
-            <a:off x="10362895" y="320040"/>
-            <a:ext cx="1371600" cy="518746"/>
-          </a:xfrm>
-          <a:prstGeom prst="rect">
-            <a:avLst/>
-          </a:prstGeom>
-        </p:spPr>
-      </p:pic>
-    </p:spTree>
-  </p:cSld>
-  <p:clrMapOvr>
-    <a:masterClrMapping/>
-  </p:clrMapOvr>
-</p:sld>
-</file>
-
-<file path=ppt/slides/slide2.xml><?xml version="1.0" encoding="utf-8"?>
-<p:sld xmlns:a="http://schemas.openxmlformats.org/drawingml/2006/main" xmlns:r="http://schemas.openxmlformats.org/officeDocument/2006/relationships" xmlns:p="http://schemas.openxmlformats.org/presentationml/2006/main">
-  <p:cSld name="Slide 2">
-    <p:bg>
-      <p:bgPr>
-        <a:solidFill>
-          <a:srgbClr val="FFFFFF"/>
-        </a:solidFill>
-        <a:effectLst/>
-      </p:bgPr>
-    </p:bg>
-    <p:spTree>
-      <p:nvGrpSpPr>
-        <p:cNvPr id="1" name=""/>
-        <p:cNvGrpSpPr/>
-        <p:nvPr/>
-      </p:nvGrpSpPr>
-      <p:grpSpPr>
-        <a:xfrm>
-          <a:off x="0" y="0"/>
-          <a:ext cx="0" cy="0"/>
-          <a:chOff x="0" y="0"/>
-          <a:chExt cx="0" cy="0"/>
-        </a:xfrm>
-      </p:grpSpPr>
-      <p:sp>
-        <p:nvSpPr>
-          <p:cNvPr id="2" name="Text 0"/>
-          <p:cNvSpPr txBox="1"/>
-          <p:nvPr/>
-        </p:nvSpPr>
-        <p:spPr>
-          <a:xfrm>
-            <a:off x="11460175" y="6446520"/>
-            <a:ext cx="457200" cy="274320"/>
-          </a:xfrm>
-          <a:prstGeom prst="rect">
-            <a:avLst/>
-          </a:prstGeom>
-          <a:noFill/>
-          <a:ln/>
-        </p:spPr>
-        <p:txBody>
-          <a:bodyPr wrap="square" lIns="0" tIns="0" rIns="0" bIns="0" rtlCol="0" anchor="ctr"/>
-          <a:lstStyle/>
-          <a:p>
-            <a:pPr marL="0" indent="0" algn="r">
-              <a:buNone/>
-            </a:pPr>
-            <a:r>
-              <a:rPr lang="en-US" sz="1000" dirty="0">
-                <a:solidFill>
-                  <a:srgbClr val="808080"/>
-                </a:solidFill>
-                <a:latin typeface="Calibri" pitchFamily="34" charset="0"/>
-                <a:ea typeface="Calibri" pitchFamily="34" charset="-122"/>
-                <a:cs typeface="Calibri" pitchFamily="34" charset="-120"/>
-              </a:rPr>
-              <a:t>2</a:t>
-            </a:r>
-            <a:endParaRPr lang="en-US" sz="1000" dirty="0"/>
-          </a:p>
-        </p:txBody>
-      </p:sp>
-      <p:pic>
-        <p:nvPicPr>
-          <p:cNvPr id="3" name="Image 0" descr="logo.png"/>
-          <p:cNvPicPr>
-            <a:picLocks noChangeAspect="1"/>
-          </p:cNvPicPr>
-          <p:nvPr/>
-        </p:nvPicPr>
-        <p:blipFill>
-          <a:blip r:embed="rId3"/>
-          <a:stretch>
-            <a:fillRect/>
-          </a:stretch>
-        </p:blipFill>
-        <p:spPr>
-          <a:xfrm>
-            <a:off x="548640" y="365760"/>
-            <a:ext cx="2011680" cy="760828"/>
-          </a:xfrm>
-          <a:prstGeom prst="rect">
-            <a:avLst/>
-          </a:prstGeom>
-        </p:spPr>
-      </p:pic>
-      <p:sp>
-        <p:nvSpPr>
-          <p:cNvPr id="4" name="Text 1"/>
-          <p:cNvSpPr txBox="1"/>
-          <p:nvPr/>
-        </p:nvSpPr>
-        <p:spPr>
-          <a:xfrm>
-            <a:off x="5486400" y="411480"/>
-            <a:ext cx="6217920" cy="320040"/>
-          </a:xfrm>
-          <a:prstGeom prst="rect">
-            <a:avLst/>
-          </a:prstGeom>
-          <a:noFill/>
-          <a:ln/>
-        </p:spPr>
-        <p:txBody>
-          <a:bodyPr wrap="square" lIns="0" tIns="0" rIns="0" bIns="0" rtlCol="0" anchor="ctr"/>
-          <a:lstStyle/>
-          <a:p>
-            <a:pPr marL="0" indent="0" algn="r">
-              <a:buNone/>
-            </a:pPr>
-            <a:r>
-              <a:rPr lang="en-US" sz="1400" b="1" dirty="0">
-                <a:solidFill>
-                  <a:srgbClr val="1D2F82"/>
-                </a:solidFill>
-                <a:latin typeface="Calibri" pitchFamily="34" charset="0"/>
-                <a:ea typeface="Calibri" pitchFamily="34" charset="-122"/>
-                <a:cs typeface="Calibri" pitchFamily="34" charset="-120"/>
-              </a:rPr>
-              <a:t>School of Electronics Engineering (SENSE)</a:t>
-            </a:r>
-            <a:endParaRPr lang="en-US" sz="1400" dirty="0"/>
-          </a:p>
-        </p:txBody>
-      </p:sp>
-      <p:sp>
-        <p:nvSpPr>
-          <p:cNvPr id="5" name="Text 2"/>
-          <p:cNvSpPr txBox="1"/>
-          <p:nvPr/>
-        </p:nvSpPr>
-        <p:spPr>
-          <a:xfrm>
-            <a:off x="5486400" y="749808"/>
-            <a:ext cx="6217920" cy="274320"/>
-          </a:xfrm>
-          <a:prstGeom prst="rect">
-            <a:avLst/>
-          </a:prstGeom>
-          <a:noFill/>
-          <a:ln/>
-        </p:spPr>
-        <p:txBody>
-          <a:bodyPr wrap="square" lIns="0" tIns="0" rIns="0" bIns="0" rtlCol="0" anchor="ctr"/>
-          <a:lstStyle/>
-          <a:p>
-            <a:pPr marL="0" indent="0" algn="r">
-              <a:buNone/>
-            </a:pPr>
-            <a:r>
-              <a:rPr lang="en-US" sz="1200" dirty="0">
-                <a:solidFill>
-                  <a:srgbClr val="000000"/>
-                </a:solidFill>
-                <a:latin typeface="Calibri" pitchFamily="34" charset="0"/>
-                <a:ea typeface="Calibri" pitchFamily="34" charset="-122"/>
-                <a:cs typeface="Calibri" pitchFamily="34" charset="-120"/>
-              </a:rPr>
-              <a:t>Project-I (2026)</a:t>
-            </a:r>
-            <a:endParaRPr lang="en-US" sz="1200" dirty="0"/>
-          </a:p>
-        </p:txBody>
-      </p:sp>
-      <p:sp>
-        <p:nvSpPr>
-          <p:cNvPr id="6" name="Text 3"/>
-          <p:cNvSpPr txBox="1"/>
-          <p:nvPr/>
-        </p:nvSpPr>
-        <p:spPr>
-          <a:xfrm>
-            <a:off x="548640" y="1737360"/>
-            <a:ext cx="11091672" cy="914400"/>
-          </a:xfrm>
-          <a:prstGeom prst="rect">
-            <a:avLst/>
-          </a:prstGeom>
-          <a:noFill/>
-          <a:ln/>
-        </p:spPr>
-        <p:txBody>
-          <a:bodyPr wrap="square" lIns="0" tIns="0" rIns="0" bIns="0" rtlCol="0" anchor="ctr"/>
-          <a:lstStyle/>
-          <a:p>
-            <a:pPr marL="0" indent="0" algn="ctr">
-              <a:buNone/>
-            </a:pPr>
-            <a:r>
-              <a:rPr lang="en-US" sz="3200" b="1" dirty="0">
-                <a:solidFill>
-                  <a:srgbClr val="1D2F82"/>
-                </a:solidFill>
-                <a:latin typeface="Calibri" pitchFamily="34" charset="0"/>
-                <a:ea typeface="Calibri" pitchFamily="34" charset="-122"/>
-                <a:cs typeface="Calibri" pitchFamily="34" charset="-120"/>
-              </a:rPr>
-              <a:t>Project Title</a:t>
-            </a:r>
-            <a:endParaRPr lang="en-US" sz="3200" dirty="0"/>
-          </a:p>
-        </p:txBody>
-      </p:sp>
-      <p:sp>
-        <p:nvSpPr>
-          <p:cNvPr id="7" name="Text 4"/>
-          <p:cNvSpPr txBox="1"/>
-          <p:nvPr/>
-        </p:nvSpPr>
-        <p:spPr>
-          <a:xfrm>
-            <a:off x="822960" y="3063240"/>
-            <a:ext cx="2560320" cy="384048"/>
-          </a:xfrm>
-          <a:prstGeom prst="rect">
-            <a:avLst/>
-          </a:prstGeom>
-          <a:noFill/>
-          <a:ln/>
-        </p:spPr>
-        <p:txBody>
-          <a:bodyPr wrap="square" lIns="0" tIns="0" rIns="0" bIns="0" rtlCol="0" anchor="ctr"/>
-          <a:lstStyle/>
-          <a:p>
-            <a:pPr marL="0" indent="0">
-              <a:buNone/>
-            </a:pPr>
-            <a:r>
-              <a:rPr lang="en-US" sz="1400" b="1" dirty="0">
-                <a:solidFill>
-                  <a:srgbClr val="000000"/>
-                </a:solidFill>
-                <a:latin typeface="Calibri" pitchFamily="34" charset="0"/>
-                <a:ea typeface="Calibri" pitchFamily="34" charset="-122"/>
-                <a:cs typeface="Calibri" pitchFamily="34" charset="-120"/>
-              </a:rPr>
-              <a:t>Student Name(s):</a:t>
-            </a:r>
-            <a:endParaRPr lang="en-US" sz="1400" dirty="0"/>
-          </a:p>
-        </p:txBody>
-      </p:sp>
-      <p:sp>
-        <p:nvSpPr>
-          <p:cNvPr id="8" name="Text 5"/>
-          <p:cNvSpPr txBox="1"/>
-          <p:nvPr/>
-        </p:nvSpPr>
-        <p:spPr>
-          <a:xfrm>
-            <a:off x="3474720" y="3063240"/>
-            <a:ext cx="4023360" cy="384048"/>
-          </a:xfrm>
-          <a:prstGeom prst="rect">
-            <a:avLst/>
-          </a:prstGeom>
-          <a:noFill/>
-          <a:ln/>
-        </p:spPr>
-        <p:txBody>
-          <a:bodyPr wrap="square" lIns="0" tIns="0" rIns="0" bIns="0" rtlCol="0" anchor="ctr"/>
-          <a:lstStyle/>
-          <a:p>
-            <a:pPr marL="0" indent="0">
-              <a:buNone/>
-            </a:pPr>
-            <a:r>
-              <a:rPr lang="en-US" sz="1400" dirty="0">
-                <a:solidFill>
-                  <a:srgbClr val="000000"/>
-                </a:solidFill>
-                <a:latin typeface="Calibri" pitchFamily="34" charset="0"/>
-                <a:ea typeface="Calibri" pitchFamily="34" charset="-122"/>
-                <a:cs typeface="Calibri" pitchFamily="34" charset="-120"/>
-              </a:rPr>
-              <a:t>Name — Reg. No.</a:t>
-            </a:r>
-            <a:endParaRPr lang="en-US" sz="1400" dirty="0"/>
-          </a:p>
-        </p:txBody>
-      </p:sp>
-      <p:sp>
-        <p:nvSpPr>
-          <p:cNvPr id="9" name="Shape 6"/>
-          <p:cNvSpPr/>
-          <p:nvPr/>
-        </p:nvSpPr>
-        <p:spPr>
-          <a:xfrm>
-            <a:off x="3474720" y="3465576"/>
-            <a:ext cx="4023360" cy="0"/>
-          </a:xfrm>
-          <a:prstGeom prst="line">
-            <a:avLst/>
-          </a:prstGeom>
-          <a:noFill/>
-          <a:ln w="12700">
-            <a:solidFill>
-              <a:srgbClr val="BFBFBF"/>
-            </a:solidFill>
-            <a:prstDash val="solid"/>
-          </a:ln>
-        </p:spPr>
-        <p:txBody>
-          <a:bodyPr/>
-          <a:lstStyle/>
-          <a:p>
-            <a:endParaRPr lang="en-US"/>
-          </a:p>
-        </p:txBody>
-      </p:sp>
-      <p:sp>
-        <p:nvSpPr>
-          <p:cNvPr id="10" name="Text 7"/>
-          <p:cNvSpPr txBox="1"/>
-          <p:nvPr/>
-        </p:nvSpPr>
-        <p:spPr>
-          <a:xfrm>
-            <a:off x="822960" y="3657600"/>
-            <a:ext cx="2560320" cy="384048"/>
-          </a:xfrm>
-          <a:prstGeom prst="rect">
-            <a:avLst/>
-          </a:prstGeom>
-          <a:noFill/>
-          <a:ln/>
-        </p:spPr>
-        <p:txBody>
-          <a:bodyPr wrap="square" lIns="0" tIns="0" rIns="0" bIns="0" rtlCol="0" anchor="ctr"/>
-          <a:lstStyle/>
-          <a:p>
-            <a:pPr marL="0" indent="0">
-              <a:buNone/>
-            </a:pPr>
-            <a:r>
-              <a:rPr lang="en-US" sz="1400" b="1" dirty="0">
-                <a:solidFill>
-                  <a:srgbClr val="000000"/>
-                </a:solidFill>
-                <a:latin typeface="Calibri" pitchFamily="34" charset="0"/>
-                <a:ea typeface="Calibri" pitchFamily="34" charset="-122"/>
-                <a:cs typeface="Calibri" pitchFamily="34" charset="-120"/>
-              </a:rPr>
-              <a:t>Guide:</a:t>
-            </a:r>
-            <a:endParaRPr lang="en-US" sz="1400" dirty="0"/>
-          </a:p>
-        </p:txBody>
-      </p:sp>
-      <p:sp>
-        <p:nvSpPr>
-          <p:cNvPr id="11" name="Text 8"/>
-          <p:cNvSpPr txBox="1"/>
-          <p:nvPr/>
-        </p:nvSpPr>
-        <p:spPr>
-          <a:xfrm>
-            <a:off x="3474720" y="3657600"/>
-            <a:ext cx="4023360" cy="384048"/>
-          </a:xfrm>
-          <a:prstGeom prst="rect">
-            <a:avLst/>
-          </a:prstGeom>
-          <a:noFill/>
-          <a:ln/>
-        </p:spPr>
-        <p:txBody>
-          <a:bodyPr wrap="square" lIns="0" tIns="0" rIns="0" bIns="0" rtlCol="0" anchor="ctr"/>
-          <a:lstStyle/>
-          <a:p>
-            <a:pPr marL="0" indent="0">
-              <a:buNone/>
-            </a:pPr>
-            <a:r>
-              <a:rPr lang="en-US" sz="1400" dirty="0">
-                <a:solidFill>
-                  <a:srgbClr val="000000"/>
-                </a:solidFill>
-                <a:latin typeface="Calibri" pitchFamily="34" charset="0"/>
-                <a:ea typeface="Calibri" pitchFamily="34" charset="-122"/>
-                <a:cs typeface="Calibri" pitchFamily="34" charset="-120"/>
-              </a:rPr>
-              <a:t>Dr. Guide Name, School</a:t>
-            </a:r>
-            <a:endParaRPr lang="en-US" sz="1400" dirty="0"/>
-          </a:p>
-        </p:txBody>
-      </p:sp>
-      <p:sp>
-        <p:nvSpPr>
-          <p:cNvPr id="12" name="Shape 9"/>
-          <p:cNvSpPr/>
-          <p:nvPr/>
-        </p:nvSpPr>
-        <p:spPr>
-          <a:xfrm>
-            <a:off x="3474720" y="4059936"/>
-            <a:ext cx="4023360" cy="0"/>
-          </a:xfrm>
-          <a:prstGeom prst="line">
-            <a:avLst/>
-          </a:prstGeom>
-          <a:noFill/>
-          <a:ln w="12700">
-            <a:solidFill>
-              <a:srgbClr val="BFBFBF"/>
-            </a:solidFill>
-            <a:prstDash val="solid"/>
-          </a:ln>
-        </p:spPr>
-        <p:txBody>
-          <a:bodyPr/>
-          <a:lstStyle/>
-          <a:p>
-            <a:endParaRPr lang="en-US"/>
-          </a:p>
-        </p:txBody>
-      </p:sp>
-      <p:sp>
-        <p:nvSpPr>
-          <p:cNvPr id="13" name="Text 10"/>
-          <p:cNvSpPr txBox="1"/>
-          <p:nvPr/>
-        </p:nvSpPr>
-        <p:spPr>
-          <a:xfrm>
-            <a:off x="822960" y="4251960"/>
-            <a:ext cx="2560320" cy="384048"/>
-          </a:xfrm>
-          <a:prstGeom prst="rect">
-            <a:avLst/>
-          </a:prstGeom>
-          <a:noFill/>
-          <a:ln/>
-        </p:spPr>
-        <p:txBody>
-          <a:bodyPr wrap="square" lIns="0" tIns="0" rIns="0" bIns="0" rtlCol="0" anchor="ctr"/>
-          <a:lstStyle/>
-          <a:p>
-            <a:pPr marL="0" indent="0">
-              <a:buNone/>
-            </a:pPr>
-            <a:r>
-              <a:rPr lang="en-US" sz="1400" b="1" dirty="0">
-                <a:solidFill>
-                  <a:srgbClr val="000000"/>
-                </a:solidFill>
-                <a:latin typeface="Calibri" pitchFamily="34" charset="0"/>
-                <a:ea typeface="Calibri" pitchFamily="34" charset="-122"/>
-                <a:cs typeface="Calibri" pitchFamily="34" charset="-120"/>
-              </a:rPr>
-              <a:t>Programme / School:</a:t>
-            </a:r>
-            <a:endParaRPr lang="en-US" sz="1400" dirty="0"/>
-          </a:p>
-        </p:txBody>
-      </p:sp>
-      <p:sp>
-        <p:nvSpPr>
-          <p:cNvPr id="14" name="Text 11"/>
-          <p:cNvSpPr txBox="1"/>
-          <p:nvPr/>
-        </p:nvSpPr>
-        <p:spPr>
-          <a:xfrm>
-            <a:off x="3474720" y="4251960"/>
-            <a:ext cx="4023360" cy="384048"/>
-          </a:xfrm>
-          <a:prstGeom prst="rect">
-            <a:avLst/>
-          </a:prstGeom>
-          <a:noFill/>
-          <a:ln/>
-        </p:spPr>
-        <p:txBody>
-          <a:bodyPr wrap="square" lIns="0" tIns="0" rIns="0" bIns="0" rtlCol="0" anchor="ctr"/>
-          <a:lstStyle/>
-          <a:p>
-            <a:pPr marL="0" indent="0">
-              <a:buNone/>
-            </a:pPr>
-            <a:r>
-              <a:rPr lang="en-US" sz="1400" dirty="0">
-                <a:solidFill>
-                  <a:srgbClr val="000000"/>
-                </a:solidFill>
-                <a:latin typeface="Calibri" pitchFamily="34" charset="0"/>
-                <a:ea typeface="Calibri" pitchFamily="34" charset="-122"/>
-                <a:cs typeface="Calibri" pitchFamily="34" charset="-120"/>
-              </a:rPr>
-              <a:t>B.Tech — SENSE, VIT Chennai</a:t>
-            </a:r>
-            <a:endParaRPr lang="en-US" sz="1400" dirty="0"/>
-          </a:p>
-        </p:txBody>
-      </p:sp>
-      <p:sp>
-        <p:nvSpPr>
-          <p:cNvPr id="15" name="Shape 12"/>
-          <p:cNvSpPr/>
-          <p:nvPr/>
-        </p:nvSpPr>
-        <p:spPr>
-          <a:xfrm>
-            <a:off x="3474720" y="4654296"/>
-            <a:ext cx="4023360" cy="0"/>
-          </a:xfrm>
-          <a:prstGeom prst="line">
-            <a:avLst/>
-          </a:prstGeom>
-          <a:noFill/>
-          <a:ln w="12700">
-            <a:solidFill>
-              <a:srgbClr val="BFBFBF"/>
-            </a:solidFill>
-            <a:prstDash val="solid"/>
-          </a:ln>
-        </p:spPr>
-        <p:txBody>
-          <a:bodyPr/>
-          <a:lstStyle/>
-          <a:p>
-            <a:endParaRPr lang="en-US"/>
-          </a:p>
-        </p:txBody>
-      </p:sp>
-      <p:sp>
-        <p:nvSpPr>
-          <p:cNvPr id="16" name="Text 13"/>
-          <p:cNvSpPr txBox="1"/>
-          <p:nvPr/>
-        </p:nvSpPr>
-        <p:spPr>
-          <a:xfrm>
-            <a:off x="822960" y="4846320"/>
-            <a:ext cx="2560320" cy="384048"/>
-          </a:xfrm>
-          <a:prstGeom prst="rect">
-            <a:avLst/>
-          </a:prstGeom>
-          <a:noFill/>
-          <a:ln/>
-        </p:spPr>
-        <p:txBody>
-          <a:bodyPr wrap="square" lIns="0" tIns="0" rIns="0" bIns="0" rtlCol="0" anchor="ctr"/>
-          <a:lstStyle/>
-          <a:p>
-            <a:pPr marL="0" indent="0">
-              <a:buNone/>
-            </a:pPr>
-            <a:r>
-              <a:rPr lang="en-US" sz="1400" b="1" dirty="0">
-                <a:solidFill>
-                  <a:srgbClr val="000000"/>
-                </a:solidFill>
-                <a:latin typeface="Calibri" pitchFamily="34" charset="0"/>
-                <a:ea typeface="Calibri" pitchFamily="34" charset="-122"/>
-                <a:cs typeface="Calibri" pitchFamily="34" charset="-120"/>
-              </a:rPr>
-              <a:t>Review &amp; Date:</a:t>
-            </a:r>
-            <a:endParaRPr lang="en-US" sz="1400" dirty="0"/>
-          </a:p>
-        </p:txBody>
-      </p:sp>
-      <p:sp>
-        <p:nvSpPr>
-          <p:cNvPr id="17" name="Text 14"/>
-          <p:cNvSpPr txBox="1"/>
-          <p:nvPr/>
-        </p:nvSpPr>
-        <p:spPr>
-          <a:xfrm>
-            <a:off x="3474720" y="4846320"/>
-            <a:ext cx="4023360" cy="384048"/>
-          </a:xfrm>
-          <a:prstGeom prst="rect">
-            <a:avLst/>
-          </a:prstGeom>
-          <a:noFill/>
-          <a:ln/>
-        </p:spPr>
-        <p:txBody>
-          <a:bodyPr wrap="square" lIns="0" tIns="0" rIns="0" bIns="0" rtlCol="0" anchor="ctr"/>
-          <a:lstStyle/>
-          <a:p>
-            <a:pPr marL="0" indent="0">
-              <a:buNone/>
-            </a:pPr>
-            <a:r>
-              <a:rPr lang="en-US" sz="1400" dirty="0">
-                <a:solidFill>
-                  <a:srgbClr val="000000"/>
-                </a:solidFill>
-                <a:latin typeface="Calibri" pitchFamily="34" charset="0"/>
-                <a:ea typeface="Calibri" pitchFamily="34" charset="-122"/>
-                <a:cs typeface="Calibri" pitchFamily="34" charset="-120"/>
-              </a:rPr>
-              <a:t>Review-I  ·  02.09.2026 (Wednesday)</a:t>
-            </a:r>
-            <a:endParaRPr lang="en-US" sz="1400" dirty="0"/>
-          </a:p>
-        </p:txBody>
-      </p:sp>
-      <p:sp>
-        <p:nvSpPr>
-          <p:cNvPr id="18" name="Shape 15"/>
-          <p:cNvSpPr/>
-          <p:nvPr/>
-        </p:nvSpPr>
-        <p:spPr>
-          <a:xfrm>
-            <a:off x="3474720" y="5248656"/>
-            <a:ext cx="4023360" cy="0"/>
-          </a:xfrm>
-          <a:prstGeom prst="line">
-            <a:avLst/>
-          </a:prstGeom>
-          <a:noFill/>
-          <a:ln w="12700">
-            <a:solidFill>
-              <a:srgbClr val="BFBFBF"/>
-            </a:solidFill>
-            <a:prstDash val="solid"/>
-          </a:ln>
-        </p:spPr>
-        <p:txBody>
-          <a:bodyPr/>
-          <a:lstStyle/>
-          <a:p>
-            <a:endParaRPr lang="en-US"/>
-          </a:p>
-        </p:txBody>
-      </p:sp>
-      <p:sp>
-        <p:nvSpPr>
-          <p:cNvPr id="19" name="Shape 16"/>
-          <p:cNvSpPr/>
-          <p:nvPr/>
-        </p:nvSpPr>
-        <p:spPr>
-          <a:xfrm>
-            <a:off x="8046720" y="3063240"/>
-            <a:ext cx="3657600" cy="2194560"/>
-          </a:xfrm>
-          <a:prstGeom prst="rect">
-            <a:avLst/>
-          </a:prstGeom>
-          <a:solidFill>
-            <a:srgbClr val="FFFFFF"/>
-          </a:solidFill>
-          <a:ln w="15875">
-            <a:solidFill>
-              <a:srgbClr val="1D2F82"/>
-            </a:solidFill>
-            <a:prstDash val="solid"/>
-          </a:ln>
-        </p:spPr>
-        <p:txBody>
-          <a:bodyPr/>
-          <a:lstStyle/>
-          <a:p>
-            <a:endParaRPr lang="en-US"/>
-          </a:p>
-        </p:txBody>
-      </p:sp>
-      <p:sp>
-        <p:nvSpPr>
-          <p:cNvPr id="20" name="Text 17"/>
-          <p:cNvSpPr txBox="1"/>
-          <p:nvPr/>
-        </p:nvSpPr>
-        <p:spPr>
-          <a:xfrm>
-            <a:off x="8229600" y="3246120"/>
-            <a:ext cx="3291840" cy="365760"/>
-          </a:xfrm>
-          <a:prstGeom prst="rect">
-            <a:avLst/>
-          </a:prstGeom>
-          <a:noFill/>
-          <a:ln/>
-        </p:spPr>
-        <p:txBody>
-          <a:bodyPr wrap="square" lIns="0" tIns="0" rIns="0" bIns="0" rtlCol="0" anchor="ctr"/>
-          <a:lstStyle/>
-          <a:p>
-            <a:pPr marL="0" indent="0">
-              <a:buNone/>
-            </a:pPr>
-            <a:r>
-              <a:rPr lang="en-US" sz="1400" b="1" dirty="0">
-                <a:solidFill>
-                  <a:srgbClr val="1D2F82"/>
-                </a:solidFill>
-                <a:latin typeface="Calibri" pitchFamily="34" charset="0"/>
-                <a:ea typeface="Calibri" pitchFamily="34" charset="-122"/>
-                <a:cs typeface="Calibri" pitchFamily="34" charset="-120"/>
-              </a:rPr>
-              <a:t>Guide's Signature with Date</a:t>
-            </a:r>
-            <a:endParaRPr lang="en-US" sz="1400" dirty="0"/>
-          </a:p>
-        </p:txBody>
-      </p:sp>
-      <p:sp>
-        <p:nvSpPr>
-          <p:cNvPr id="21" name="Text 18"/>
-          <p:cNvSpPr txBox="1"/>
-          <p:nvPr/>
-        </p:nvSpPr>
-        <p:spPr>
-          <a:xfrm>
-            <a:off x="8229600" y="3886200"/>
-            <a:ext cx="3291840" cy="320040"/>
-          </a:xfrm>
-          <a:prstGeom prst="rect">
-            <a:avLst/>
-          </a:prstGeom>
-          <a:noFill/>
-          <a:ln/>
-        </p:spPr>
-        <p:txBody>
-          <a:bodyPr wrap="square" lIns="0" tIns="0" rIns="0" bIns="0" rtlCol="0" anchor="ctr"/>
-          <a:lstStyle/>
-          <a:p>
-            <a:pPr marL="0" indent="0">
-              <a:buNone/>
-            </a:pPr>
-            <a:r>
-              <a:rPr lang="en-US" sz="1300" dirty="0">
-                <a:solidFill>
-                  <a:srgbClr val="000000"/>
-                </a:solidFill>
-                <a:latin typeface="Calibri" pitchFamily="34" charset="0"/>
-                <a:ea typeface="Calibri" pitchFamily="34" charset="-122"/>
-                <a:cs typeface="Calibri" pitchFamily="34" charset="-120"/>
-              </a:rPr>
-              <a:t>Signature: _____________________</a:t>
-            </a:r>
-            <a:endParaRPr lang="en-US" sz="1300" dirty="0"/>
-          </a:p>
-        </p:txBody>
-      </p:sp>
-      <p:sp>
-        <p:nvSpPr>
-          <p:cNvPr id="22" name="Text 19"/>
-          <p:cNvSpPr txBox="1"/>
-          <p:nvPr/>
-        </p:nvSpPr>
-        <p:spPr>
-          <a:xfrm>
-            <a:off x="8229600" y="4434840"/>
-            <a:ext cx="3291840" cy="320040"/>
-          </a:xfrm>
-          <a:prstGeom prst="rect">
-            <a:avLst/>
-          </a:prstGeom>
-          <a:noFill/>
-          <a:ln/>
-        </p:spPr>
-        <p:txBody>
-          <a:bodyPr wrap="square" lIns="0" tIns="0" rIns="0" bIns="0" rtlCol="0" anchor="ctr"/>
-          <a:lstStyle/>
-          <a:p>
-            <a:pPr marL="0" indent="0">
-              <a:buNone/>
-            </a:pPr>
-            <a:r>
-              <a:rPr lang="en-US" sz="1300" dirty="0">
-                <a:solidFill>
-                  <a:srgbClr val="000000"/>
-                </a:solidFill>
-                <a:latin typeface="Calibri" pitchFamily="34" charset="0"/>
-                <a:ea typeface="Calibri" pitchFamily="34" charset="-122"/>
-                <a:cs typeface="Calibri" pitchFamily="34" charset="-120"/>
-              </a:rPr>
-              <a:t>Date: _________________________</a:t>
-            </a:r>
-            <a:endParaRPr lang="en-US" sz="1300" dirty="0"/>
-          </a:p>
-        </p:txBody>
-      </p:sp>
-      <p:sp>
-        <p:nvSpPr>
-          <p:cNvPr id="23" name="Text 20"/>
-          <p:cNvSpPr txBox="1"/>
-          <p:nvPr/>
-        </p:nvSpPr>
-        <p:spPr>
-          <a:xfrm>
-            <a:off x="822960" y="5760720"/>
-            <a:ext cx="10607040" cy="548640"/>
-          </a:xfrm>
-          <a:prstGeom prst="rect">
-            <a:avLst/>
-          </a:prstGeom>
-          <a:noFill/>
-          <a:ln/>
-        </p:spPr>
-        <p:txBody>
-          <a:bodyPr wrap="square" lIns="0" tIns="0" rIns="0" bIns="0" rtlCol="0" anchor="ctr"/>
-          <a:lstStyle/>
-          <a:p>
-            <a:pPr marL="0" indent="0">
-              <a:buNone/>
-            </a:pPr>
-            <a:r>
-              <a:rPr lang="en-US" sz="1200" i="1" dirty="0">
-                <a:solidFill>
-                  <a:srgbClr val="000000"/>
-                </a:solidFill>
-                <a:latin typeface="Calibri" pitchFamily="34" charset="0"/>
-                <a:ea typeface="Calibri" pitchFamily="34" charset="-122"/>
-                <a:cs typeface="Calibri" pitchFamily="34" charset="-120"/>
-              </a:rPr>
-              <a:t>Approval is mandatory before every review. After signing, scan this slide and keep the scanned copy as Slide 1 of the presentation.</a:t>
-            </a:r>
-            <a:endParaRPr lang="en-US" sz="1200" dirty="0"/>
-          </a:p>
-        </p:txBody>
-      </p:sp>
-    </p:spTree>
-  </p:cSld>
-  <p:clrMapOvr>
-    <a:masterClrMapping/>
-  </p:clrMapOvr>
-</p:sld>
-</file>
-
-<file path=ppt/slides/slide20.xml><?xml version="1.0" encoding="utf-8"?>
-<p:sld xmlns:a="http://schemas.openxmlformats.org/drawingml/2006/main" xmlns:r="http://schemas.openxmlformats.org/officeDocument/2006/relationships" xmlns:p="http://schemas.openxmlformats.org/presentationml/2006/main">
-  <p:cSld name="Slide 9">
-    <p:bg>
-      <p:bgPr>
-        <a:solidFill>
-          <a:srgbClr val="FFFFFF"/>
-        </a:solidFill>
-        <a:effectLst/>
-      </p:bgPr>
-    </p:bg>
-    <p:spTree>
-      <p:nvGrpSpPr>
-        <p:cNvPr id="1" name=""/>
-        <p:cNvGrpSpPr/>
-        <p:nvPr/>
-      </p:nvGrpSpPr>
-      <p:grpSpPr>
-        <a:xfrm>
-          <a:off x="0" y="0"/>
-          <a:ext cx="0" cy="0"/>
-          <a:chOff x="0" y="0"/>
-          <a:chExt cx="0" cy="0"/>
-        </a:xfrm>
-      </p:grpSpPr>
-      <p:sp>
-        <p:nvSpPr>
-          <p:cNvPr id="2" name="Text 0"/>
-          <p:cNvSpPr txBox="1"/>
-          <p:nvPr/>
-        </p:nvSpPr>
-        <p:spPr>
-          <a:xfrm>
-            <a:off x="11460175" y="6446520"/>
-            <a:ext cx="457200" cy="274320"/>
-          </a:xfrm>
-          <a:prstGeom prst="rect">
-            <a:avLst/>
-          </a:prstGeom>
-          <a:noFill/>
-          <a:ln/>
-        </p:spPr>
-        <p:txBody>
-          <a:bodyPr wrap="square" lIns="0" tIns="0" rIns="0" bIns="0" rtlCol="0" anchor="ctr"/>
-          <a:lstStyle/>
-          <a:p>
-            <a:pPr marL="0" indent="0" algn="r">
-              <a:buNone/>
-            </a:pPr>
-            <a:r>
-              <a:rPr lang="en-US" sz="1000" dirty="0">
-                <a:solidFill>
-                  <a:srgbClr val="808080"/>
-                </a:solidFill>
-                <a:latin typeface="Calibri" pitchFamily="34" charset="0"/>
-                <a:ea typeface="Calibri" pitchFamily="34" charset="-122"/>
-                <a:cs typeface="Calibri" pitchFamily="34" charset="-120"/>
-              </a:rPr>
-              <a:t>9</a:t>
-            </a:r>
-            <a:endParaRPr lang="en-US" sz="1000" dirty="0"/>
-          </a:p>
-        </p:txBody>
-      </p:sp>
-      <p:sp>
-        <p:nvSpPr>
-          <p:cNvPr id="3" name="Text 1"/>
-          <p:cNvSpPr txBox="1"/>
-          <p:nvPr/>
-        </p:nvSpPr>
-        <p:spPr>
-          <a:xfrm>
-            <a:off x="548640" y="320040"/>
-            <a:ext cx="9601200" cy="685800"/>
-          </a:xfrm>
-          <a:prstGeom prst="rect">
-            <a:avLst/>
-          </a:prstGeom>
-          <a:noFill/>
-          <a:ln/>
-        </p:spPr>
-        <p:txBody>
-          <a:bodyPr wrap="square" lIns="0" tIns="0" rIns="0" bIns="0" rtlCol="0" anchor="ctr"/>
-          <a:lstStyle/>
-          <a:p>
-            <a:pPr marL="0" indent="0">
-              <a:buNone/>
-            </a:pPr>
-            <a:r>
-              <a:rPr lang="en-US" sz="2800" b="1" dirty="0">
-                <a:solidFill>
-                  <a:srgbClr val="1D2F82"/>
-                </a:solidFill>
-                <a:latin typeface="Calibri" pitchFamily="34" charset="0"/>
-                <a:ea typeface="Calibri" pitchFamily="34" charset="-122"/>
-                <a:cs typeface="Calibri" pitchFamily="34" charset="-120"/>
-              </a:rPr>
-              <a:t>Results (contd.)</a:t>
-            </a:r>
-            <a:endParaRPr lang="en-US" sz="2800" dirty="0"/>
-          </a:p>
-        </p:txBody>
-      </p:sp>
-      <p:pic>
-        <p:nvPicPr>
-          <p:cNvPr id="4" name="Image 0" descr="logo.png"/>
-          <p:cNvPicPr>
-            <a:picLocks noChangeAspect="1"/>
-          </p:cNvPicPr>
-          <p:nvPr/>
-        </p:nvPicPr>
-        <p:blipFill>
-          <a:blip r:embed="rId3"/>
-          <a:stretch>
-            <a:fillRect/>
-          </a:stretch>
-        </p:blipFill>
-        <p:spPr>
-          <a:xfrm>
-            <a:off x="10362895" y="320040"/>
-            <a:ext cx="1371600" cy="518746"/>
-          </a:xfrm>
-          <a:prstGeom prst="rect">
-            <a:avLst/>
-          </a:prstGeom>
-        </p:spPr>
-      </p:pic>
-    </p:spTree>
-  </p:cSld>
-  <p:clrMapOvr>
-    <a:masterClrMapping/>
-  </p:clrMapOvr>
-</p:sld>
-</file>
-
-<file path=ppt/slides/slide21.xml><?xml version="1.0" encoding="utf-8"?>
-<p:sld xmlns:a="http://schemas.openxmlformats.org/drawingml/2006/main" xmlns:r="http://schemas.openxmlformats.org/officeDocument/2006/relationships" xmlns:p="http://schemas.openxmlformats.org/presentationml/2006/main">
-  <p:cSld name="Slide 9">
-    <p:bg>
-      <p:bgPr>
-        <a:solidFill>
-          <a:srgbClr val="FFFFFF"/>
-        </a:solidFill>
-        <a:effectLst/>
-      </p:bgPr>
-    </p:bg>
-    <p:spTree>
-      <p:nvGrpSpPr>
-        <p:cNvPr id="1" name=""/>
-        <p:cNvGrpSpPr/>
-        <p:nvPr/>
-      </p:nvGrpSpPr>
-      <p:grpSpPr>
-        <a:xfrm>
-          <a:off x="0" y="0"/>
-          <a:ext cx="0" cy="0"/>
-          <a:chOff x="0" y="0"/>
-          <a:chExt cx="0" cy="0"/>
-        </a:xfrm>
-      </p:grpSpPr>
-      <p:sp>
-        <p:nvSpPr>
-          <p:cNvPr id="2" name="Text 0"/>
-          <p:cNvSpPr txBox="1"/>
-          <p:nvPr/>
-        </p:nvSpPr>
-        <p:spPr>
-          <a:xfrm>
-            <a:off x="11460175" y="6446520"/>
-            <a:ext cx="457200" cy="274320"/>
-          </a:xfrm>
-          <a:prstGeom prst="rect">
-            <a:avLst/>
-          </a:prstGeom>
-          <a:noFill/>
-          <a:ln/>
-        </p:spPr>
-        <p:txBody>
-          <a:bodyPr wrap="square" lIns="0" tIns="0" rIns="0" bIns="0" rtlCol="0" anchor="ctr"/>
-          <a:lstStyle/>
-          <a:p>
-            <a:pPr marL="0" indent="0" algn="r">
-              <a:buNone/>
-            </a:pPr>
-            <a:r>
-              <a:rPr lang="en-US" sz="1000" dirty="0">
-                <a:solidFill>
-                  <a:srgbClr val="808080"/>
-                </a:solidFill>
-                <a:latin typeface="Calibri" pitchFamily="34" charset="0"/>
-                <a:ea typeface="Calibri" pitchFamily="34" charset="-122"/>
-                <a:cs typeface="Calibri" pitchFamily="34" charset="-120"/>
-              </a:rPr>
-              <a:t>9</a:t>
-            </a:r>
-            <a:endParaRPr lang="en-US" sz="1000" dirty="0"/>
-          </a:p>
-        </p:txBody>
-      </p:sp>
-      <p:sp>
-        <p:nvSpPr>
-          <p:cNvPr id="3" name="Text 1"/>
-          <p:cNvSpPr txBox="1"/>
-          <p:nvPr/>
-        </p:nvSpPr>
-        <p:spPr>
-          <a:xfrm>
-            <a:off x="548640" y="320040"/>
-            <a:ext cx="9601200" cy="685800"/>
-          </a:xfrm>
-          <a:prstGeom prst="rect">
-            <a:avLst/>
-          </a:prstGeom>
-          <a:noFill/>
-          <a:ln/>
-        </p:spPr>
-        <p:txBody>
-          <a:bodyPr wrap="square" lIns="0" tIns="0" rIns="0" bIns="0" rtlCol="0" anchor="ctr"/>
-          <a:lstStyle/>
-          <a:p>
-            <a:pPr marL="0" indent="0">
-              <a:buNone/>
-            </a:pPr>
-            <a:r>
-              <a:rPr lang="en-US" sz="2800" b="1" dirty="0">
-                <a:solidFill>
-                  <a:srgbClr val="1D2F82"/>
-                </a:solidFill>
-                <a:latin typeface="Calibri" pitchFamily="34" charset="0"/>
-                <a:ea typeface="Calibri" pitchFamily="34" charset="-122"/>
-                <a:cs typeface="Calibri" pitchFamily="34" charset="-120"/>
-              </a:rPr>
-              <a:t>Results (contd.)</a:t>
-            </a:r>
-            <a:endParaRPr lang="en-US" sz="2800" dirty="0"/>
-          </a:p>
-        </p:txBody>
-      </p:sp>
-      <p:pic>
-        <p:nvPicPr>
-          <p:cNvPr id="4" name="Image 0" descr="logo.png"/>
-          <p:cNvPicPr>
-            <a:picLocks noChangeAspect="1"/>
-          </p:cNvPicPr>
-          <p:nvPr/>
-        </p:nvPicPr>
-        <p:blipFill>
-          <a:blip r:embed="rId3"/>
-          <a:stretch>
-            <a:fillRect/>
-          </a:stretch>
-        </p:blipFill>
-        <p:spPr>
-          <a:xfrm>
-            <a:off x="10362895" y="320040"/>
-            <a:ext cx="1371600" cy="518746"/>
-          </a:xfrm>
-          <a:prstGeom prst="rect">
-            <a:avLst/>
-          </a:prstGeom>
-        </p:spPr>
-      </p:pic>
-    </p:spTree>
-  </p:cSld>
-  <p:clrMapOvr>
-    <a:masterClrMapping/>
-  </p:clrMapOvr>
-</p:sld>
-</file>
-
-<file path=ppt/slides/slide3.xml><?xml version="1.0" encoding="utf-8"?>
-<p:sld xmlns:a="http://schemas.openxmlformats.org/drawingml/2006/main" xmlns:r="http://schemas.openxmlformats.org/officeDocument/2006/relationships" xmlns:p="http://schemas.openxmlformats.org/presentationml/2006/main">
-  <p:cSld name="Slide 3">
-    <p:bg>
-      <p:bgPr>
-        <a:solidFill>
-          <a:srgbClr val="FFFFFF"/>
-        </a:solidFill>
-        <a:effectLst/>
-      </p:bgPr>
-    </p:bg>
-    <p:spTree>
-      <p:nvGrpSpPr>
-        <p:cNvPr id="1" name=""/>
-        <p:cNvGrpSpPr/>
-        <p:nvPr/>
-      </p:nvGrpSpPr>
-      <p:grpSpPr>
-        <a:xfrm>
-          <a:off x="0" y="0"/>
-          <a:ext cx="0" cy="0"/>
-          <a:chOff x="0" y="0"/>
-          <a:chExt cx="0" cy="0"/>
-        </a:xfrm>
-      </p:grpSpPr>
-      <p:sp>
-        <p:nvSpPr>
-          <p:cNvPr id="2" name="Text 0"/>
-          <p:cNvSpPr txBox="1"/>
-          <p:nvPr/>
-        </p:nvSpPr>
-        <p:spPr>
-          <a:xfrm>
-            <a:off x="11460175" y="6446520"/>
-            <a:ext cx="457200" cy="274320"/>
-          </a:xfrm>
-          <a:prstGeom prst="rect">
-            <a:avLst/>
-          </a:prstGeom>
-          <a:noFill/>
-          <a:ln/>
-        </p:spPr>
-        <p:txBody>
-          <a:bodyPr wrap="square" lIns="0" tIns="0" rIns="0" bIns="0" rtlCol="0" anchor="ctr"/>
-          <a:lstStyle/>
-          <a:p>
-            <a:pPr marL="0" indent="0" algn="r">
-              <a:buNone/>
-            </a:pPr>
-            <a:r>
-              <a:rPr lang="en-US" sz="1000" dirty="0">
-                <a:solidFill>
-                  <a:srgbClr val="808080"/>
-                </a:solidFill>
-                <a:latin typeface="Calibri" pitchFamily="34" charset="0"/>
-                <a:ea typeface="Calibri" pitchFamily="34" charset="-122"/>
-                <a:cs typeface="Calibri" pitchFamily="34" charset="-120"/>
-              </a:rPr>
-              <a:t>3</a:t>
-            </a:r>
-            <a:endParaRPr lang="en-US" sz="1000" dirty="0"/>
-          </a:p>
-        </p:txBody>
-      </p:sp>
-      <p:sp>
-        <p:nvSpPr>
-          <p:cNvPr id="3" name="Text 1"/>
-          <p:cNvSpPr txBox="1"/>
-          <p:nvPr/>
-        </p:nvSpPr>
-        <p:spPr>
-          <a:xfrm>
-            <a:off x="548640" y="320040"/>
-            <a:ext cx="9601200" cy="685800"/>
-          </a:xfrm>
-          <a:prstGeom prst="rect">
-            <a:avLst/>
-          </a:prstGeom>
-          <a:noFill/>
-          <a:ln/>
-        </p:spPr>
-        <p:txBody>
-          <a:bodyPr wrap="square" lIns="0" tIns="0" rIns="0" bIns="0" rtlCol="0" anchor="ctr"/>
-          <a:lstStyle/>
-          <a:p>
-            <a:pPr marL="0" indent="0">
-              <a:buNone/>
-            </a:pPr>
-            <a:r>
-              <a:rPr lang="en-US" sz="2800" b="1" dirty="0">
-                <a:solidFill>
-                  <a:srgbClr val="1D2F82"/>
-                </a:solidFill>
-                <a:latin typeface="Calibri" pitchFamily="34" charset="0"/>
-                <a:ea typeface="Calibri" pitchFamily="34" charset="-122"/>
-                <a:cs typeface="Calibri" pitchFamily="34" charset="-120"/>
-              </a:rPr>
-              <a:t>Review-I — 02.09.2026 (5 Marks, 5%)</a:t>
-            </a:r>
-            <a:endParaRPr lang="en-US" sz="2800" dirty="0"/>
-          </a:p>
-        </p:txBody>
-      </p:sp>
-      <p:pic>
-        <p:nvPicPr>
-          <p:cNvPr id="4" name="Image 0" descr="logo.png"/>
-          <p:cNvPicPr>
-            <a:picLocks noChangeAspect="1"/>
-          </p:cNvPicPr>
-          <p:nvPr/>
-        </p:nvPicPr>
-        <p:blipFill>
-          <a:blip r:embed="rId3"/>
-          <a:stretch>
-            <a:fillRect/>
-          </a:stretch>
-        </p:blipFill>
-        <p:spPr>
-          <a:xfrm>
-            <a:off x="10362895" y="320040"/>
-            <a:ext cx="1371600" cy="518746"/>
-          </a:xfrm>
-          <a:prstGeom prst="rect">
-            <a:avLst/>
-          </a:prstGeom>
-        </p:spPr>
-      </p:pic>
-      <p:sp>
-        <p:nvSpPr>
-          <p:cNvPr id="5" name="Text 2"/>
-          <p:cNvSpPr txBox="1"/>
-          <p:nvPr/>
-        </p:nvSpPr>
-        <p:spPr>
-          <a:xfrm>
-            <a:off x="640080" y="1325880"/>
-            <a:ext cx="10881360" cy="4937760"/>
-          </a:xfrm>
-          <a:prstGeom prst="rect">
-            <a:avLst/>
-          </a:prstGeom>
-          <a:noFill/>
-          <a:ln/>
-        </p:spPr>
-        <p:txBody>
-          <a:bodyPr wrap="square" lIns="0" tIns="0" rIns="0" bIns="0" rtlCol="0" anchor="t"/>
-          <a:lstStyle/>
-          <a:p>
-            <a:pPr marL="177800" indent="-177800">
-              <a:spcAft>
-                <a:spcPts val="800"/>
-              </a:spcAft>
-              <a:buSzPct val="100000"/>
-              <a:buChar char="•"/>
-            </a:pPr>
-            <a:r>
-              <a:rPr lang="en-US" sz="1500" dirty="0">
-                <a:solidFill>
-                  <a:srgbClr val="000000"/>
-                </a:solidFill>
-                <a:latin typeface="Calibri" pitchFamily="34" charset="0"/>
-                <a:ea typeface="Calibri" pitchFamily="34" charset="-122"/>
-                <a:cs typeface="Calibri" pitchFamily="34" charset="-120"/>
-              </a:rPr>
-              <a:t>Focus: Proposed Solution &amp; 50% Work Completion.</a:t>
-            </a:r>
-            <a:endParaRPr lang="en-US" sz="1500" dirty="0"/>
-          </a:p>
-          <a:p>
-            <a:pPr marL="177800" indent="-177800">
-              <a:spcAft>
-                <a:spcPts val="800"/>
-              </a:spcAft>
-              <a:buSzPct val="100000"/>
-              <a:buChar char="•"/>
-            </a:pPr>
-            <a:r>
-              <a:rPr lang="en-US" sz="1500" dirty="0">
-                <a:solidFill>
-                  <a:srgbClr val="000000"/>
-                </a:solidFill>
-                <a:latin typeface="Calibri" pitchFamily="34" charset="0"/>
-                <a:ea typeface="Calibri" pitchFamily="34" charset="-122"/>
-                <a:cs typeface="Calibri" pitchFamily="34" charset="-120"/>
-              </a:rPr>
-              <a:t>Duration: 8–10 minutes.</a:t>
-            </a:r>
-            <a:endParaRPr lang="en-US" sz="1500" dirty="0"/>
-          </a:p>
-          <a:p>
-            <a:pPr marL="177800" indent="-177800">
-              <a:spcAft>
-                <a:spcPts val="800"/>
-              </a:spcAft>
-              <a:buSzPct val="100000"/>
-              <a:buChar char="•"/>
-            </a:pPr>
-            <a:r>
-              <a:rPr lang="en-US" sz="1500" dirty="0">
-                <a:solidFill>
-                  <a:srgbClr val="000000"/>
-                </a:solidFill>
-                <a:latin typeface="Calibri" pitchFamily="34" charset="0"/>
-                <a:ea typeface="Calibri" pitchFamily="34" charset="-122"/>
-                <a:cs typeface="Calibri" pitchFamily="34" charset="-120"/>
-              </a:rPr>
-              <a:t>Presentation contents:</a:t>
-            </a:r>
-            <a:endParaRPr lang="en-US" sz="1500" dirty="0"/>
-          </a:p>
-          <a:p>
-            <a:pPr marL="355600" lvl="1" indent="-177800">
-              <a:spcAft>
-                <a:spcPts val="400"/>
-              </a:spcAft>
-              <a:buSzPct val="100000"/>
-              <a:buChar char="•"/>
-            </a:pPr>
-            <a:r>
-              <a:rPr lang="en-US" sz="1500" dirty="0">
-                <a:solidFill>
-                  <a:srgbClr val="000000"/>
-                </a:solidFill>
-                <a:latin typeface="Calibri" pitchFamily="34" charset="0"/>
-                <a:ea typeface="Calibri" pitchFamily="34" charset="-122"/>
-                <a:cs typeface="Calibri" pitchFamily="34" charset="-120"/>
-              </a:rPr>
-              <a:t>Signed &amp; scanned title slide (Slide 1)</a:t>
-            </a:r>
-            <a:endParaRPr lang="en-US" sz="1500" dirty="0"/>
-          </a:p>
-          <a:p>
-            <a:pPr marL="355600" lvl="1" indent="-177800">
-              <a:spcAft>
-                <a:spcPts val="400"/>
-              </a:spcAft>
-              <a:buSzPct val="100000"/>
-              <a:buChar char="•"/>
-            </a:pPr>
-            <a:r>
-              <a:rPr lang="en-US" sz="1500" dirty="0">
-                <a:solidFill>
-                  <a:srgbClr val="000000"/>
-                </a:solidFill>
-                <a:latin typeface="Calibri" pitchFamily="34" charset="0"/>
-                <a:ea typeface="Calibri" pitchFamily="34" charset="-122"/>
-                <a:cs typeface="Calibri" pitchFamily="34" charset="-120"/>
-              </a:rPr>
-              <a:t>Problem statement and background</a:t>
-            </a:r>
-            <a:endParaRPr lang="en-US" sz="1500" dirty="0"/>
-          </a:p>
-          <a:p>
-            <a:pPr marL="355600" lvl="1" indent="-177800">
-              <a:spcAft>
-                <a:spcPts val="400"/>
-              </a:spcAft>
-              <a:buSzPct val="100000"/>
-              <a:buChar char="•"/>
-            </a:pPr>
-            <a:r>
-              <a:rPr lang="en-US" sz="1500" dirty="0">
-                <a:solidFill>
-                  <a:srgbClr val="000000"/>
-                </a:solidFill>
-                <a:latin typeface="Calibri" pitchFamily="34" charset="0"/>
-                <a:ea typeface="Calibri" pitchFamily="34" charset="-122"/>
-                <a:cs typeface="Calibri" pitchFamily="34" charset="-120"/>
-              </a:rPr>
-              <a:t>Literature survey — minimum 8–10 recent references</a:t>
-            </a:r>
-            <a:endParaRPr lang="en-US" sz="1500" dirty="0"/>
-          </a:p>
-          <a:p>
-            <a:pPr marL="355600" lvl="1" indent="-177800">
-              <a:spcAft>
-                <a:spcPts val="400"/>
-              </a:spcAft>
-              <a:buSzPct val="100000"/>
-              <a:buChar char="•"/>
-            </a:pPr>
-            <a:r>
-              <a:rPr lang="en-US" sz="1500" dirty="0">
-                <a:solidFill>
-                  <a:srgbClr val="000000"/>
-                </a:solidFill>
-                <a:latin typeface="Calibri" pitchFamily="34" charset="0"/>
-                <a:ea typeface="Calibri" pitchFamily="34" charset="-122"/>
-                <a:cs typeface="Calibri" pitchFamily="34" charset="-120"/>
-              </a:rPr>
-              <a:t>Existing solutions and their limitations</a:t>
-            </a:r>
-            <a:endParaRPr lang="en-US" sz="1500" dirty="0"/>
-          </a:p>
-          <a:p>
-            <a:pPr marL="355600" lvl="1" indent="-177800">
-              <a:spcAft>
-                <a:spcPts val="400"/>
-              </a:spcAft>
-              <a:buSzPct val="100000"/>
-              <a:buChar char="•"/>
-            </a:pPr>
-            <a:r>
-              <a:rPr lang="en-US" sz="1500" dirty="0">
-                <a:solidFill>
-                  <a:srgbClr val="000000"/>
-                </a:solidFill>
-                <a:latin typeface="Calibri" pitchFamily="34" charset="0"/>
-                <a:ea typeface="Calibri" pitchFamily="34" charset="-122"/>
-                <a:cs typeface="Calibri" pitchFamily="34" charset="-120"/>
-              </a:rPr>
-              <a:t>Proposed solution, scope and methodology</a:t>
-            </a:r>
-            <a:endParaRPr lang="en-US" sz="1500" dirty="0"/>
-          </a:p>
-          <a:p>
-            <a:pPr marL="355600" lvl="1" indent="-177800">
-              <a:spcAft>
-                <a:spcPts val="400"/>
-              </a:spcAft>
-              <a:buSzPct val="100000"/>
-              <a:buChar char="•"/>
-            </a:pPr>
-            <a:r>
-              <a:rPr lang="en-US" sz="1500" dirty="0">
-                <a:solidFill>
-                  <a:srgbClr val="000000"/>
-                </a:solidFill>
-                <a:latin typeface="Calibri" pitchFamily="34" charset="0"/>
-                <a:ea typeface="Calibri" pitchFamily="34" charset="-122"/>
-                <a:cs typeface="Calibri" pitchFamily="34" charset="-120"/>
-              </a:rPr>
-              <a:t>50% work completed, timeline, tools &amp; technologies</a:t>
-            </a:r>
-            <a:endParaRPr lang="en-US" sz="1500" dirty="0"/>
-          </a:p>
-          <a:p>
-            <a:pPr marL="177800" indent="-177800">
-              <a:spcAft>
-                <a:spcPts val="800"/>
-              </a:spcAft>
-              <a:buSzPct val="100000"/>
-              <a:buChar char="•"/>
-            </a:pPr>
-            <a:r>
-              <a:rPr lang="en-US" sz="1500" dirty="0">
-                <a:solidFill>
-                  <a:srgbClr val="000000"/>
-                </a:solidFill>
-                <a:latin typeface="Calibri" pitchFamily="34" charset="0"/>
-                <a:ea typeface="Calibri" pitchFamily="34" charset="-122"/>
-                <a:cs typeface="Calibri" pitchFamily="34" charset="-120"/>
-              </a:rPr>
-              <a:t>Mark split-up: Problem clarity &amp; relevance (2), Literature survey quality (1), Proposed solution feasibility (1), Presentation quality (1).</a:t>
-            </a:r>
-            <a:endParaRPr lang="en-US" sz="1500" dirty="0"/>
-          </a:p>
-        </p:txBody>
-      </p:sp>
-    </p:spTree>
-  </p:cSld>
-  <p:clrMapOvr>
-    <a:masterClrMapping/>
-  </p:clrMapOvr>
-</p:sld>
-</file>
-
-<file path=ppt/slides/slide4.xml><?xml version="1.0" encoding="utf-8"?>
-<p:sld xmlns:a="http://schemas.openxmlformats.org/drawingml/2006/main" xmlns:r="http://schemas.openxmlformats.org/officeDocument/2006/relationships" xmlns:p="http://schemas.openxmlformats.org/presentationml/2006/main">
-  <p:cSld name="Slide 4">
-    <p:bg>
-      <p:bgPr>
-        <a:solidFill>
-          <a:srgbClr val="FFFFFF"/>
-        </a:solidFill>
-        <a:effectLst/>
-      </p:bgPr>
-    </p:bg>
-    <p:spTree>
-      <p:nvGrpSpPr>
-        <p:cNvPr id="1" name=""/>
-        <p:cNvGrpSpPr/>
-        <p:nvPr/>
-      </p:nvGrpSpPr>
-      <p:grpSpPr>
-        <a:xfrm>
-          <a:off x="0" y="0"/>
-          <a:ext cx="0" cy="0"/>
-          <a:chOff x="0" y="0"/>
-          <a:chExt cx="0" cy="0"/>
-        </a:xfrm>
-      </p:grpSpPr>
-      <p:sp>
-        <p:nvSpPr>
-          <p:cNvPr id="2" name="Text 0"/>
-          <p:cNvSpPr txBox="1"/>
-          <p:nvPr/>
-        </p:nvSpPr>
-        <p:spPr>
-          <a:xfrm>
-            <a:off x="11460175" y="6446520"/>
-            <a:ext cx="457200" cy="274320"/>
-          </a:xfrm>
-          <a:prstGeom prst="rect">
-            <a:avLst/>
-          </a:prstGeom>
-          <a:noFill/>
-          <a:ln/>
-        </p:spPr>
-        <p:txBody>
-          <a:bodyPr wrap="square" lIns="0" tIns="0" rIns="0" bIns="0" rtlCol="0" anchor="ctr"/>
-          <a:lstStyle/>
-          <a:p>
-            <a:pPr marL="0" indent="0" algn="r">
-              <a:buNone/>
-            </a:pPr>
-            <a:r>
-              <a:rPr lang="en-US" sz="1000" dirty="0">
-                <a:solidFill>
-                  <a:srgbClr val="808080"/>
-                </a:solidFill>
-                <a:latin typeface="Calibri" pitchFamily="34" charset="0"/>
-                <a:ea typeface="Calibri" pitchFamily="34" charset="-122"/>
-                <a:cs typeface="Calibri" pitchFamily="34" charset="-120"/>
-              </a:rPr>
-              <a:t>4</a:t>
-            </a:r>
-            <a:endParaRPr lang="en-US" sz="1000" dirty="0"/>
-          </a:p>
-        </p:txBody>
-      </p:sp>
-      <p:sp>
-        <p:nvSpPr>
-          <p:cNvPr id="3" name="Text 1"/>
-          <p:cNvSpPr txBox="1"/>
-          <p:nvPr/>
-        </p:nvSpPr>
-        <p:spPr>
-          <a:xfrm>
-            <a:off x="548640" y="320040"/>
-            <a:ext cx="9601200" cy="685800"/>
-          </a:xfrm>
-          <a:prstGeom prst="rect">
-            <a:avLst/>
-          </a:prstGeom>
-          <a:noFill/>
-          <a:ln/>
-        </p:spPr>
-        <p:txBody>
-          <a:bodyPr wrap="square" lIns="0" tIns="0" rIns="0" bIns="0" rtlCol="0" anchor="ctr"/>
-          <a:lstStyle/>
-          <a:p>
-            <a:pPr marL="0" indent="0">
-              <a:buNone/>
-            </a:pPr>
-            <a:r>
-              <a:rPr lang="en-US" sz="2800" b="1" dirty="0">
-                <a:solidFill>
-                  <a:srgbClr val="1D2F82"/>
-                </a:solidFill>
-                <a:latin typeface="Calibri" pitchFamily="34" charset="0"/>
-                <a:ea typeface="Calibri" pitchFamily="34" charset="-122"/>
-                <a:cs typeface="Calibri" pitchFamily="34" charset="-120"/>
-              </a:rPr>
-              <a:t>Problem Statement &amp; Background</a:t>
-            </a:r>
-            <a:endParaRPr lang="en-US" sz="2800" dirty="0"/>
-          </a:p>
-        </p:txBody>
-      </p:sp>
-      <p:pic>
-        <p:nvPicPr>
-          <p:cNvPr id="4" name="Image 0" descr="logo.png"/>
-          <p:cNvPicPr>
-            <a:picLocks noChangeAspect="1"/>
-          </p:cNvPicPr>
-          <p:nvPr/>
-        </p:nvPicPr>
-        <p:blipFill>
-          <a:blip r:embed="rId3"/>
-          <a:stretch>
-            <a:fillRect/>
-          </a:stretch>
-        </p:blipFill>
-        <p:spPr>
-          <a:xfrm>
-            <a:off x="10362895" y="320040"/>
-            <a:ext cx="1371600" cy="518746"/>
-          </a:xfrm>
-          <a:prstGeom prst="rect">
-            <a:avLst/>
-          </a:prstGeom>
-        </p:spPr>
-      </p:pic>
-      <p:sp>
-        <p:nvSpPr>
-          <p:cNvPr id="5" name="Text 2"/>
-          <p:cNvSpPr txBox="1"/>
-          <p:nvPr/>
-        </p:nvSpPr>
-        <p:spPr>
-          <a:xfrm>
-            <a:off x="640080" y="1325880"/>
-            <a:ext cx="10881360" cy="4937760"/>
-          </a:xfrm>
-          <a:prstGeom prst="rect">
-            <a:avLst/>
-          </a:prstGeom>
-          <a:noFill/>
-          <a:ln/>
-        </p:spPr>
-        <p:txBody>
-          <a:bodyPr wrap="square" lIns="0" tIns="0" rIns="0" bIns="0" rtlCol="0" anchor="t"/>
-          <a:lstStyle/>
-          <a:p>
-            <a:pPr marL="177800" indent="-177800">
-              <a:spcAft>
-                <a:spcPts val="800"/>
-              </a:spcAft>
-              <a:buSzPct val="100000"/>
-              <a:buChar char="•"/>
-            </a:pPr>
-            <a:r>
-              <a:rPr lang="en-US" sz="1600" dirty="0">
-                <a:solidFill>
-                  <a:srgbClr val="000000"/>
-                </a:solidFill>
-                <a:latin typeface="Calibri" pitchFamily="34" charset="0"/>
-                <a:ea typeface="Calibri" pitchFamily="34" charset="-122"/>
-                <a:cs typeface="Calibri" pitchFamily="34" charset="-120"/>
-              </a:rPr>
-              <a:t>Problem Statement:</a:t>
-            </a:r>
-            <a:endParaRPr lang="en-US" sz="1600" dirty="0"/>
-          </a:p>
-          <a:p>
-            <a:pPr marL="177800" indent="-177800">
-              <a:spcAft>
-                <a:spcPts val="800"/>
-              </a:spcAft>
-              <a:buSzPct val="100000"/>
-              <a:buChar char="•"/>
-            </a:pPr>
-            <a:r>
-              <a:rPr lang="en-US" sz="1600" dirty="0">
-                <a:solidFill>
-                  <a:srgbClr val="000000"/>
-                </a:solidFill>
-                <a:latin typeface="Calibri" pitchFamily="34" charset="0"/>
-                <a:ea typeface="Calibri" pitchFamily="34" charset="-122"/>
-                <a:cs typeface="Calibri" pitchFamily="34" charset="-120"/>
-              </a:rPr>
-              <a:t>Background &amp; Significance:</a:t>
-            </a:r>
-            <a:endParaRPr lang="en-US" sz="1600" dirty="0"/>
-          </a:p>
-          <a:p>
-            <a:pPr marL="177800" indent="-177800">
-              <a:spcAft>
-                <a:spcPts val="800"/>
-              </a:spcAft>
-              <a:buSzPct val="100000"/>
-              <a:buChar char="•"/>
-            </a:pPr>
-            <a:r>
-              <a:rPr lang="en-US" sz="1600" dirty="0">
-                <a:solidFill>
-                  <a:srgbClr val="000000"/>
-                </a:solidFill>
-                <a:latin typeface="Calibri" pitchFamily="34" charset="0"/>
-                <a:ea typeface="Calibri" pitchFamily="34" charset="-122"/>
-                <a:cs typeface="Calibri" pitchFamily="34" charset="-120"/>
-              </a:rPr>
-              <a:t>Existing Solutions:</a:t>
-            </a:r>
-            <a:endParaRPr lang="en-US" sz="1600" dirty="0"/>
-          </a:p>
-          <a:p>
-            <a:pPr marL="177800" indent="-177800">
-              <a:spcAft>
-                <a:spcPts val="800"/>
-              </a:spcAft>
-              <a:buSzPct val="100000"/>
-              <a:buChar char="•"/>
-            </a:pPr>
-            <a:r>
-              <a:rPr lang="en-US" sz="1600" dirty="0">
-                <a:solidFill>
-                  <a:srgbClr val="000000"/>
-                </a:solidFill>
-                <a:latin typeface="Calibri" pitchFamily="34" charset="0"/>
-                <a:ea typeface="Calibri" pitchFamily="34" charset="-122"/>
-                <a:cs typeface="Calibri" pitchFamily="34" charset="-120"/>
-              </a:rPr>
-              <a:t>Limitations / Research Gap:</a:t>
-            </a:r>
-            <a:endParaRPr lang="en-US" sz="1600" dirty="0"/>
-          </a:p>
-        </p:txBody>
-      </p:sp>
-    </p:spTree>
-  </p:cSld>
-  <p:clrMapOvr>
-    <a:masterClrMapping/>
-  </p:clrMapOvr>
-</p:sld>
-</file>
-
-<file path=ppt/slides/slide5.xml><?xml version="1.0" encoding="utf-8"?>
+<file path=ppt/slides/slide6.xml><?xml version="1.0" encoding="utf-8"?>
 <p:sld xmlns:a="http://schemas.openxmlformats.org/drawingml/2006/main" xmlns:r="http://schemas.openxmlformats.org/officeDocument/2006/relationships" xmlns:p="http://schemas.openxmlformats.org/presentationml/2006/main">
   <p:cSld name="Slide 5">
     <p:bg>
@@ -9732,7 +9867,7 @@
 </p:sld>
 </file>
 
-<file path=ppt/slides/slide6.xml><?xml version="1.0" encoding="utf-8"?>
+<file path=ppt/slides/slide7.xml><?xml version="1.0" encoding="utf-8"?>
 <p:sld xmlns:a="http://schemas.openxmlformats.org/drawingml/2006/main" xmlns:r="http://schemas.openxmlformats.org/officeDocument/2006/relationships" xmlns:p="http://schemas.openxmlformats.org/presentationml/2006/main">
   <p:cSld name="Slide 6">
     <p:bg>
@@ -9952,7 +10087,142 @@
 </p:sld>
 </file>
 
-<file path=ppt/slides/slide7.xml><?xml version="1.0" encoding="utf-8"?>
+<file path=ppt/slides/slide8.xml><?xml version="1.0" encoding="utf-8"?>
+<p:sld xmlns:a="http://schemas.openxmlformats.org/drawingml/2006/main" xmlns:r="http://schemas.openxmlformats.org/officeDocument/2006/relationships" xmlns:p="http://schemas.openxmlformats.org/presentationml/2006/main">
+  <p:cSld name="Slide 9">
+    <p:bg>
+      <p:bgPr>
+        <a:solidFill>
+          <a:srgbClr val="FFFFFF"/>
+        </a:solidFill>
+        <a:effectLst/>
+      </p:bgPr>
+    </p:bg>
+    <p:spTree>
+      <p:nvGrpSpPr>
+        <p:cNvPr id="1" name=""/>
+        <p:cNvGrpSpPr/>
+        <p:nvPr/>
+      </p:nvGrpSpPr>
+      <p:grpSpPr>
+        <a:xfrm>
+          <a:off x="0" y="0"/>
+          <a:ext cx="0" cy="0"/>
+          <a:chOff x="0" y="0"/>
+          <a:chExt cx="0" cy="0"/>
+        </a:xfrm>
+      </p:grpSpPr>
+      <p:sp>
+        <p:nvSpPr>
+          <p:cNvPr id="2" name="Text 0"/>
+          <p:cNvSpPr txBox="1"/>
+          <p:nvPr/>
+        </p:nvSpPr>
+        <p:spPr>
+          <a:xfrm>
+            <a:off x="11460175" y="6446520"/>
+            <a:ext cx="457200" cy="274320"/>
+          </a:xfrm>
+          <a:prstGeom prst="rect">
+            <a:avLst/>
+          </a:prstGeom>
+          <a:noFill/>
+          <a:ln/>
+        </p:spPr>
+        <p:txBody>
+          <a:bodyPr wrap="square" lIns="0" tIns="0" rIns="0" bIns="0" rtlCol="0" anchor="ctr"/>
+          <a:lstStyle/>
+          <a:p>
+            <a:pPr marL="0" indent="0" algn="r">
+              <a:buNone/>
+            </a:pPr>
+            <a:r>
+              <a:rPr lang="en-US" sz="1000" dirty="0">
+                <a:solidFill>
+                  <a:srgbClr val="808080"/>
+                </a:solidFill>
+                <a:latin typeface="Calibri" pitchFamily="34" charset="0"/>
+                <a:ea typeface="Calibri" pitchFamily="34" charset="-122"/>
+                <a:cs typeface="Calibri" pitchFamily="34" charset="-120"/>
+              </a:rPr>
+              <a:t>9</a:t>
+            </a:r>
+            <a:endParaRPr lang="en-US" sz="1000" dirty="0"/>
+          </a:p>
+        </p:txBody>
+      </p:sp>
+      <p:sp>
+        <p:nvSpPr>
+          <p:cNvPr id="3" name="Text 1"/>
+          <p:cNvSpPr txBox="1"/>
+          <p:nvPr/>
+        </p:nvSpPr>
+        <p:spPr>
+          <a:xfrm>
+            <a:off x="548640" y="320040"/>
+            <a:ext cx="9601200" cy="685800"/>
+          </a:xfrm>
+          <a:prstGeom prst="rect">
+            <a:avLst/>
+          </a:prstGeom>
+          <a:noFill/>
+          <a:ln/>
+        </p:spPr>
+        <p:txBody>
+          <a:bodyPr wrap="square" lIns="0" tIns="0" rIns="0" bIns="0" rtlCol="0" anchor="ctr"/>
+          <a:lstStyle/>
+          <a:p>
+            <a:pPr marL="0" indent="0">
+              <a:buNone/>
+            </a:pPr>
+            <a:r>
+              <a:rPr lang="en-US" sz="2800" b="1" dirty="0">
+                <a:solidFill>
+                  <a:srgbClr val="1D2F82"/>
+                </a:solidFill>
+                <a:latin typeface="Calibri" pitchFamily="34" charset="0"/>
+                <a:ea typeface="Calibri" pitchFamily="34" charset="-122"/>
+                <a:cs typeface="Calibri" pitchFamily="34" charset="-120"/>
+              </a:rPr>
+              <a:t>Results (contd.)</a:t>
+            </a:r>
+            <a:endParaRPr lang="en-US" sz="2800" dirty="0"/>
+          </a:p>
+        </p:txBody>
+      </p:sp>
+      <p:pic>
+        <p:nvPicPr>
+          <p:cNvPr id="4" name="Image 0" descr="logo.png"/>
+          <p:cNvPicPr>
+            <a:picLocks noChangeAspect="1"/>
+          </p:cNvPicPr>
+          <p:nvPr/>
+        </p:nvPicPr>
+        <p:blipFill>
+          <a:blip r:embed="rId3"/>
+          <a:stretch>
+            <a:fillRect/>
+          </a:stretch>
+        </p:blipFill>
+        <p:spPr>
+          <a:xfrm>
+            <a:off x="10362895" y="320040"/>
+            <a:ext cx="1371600" cy="518746"/>
+          </a:xfrm>
+          <a:prstGeom prst="rect">
+            <a:avLst/>
+          </a:prstGeom>
+        </p:spPr>
+      </p:pic>
+    </p:spTree>
+  </p:cSld>
+  <p:clrMapOvr>
+    <a:masterClrMapping/>
+  </p:clrMapOvr>
+</p:sld>
+</file>
+
+<file path=ppt/slides/slide9.xml><?xml version="1.0" encoding="utf-8"?>
 <p:sld xmlns:a="http://schemas.openxmlformats.org/drawingml/2006/main" xmlns:r="http://schemas.openxmlformats.org/officeDocument/2006/relationships" xmlns:p="http://schemas.openxmlformats.org/presentationml/2006/main">
   <p:cSld name="Slide 7">
     <p:bg>
@@ -10164,276 +10434,6 @@
           </a:p>
         </p:txBody>
       </p:sp>
-    </p:spTree>
-  </p:cSld>
-  <p:clrMapOvr>
-    <a:masterClrMapping/>
-  </p:clrMapOvr>
-</p:sld>
-</file>
-
-<file path=ppt/slides/slide8.xml><?xml version="1.0" encoding="utf-8"?>
-<p:sld xmlns:a="http://schemas.openxmlformats.org/drawingml/2006/main" xmlns:r="http://schemas.openxmlformats.org/officeDocument/2006/relationships" xmlns:p="http://schemas.openxmlformats.org/presentationml/2006/main">
-  <p:cSld name="Slide 8">
-    <p:bg>
-      <p:bgPr>
-        <a:solidFill>
-          <a:srgbClr val="FFFFFF"/>
-        </a:solidFill>
-        <a:effectLst/>
-      </p:bgPr>
-    </p:bg>
-    <p:spTree>
-      <p:nvGrpSpPr>
-        <p:cNvPr id="1" name=""/>
-        <p:cNvGrpSpPr/>
-        <p:nvPr/>
-      </p:nvGrpSpPr>
-      <p:grpSpPr>
-        <a:xfrm>
-          <a:off x="0" y="0"/>
-          <a:ext cx="0" cy="0"/>
-          <a:chOff x="0" y="0"/>
-          <a:chExt cx="0" cy="0"/>
-        </a:xfrm>
-      </p:grpSpPr>
-      <p:sp>
-        <p:nvSpPr>
-          <p:cNvPr id="2" name="Text 0"/>
-          <p:cNvSpPr txBox="1"/>
-          <p:nvPr/>
-        </p:nvSpPr>
-        <p:spPr>
-          <a:xfrm>
-            <a:off x="11460175" y="6446520"/>
-            <a:ext cx="457200" cy="274320"/>
-          </a:xfrm>
-          <a:prstGeom prst="rect">
-            <a:avLst/>
-          </a:prstGeom>
-          <a:noFill/>
-          <a:ln/>
-        </p:spPr>
-        <p:txBody>
-          <a:bodyPr wrap="square" lIns="0" tIns="0" rIns="0" bIns="0" rtlCol="0" anchor="ctr"/>
-          <a:lstStyle/>
-          <a:p>
-            <a:pPr marL="0" indent="0" algn="r">
-              <a:buNone/>
-            </a:pPr>
-            <a:r>
-              <a:rPr lang="en-US" sz="1000" dirty="0">
-                <a:solidFill>
-                  <a:srgbClr val="808080"/>
-                </a:solidFill>
-                <a:latin typeface="Calibri" pitchFamily="34" charset="0"/>
-                <a:ea typeface="Calibri" pitchFamily="34" charset="-122"/>
-                <a:cs typeface="Calibri" pitchFamily="34" charset="-120"/>
-              </a:rPr>
-              <a:t>8</a:t>
-            </a:r>
-            <a:endParaRPr lang="en-US" sz="1000" dirty="0"/>
-          </a:p>
-        </p:txBody>
-      </p:sp>
-      <p:sp>
-        <p:nvSpPr>
-          <p:cNvPr id="3" name="Text 1"/>
-          <p:cNvSpPr txBox="1"/>
-          <p:nvPr/>
-        </p:nvSpPr>
-        <p:spPr>
-          <a:xfrm>
-            <a:off x="548640" y="320040"/>
-            <a:ext cx="9601200" cy="685800"/>
-          </a:xfrm>
-          <a:prstGeom prst="rect">
-            <a:avLst/>
-          </a:prstGeom>
-          <a:noFill/>
-          <a:ln/>
-        </p:spPr>
-        <p:txBody>
-          <a:bodyPr wrap="square" lIns="0" tIns="0" rIns="0" bIns="0" rtlCol="0" anchor="ctr"/>
-          <a:lstStyle/>
-          <a:p>
-            <a:pPr marL="0" indent="0">
-              <a:buNone/>
-            </a:pPr>
-            <a:r>
-              <a:rPr lang="en-US" sz="2800" b="1" dirty="0">
-                <a:solidFill>
-                  <a:srgbClr val="1D2F82"/>
-                </a:solidFill>
-                <a:latin typeface="Calibri" pitchFamily="34" charset="0"/>
-                <a:ea typeface="Calibri" pitchFamily="34" charset="-122"/>
-                <a:cs typeface="Calibri" pitchFamily="34" charset="-120"/>
-              </a:rPr>
-              <a:t>Results</a:t>
-            </a:r>
-            <a:endParaRPr lang="en-US" sz="2800" dirty="0"/>
-          </a:p>
-        </p:txBody>
-      </p:sp>
-      <p:pic>
-        <p:nvPicPr>
-          <p:cNvPr id="4" name="Image 0" descr="logo.png"/>
-          <p:cNvPicPr>
-            <a:picLocks noChangeAspect="1"/>
-          </p:cNvPicPr>
-          <p:nvPr/>
-        </p:nvPicPr>
-        <p:blipFill>
-          <a:blip r:embed="rId3"/>
-          <a:stretch>
-            <a:fillRect/>
-          </a:stretch>
-        </p:blipFill>
-        <p:spPr>
-          <a:xfrm>
-            <a:off x="10362895" y="320040"/>
-            <a:ext cx="1371600" cy="518746"/>
-          </a:xfrm>
-          <a:prstGeom prst="rect">
-            <a:avLst/>
-          </a:prstGeom>
-        </p:spPr>
-      </p:pic>
-    </p:spTree>
-  </p:cSld>
-  <p:clrMapOvr>
-    <a:masterClrMapping/>
-  </p:clrMapOvr>
-</p:sld>
-</file>
-
-<file path=ppt/slides/slide9.xml><?xml version="1.0" encoding="utf-8"?>
-<p:sld xmlns:a="http://schemas.openxmlformats.org/drawingml/2006/main" xmlns:r="http://schemas.openxmlformats.org/officeDocument/2006/relationships" xmlns:p="http://schemas.openxmlformats.org/presentationml/2006/main">
-  <p:cSld name="Slide 9">
-    <p:bg>
-      <p:bgPr>
-        <a:solidFill>
-          <a:srgbClr val="FFFFFF"/>
-        </a:solidFill>
-        <a:effectLst/>
-      </p:bgPr>
-    </p:bg>
-    <p:spTree>
-      <p:nvGrpSpPr>
-        <p:cNvPr id="1" name=""/>
-        <p:cNvGrpSpPr/>
-        <p:nvPr/>
-      </p:nvGrpSpPr>
-      <p:grpSpPr>
-        <a:xfrm>
-          <a:off x="0" y="0"/>
-          <a:ext cx="0" cy="0"/>
-          <a:chOff x="0" y="0"/>
-          <a:chExt cx="0" cy="0"/>
-        </a:xfrm>
-      </p:grpSpPr>
-      <p:sp>
-        <p:nvSpPr>
-          <p:cNvPr id="2" name="Text 0"/>
-          <p:cNvSpPr txBox="1"/>
-          <p:nvPr/>
-        </p:nvSpPr>
-        <p:spPr>
-          <a:xfrm>
-            <a:off x="11460175" y="6446520"/>
-            <a:ext cx="457200" cy="274320"/>
-          </a:xfrm>
-          <a:prstGeom prst="rect">
-            <a:avLst/>
-          </a:prstGeom>
-          <a:noFill/>
-          <a:ln/>
-        </p:spPr>
-        <p:txBody>
-          <a:bodyPr wrap="square" lIns="0" tIns="0" rIns="0" bIns="0" rtlCol="0" anchor="ctr"/>
-          <a:lstStyle/>
-          <a:p>
-            <a:pPr marL="0" indent="0" algn="r">
-              <a:buNone/>
-            </a:pPr>
-            <a:r>
-              <a:rPr lang="en-US" sz="1000" dirty="0">
-                <a:solidFill>
-                  <a:srgbClr val="808080"/>
-                </a:solidFill>
-                <a:latin typeface="Calibri" pitchFamily="34" charset="0"/>
-                <a:ea typeface="Calibri" pitchFamily="34" charset="-122"/>
-                <a:cs typeface="Calibri" pitchFamily="34" charset="-120"/>
-              </a:rPr>
-              <a:t>9</a:t>
-            </a:r>
-            <a:endParaRPr lang="en-US" sz="1000" dirty="0"/>
-          </a:p>
-        </p:txBody>
-      </p:sp>
-      <p:sp>
-        <p:nvSpPr>
-          <p:cNvPr id="3" name="Text 1"/>
-          <p:cNvSpPr txBox="1"/>
-          <p:nvPr/>
-        </p:nvSpPr>
-        <p:spPr>
-          <a:xfrm>
-            <a:off x="548640" y="320040"/>
-            <a:ext cx="9601200" cy="685800"/>
-          </a:xfrm>
-          <a:prstGeom prst="rect">
-            <a:avLst/>
-          </a:prstGeom>
-          <a:noFill/>
-          <a:ln/>
-        </p:spPr>
-        <p:txBody>
-          <a:bodyPr wrap="square" lIns="0" tIns="0" rIns="0" bIns="0" rtlCol="0" anchor="ctr"/>
-          <a:lstStyle/>
-          <a:p>
-            <a:pPr marL="0" indent="0">
-              <a:buNone/>
-            </a:pPr>
-            <a:r>
-              <a:rPr lang="en-US" sz="2800" b="1" dirty="0">
-                <a:solidFill>
-                  <a:srgbClr val="1D2F82"/>
-                </a:solidFill>
-                <a:latin typeface="Calibri" pitchFamily="34" charset="0"/>
-                <a:ea typeface="Calibri" pitchFamily="34" charset="-122"/>
-                <a:cs typeface="Calibri" pitchFamily="34" charset="-120"/>
-              </a:rPr>
-              <a:t>Results (contd.)</a:t>
-            </a:r>
-            <a:endParaRPr lang="en-US" sz="2800" dirty="0"/>
-          </a:p>
-        </p:txBody>
-      </p:sp>
-      <p:pic>
-        <p:nvPicPr>
-          <p:cNvPr id="4" name="Image 0" descr="logo.png"/>
-          <p:cNvPicPr>
-            <a:picLocks noChangeAspect="1"/>
-          </p:cNvPicPr>
-          <p:nvPr/>
-        </p:nvPicPr>
-        <p:blipFill>
-          <a:blip r:embed="rId3"/>
-          <a:stretch>
-            <a:fillRect/>
-          </a:stretch>
-        </p:blipFill>
-        <p:spPr>
-          <a:xfrm>
-            <a:off x="10362895" y="320040"/>
-            <a:ext cx="1371600" cy="518746"/>
-          </a:xfrm>
-          <a:prstGeom prst="rect">
-            <a:avLst/>
-          </a:prstGeom>
-        </p:spPr>
-      </p:pic>
     </p:spTree>
   </p:cSld>
   <p:clrMapOvr>
